--- a/docs/pptx/auc3/jx-auc3-linsubhr-ratio-akikdigo.pptx
+++ b/docs/pptx/auc3/jx-auc3-linsubhr-ratio-akikdigo.pptx
@@ -2271,7 +2271,7 @@
           </p:nvSpPr>
           <p:spPr>
             <a:xfrm>
-              <a:off x="817517" y="5114368"/>
+              <a:off x="817517" y="5142518"/>
               <a:ext cx="7799693" cy="0"/>
             </a:xfrm>
             <a:custGeom>
@@ -2314,7 +2314,7 @@
           </p:nvSpPr>
           <p:spPr>
             <a:xfrm>
-              <a:off x="817517" y="4244691"/>
+              <a:off x="817517" y="4313054"/>
               <a:ext cx="7799693" cy="0"/>
             </a:xfrm>
             <a:custGeom>
@@ -2357,7 +2357,7 @@
           </p:nvSpPr>
           <p:spPr>
             <a:xfrm>
-              <a:off x="817517" y="3375014"/>
+              <a:off x="817517" y="3483591"/>
               <a:ext cx="7799693" cy="0"/>
             </a:xfrm>
             <a:custGeom>
@@ -2400,7 +2400,7 @@
           </p:nvSpPr>
           <p:spPr>
             <a:xfrm>
-              <a:off x="817517" y="2505337"/>
+              <a:off x="817517" y="2654127"/>
               <a:ext cx="7799693" cy="0"/>
             </a:xfrm>
             <a:custGeom>
@@ -2443,15 +2443,15 @@
           </p:nvSpPr>
           <p:spPr>
             <a:xfrm>
-              <a:off x="1615213" y="1896563"/>
-              <a:ext cx="0" cy="3826579"/>
+              <a:off x="1615213" y="2073503"/>
+              <a:ext cx="0" cy="3649639"/>
             </a:xfrm>
             <a:custGeom>
               <a:avLst/>
               <a:pathLst>
-                <a:path w="0" h="3826579">
+                <a:path w="0" h="3649639">
                   <a:moveTo>
-                    <a:pt x="0" y="3826579"/>
+                    <a:pt x="0" y="3649639"/>
                   </a:moveTo>
                   <a:lnTo>
                     <a:pt x="0" y="0"/>
@@ -2486,15 +2486,15 @@
           </p:nvSpPr>
           <p:spPr>
             <a:xfrm>
-              <a:off x="3387871" y="1896563"/>
-              <a:ext cx="0" cy="3826579"/>
+              <a:off x="3387871" y="2073503"/>
+              <a:ext cx="0" cy="3649639"/>
             </a:xfrm>
             <a:custGeom>
               <a:avLst/>
               <a:pathLst>
-                <a:path w="0" h="3826579">
+                <a:path w="0" h="3649639">
                   <a:moveTo>
-                    <a:pt x="0" y="3826579"/>
+                    <a:pt x="0" y="3649639"/>
                   </a:moveTo>
                   <a:lnTo>
                     <a:pt x="0" y="0"/>
@@ -2529,15 +2529,15 @@
           </p:nvSpPr>
           <p:spPr>
             <a:xfrm>
-              <a:off x="5160528" y="1896563"/>
-              <a:ext cx="0" cy="3826579"/>
+              <a:off x="5160528" y="2073503"/>
+              <a:ext cx="0" cy="3649639"/>
             </a:xfrm>
             <a:custGeom>
               <a:avLst/>
               <a:pathLst>
-                <a:path w="0" h="3826579">
+                <a:path w="0" h="3649639">
                   <a:moveTo>
-                    <a:pt x="0" y="3826579"/>
+                    <a:pt x="0" y="3649639"/>
                   </a:moveTo>
                   <a:lnTo>
                     <a:pt x="0" y="0"/>
@@ -2572,15 +2572,15 @@
           </p:nvSpPr>
           <p:spPr>
             <a:xfrm>
-              <a:off x="6933186" y="1896563"/>
-              <a:ext cx="0" cy="3826579"/>
+              <a:off x="6933186" y="2073503"/>
+              <a:ext cx="0" cy="3649639"/>
             </a:xfrm>
             <a:custGeom>
               <a:avLst/>
               <a:pathLst>
-                <a:path w="0" h="3826579">
+                <a:path w="0" h="3649639">
                   <a:moveTo>
-                    <a:pt x="0" y="3826579"/>
+                    <a:pt x="0" y="3649639"/>
                   </a:moveTo>
                   <a:lnTo>
                     <a:pt x="0" y="0"/>
@@ -2615,7 +2615,7 @@
           </p:nvSpPr>
           <p:spPr>
             <a:xfrm>
-              <a:off x="817517" y="5549207"/>
+              <a:off x="817517" y="5557249"/>
               <a:ext cx="7799693" cy="0"/>
             </a:xfrm>
             <a:custGeom>
@@ -2658,7 +2658,7 @@
           </p:nvSpPr>
           <p:spPr>
             <a:xfrm>
-              <a:off x="817517" y="4679530"/>
+              <a:off x="817517" y="4727786"/>
               <a:ext cx="7799693" cy="0"/>
             </a:xfrm>
             <a:custGeom>
@@ -2701,7 +2701,7 @@
           </p:nvSpPr>
           <p:spPr>
             <a:xfrm>
-              <a:off x="817517" y="3809853"/>
+              <a:off x="817517" y="3898322"/>
               <a:ext cx="7799693" cy="0"/>
             </a:xfrm>
             <a:custGeom>
@@ -2744,7 +2744,7 @@
           </p:nvSpPr>
           <p:spPr>
             <a:xfrm>
-              <a:off x="817517" y="2940175"/>
+              <a:off x="817517" y="3068859"/>
               <a:ext cx="7799693" cy="0"/>
             </a:xfrm>
             <a:custGeom>
@@ -2787,7 +2787,7 @@
           </p:nvSpPr>
           <p:spPr>
             <a:xfrm>
-              <a:off x="817517" y="2070498"/>
+              <a:off x="817517" y="2239395"/>
               <a:ext cx="7799693" cy="0"/>
             </a:xfrm>
             <a:custGeom>
@@ -2830,15 +2830,15 @@
           </p:nvSpPr>
           <p:spPr>
             <a:xfrm>
-              <a:off x="2501542" y="1896563"/>
-              <a:ext cx="0" cy="3826579"/>
+              <a:off x="2501542" y="2073503"/>
+              <a:ext cx="0" cy="3649639"/>
             </a:xfrm>
             <a:custGeom>
               <a:avLst/>
               <a:pathLst>
-                <a:path w="0" h="3826579">
+                <a:path w="0" h="3649639">
                   <a:moveTo>
-                    <a:pt x="0" y="3826579"/>
+                    <a:pt x="0" y="3649639"/>
                   </a:moveTo>
                   <a:lnTo>
                     <a:pt x="0" y="0"/>
@@ -2873,15 +2873,15 @@
           </p:nvSpPr>
           <p:spPr>
             <a:xfrm>
-              <a:off x="4274200" y="1896563"/>
-              <a:ext cx="0" cy="3826579"/>
+              <a:off x="4274200" y="2073503"/>
+              <a:ext cx="0" cy="3649639"/>
             </a:xfrm>
             <a:custGeom>
               <a:avLst/>
               <a:pathLst>
-                <a:path w="0" h="3826579">
+                <a:path w="0" h="3649639">
                   <a:moveTo>
-                    <a:pt x="0" y="3826579"/>
+                    <a:pt x="0" y="3649639"/>
                   </a:moveTo>
                   <a:lnTo>
                     <a:pt x="0" y="0"/>
@@ -2916,15 +2916,15 @@
           </p:nvSpPr>
           <p:spPr>
             <a:xfrm>
-              <a:off x="6046857" y="1896563"/>
-              <a:ext cx="0" cy="3826579"/>
+              <a:off x="6046857" y="2073503"/>
+              <a:ext cx="0" cy="3649639"/>
             </a:xfrm>
             <a:custGeom>
               <a:avLst/>
               <a:pathLst>
-                <a:path w="0" h="3826579">
+                <a:path w="0" h="3649639">
                   <a:moveTo>
-                    <a:pt x="0" y="3826579"/>
+                    <a:pt x="0" y="3649639"/>
                   </a:moveTo>
                   <a:lnTo>
                     <a:pt x="0" y="0"/>
@@ -2959,15 +2959,15 @@
           </p:nvSpPr>
           <p:spPr>
             <a:xfrm>
-              <a:off x="7819515" y="1896563"/>
-              <a:ext cx="0" cy="3826579"/>
+              <a:off x="7819515" y="2073503"/>
+              <a:ext cx="0" cy="3649639"/>
             </a:xfrm>
             <a:custGeom>
               <a:avLst/>
               <a:pathLst>
-                <a:path w="0" h="3826579">
+                <a:path w="0" h="3649639">
                   <a:moveTo>
-                    <a:pt x="0" y="3826579"/>
+                    <a:pt x="0" y="3649639"/>
                   </a:moveTo>
                   <a:lnTo>
                     <a:pt x="0" y="0"/>
@@ -3002,576 +3002,576 @@
           </p:nvSpPr>
           <p:spPr>
             <a:xfrm>
-              <a:off x="817517" y="1896563"/>
-              <a:ext cx="7392041" cy="3546608"/>
+              <a:off x="817517" y="2073503"/>
+              <a:ext cx="7392041" cy="3382614"/>
             </a:xfrm>
             <a:custGeom>
               <a:avLst/>
               <a:pathLst>
-                <a:path w="7392041" h="3546608">
+                <a:path w="7392041" h="3382614">
                   <a:moveTo>
                     <a:pt x="509469" y="0"/>
                   </a:moveTo>
                   <a:lnTo>
-                    <a:pt x="517363" y="15063"/>
-                  </a:lnTo>
-                  <a:lnTo>
-                    <a:pt x="594606" y="156724"/>
-                  </a:lnTo>
-                  <a:lnTo>
-                    <a:pt x="671850" y="292869"/>
-                  </a:lnTo>
-                  <a:lnTo>
-                    <a:pt x="749094" y="423711"/>
-                  </a:lnTo>
-                  <a:lnTo>
-                    <a:pt x="826337" y="549458"/>
-                  </a:lnTo>
-                  <a:lnTo>
-                    <a:pt x="903581" y="670308"/>
-                  </a:lnTo>
-                  <a:lnTo>
-                    <a:pt x="980824" y="786452"/>
-                  </a:lnTo>
-                  <a:lnTo>
-                    <a:pt x="1058068" y="898073"/>
-                  </a:lnTo>
-                  <a:lnTo>
-                    <a:pt x="1135311" y="1005346"/>
-                  </a:lnTo>
-                  <a:lnTo>
-                    <a:pt x="1212555" y="1108442"/>
-                  </a:lnTo>
-                  <a:lnTo>
-                    <a:pt x="1289799" y="1207523"/>
-                  </a:lnTo>
-                  <a:lnTo>
-                    <a:pt x="1367042" y="1302746"/>
-                  </a:lnTo>
-                  <a:lnTo>
-                    <a:pt x="1444286" y="1394260"/>
-                  </a:lnTo>
-                  <a:lnTo>
-                    <a:pt x="1521529" y="1482210"/>
-                  </a:lnTo>
-                  <a:lnTo>
-                    <a:pt x="1598773" y="1566735"/>
-                  </a:lnTo>
-                  <a:lnTo>
-                    <a:pt x="1676016" y="1647968"/>
-                  </a:lnTo>
-                  <a:lnTo>
-                    <a:pt x="1753260" y="1726038"/>
-                  </a:lnTo>
-                  <a:lnTo>
-                    <a:pt x="1830504" y="1801068"/>
-                  </a:lnTo>
-                  <a:lnTo>
-                    <a:pt x="1907747" y="1873175"/>
-                  </a:lnTo>
-                  <a:lnTo>
-                    <a:pt x="1984991" y="1942475"/>
-                  </a:lnTo>
-                  <a:lnTo>
-                    <a:pt x="2062234" y="2009075"/>
-                  </a:lnTo>
-                  <a:lnTo>
-                    <a:pt x="2139478" y="2073082"/>
-                  </a:lnTo>
-                  <a:lnTo>
-                    <a:pt x="2216721" y="2134596"/>
-                  </a:lnTo>
-                  <a:lnTo>
-                    <a:pt x="2293965" y="2193715"/>
-                  </a:lnTo>
-                  <a:lnTo>
-                    <a:pt x="2371209" y="2250531"/>
-                  </a:lnTo>
-                  <a:lnTo>
-                    <a:pt x="2448452" y="2305135"/>
-                  </a:lnTo>
-                  <a:lnTo>
-                    <a:pt x="2525696" y="2357612"/>
-                  </a:lnTo>
-                  <a:lnTo>
-                    <a:pt x="2602939" y="2408046"/>
-                  </a:lnTo>
-                  <a:lnTo>
-                    <a:pt x="2680183" y="2456515"/>
-                  </a:lnTo>
-                  <a:lnTo>
-                    <a:pt x="2757426" y="2503097"/>
-                  </a:lnTo>
-                  <a:lnTo>
-                    <a:pt x="2834670" y="2547865"/>
-                  </a:lnTo>
-                  <a:lnTo>
-                    <a:pt x="2911914" y="2590889"/>
-                  </a:lnTo>
-                  <a:lnTo>
-                    <a:pt x="2989157" y="2632238"/>
-                  </a:lnTo>
-                  <a:lnTo>
-                    <a:pt x="3066401" y="2671976"/>
-                  </a:lnTo>
-                  <a:lnTo>
-                    <a:pt x="3143644" y="2710167"/>
-                  </a:lnTo>
-                  <a:lnTo>
-                    <a:pt x="3220888" y="2746871"/>
-                  </a:lnTo>
-                  <a:lnTo>
-                    <a:pt x="3298131" y="2782145"/>
-                  </a:lnTo>
-                  <a:lnTo>
-                    <a:pt x="3375375" y="2781688"/>
-                  </a:lnTo>
-                  <a:lnTo>
-                    <a:pt x="3452619" y="2780377"/>
-                  </a:lnTo>
-                  <a:lnTo>
-                    <a:pt x="3529862" y="2779064"/>
-                  </a:lnTo>
-                  <a:lnTo>
-                    <a:pt x="3607106" y="2777749"/>
-                  </a:lnTo>
-                  <a:lnTo>
-                    <a:pt x="3684349" y="2776432"/>
-                  </a:lnTo>
-                  <a:lnTo>
-                    <a:pt x="3761593" y="2775113"/>
-                  </a:lnTo>
-                  <a:lnTo>
-                    <a:pt x="3838836" y="2773792"/>
-                  </a:lnTo>
-                  <a:lnTo>
-                    <a:pt x="3916080" y="2772469"/>
-                  </a:lnTo>
-                  <a:lnTo>
-                    <a:pt x="3993324" y="2771144"/>
-                  </a:lnTo>
-                  <a:lnTo>
-                    <a:pt x="4070567" y="2769817"/>
-                  </a:lnTo>
-                  <a:lnTo>
-                    <a:pt x="4147811" y="2768488"/>
-                  </a:lnTo>
-                  <a:lnTo>
-                    <a:pt x="4225054" y="2767157"/>
-                  </a:lnTo>
-                  <a:lnTo>
-                    <a:pt x="4302298" y="2765824"/>
-                  </a:lnTo>
-                  <a:lnTo>
-                    <a:pt x="4379541" y="2764489"/>
-                  </a:lnTo>
-                  <a:lnTo>
-                    <a:pt x="4456785" y="2763152"/>
-                  </a:lnTo>
-                  <a:lnTo>
-                    <a:pt x="4534029" y="2761813"/>
-                  </a:lnTo>
-                  <a:lnTo>
-                    <a:pt x="4611272" y="2760472"/>
-                  </a:lnTo>
-                  <a:lnTo>
-                    <a:pt x="4688516" y="2759129"/>
-                  </a:lnTo>
-                  <a:lnTo>
-                    <a:pt x="4765759" y="2757784"/>
-                  </a:lnTo>
-                  <a:lnTo>
-                    <a:pt x="4843003" y="2756437"/>
-                  </a:lnTo>
-                  <a:lnTo>
-                    <a:pt x="4920246" y="2755088"/>
-                  </a:lnTo>
-                  <a:lnTo>
-                    <a:pt x="4997490" y="2753736"/>
-                  </a:lnTo>
-                  <a:lnTo>
-                    <a:pt x="5074734" y="2752383"/>
-                  </a:lnTo>
-                  <a:lnTo>
-                    <a:pt x="5151977" y="2751028"/>
-                  </a:lnTo>
-                  <a:lnTo>
-                    <a:pt x="5229221" y="2749671"/>
-                  </a:lnTo>
-                  <a:lnTo>
-                    <a:pt x="5306464" y="2748311"/>
-                  </a:lnTo>
-                  <a:lnTo>
-                    <a:pt x="5383708" y="2746950"/>
-                  </a:lnTo>
-                  <a:lnTo>
-                    <a:pt x="5460951" y="2745587"/>
-                  </a:lnTo>
-                  <a:lnTo>
-                    <a:pt x="5538195" y="2744221"/>
-                  </a:lnTo>
-                  <a:lnTo>
-                    <a:pt x="5615439" y="2742854"/>
-                  </a:lnTo>
-                  <a:lnTo>
-                    <a:pt x="5692682" y="2741484"/>
-                  </a:lnTo>
-                  <a:lnTo>
-                    <a:pt x="5769926" y="2740112"/>
-                  </a:lnTo>
-                  <a:lnTo>
-                    <a:pt x="5847169" y="2738739"/>
-                  </a:lnTo>
-                  <a:lnTo>
-                    <a:pt x="5924413" y="2737363"/>
-                  </a:lnTo>
-                  <a:lnTo>
-                    <a:pt x="6001656" y="2735985"/>
-                  </a:lnTo>
-                  <a:lnTo>
-                    <a:pt x="6078900" y="2734605"/>
-                  </a:lnTo>
-                  <a:lnTo>
-                    <a:pt x="6156144" y="2733223"/>
-                  </a:lnTo>
-                  <a:lnTo>
-                    <a:pt x="6233387" y="2731839"/>
-                  </a:lnTo>
-                  <a:lnTo>
-                    <a:pt x="6310631" y="2730453"/>
-                  </a:lnTo>
-                  <a:lnTo>
-                    <a:pt x="6387874" y="2729065"/>
-                  </a:lnTo>
-                  <a:lnTo>
-                    <a:pt x="6465118" y="2727674"/>
-                  </a:lnTo>
-                  <a:lnTo>
-                    <a:pt x="6542361" y="2726282"/>
-                  </a:lnTo>
-                  <a:lnTo>
-                    <a:pt x="6619605" y="2724888"/>
-                  </a:lnTo>
-                  <a:lnTo>
-                    <a:pt x="6696849" y="2723491"/>
-                  </a:lnTo>
-                  <a:lnTo>
-                    <a:pt x="6774092" y="2722092"/>
-                  </a:lnTo>
-                  <a:lnTo>
-                    <a:pt x="6851336" y="2720691"/>
-                  </a:lnTo>
-                  <a:lnTo>
-                    <a:pt x="6928579" y="2719288"/>
-                  </a:lnTo>
-                  <a:lnTo>
-                    <a:pt x="7005823" y="2717883"/>
-                  </a:lnTo>
-                  <a:lnTo>
-                    <a:pt x="7083066" y="2716476"/>
-                  </a:lnTo>
-                  <a:lnTo>
-                    <a:pt x="7160310" y="2715067"/>
-                  </a:lnTo>
-                  <a:lnTo>
-                    <a:pt x="7237554" y="2713656"/>
-                  </a:lnTo>
-                  <a:lnTo>
-                    <a:pt x="7314797" y="2712242"/>
-                  </a:lnTo>
-                  <a:lnTo>
-                    <a:pt x="7392041" y="2710826"/>
-                  </a:lnTo>
-                  <a:lnTo>
-                    <a:pt x="7392041" y="3546608"/>
-                  </a:lnTo>
-                  <a:lnTo>
-                    <a:pt x="7314797" y="3542311"/>
-                  </a:lnTo>
-                  <a:lnTo>
-                    <a:pt x="7237554" y="3537840"/>
-                  </a:lnTo>
-                  <a:lnTo>
-                    <a:pt x="7160310" y="3533188"/>
-                  </a:lnTo>
-                  <a:lnTo>
-                    <a:pt x="7083066" y="3528347"/>
-                  </a:lnTo>
-                  <a:lnTo>
-                    <a:pt x="7005823" y="3523311"/>
-                  </a:lnTo>
-                  <a:lnTo>
-                    <a:pt x="6928579" y="3518070"/>
-                  </a:lnTo>
-                  <a:lnTo>
-                    <a:pt x="6851336" y="3512617"/>
-                  </a:lnTo>
-                  <a:lnTo>
-                    <a:pt x="6774092" y="3506943"/>
-                  </a:lnTo>
-                  <a:lnTo>
-                    <a:pt x="6696849" y="3501038"/>
-                  </a:lnTo>
-                  <a:lnTo>
-                    <a:pt x="6619605" y="3494895"/>
-                  </a:lnTo>
-                  <a:lnTo>
-                    <a:pt x="6542361" y="3488503"/>
-                  </a:lnTo>
-                  <a:lnTo>
-                    <a:pt x="6465118" y="3481852"/>
-                  </a:lnTo>
-                  <a:lnTo>
-                    <a:pt x="6387874" y="3474931"/>
-                  </a:lnTo>
-                  <a:lnTo>
-                    <a:pt x="6310631" y="3467730"/>
-                  </a:lnTo>
-                  <a:lnTo>
-                    <a:pt x="6233387" y="3460236"/>
-                  </a:lnTo>
-                  <a:lnTo>
-                    <a:pt x="6156144" y="3452440"/>
-                  </a:lnTo>
-                  <a:lnTo>
-                    <a:pt x="6078900" y="3444327"/>
-                  </a:lnTo>
-                  <a:lnTo>
-                    <a:pt x="6001656" y="3435886"/>
-                  </a:lnTo>
-                  <a:lnTo>
-                    <a:pt x="5924413" y="3427102"/>
-                  </a:lnTo>
-                  <a:lnTo>
-                    <a:pt x="5847169" y="3417963"/>
-                  </a:lnTo>
-                  <a:lnTo>
-                    <a:pt x="5769926" y="3408453"/>
-                  </a:lnTo>
-                  <a:lnTo>
-                    <a:pt x="5692682" y="3398558"/>
-                  </a:lnTo>
-                  <a:lnTo>
-                    <a:pt x="5615439" y="3388262"/>
-                  </a:lnTo>
-                  <a:lnTo>
-                    <a:pt x="5538195" y="3377549"/>
-                  </a:lnTo>
-                  <a:lnTo>
-                    <a:pt x="5460951" y="3366402"/>
-                  </a:lnTo>
-                  <a:lnTo>
-                    <a:pt x="5383708" y="3354803"/>
-                  </a:lnTo>
-                  <a:lnTo>
-                    <a:pt x="5306464" y="3342733"/>
-                  </a:lnTo>
-                  <a:lnTo>
-                    <a:pt x="5229221" y="3330175"/>
-                  </a:lnTo>
-                  <a:lnTo>
-                    <a:pt x="5151977" y="3317108"/>
-                  </a:lnTo>
-                  <a:lnTo>
-                    <a:pt x="5074734" y="3303512"/>
-                  </a:lnTo>
-                  <a:lnTo>
-                    <a:pt x="4997490" y="3289364"/>
-                  </a:lnTo>
-                  <a:lnTo>
-                    <a:pt x="4920246" y="3274643"/>
-                  </a:lnTo>
-                  <a:lnTo>
-                    <a:pt x="4843003" y="3259326"/>
-                  </a:lnTo>
-                  <a:lnTo>
-                    <a:pt x="4765759" y="3243388"/>
-                  </a:lnTo>
-                  <a:lnTo>
-                    <a:pt x="4688516" y="3226804"/>
-                  </a:lnTo>
-                  <a:lnTo>
-                    <a:pt x="4611272" y="3209549"/>
-                  </a:lnTo>
-                  <a:lnTo>
-                    <a:pt x="4534029" y="3191593"/>
-                  </a:lnTo>
-                  <a:lnTo>
-                    <a:pt x="4456785" y="3172911"/>
-                  </a:lnTo>
-                  <a:lnTo>
-                    <a:pt x="4379541" y="3153471"/>
-                  </a:lnTo>
-                  <a:lnTo>
-                    <a:pt x="4302298" y="3133244"/>
-                  </a:lnTo>
-                  <a:lnTo>
-                    <a:pt x="4225054" y="3112197"/>
-                  </a:lnTo>
-                  <a:lnTo>
-                    <a:pt x="4147811" y="3090297"/>
-                  </a:lnTo>
-                  <a:lnTo>
-                    <a:pt x="4070567" y="3067509"/>
-                  </a:lnTo>
-                  <a:lnTo>
-                    <a:pt x="3993324" y="3043799"/>
-                  </a:lnTo>
-                  <a:lnTo>
-                    <a:pt x="3916080" y="3019127"/>
-                  </a:lnTo>
-                  <a:lnTo>
-                    <a:pt x="3838836" y="2993456"/>
-                  </a:lnTo>
-                  <a:lnTo>
-                    <a:pt x="3761593" y="2966744"/>
-                  </a:lnTo>
-                  <a:lnTo>
-                    <a:pt x="3684349" y="2938950"/>
-                  </a:lnTo>
-                  <a:lnTo>
-                    <a:pt x="3607106" y="2910030"/>
-                  </a:lnTo>
-                  <a:lnTo>
-                    <a:pt x="3529862" y="2879938"/>
-                  </a:lnTo>
-                  <a:lnTo>
-                    <a:pt x="3452619" y="2848626"/>
-                  </a:lnTo>
-                  <a:lnTo>
-                    <a:pt x="3375375" y="2816046"/>
-                  </a:lnTo>
-                  <a:lnTo>
-                    <a:pt x="3298131" y="2782997"/>
-                  </a:lnTo>
-                  <a:lnTo>
-                    <a:pt x="3220888" y="2784304"/>
-                  </a:lnTo>
-                  <a:lnTo>
-                    <a:pt x="3143644" y="2785610"/>
-                  </a:lnTo>
-                  <a:lnTo>
-                    <a:pt x="3066401" y="2786913"/>
-                  </a:lnTo>
-                  <a:lnTo>
-                    <a:pt x="2989157" y="2788214"/>
-                  </a:lnTo>
-                  <a:lnTo>
-                    <a:pt x="2911914" y="2789514"/>
-                  </a:lnTo>
-                  <a:lnTo>
-                    <a:pt x="2834670" y="2790811"/>
-                  </a:lnTo>
-                  <a:lnTo>
-                    <a:pt x="2757426" y="2792106"/>
-                  </a:lnTo>
-                  <a:lnTo>
-                    <a:pt x="2680183" y="2793400"/>
-                  </a:lnTo>
-                  <a:lnTo>
-                    <a:pt x="2602939" y="2794691"/>
-                  </a:lnTo>
-                  <a:lnTo>
-                    <a:pt x="2525696" y="2795981"/>
-                  </a:lnTo>
-                  <a:lnTo>
-                    <a:pt x="2448452" y="2797269"/>
-                  </a:lnTo>
-                  <a:lnTo>
-                    <a:pt x="2371209" y="2798554"/>
-                  </a:lnTo>
-                  <a:lnTo>
-                    <a:pt x="2293965" y="2799838"/>
-                  </a:lnTo>
-                  <a:lnTo>
-                    <a:pt x="2216721" y="2801120"/>
-                  </a:lnTo>
-                  <a:lnTo>
-                    <a:pt x="2139478" y="2802400"/>
-                  </a:lnTo>
-                  <a:lnTo>
-                    <a:pt x="2062234" y="2803678"/>
-                  </a:lnTo>
-                  <a:lnTo>
-                    <a:pt x="1984991" y="2804954"/>
-                  </a:lnTo>
-                  <a:lnTo>
-                    <a:pt x="1907747" y="2806228"/>
-                  </a:lnTo>
-                  <a:lnTo>
-                    <a:pt x="1830504" y="2807500"/>
-                  </a:lnTo>
-                  <a:lnTo>
-                    <a:pt x="1753260" y="2808771"/>
-                  </a:lnTo>
-                  <a:lnTo>
-                    <a:pt x="1676016" y="2810039"/>
-                  </a:lnTo>
-                  <a:lnTo>
-                    <a:pt x="1598773" y="2811306"/>
-                  </a:lnTo>
-                  <a:lnTo>
-                    <a:pt x="1521529" y="2812570"/>
-                  </a:lnTo>
-                  <a:lnTo>
-                    <a:pt x="1444286" y="2813833"/>
-                  </a:lnTo>
-                  <a:lnTo>
-                    <a:pt x="1367042" y="2815094"/>
-                  </a:lnTo>
-                  <a:lnTo>
-                    <a:pt x="1289799" y="2816353"/>
-                  </a:lnTo>
-                  <a:lnTo>
-                    <a:pt x="1212555" y="2817610"/>
-                  </a:lnTo>
-                  <a:lnTo>
-                    <a:pt x="1135311" y="2818865"/>
-                  </a:lnTo>
-                  <a:lnTo>
-                    <a:pt x="1058068" y="2820118"/>
-                  </a:lnTo>
-                  <a:lnTo>
-                    <a:pt x="980824" y="2821370"/>
-                  </a:lnTo>
-                  <a:lnTo>
-                    <a:pt x="903581" y="2822619"/>
-                  </a:lnTo>
-                  <a:lnTo>
-                    <a:pt x="826337" y="2823867"/>
-                  </a:lnTo>
-                  <a:lnTo>
-                    <a:pt x="749094" y="2825112"/>
-                  </a:lnTo>
-                  <a:lnTo>
-                    <a:pt x="671850" y="2826356"/>
-                  </a:lnTo>
-                  <a:lnTo>
-                    <a:pt x="594606" y="2827598"/>
-                  </a:lnTo>
-                  <a:lnTo>
-                    <a:pt x="517363" y="2828838"/>
-                  </a:lnTo>
-                  <a:lnTo>
-                    <a:pt x="440119" y="2830077"/>
-                  </a:lnTo>
-                  <a:lnTo>
-                    <a:pt x="362876" y="2831313"/>
-                  </a:lnTo>
-                  <a:lnTo>
-                    <a:pt x="285632" y="2832548"/>
-                  </a:lnTo>
-                  <a:lnTo>
-                    <a:pt x="208389" y="2833780"/>
-                  </a:lnTo>
-                  <a:lnTo>
-                    <a:pt x="131145" y="2835011"/>
-                  </a:lnTo>
-                  <a:lnTo>
-                    <a:pt x="53901" y="2836240"/>
-                  </a:lnTo>
-                  <a:lnTo>
-                    <a:pt x="0" y="2837096"/>
+                    <a:pt x="517363" y="14366"/>
+                  </a:lnTo>
+                  <a:lnTo>
+                    <a:pt x="594606" y="149477"/>
+                  </a:lnTo>
+                  <a:lnTo>
+                    <a:pt x="671850" y="279327"/>
+                  </a:lnTo>
+                  <a:lnTo>
+                    <a:pt x="749094" y="404119"/>
+                  </a:lnTo>
+                  <a:lnTo>
+                    <a:pt x="826337" y="524052"/>
+                  </a:lnTo>
+                  <a:lnTo>
+                    <a:pt x="903581" y="639314"/>
+                  </a:lnTo>
+                  <a:lnTo>
+                    <a:pt x="980824" y="750087"/>
+                  </a:lnTo>
+                  <a:lnTo>
+                    <a:pt x="1058068" y="856546"/>
+                  </a:lnTo>
+                  <a:lnTo>
+                    <a:pt x="1135311" y="958859"/>
+                  </a:lnTo>
+                  <a:lnTo>
+                    <a:pt x="1212555" y="1057188"/>
+                  </a:lnTo>
+                  <a:lnTo>
+                    <a:pt x="1289799" y="1151688"/>
+                  </a:lnTo>
+                  <a:lnTo>
+                    <a:pt x="1367042" y="1242507"/>
+                  </a:lnTo>
+                  <a:lnTo>
+                    <a:pt x="1444286" y="1329790"/>
+                  </a:lnTo>
+                  <a:lnTo>
+                    <a:pt x="1521529" y="1413673"/>
+                  </a:lnTo>
+                  <a:lnTo>
+                    <a:pt x="1598773" y="1494290"/>
+                  </a:lnTo>
+                  <a:lnTo>
+                    <a:pt x="1676016" y="1571767"/>
+                  </a:lnTo>
+                  <a:lnTo>
+                    <a:pt x="1753260" y="1646227"/>
+                  </a:lnTo>
+                  <a:lnTo>
+                    <a:pt x="1830504" y="1717787"/>
+                  </a:lnTo>
+                  <a:lnTo>
+                    <a:pt x="1907747" y="1786560"/>
+                  </a:lnTo>
+                  <a:lnTo>
+                    <a:pt x="1984991" y="1852655"/>
+                  </a:lnTo>
+                  <a:lnTo>
+                    <a:pt x="2062234" y="1916176"/>
+                  </a:lnTo>
+                  <a:lnTo>
+                    <a:pt x="2139478" y="1977223"/>
+                  </a:lnTo>
+                  <a:lnTo>
+                    <a:pt x="2216721" y="2035893"/>
+                  </a:lnTo>
+                  <a:lnTo>
+                    <a:pt x="2293965" y="2092278"/>
+                  </a:lnTo>
+                  <a:lnTo>
+                    <a:pt x="2371209" y="2146467"/>
+                  </a:lnTo>
+                  <a:lnTo>
+                    <a:pt x="2448452" y="2198546"/>
+                  </a:lnTo>
+                  <a:lnTo>
+                    <a:pt x="2525696" y="2248597"/>
+                  </a:lnTo>
+                  <a:lnTo>
+                    <a:pt x="2602939" y="2296698"/>
+                  </a:lnTo>
+                  <a:lnTo>
+                    <a:pt x="2680183" y="2342927"/>
+                  </a:lnTo>
+                  <a:lnTo>
+                    <a:pt x="2757426" y="2387355"/>
+                  </a:lnTo>
+                  <a:lnTo>
+                    <a:pt x="2834670" y="2430052"/>
+                  </a:lnTo>
+                  <a:lnTo>
+                    <a:pt x="2911914" y="2471087"/>
+                  </a:lnTo>
+                  <a:lnTo>
+                    <a:pt x="2989157" y="2510524"/>
+                  </a:lnTo>
+                  <a:lnTo>
+                    <a:pt x="3066401" y="2548425"/>
+                  </a:lnTo>
+                  <a:lnTo>
+                    <a:pt x="3143644" y="2584850"/>
+                  </a:lnTo>
+                  <a:lnTo>
+                    <a:pt x="3220888" y="2619857"/>
+                  </a:lnTo>
+                  <a:lnTo>
+                    <a:pt x="3298131" y="2653500"/>
+                  </a:lnTo>
+                  <a:lnTo>
+                    <a:pt x="3375375" y="2653064"/>
+                  </a:lnTo>
+                  <a:lnTo>
+                    <a:pt x="3452619" y="2651813"/>
+                  </a:lnTo>
+                  <a:lnTo>
+                    <a:pt x="3529862" y="2650561"/>
+                  </a:lnTo>
+                  <a:lnTo>
+                    <a:pt x="3607106" y="2649307"/>
+                  </a:lnTo>
+                  <a:lnTo>
+                    <a:pt x="3684349" y="2648051"/>
+                  </a:lnTo>
+                  <a:lnTo>
+                    <a:pt x="3761593" y="2646793"/>
+                  </a:lnTo>
+                  <a:lnTo>
+                    <a:pt x="3838836" y="2645533"/>
+                  </a:lnTo>
+                  <a:lnTo>
+                    <a:pt x="3916080" y="2644271"/>
+                  </a:lnTo>
+                  <a:lnTo>
+                    <a:pt x="3993324" y="2643007"/>
+                  </a:lnTo>
+                  <a:lnTo>
+                    <a:pt x="4070567" y="2641742"/>
+                  </a:lnTo>
+                  <a:lnTo>
+                    <a:pt x="4147811" y="2640474"/>
+                  </a:lnTo>
+                  <a:lnTo>
+                    <a:pt x="4225054" y="2639205"/>
+                  </a:lnTo>
+                  <a:lnTo>
+                    <a:pt x="4302298" y="2637933"/>
+                  </a:lnTo>
+                  <a:lnTo>
+                    <a:pt x="4379541" y="2636660"/>
+                  </a:lnTo>
+                  <a:lnTo>
+                    <a:pt x="4456785" y="2635385"/>
+                  </a:lnTo>
+                  <a:lnTo>
+                    <a:pt x="4534029" y="2634108"/>
+                  </a:lnTo>
+                  <a:lnTo>
+                    <a:pt x="4611272" y="2632829"/>
+                  </a:lnTo>
+                  <a:lnTo>
+                    <a:pt x="4688516" y="2631548"/>
+                  </a:lnTo>
+                  <a:lnTo>
+                    <a:pt x="4765759" y="2630265"/>
+                  </a:lnTo>
+                  <a:lnTo>
+                    <a:pt x="4843003" y="2628980"/>
+                  </a:lnTo>
+                  <a:lnTo>
+                    <a:pt x="4920246" y="2627693"/>
+                  </a:lnTo>
+                  <a:lnTo>
+                    <a:pt x="4997490" y="2626405"/>
+                  </a:lnTo>
+                  <a:lnTo>
+                    <a:pt x="5074734" y="2625114"/>
+                  </a:lnTo>
+                  <a:lnTo>
+                    <a:pt x="5151977" y="2623821"/>
+                  </a:lnTo>
+                  <a:lnTo>
+                    <a:pt x="5229221" y="2622527"/>
+                  </a:lnTo>
+                  <a:lnTo>
+                    <a:pt x="5306464" y="2621230"/>
+                  </a:lnTo>
+                  <a:lnTo>
+                    <a:pt x="5383708" y="2619932"/>
+                  </a:lnTo>
+                  <a:lnTo>
+                    <a:pt x="5460951" y="2618632"/>
+                  </a:lnTo>
+                  <a:lnTo>
+                    <a:pt x="5538195" y="2617329"/>
+                  </a:lnTo>
+                  <a:lnTo>
+                    <a:pt x="5615439" y="2616025"/>
+                  </a:lnTo>
+                  <a:lnTo>
+                    <a:pt x="5692682" y="2614719"/>
+                  </a:lnTo>
+                  <a:lnTo>
+                    <a:pt x="5769926" y="2613411"/>
+                  </a:lnTo>
+                  <a:lnTo>
+                    <a:pt x="5847169" y="2612100"/>
+                  </a:lnTo>
+                  <a:lnTo>
+                    <a:pt x="5924413" y="2610788"/>
+                  </a:lnTo>
+                  <a:lnTo>
+                    <a:pt x="6001656" y="2609474"/>
+                  </a:lnTo>
+                  <a:lnTo>
+                    <a:pt x="6078900" y="2608158"/>
+                  </a:lnTo>
+                  <a:lnTo>
+                    <a:pt x="6156144" y="2606840"/>
+                  </a:lnTo>
+                  <a:lnTo>
+                    <a:pt x="6233387" y="2605520"/>
+                  </a:lnTo>
+                  <a:lnTo>
+                    <a:pt x="6310631" y="2604198"/>
+                  </a:lnTo>
+                  <a:lnTo>
+                    <a:pt x="6387874" y="2602874"/>
+                  </a:lnTo>
+                  <a:lnTo>
+                    <a:pt x="6465118" y="2601548"/>
+                  </a:lnTo>
+                  <a:lnTo>
+                    <a:pt x="6542361" y="2600220"/>
+                  </a:lnTo>
+                  <a:lnTo>
+                    <a:pt x="6619605" y="2598890"/>
+                  </a:lnTo>
+                  <a:lnTo>
+                    <a:pt x="6696849" y="2597558"/>
+                  </a:lnTo>
+                  <a:lnTo>
+                    <a:pt x="6774092" y="2596224"/>
+                  </a:lnTo>
+                  <a:lnTo>
+                    <a:pt x="6851336" y="2594888"/>
+                  </a:lnTo>
+                  <a:lnTo>
+                    <a:pt x="6928579" y="2593550"/>
+                  </a:lnTo>
+                  <a:lnTo>
+                    <a:pt x="7005823" y="2592209"/>
+                  </a:lnTo>
+                  <a:lnTo>
+                    <a:pt x="7083066" y="2590867"/>
+                  </a:lnTo>
+                  <a:lnTo>
+                    <a:pt x="7160310" y="2589523"/>
+                  </a:lnTo>
+                  <a:lnTo>
+                    <a:pt x="7237554" y="2588177"/>
+                  </a:lnTo>
+                  <a:lnTo>
+                    <a:pt x="7314797" y="2586829"/>
+                  </a:lnTo>
+                  <a:lnTo>
+                    <a:pt x="7392041" y="2585479"/>
+                  </a:lnTo>
+                  <a:lnTo>
+                    <a:pt x="7392041" y="3382614"/>
+                  </a:lnTo>
+                  <a:lnTo>
+                    <a:pt x="7314797" y="3378516"/>
+                  </a:lnTo>
+                  <a:lnTo>
+                    <a:pt x="7237554" y="3374252"/>
+                  </a:lnTo>
+                  <a:lnTo>
+                    <a:pt x="7160310" y="3369815"/>
+                  </a:lnTo>
+                  <a:lnTo>
+                    <a:pt x="7083066" y="3365198"/>
+                  </a:lnTo>
+                  <a:lnTo>
+                    <a:pt x="7005823" y="3360394"/>
+                  </a:lnTo>
+                  <a:lnTo>
+                    <a:pt x="6928579" y="3355396"/>
+                  </a:lnTo>
+                  <a:lnTo>
+                    <a:pt x="6851336" y="3350195"/>
+                  </a:lnTo>
+                  <a:lnTo>
+                    <a:pt x="6774092" y="3344783"/>
+                  </a:lnTo>
+                  <a:lnTo>
+                    <a:pt x="6696849" y="3339152"/>
+                  </a:lnTo>
+                  <a:lnTo>
+                    <a:pt x="6619605" y="3333292"/>
+                  </a:lnTo>
+                  <a:lnTo>
+                    <a:pt x="6542361" y="3327196"/>
+                  </a:lnTo>
+                  <a:lnTo>
+                    <a:pt x="6465118" y="3320852"/>
+                  </a:lnTo>
+                  <a:lnTo>
+                    <a:pt x="6387874" y="3314251"/>
+                  </a:lnTo>
+                  <a:lnTo>
+                    <a:pt x="6310631" y="3307383"/>
+                  </a:lnTo>
+                  <a:lnTo>
+                    <a:pt x="6233387" y="3300236"/>
+                  </a:lnTo>
+                  <a:lnTo>
+                    <a:pt x="6156144" y="3292800"/>
+                  </a:lnTo>
+                  <a:lnTo>
+                    <a:pt x="6078900" y="3285063"/>
+                  </a:lnTo>
+                  <a:lnTo>
+                    <a:pt x="6001656" y="3277012"/>
+                  </a:lnTo>
+                  <a:lnTo>
+                    <a:pt x="5924413" y="3268634"/>
+                  </a:lnTo>
+                  <a:lnTo>
+                    <a:pt x="5847169" y="3259918"/>
+                  </a:lnTo>
+                  <a:lnTo>
+                    <a:pt x="5769926" y="3250848"/>
+                  </a:lnTo>
+                  <a:lnTo>
+                    <a:pt x="5692682" y="3241410"/>
+                  </a:lnTo>
+                  <a:lnTo>
+                    <a:pt x="5615439" y="3231590"/>
+                  </a:lnTo>
+                  <a:lnTo>
+                    <a:pt x="5538195" y="3221372"/>
+                  </a:lnTo>
+                  <a:lnTo>
+                    <a:pt x="5460951" y="3210740"/>
+                  </a:lnTo>
+                  <a:lnTo>
+                    <a:pt x="5383708" y="3199678"/>
+                  </a:lnTo>
+                  <a:lnTo>
+                    <a:pt x="5306464" y="3188167"/>
+                  </a:lnTo>
+                  <a:lnTo>
+                    <a:pt x="5229221" y="3176189"/>
+                  </a:lnTo>
+                  <a:lnTo>
+                    <a:pt x="5151977" y="3163726"/>
+                  </a:lnTo>
+                  <a:lnTo>
+                    <a:pt x="5074734" y="3150759"/>
+                  </a:lnTo>
+                  <a:lnTo>
+                    <a:pt x="4997490" y="3137265"/>
+                  </a:lnTo>
+                  <a:lnTo>
+                    <a:pt x="4920246" y="3123225"/>
+                  </a:lnTo>
+                  <a:lnTo>
+                    <a:pt x="4843003" y="3108616"/>
+                  </a:lnTo>
+                  <a:lnTo>
+                    <a:pt x="4765759" y="3093415"/>
+                  </a:lnTo>
+                  <a:lnTo>
+                    <a:pt x="4688516" y="3077598"/>
+                  </a:lnTo>
+                  <a:lnTo>
+                    <a:pt x="4611272" y="3061140"/>
+                  </a:lnTo>
+                  <a:lnTo>
+                    <a:pt x="4534029" y="3044015"/>
+                  </a:lnTo>
+                  <a:lnTo>
+                    <a:pt x="4456785" y="3026197"/>
+                  </a:lnTo>
+                  <a:lnTo>
+                    <a:pt x="4379541" y="3007656"/>
+                  </a:lnTo>
+                  <a:lnTo>
+                    <a:pt x="4302298" y="2988364"/>
+                  </a:lnTo>
+                  <a:lnTo>
+                    <a:pt x="4225054" y="2968290"/>
+                  </a:lnTo>
+                  <a:lnTo>
+                    <a:pt x="4147811" y="2947402"/>
+                  </a:lnTo>
+                  <a:lnTo>
+                    <a:pt x="4070567" y="2925669"/>
+                  </a:lnTo>
+                  <a:lnTo>
+                    <a:pt x="3993324" y="2903054"/>
+                  </a:lnTo>
+                  <a:lnTo>
+                    <a:pt x="3916080" y="2879524"/>
+                  </a:lnTo>
+                  <a:lnTo>
+                    <a:pt x="3838836" y="2855039"/>
+                  </a:lnTo>
+                  <a:lnTo>
+                    <a:pt x="3761593" y="2829563"/>
+                  </a:lnTo>
+                  <a:lnTo>
+                    <a:pt x="3684349" y="2803054"/>
+                  </a:lnTo>
+                  <a:lnTo>
+                    <a:pt x="3607106" y="2775471"/>
+                  </a:lnTo>
+                  <a:lnTo>
+                    <a:pt x="3529862" y="2746770"/>
+                  </a:lnTo>
+                  <a:lnTo>
+                    <a:pt x="3452619" y="2716907"/>
+                  </a:lnTo>
+                  <a:lnTo>
+                    <a:pt x="3375375" y="2685833"/>
+                  </a:lnTo>
+                  <a:lnTo>
+                    <a:pt x="3298131" y="2654312"/>
+                  </a:lnTo>
+                  <a:lnTo>
+                    <a:pt x="3220888" y="2655559"/>
+                  </a:lnTo>
+                  <a:lnTo>
+                    <a:pt x="3143644" y="2656804"/>
+                  </a:lnTo>
+                  <a:lnTo>
+                    <a:pt x="3066401" y="2658047"/>
+                  </a:lnTo>
+                  <a:lnTo>
+                    <a:pt x="2989157" y="2659288"/>
+                  </a:lnTo>
+                  <a:lnTo>
+                    <a:pt x="2911914" y="2660527"/>
+                  </a:lnTo>
+                  <a:lnTo>
+                    <a:pt x="2834670" y="2661765"/>
+                  </a:lnTo>
+                  <a:lnTo>
+                    <a:pt x="2757426" y="2663000"/>
+                  </a:lnTo>
+                  <a:lnTo>
+                    <a:pt x="2680183" y="2664234"/>
+                  </a:lnTo>
+                  <a:lnTo>
+                    <a:pt x="2602939" y="2665466"/>
+                  </a:lnTo>
+                  <a:lnTo>
+                    <a:pt x="2525696" y="2666696"/>
+                  </a:lnTo>
+                  <a:lnTo>
+                    <a:pt x="2448452" y="2667924"/>
+                  </a:lnTo>
+                  <a:lnTo>
+                    <a:pt x="2371209" y="2669150"/>
+                  </a:lnTo>
+                  <a:lnTo>
+                    <a:pt x="2293965" y="2670375"/>
+                  </a:lnTo>
+                  <a:lnTo>
+                    <a:pt x="2216721" y="2671597"/>
+                  </a:lnTo>
+                  <a:lnTo>
+                    <a:pt x="2139478" y="2672818"/>
+                  </a:lnTo>
+                  <a:lnTo>
+                    <a:pt x="2062234" y="2674037"/>
+                  </a:lnTo>
+                  <a:lnTo>
+                    <a:pt x="1984991" y="2675254"/>
+                  </a:lnTo>
+                  <a:lnTo>
+                    <a:pt x="1907747" y="2676469"/>
+                  </a:lnTo>
+                  <a:lnTo>
+                    <a:pt x="1830504" y="2677683"/>
+                  </a:lnTo>
+                  <a:lnTo>
+                    <a:pt x="1753260" y="2678894"/>
+                  </a:lnTo>
+                  <a:lnTo>
+                    <a:pt x="1676016" y="2680104"/>
+                  </a:lnTo>
+                  <a:lnTo>
+                    <a:pt x="1598773" y="2681312"/>
+                  </a:lnTo>
+                  <a:lnTo>
+                    <a:pt x="1521529" y="2682518"/>
+                  </a:lnTo>
+                  <a:lnTo>
+                    <a:pt x="1444286" y="2683722"/>
+                  </a:lnTo>
+                  <a:lnTo>
+                    <a:pt x="1367042" y="2684925"/>
+                  </a:lnTo>
+                  <a:lnTo>
+                    <a:pt x="1289799" y="2686126"/>
+                  </a:lnTo>
+                  <a:lnTo>
+                    <a:pt x="1212555" y="2687325"/>
+                  </a:lnTo>
+                  <a:lnTo>
+                    <a:pt x="1135311" y="2688522"/>
+                  </a:lnTo>
+                  <a:lnTo>
+                    <a:pt x="1058068" y="2689717"/>
+                  </a:lnTo>
+                  <a:lnTo>
+                    <a:pt x="980824" y="2690910"/>
+                  </a:lnTo>
+                  <a:lnTo>
+                    <a:pt x="903581" y="2692102"/>
+                  </a:lnTo>
+                  <a:lnTo>
+                    <a:pt x="826337" y="2693292"/>
+                  </a:lnTo>
+                  <a:lnTo>
+                    <a:pt x="749094" y="2694480"/>
+                  </a:lnTo>
+                  <a:lnTo>
+                    <a:pt x="671850" y="2695667"/>
+                  </a:lnTo>
+                  <a:lnTo>
+                    <a:pt x="594606" y="2696851"/>
+                  </a:lnTo>
+                  <a:lnTo>
+                    <a:pt x="517363" y="2698034"/>
+                  </a:lnTo>
+                  <a:lnTo>
+                    <a:pt x="440119" y="2699215"/>
+                  </a:lnTo>
+                  <a:lnTo>
+                    <a:pt x="362876" y="2700394"/>
+                  </a:lnTo>
+                  <a:lnTo>
+                    <a:pt x="285632" y="2701572"/>
+                  </a:lnTo>
+                  <a:lnTo>
+                    <a:pt x="208389" y="2702747"/>
+                  </a:lnTo>
+                  <a:lnTo>
+                    <a:pt x="131145" y="2703921"/>
+                  </a:lnTo>
+                  <a:lnTo>
+                    <a:pt x="53901" y="2705093"/>
+                  </a:lnTo>
+                  <a:lnTo>
+                    <a:pt x="0" y="2705910"/>
                   </a:lnTo>
                   <a:close/>
                 </a:path>
@@ -3597,285 +3597,285 @@
           </p:nvSpPr>
           <p:spPr>
             <a:xfrm>
-              <a:off x="1326987" y="1896563"/>
-              <a:ext cx="6882571" cy="2782145"/>
+              <a:off x="1326987" y="2073503"/>
+              <a:ext cx="6882571" cy="2653500"/>
             </a:xfrm>
             <a:custGeom>
               <a:avLst/>
               <a:pathLst>
-                <a:path w="6882571" h="2782145">
+                <a:path w="6882571" h="2653500">
                   <a:moveTo>
                     <a:pt x="0" y="0"/>
                   </a:moveTo>
                   <a:lnTo>
-                    <a:pt x="7893" y="15063"/>
-                  </a:lnTo>
-                  <a:lnTo>
-                    <a:pt x="85137" y="156724"/>
-                  </a:lnTo>
-                  <a:lnTo>
-                    <a:pt x="162380" y="292869"/>
-                  </a:lnTo>
-                  <a:lnTo>
-                    <a:pt x="239624" y="423711"/>
-                  </a:lnTo>
-                  <a:lnTo>
-                    <a:pt x="316867" y="549458"/>
-                  </a:lnTo>
-                  <a:lnTo>
-                    <a:pt x="394111" y="670308"/>
-                  </a:lnTo>
-                  <a:lnTo>
-                    <a:pt x="471355" y="786452"/>
-                  </a:lnTo>
-                  <a:lnTo>
-                    <a:pt x="548598" y="898073"/>
-                  </a:lnTo>
-                  <a:lnTo>
-                    <a:pt x="625842" y="1005346"/>
-                  </a:lnTo>
-                  <a:lnTo>
-                    <a:pt x="703085" y="1108442"/>
-                  </a:lnTo>
-                  <a:lnTo>
-                    <a:pt x="780329" y="1207523"/>
-                  </a:lnTo>
-                  <a:lnTo>
-                    <a:pt x="857572" y="1302746"/>
-                  </a:lnTo>
-                  <a:lnTo>
-                    <a:pt x="934816" y="1394260"/>
-                  </a:lnTo>
-                  <a:lnTo>
-                    <a:pt x="1012060" y="1482210"/>
-                  </a:lnTo>
-                  <a:lnTo>
-                    <a:pt x="1089303" y="1566735"/>
-                  </a:lnTo>
-                  <a:lnTo>
-                    <a:pt x="1166547" y="1647968"/>
-                  </a:lnTo>
-                  <a:lnTo>
-                    <a:pt x="1243790" y="1726038"/>
-                  </a:lnTo>
-                  <a:lnTo>
-                    <a:pt x="1321034" y="1801068"/>
-                  </a:lnTo>
-                  <a:lnTo>
-                    <a:pt x="1398277" y="1873175"/>
-                  </a:lnTo>
-                  <a:lnTo>
-                    <a:pt x="1475521" y="1942475"/>
-                  </a:lnTo>
-                  <a:lnTo>
-                    <a:pt x="1552765" y="2009075"/>
-                  </a:lnTo>
-                  <a:lnTo>
-                    <a:pt x="1630008" y="2073082"/>
-                  </a:lnTo>
-                  <a:lnTo>
-                    <a:pt x="1707252" y="2134596"/>
-                  </a:lnTo>
-                  <a:lnTo>
-                    <a:pt x="1784495" y="2193715"/>
-                  </a:lnTo>
-                  <a:lnTo>
-                    <a:pt x="1861739" y="2250531"/>
-                  </a:lnTo>
-                  <a:lnTo>
-                    <a:pt x="1938982" y="2305135"/>
-                  </a:lnTo>
-                  <a:lnTo>
-                    <a:pt x="2016226" y="2357612"/>
-                  </a:lnTo>
-                  <a:lnTo>
-                    <a:pt x="2093470" y="2408046"/>
-                  </a:lnTo>
-                  <a:lnTo>
-                    <a:pt x="2170713" y="2456515"/>
-                  </a:lnTo>
-                  <a:lnTo>
-                    <a:pt x="2247957" y="2503097"/>
-                  </a:lnTo>
-                  <a:lnTo>
-                    <a:pt x="2325200" y="2547865"/>
-                  </a:lnTo>
-                  <a:lnTo>
-                    <a:pt x="2402444" y="2590889"/>
-                  </a:lnTo>
-                  <a:lnTo>
-                    <a:pt x="2479687" y="2632238"/>
-                  </a:lnTo>
-                  <a:lnTo>
-                    <a:pt x="2556931" y="2671976"/>
-                  </a:lnTo>
-                  <a:lnTo>
-                    <a:pt x="2634175" y="2710167"/>
-                  </a:lnTo>
-                  <a:lnTo>
-                    <a:pt x="2711418" y="2746871"/>
-                  </a:lnTo>
-                  <a:lnTo>
-                    <a:pt x="2788662" y="2782145"/>
-                  </a:lnTo>
-                  <a:lnTo>
-                    <a:pt x="2865905" y="2781688"/>
-                  </a:lnTo>
-                  <a:lnTo>
-                    <a:pt x="2943149" y="2780377"/>
-                  </a:lnTo>
-                  <a:lnTo>
-                    <a:pt x="3020392" y="2779064"/>
-                  </a:lnTo>
-                  <a:lnTo>
-                    <a:pt x="3097636" y="2777749"/>
-                  </a:lnTo>
-                  <a:lnTo>
-                    <a:pt x="3174880" y="2776432"/>
-                  </a:lnTo>
-                  <a:lnTo>
-                    <a:pt x="3252123" y="2775113"/>
-                  </a:lnTo>
-                  <a:lnTo>
-                    <a:pt x="3329367" y="2773792"/>
-                  </a:lnTo>
-                  <a:lnTo>
-                    <a:pt x="3406610" y="2772469"/>
-                  </a:lnTo>
-                  <a:lnTo>
-                    <a:pt x="3483854" y="2771144"/>
-                  </a:lnTo>
-                  <a:lnTo>
-                    <a:pt x="3561097" y="2769817"/>
-                  </a:lnTo>
-                  <a:lnTo>
-                    <a:pt x="3638341" y="2768488"/>
-                  </a:lnTo>
-                  <a:lnTo>
-                    <a:pt x="3715585" y="2767157"/>
-                  </a:lnTo>
-                  <a:lnTo>
-                    <a:pt x="3792828" y="2765824"/>
-                  </a:lnTo>
-                  <a:lnTo>
-                    <a:pt x="3870072" y="2764489"/>
-                  </a:lnTo>
-                  <a:lnTo>
-                    <a:pt x="3947315" y="2763152"/>
-                  </a:lnTo>
-                  <a:lnTo>
-                    <a:pt x="4024559" y="2761813"/>
-                  </a:lnTo>
-                  <a:lnTo>
-                    <a:pt x="4101802" y="2760472"/>
-                  </a:lnTo>
-                  <a:lnTo>
-                    <a:pt x="4179046" y="2759129"/>
-                  </a:lnTo>
-                  <a:lnTo>
-                    <a:pt x="4256290" y="2757784"/>
-                  </a:lnTo>
-                  <a:lnTo>
-                    <a:pt x="4333533" y="2756437"/>
-                  </a:lnTo>
-                  <a:lnTo>
-                    <a:pt x="4410777" y="2755088"/>
-                  </a:lnTo>
-                  <a:lnTo>
-                    <a:pt x="4488020" y="2753736"/>
-                  </a:lnTo>
-                  <a:lnTo>
-                    <a:pt x="4565264" y="2752383"/>
-                  </a:lnTo>
-                  <a:lnTo>
-                    <a:pt x="4642507" y="2751028"/>
-                  </a:lnTo>
-                  <a:lnTo>
-                    <a:pt x="4719751" y="2749671"/>
-                  </a:lnTo>
-                  <a:lnTo>
-                    <a:pt x="4796995" y="2748311"/>
-                  </a:lnTo>
-                  <a:lnTo>
-                    <a:pt x="4874238" y="2746950"/>
-                  </a:lnTo>
-                  <a:lnTo>
-                    <a:pt x="4951482" y="2745587"/>
-                  </a:lnTo>
-                  <a:lnTo>
-                    <a:pt x="5028725" y="2744221"/>
-                  </a:lnTo>
-                  <a:lnTo>
-                    <a:pt x="5105969" y="2742854"/>
-                  </a:lnTo>
-                  <a:lnTo>
-                    <a:pt x="5183212" y="2741484"/>
-                  </a:lnTo>
-                  <a:lnTo>
-                    <a:pt x="5260456" y="2740112"/>
-                  </a:lnTo>
-                  <a:lnTo>
-                    <a:pt x="5337700" y="2738739"/>
-                  </a:lnTo>
-                  <a:lnTo>
-                    <a:pt x="5414943" y="2737363"/>
-                  </a:lnTo>
-                  <a:lnTo>
-                    <a:pt x="5492187" y="2735985"/>
-                  </a:lnTo>
-                  <a:lnTo>
-                    <a:pt x="5569430" y="2734605"/>
-                  </a:lnTo>
-                  <a:lnTo>
-                    <a:pt x="5646674" y="2733223"/>
-                  </a:lnTo>
-                  <a:lnTo>
-                    <a:pt x="5723917" y="2731839"/>
-                  </a:lnTo>
-                  <a:lnTo>
-                    <a:pt x="5801161" y="2730453"/>
-                  </a:lnTo>
-                  <a:lnTo>
-                    <a:pt x="5878405" y="2729065"/>
-                  </a:lnTo>
-                  <a:lnTo>
-                    <a:pt x="5955648" y="2727674"/>
-                  </a:lnTo>
-                  <a:lnTo>
-                    <a:pt x="6032892" y="2726282"/>
-                  </a:lnTo>
-                  <a:lnTo>
-                    <a:pt x="6110135" y="2724888"/>
-                  </a:lnTo>
-                  <a:lnTo>
-                    <a:pt x="6187379" y="2723491"/>
-                  </a:lnTo>
-                  <a:lnTo>
-                    <a:pt x="6264622" y="2722092"/>
-                  </a:lnTo>
-                  <a:lnTo>
-                    <a:pt x="6341866" y="2720691"/>
-                  </a:lnTo>
-                  <a:lnTo>
-                    <a:pt x="6419110" y="2719288"/>
-                  </a:lnTo>
-                  <a:lnTo>
-                    <a:pt x="6496353" y="2717883"/>
-                  </a:lnTo>
-                  <a:lnTo>
-                    <a:pt x="6573597" y="2716476"/>
-                  </a:lnTo>
-                  <a:lnTo>
-                    <a:pt x="6650840" y="2715067"/>
-                  </a:lnTo>
-                  <a:lnTo>
-                    <a:pt x="6728084" y="2713656"/>
-                  </a:lnTo>
-                  <a:lnTo>
-                    <a:pt x="6805327" y="2712242"/>
-                  </a:lnTo>
-                  <a:lnTo>
-                    <a:pt x="6882571" y="2710826"/>
+                    <a:pt x="7893" y="14366"/>
+                  </a:lnTo>
+                  <a:lnTo>
+                    <a:pt x="85137" y="149477"/>
+                  </a:lnTo>
+                  <a:lnTo>
+                    <a:pt x="162380" y="279327"/>
+                  </a:lnTo>
+                  <a:lnTo>
+                    <a:pt x="239624" y="404119"/>
+                  </a:lnTo>
+                  <a:lnTo>
+                    <a:pt x="316867" y="524052"/>
+                  </a:lnTo>
+                  <a:lnTo>
+                    <a:pt x="394111" y="639314"/>
+                  </a:lnTo>
+                  <a:lnTo>
+                    <a:pt x="471355" y="750087"/>
+                  </a:lnTo>
+                  <a:lnTo>
+                    <a:pt x="548598" y="856546"/>
+                  </a:lnTo>
+                  <a:lnTo>
+                    <a:pt x="625842" y="958859"/>
+                  </a:lnTo>
+                  <a:lnTo>
+                    <a:pt x="703085" y="1057188"/>
+                  </a:lnTo>
+                  <a:lnTo>
+                    <a:pt x="780329" y="1151688"/>
+                  </a:lnTo>
+                  <a:lnTo>
+                    <a:pt x="857572" y="1242507"/>
+                  </a:lnTo>
+                  <a:lnTo>
+                    <a:pt x="934816" y="1329790"/>
+                  </a:lnTo>
+                  <a:lnTo>
+                    <a:pt x="1012060" y="1413673"/>
+                  </a:lnTo>
+                  <a:lnTo>
+                    <a:pt x="1089303" y="1494290"/>
+                  </a:lnTo>
+                  <a:lnTo>
+                    <a:pt x="1166547" y="1571767"/>
+                  </a:lnTo>
+                  <a:lnTo>
+                    <a:pt x="1243790" y="1646227"/>
+                  </a:lnTo>
+                  <a:lnTo>
+                    <a:pt x="1321034" y="1717787"/>
+                  </a:lnTo>
+                  <a:lnTo>
+                    <a:pt x="1398277" y="1786560"/>
+                  </a:lnTo>
+                  <a:lnTo>
+                    <a:pt x="1475521" y="1852655"/>
+                  </a:lnTo>
+                  <a:lnTo>
+                    <a:pt x="1552765" y="1916176"/>
+                  </a:lnTo>
+                  <a:lnTo>
+                    <a:pt x="1630008" y="1977223"/>
+                  </a:lnTo>
+                  <a:lnTo>
+                    <a:pt x="1707252" y="2035893"/>
+                  </a:lnTo>
+                  <a:lnTo>
+                    <a:pt x="1784495" y="2092278"/>
+                  </a:lnTo>
+                  <a:lnTo>
+                    <a:pt x="1861739" y="2146467"/>
+                  </a:lnTo>
+                  <a:lnTo>
+                    <a:pt x="1938982" y="2198546"/>
+                  </a:lnTo>
+                  <a:lnTo>
+                    <a:pt x="2016226" y="2248597"/>
+                  </a:lnTo>
+                  <a:lnTo>
+                    <a:pt x="2093470" y="2296698"/>
+                  </a:lnTo>
+                  <a:lnTo>
+                    <a:pt x="2170713" y="2342927"/>
+                  </a:lnTo>
+                  <a:lnTo>
+                    <a:pt x="2247957" y="2387355"/>
+                  </a:lnTo>
+                  <a:lnTo>
+                    <a:pt x="2325200" y="2430052"/>
+                  </a:lnTo>
+                  <a:lnTo>
+                    <a:pt x="2402444" y="2471087"/>
+                  </a:lnTo>
+                  <a:lnTo>
+                    <a:pt x="2479687" y="2510524"/>
+                  </a:lnTo>
+                  <a:lnTo>
+                    <a:pt x="2556931" y="2548425"/>
+                  </a:lnTo>
+                  <a:lnTo>
+                    <a:pt x="2634175" y="2584850"/>
+                  </a:lnTo>
+                  <a:lnTo>
+                    <a:pt x="2711418" y="2619857"/>
+                  </a:lnTo>
+                  <a:lnTo>
+                    <a:pt x="2788662" y="2653500"/>
+                  </a:lnTo>
+                  <a:lnTo>
+                    <a:pt x="2865905" y="2653064"/>
+                  </a:lnTo>
+                  <a:lnTo>
+                    <a:pt x="2943149" y="2651813"/>
+                  </a:lnTo>
+                  <a:lnTo>
+                    <a:pt x="3020392" y="2650561"/>
+                  </a:lnTo>
+                  <a:lnTo>
+                    <a:pt x="3097636" y="2649307"/>
+                  </a:lnTo>
+                  <a:lnTo>
+                    <a:pt x="3174880" y="2648051"/>
+                  </a:lnTo>
+                  <a:lnTo>
+                    <a:pt x="3252123" y="2646793"/>
+                  </a:lnTo>
+                  <a:lnTo>
+                    <a:pt x="3329367" y="2645533"/>
+                  </a:lnTo>
+                  <a:lnTo>
+                    <a:pt x="3406610" y="2644271"/>
+                  </a:lnTo>
+                  <a:lnTo>
+                    <a:pt x="3483854" y="2643007"/>
+                  </a:lnTo>
+                  <a:lnTo>
+                    <a:pt x="3561097" y="2641742"/>
+                  </a:lnTo>
+                  <a:lnTo>
+                    <a:pt x="3638341" y="2640474"/>
+                  </a:lnTo>
+                  <a:lnTo>
+                    <a:pt x="3715585" y="2639205"/>
+                  </a:lnTo>
+                  <a:lnTo>
+                    <a:pt x="3792828" y="2637933"/>
+                  </a:lnTo>
+                  <a:lnTo>
+                    <a:pt x="3870072" y="2636660"/>
+                  </a:lnTo>
+                  <a:lnTo>
+                    <a:pt x="3947315" y="2635385"/>
+                  </a:lnTo>
+                  <a:lnTo>
+                    <a:pt x="4024559" y="2634108"/>
+                  </a:lnTo>
+                  <a:lnTo>
+                    <a:pt x="4101802" y="2632829"/>
+                  </a:lnTo>
+                  <a:lnTo>
+                    <a:pt x="4179046" y="2631548"/>
+                  </a:lnTo>
+                  <a:lnTo>
+                    <a:pt x="4256290" y="2630265"/>
+                  </a:lnTo>
+                  <a:lnTo>
+                    <a:pt x="4333533" y="2628980"/>
+                  </a:lnTo>
+                  <a:lnTo>
+                    <a:pt x="4410777" y="2627693"/>
+                  </a:lnTo>
+                  <a:lnTo>
+                    <a:pt x="4488020" y="2626405"/>
+                  </a:lnTo>
+                  <a:lnTo>
+                    <a:pt x="4565264" y="2625114"/>
+                  </a:lnTo>
+                  <a:lnTo>
+                    <a:pt x="4642507" y="2623821"/>
+                  </a:lnTo>
+                  <a:lnTo>
+                    <a:pt x="4719751" y="2622527"/>
+                  </a:lnTo>
+                  <a:lnTo>
+                    <a:pt x="4796995" y="2621230"/>
+                  </a:lnTo>
+                  <a:lnTo>
+                    <a:pt x="4874238" y="2619932"/>
+                  </a:lnTo>
+                  <a:lnTo>
+                    <a:pt x="4951482" y="2618632"/>
+                  </a:lnTo>
+                  <a:lnTo>
+                    <a:pt x="5028725" y="2617329"/>
+                  </a:lnTo>
+                  <a:lnTo>
+                    <a:pt x="5105969" y="2616025"/>
+                  </a:lnTo>
+                  <a:lnTo>
+                    <a:pt x="5183212" y="2614719"/>
+                  </a:lnTo>
+                  <a:lnTo>
+                    <a:pt x="5260456" y="2613411"/>
+                  </a:lnTo>
+                  <a:lnTo>
+                    <a:pt x="5337700" y="2612100"/>
+                  </a:lnTo>
+                  <a:lnTo>
+                    <a:pt x="5414943" y="2610788"/>
+                  </a:lnTo>
+                  <a:lnTo>
+                    <a:pt x="5492187" y="2609474"/>
+                  </a:lnTo>
+                  <a:lnTo>
+                    <a:pt x="5569430" y="2608158"/>
+                  </a:lnTo>
+                  <a:lnTo>
+                    <a:pt x="5646674" y="2606840"/>
+                  </a:lnTo>
+                  <a:lnTo>
+                    <a:pt x="5723917" y="2605520"/>
+                  </a:lnTo>
+                  <a:lnTo>
+                    <a:pt x="5801161" y="2604198"/>
+                  </a:lnTo>
+                  <a:lnTo>
+                    <a:pt x="5878405" y="2602874"/>
+                  </a:lnTo>
+                  <a:lnTo>
+                    <a:pt x="5955648" y="2601548"/>
+                  </a:lnTo>
+                  <a:lnTo>
+                    <a:pt x="6032892" y="2600220"/>
+                  </a:lnTo>
+                  <a:lnTo>
+                    <a:pt x="6110135" y="2598890"/>
+                  </a:lnTo>
+                  <a:lnTo>
+                    <a:pt x="6187379" y="2597558"/>
+                  </a:lnTo>
+                  <a:lnTo>
+                    <a:pt x="6264622" y="2596224"/>
+                  </a:lnTo>
+                  <a:lnTo>
+                    <a:pt x="6341866" y="2594888"/>
+                  </a:lnTo>
+                  <a:lnTo>
+                    <a:pt x="6419110" y="2593550"/>
+                  </a:lnTo>
+                  <a:lnTo>
+                    <a:pt x="6496353" y="2592209"/>
+                  </a:lnTo>
+                  <a:lnTo>
+                    <a:pt x="6573597" y="2590867"/>
+                  </a:lnTo>
+                  <a:lnTo>
+                    <a:pt x="6650840" y="2589523"/>
+                  </a:lnTo>
+                  <a:lnTo>
+                    <a:pt x="6728084" y="2588177"/>
+                  </a:lnTo>
+                  <a:lnTo>
+                    <a:pt x="6805327" y="2586829"/>
+                  </a:lnTo>
+                  <a:lnTo>
+                    <a:pt x="6882571" y="2585479"/>
                   </a:lnTo>
                 </a:path>
               </a:pathLst>
@@ -3895,303 +3895,303 @@
           </p:nvSpPr>
           <p:spPr>
             <a:xfrm>
-              <a:off x="817517" y="4679561"/>
-              <a:ext cx="7392041" cy="763610"/>
+              <a:off x="817517" y="4727816"/>
+              <a:ext cx="7392041" cy="728301"/>
             </a:xfrm>
             <a:custGeom>
               <a:avLst/>
               <a:pathLst>
-                <a:path w="7392041" h="763610">
+                <a:path w="7392041" h="728301">
                   <a:moveTo>
-                    <a:pt x="7392041" y="763610"/>
+                    <a:pt x="7392041" y="728301"/>
                   </a:moveTo>
                   <a:lnTo>
-                    <a:pt x="7314797" y="759313"/>
-                  </a:lnTo>
-                  <a:lnTo>
-                    <a:pt x="7237554" y="754842"/>
-                  </a:lnTo>
-                  <a:lnTo>
-                    <a:pt x="7160310" y="750190"/>
-                  </a:lnTo>
-                  <a:lnTo>
-                    <a:pt x="7083066" y="745350"/>
-                  </a:lnTo>
-                  <a:lnTo>
-                    <a:pt x="7005823" y="740313"/>
-                  </a:lnTo>
-                  <a:lnTo>
-                    <a:pt x="6928579" y="735072"/>
-                  </a:lnTo>
-                  <a:lnTo>
-                    <a:pt x="6851336" y="729619"/>
-                  </a:lnTo>
-                  <a:lnTo>
-                    <a:pt x="6774092" y="723945"/>
-                  </a:lnTo>
-                  <a:lnTo>
-                    <a:pt x="6696849" y="718041"/>
-                  </a:lnTo>
-                  <a:lnTo>
-                    <a:pt x="6619605" y="711897"/>
-                  </a:lnTo>
-                  <a:lnTo>
-                    <a:pt x="6542361" y="705505"/>
-                  </a:lnTo>
-                  <a:lnTo>
-                    <a:pt x="6465118" y="698854"/>
-                  </a:lnTo>
-                  <a:lnTo>
-                    <a:pt x="6387874" y="691933"/>
-                  </a:lnTo>
-                  <a:lnTo>
-                    <a:pt x="6310631" y="684732"/>
-                  </a:lnTo>
-                  <a:lnTo>
-                    <a:pt x="6233387" y="677239"/>
-                  </a:lnTo>
-                  <a:lnTo>
-                    <a:pt x="6156144" y="669442"/>
-                  </a:lnTo>
-                  <a:lnTo>
-                    <a:pt x="6078900" y="661329"/>
-                  </a:lnTo>
-                  <a:lnTo>
-                    <a:pt x="6001656" y="652888"/>
-                  </a:lnTo>
-                  <a:lnTo>
-                    <a:pt x="5924413" y="644105"/>
-                  </a:lnTo>
-                  <a:lnTo>
-                    <a:pt x="5847169" y="634965"/>
-                  </a:lnTo>
-                  <a:lnTo>
-                    <a:pt x="5769926" y="625455"/>
-                  </a:lnTo>
-                  <a:lnTo>
-                    <a:pt x="5692682" y="615560"/>
-                  </a:lnTo>
-                  <a:lnTo>
-                    <a:pt x="5615439" y="605264"/>
-                  </a:lnTo>
-                  <a:lnTo>
-                    <a:pt x="5538195" y="594551"/>
-                  </a:lnTo>
-                  <a:lnTo>
-                    <a:pt x="5460951" y="583404"/>
-                  </a:lnTo>
-                  <a:lnTo>
-                    <a:pt x="5383708" y="571805"/>
-                  </a:lnTo>
-                  <a:lnTo>
-                    <a:pt x="5306464" y="559736"/>
-                  </a:lnTo>
-                  <a:lnTo>
-                    <a:pt x="5229221" y="547178"/>
-                  </a:lnTo>
-                  <a:lnTo>
-                    <a:pt x="5151977" y="534110"/>
-                  </a:lnTo>
-                  <a:lnTo>
-                    <a:pt x="5074734" y="520514"/>
-                  </a:lnTo>
-                  <a:lnTo>
-                    <a:pt x="4997490" y="506366"/>
-                  </a:lnTo>
-                  <a:lnTo>
-                    <a:pt x="4920246" y="491646"/>
-                  </a:lnTo>
-                  <a:lnTo>
-                    <a:pt x="4843003" y="476328"/>
-                  </a:lnTo>
-                  <a:lnTo>
-                    <a:pt x="4765759" y="460390"/>
-                  </a:lnTo>
-                  <a:lnTo>
-                    <a:pt x="4688516" y="443807"/>
-                  </a:lnTo>
-                  <a:lnTo>
-                    <a:pt x="4611272" y="426551"/>
-                  </a:lnTo>
-                  <a:lnTo>
-                    <a:pt x="4534029" y="408596"/>
-                  </a:lnTo>
-                  <a:lnTo>
-                    <a:pt x="4456785" y="389913"/>
-                  </a:lnTo>
-                  <a:lnTo>
-                    <a:pt x="4379541" y="370473"/>
-                  </a:lnTo>
-                  <a:lnTo>
-                    <a:pt x="4302298" y="350246"/>
-                  </a:lnTo>
-                  <a:lnTo>
-                    <a:pt x="4225054" y="329199"/>
-                  </a:lnTo>
-                  <a:lnTo>
-                    <a:pt x="4147811" y="307299"/>
-                  </a:lnTo>
-                  <a:lnTo>
-                    <a:pt x="4070567" y="284512"/>
-                  </a:lnTo>
-                  <a:lnTo>
-                    <a:pt x="3993324" y="260801"/>
-                  </a:lnTo>
-                  <a:lnTo>
-                    <a:pt x="3916080" y="236129"/>
-                  </a:lnTo>
-                  <a:lnTo>
-                    <a:pt x="3838836" y="210458"/>
-                  </a:lnTo>
-                  <a:lnTo>
-                    <a:pt x="3761593" y="183746"/>
-                  </a:lnTo>
-                  <a:lnTo>
-                    <a:pt x="3684349" y="155952"/>
-                  </a:lnTo>
-                  <a:lnTo>
-                    <a:pt x="3607106" y="127032"/>
-                  </a:lnTo>
-                  <a:lnTo>
-                    <a:pt x="3529862" y="96940"/>
-                  </a:lnTo>
-                  <a:lnTo>
-                    <a:pt x="3452619" y="65628"/>
-                  </a:lnTo>
-                  <a:lnTo>
-                    <a:pt x="3375375" y="33048"/>
+                    <a:pt x="7314797" y="724203"/>
+                  </a:lnTo>
+                  <a:lnTo>
+                    <a:pt x="7237554" y="719939"/>
+                  </a:lnTo>
+                  <a:lnTo>
+                    <a:pt x="7160310" y="715502"/>
+                  </a:lnTo>
+                  <a:lnTo>
+                    <a:pt x="7083066" y="710885"/>
+                  </a:lnTo>
+                  <a:lnTo>
+                    <a:pt x="7005823" y="706081"/>
+                  </a:lnTo>
+                  <a:lnTo>
+                    <a:pt x="6928579" y="701083"/>
+                  </a:lnTo>
+                  <a:lnTo>
+                    <a:pt x="6851336" y="695882"/>
+                  </a:lnTo>
+                  <a:lnTo>
+                    <a:pt x="6774092" y="690470"/>
+                  </a:lnTo>
+                  <a:lnTo>
+                    <a:pt x="6696849" y="684839"/>
+                  </a:lnTo>
+                  <a:lnTo>
+                    <a:pt x="6619605" y="678980"/>
+                  </a:lnTo>
+                  <a:lnTo>
+                    <a:pt x="6542361" y="672883"/>
+                  </a:lnTo>
+                  <a:lnTo>
+                    <a:pt x="6465118" y="666539"/>
+                  </a:lnTo>
+                  <a:lnTo>
+                    <a:pt x="6387874" y="659938"/>
+                  </a:lnTo>
+                  <a:lnTo>
+                    <a:pt x="6310631" y="653070"/>
+                  </a:lnTo>
+                  <a:lnTo>
+                    <a:pt x="6233387" y="645923"/>
+                  </a:lnTo>
+                  <a:lnTo>
+                    <a:pt x="6156144" y="638487"/>
+                  </a:lnTo>
+                  <a:lnTo>
+                    <a:pt x="6078900" y="630750"/>
+                  </a:lnTo>
+                  <a:lnTo>
+                    <a:pt x="6001656" y="622699"/>
+                  </a:lnTo>
+                  <a:lnTo>
+                    <a:pt x="5924413" y="614321"/>
+                  </a:lnTo>
+                  <a:lnTo>
+                    <a:pt x="5847169" y="605605"/>
+                  </a:lnTo>
+                  <a:lnTo>
+                    <a:pt x="5769926" y="596535"/>
+                  </a:lnTo>
+                  <a:lnTo>
+                    <a:pt x="5692682" y="587097"/>
+                  </a:lnTo>
+                  <a:lnTo>
+                    <a:pt x="5615439" y="577277"/>
+                  </a:lnTo>
+                  <a:lnTo>
+                    <a:pt x="5538195" y="567059"/>
+                  </a:lnTo>
+                  <a:lnTo>
+                    <a:pt x="5460951" y="556427"/>
+                  </a:lnTo>
+                  <a:lnTo>
+                    <a:pt x="5383708" y="545365"/>
+                  </a:lnTo>
+                  <a:lnTo>
+                    <a:pt x="5306464" y="533854"/>
+                  </a:lnTo>
+                  <a:lnTo>
+                    <a:pt x="5229221" y="521876"/>
+                  </a:lnTo>
+                  <a:lnTo>
+                    <a:pt x="5151977" y="509413"/>
+                  </a:lnTo>
+                  <a:lnTo>
+                    <a:pt x="5074734" y="496446"/>
+                  </a:lnTo>
+                  <a:lnTo>
+                    <a:pt x="4997490" y="482952"/>
+                  </a:lnTo>
+                  <a:lnTo>
+                    <a:pt x="4920246" y="468912"/>
+                  </a:lnTo>
+                  <a:lnTo>
+                    <a:pt x="4843003" y="454303"/>
+                  </a:lnTo>
+                  <a:lnTo>
+                    <a:pt x="4765759" y="439102"/>
+                  </a:lnTo>
+                  <a:lnTo>
+                    <a:pt x="4688516" y="423285"/>
+                  </a:lnTo>
+                  <a:lnTo>
+                    <a:pt x="4611272" y="406827"/>
+                  </a:lnTo>
+                  <a:lnTo>
+                    <a:pt x="4534029" y="389702"/>
+                  </a:lnTo>
+                  <a:lnTo>
+                    <a:pt x="4456785" y="371884"/>
+                  </a:lnTo>
+                  <a:lnTo>
+                    <a:pt x="4379541" y="353343"/>
+                  </a:lnTo>
+                  <a:lnTo>
+                    <a:pt x="4302298" y="334051"/>
+                  </a:lnTo>
+                  <a:lnTo>
+                    <a:pt x="4225054" y="313977"/>
+                  </a:lnTo>
+                  <a:lnTo>
+                    <a:pt x="4147811" y="293090"/>
+                  </a:lnTo>
+                  <a:lnTo>
+                    <a:pt x="4070567" y="271356"/>
+                  </a:lnTo>
+                  <a:lnTo>
+                    <a:pt x="3993324" y="248741"/>
+                  </a:lnTo>
+                  <a:lnTo>
+                    <a:pt x="3916080" y="225211"/>
+                  </a:lnTo>
+                  <a:lnTo>
+                    <a:pt x="3838836" y="200726"/>
+                  </a:lnTo>
+                  <a:lnTo>
+                    <a:pt x="3761593" y="175250"/>
+                  </a:lnTo>
+                  <a:lnTo>
+                    <a:pt x="3684349" y="148741"/>
+                  </a:lnTo>
+                  <a:lnTo>
+                    <a:pt x="3607106" y="121158"/>
+                  </a:lnTo>
+                  <a:lnTo>
+                    <a:pt x="3529862" y="92457"/>
+                  </a:lnTo>
+                  <a:lnTo>
+                    <a:pt x="3452619" y="62594"/>
+                  </a:lnTo>
+                  <a:lnTo>
+                    <a:pt x="3375375" y="31520"/>
                   </a:lnTo>
                   <a:lnTo>
                     <a:pt x="3298131" y="0"/>
                   </a:lnTo>
                   <a:lnTo>
-                    <a:pt x="3220888" y="1307"/>
-                  </a:lnTo>
-                  <a:lnTo>
-                    <a:pt x="3143644" y="2612"/>
-                  </a:lnTo>
-                  <a:lnTo>
-                    <a:pt x="3066401" y="3915"/>
-                  </a:lnTo>
-                  <a:lnTo>
-                    <a:pt x="2989157" y="5216"/>
-                  </a:lnTo>
-                  <a:lnTo>
-                    <a:pt x="2911914" y="6516"/>
-                  </a:lnTo>
-                  <a:lnTo>
-                    <a:pt x="2834670" y="7813"/>
-                  </a:lnTo>
-                  <a:lnTo>
-                    <a:pt x="2757426" y="9109"/>
-                  </a:lnTo>
-                  <a:lnTo>
-                    <a:pt x="2680183" y="10402"/>
-                  </a:lnTo>
-                  <a:lnTo>
-                    <a:pt x="2602939" y="11694"/>
-                  </a:lnTo>
-                  <a:lnTo>
-                    <a:pt x="2525696" y="12983"/>
-                  </a:lnTo>
-                  <a:lnTo>
-                    <a:pt x="2448452" y="14271"/>
-                  </a:lnTo>
-                  <a:lnTo>
-                    <a:pt x="2371209" y="15557"/>
-                  </a:lnTo>
-                  <a:lnTo>
-                    <a:pt x="2293965" y="16840"/>
-                  </a:lnTo>
-                  <a:lnTo>
-                    <a:pt x="2216721" y="18122"/>
-                  </a:lnTo>
-                  <a:lnTo>
-                    <a:pt x="2139478" y="19402"/>
-                  </a:lnTo>
-                  <a:lnTo>
-                    <a:pt x="2062234" y="20680"/>
-                  </a:lnTo>
-                  <a:lnTo>
-                    <a:pt x="1984991" y="21956"/>
-                  </a:lnTo>
-                  <a:lnTo>
-                    <a:pt x="1907747" y="23230"/>
-                  </a:lnTo>
-                  <a:lnTo>
-                    <a:pt x="1830504" y="24503"/>
-                  </a:lnTo>
-                  <a:lnTo>
-                    <a:pt x="1753260" y="25773"/>
-                  </a:lnTo>
-                  <a:lnTo>
-                    <a:pt x="1676016" y="27041"/>
-                  </a:lnTo>
-                  <a:lnTo>
-                    <a:pt x="1598773" y="28308"/>
-                  </a:lnTo>
-                  <a:lnTo>
-                    <a:pt x="1521529" y="29573"/>
-                  </a:lnTo>
-                  <a:lnTo>
-                    <a:pt x="1444286" y="30835"/>
-                  </a:lnTo>
-                  <a:lnTo>
-                    <a:pt x="1367042" y="32096"/>
-                  </a:lnTo>
-                  <a:lnTo>
-                    <a:pt x="1289799" y="33355"/>
-                  </a:lnTo>
-                  <a:lnTo>
-                    <a:pt x="1212555" y="34612"/>
-                  </a:lnTo>
-                  <a:lnTo>
-                    <a:pt x="1135311" y="35867"/>
-                  </a:lnTo>
-                  <a:lnTo>
-                    <a:pt x="1058068" y="37120"/>
-                  </a:lnTo>
-                  <a:lnTo>
-                    <a:pt x="980824" y="38372"/>
-                  </a:lnTo>
-                  <a:lnTo>
-                    <a:pt x="903581" y="39621"/>
-                  </a:lnTo>
-                  <a:lnTo>
-                    <a:pt x="826337" y="40869"/>
-                  </a:lnTo>
-                  <a:lnTo>
-                    <a:pt x="749094" y="42115"/>
-                  </a:lnTo>
-                  <a:lnTo>
-                    <a:pt x="671850" y="43359"/>
-                  </a:lnTo>
-                  <a:lnTo>
-                    <a:pt x="594606" y="44601"/>
-                  </a:lnTo>
-                  <a:lnTo>
-                    <a:pt x="517363" y="45841"/>
-                  </a:lnTo>
-                  <a:lnTo>
-                    <a:pt x="440119" y="47079"/>
-                  </a:lnTo>
-                  <a:lnTo>
-                    <a:pt x="362876" y="48315"/>
-                  </a:lnTo>
-                  <a:lnTo>
-                    <a:pt x="285632" y="49550"/>
-                  </a:lnTo>
-                  <a:lnTo>
-                    <a:pt x="208389" y="50783"/>
-                  </a:lnTo>
-                  <a:lnTo>
-                    <a:pt x="131145" y="52013"/>
-                  </a:lnTo>
-                  <a:lnTo>
-                    <a:pt x="53901" y="53242"/>
-                  </a:lnTo>
-                  <a:lnTo>
-                    <a:pt x="0" y="54099"/>
+                    <a:pt x="3220888" y="1246"/>
+                  </a:lnTo>
+                  <a:lnTo>
+                    <a:pt x="3143644" y="2491"/>
+                  </a:lnTo>
+                  <a:lnTo>
+                    <a:pt x="3066401" y="3734"/>
+                  </a:lnTo>
+                  <a:lnTo>
+                    <a:pt x="2989157" y="4975"/>
+                  </a:lnTo>
+                  <a:lnTo>
+                    <a:pt x="2911914" y="6214"/>
+                  </a:lnTo>
+                  <a:lnTo>
+                    <a:pt x="2834670" y="7452"/>
+                  </a:lnTo>
+                  <a:lnTo>
+                    <a:pt x="2757426" y="8687"/>
+                  </a:lnTo>
+                  <a:lnTo>
+                    <a:pt x="2680183" y="9921"/>
+                  </a:lnTo>
+                  <a:lnTo>
+                    <a:pt x="2602939" y="11153"/>
+                  </a:lnTo>
+                  <a:lnTo>
+                    <a:pt x="2525696" y="12383"/>
+                  </a:lnTo>
+                  <a:lnTo>
+                    <a:pt x="2448452" y="13611"/>
+                  </a:lnTo>
+                  <a:lnTo>
+                    <a:pt x="2371209" y="14837"/>
+                  </a:lnTo>
+                  <a:lnTo>
+                    <a:pt x="2293965" y="16062"/>
+                  </a:lnTo>
+                  <a:lnTo>
+                    <a:pt x="2216721" y="17284"/>
+                  </a:lnTo>
+                  <a:lnTo>
+                    <a:pt x="2139478" y="18505"/>
+                  </a:lnTo>
+                  <a:lnTo>
+                    <a:pt x="2062234" y="19724"/>
+                  </a:lnTo>
+                  <a:lnTo>
+                    <a:pt x="1984991" y="20941"/>
+                  </a:lnTo>
+                  <a:lnTo>
+                    <a:pt x="1907747" y="22156"/>
+                  </a:lnTo>
+                  <a:lnTo>
+                    <a:pt x="1830504" y="23370"/>
+                  </a:lnTo>
+                  <a:lnTo>
+                    <a:pt x="1753260" y="24581"/>
+                  </a:lnTo>
+                  <a:lnTo>
+                    <a:pt x="1676016" y="25791"/>
+                  </a:lnTo>
+                  <a:lnTo>
+                    <a:pt x="1598773" y="26999"/>
+                  </a:lnTo>
+                  <a:lnTo>
+                    <a:pt x="1521529" y="28205"/>
+                  </a:lnTo>
+                  <a:lnTo>
+                    <a:pt x="1444286" y="29409"/>
+                  </a:lnTo>
+                  <a:lnTo>
+                    <a:pt x="1367042" y="30612"/>
+                  </a:lnTo>
+                  <a:lnTo>
+                    <a:pt x="1289799" y="31813"/>
+                  </a:lnTo>
+                  <a:lnTo>
+                    <a:pt x="1212555" y="33012"/>
+                  </a:lnTo>
+                  <a:lnTo>
+                    <a:pt x="1135311" y="34209"/>
+                  </a:lnTo>
+                  <a:lnTo>
+                    <a:pt x="1058068" y="35404"/>
+                  </a:lnTo>
+                  <a:lnTo>
+                    <a:pt x="980824" y="36597"/>
+                  </a:lnTo>
+                  <a:lnTo>
+                    <a:pt x="903581" y="37789"/>
+                  </a:lnTo>
+                  <a:lnTo>
+                    <a:pt x="826337" y="38979"/>
+                  </a:lnTo>
+                  <a:lnTo>
+                    <a:pt x="749094" y="40167"/>
+                  </a:lnTo>
+                  <a:lnTo>
+                    <a:pt x="671850" y="41354"/>
+                  </a:lnTo>
+                  <a:lnTo>
+                    <a:pt x="594606" y="42538"/>
+                  </a:lnTo>
+                  <a:lnTo>
+                    <a:pt x="517363" y="43721"/>
+                  </a:lnTo>
+                  <a:lnTo>
+                    <a:pt x="440119" y="44902"/>
+                  </a:lnTo>
+                  <a:lnTo>
+                    <a:pt x="362876" y="46081"/>
+                  </a:lnTo>
+                  <a:lnTo>
+                    <a:pt x="285632" y="47259"/>
+                  </a:lnTo>
+                  <a:lnTo>
+                    <a:pt x="208389" y="48434"/>
+                  </a:lnTo>
+                  <a:lnTo>
+                    <a:pt x="131145" y="49608"/>
+                  </a:lnTo>
+                  <a:lnTo>
+                    <a:pt x="53901" y="50780"/>
+                  </a:lnTo>
+                  <a:lnTo>
+                    <a:pt x="0" y="51597"/>
                   </a:lnTo>
                 </a:path>
               </a:pathLst>
@@ -4211,303 +4211,303 @@
           </p:nvSpPr>
           <p:spPr>
             <a:xfrm>
-              <a:off x="817517" y="3581682"/>
-              <a:ext cx="7392041" cy="1651508"/>
+              <a:off x="817517" y="3680702"/>
+              <a:ext cx="7392041" cy="1575143"/>
             </a:xfrm>
             <a:custGeom>
               <a:avLst/>
               <a:pathLst>
-                <a:path w="7392041" h="1651508">
+                <a:path w="7392041" h="1575143">
                   <a:moveTo>
                     <a:pt x="0" y="0"/>
                   </a:moveTo>
                   <a:lnTo>
-                    <a:pt x="53901" y="26136"/>
-                  </a:lnTo>
-                  <a:lnTo>
-                    <a:pt x="131145" y="62882"/>
-                  </a:lnTo>
-                  <a:lnTo>
-                    <a:pt x="208389" y="98933"/>
-                  </a:lnTo>
-                  <a:lnTo>
-                    <a:pt x="285632" y="134301"/>
-                  </a:lnTo>
-                  <a:lnTo>
-                    <a:pt x="362876" y="169000"/>
-                  </a:lnTo>
-                  <a:lnTo>
-                    <a:pt x="440119" y="203041"/>
-                  </a:lnTo>
-                  <a:lnTo>
-                    <a:pt x="517363" y="236439"/>
-                  </a:lnTo>
-                  <a:lnTo>
-                    <a:pt x="594606" y="269204"/>
-                  </a:lnTo>
-                  <a:lnTo>
-                    <a:pt x="671850" y="301350"/>
-                  </a:lnTo>
-                  <a:lnTo>
-                    <a:pt x="749094" y="332887"/>
-                  </a:lnTo>
-                  <a:lnTo>
-                    <a:pt x="826337" y="363826"/>
-                  </a:lnTo>
-                  <a:lnTo>
-                    <a:pt x="903581" y="394181"/>
-                  </a:lnTo>
-                  <a:lnTo>
-                    <a:pt x="980824" y="423961"/>
-                  </a:lnTo>
-                  <a:lnTo>
-                    <a:pt x="1058068" y="453177"/>
-                  </a:lnTo>
-                  <a:lnTo>
-                    <a:pt x="1135311" y="481840"/>
-                  </a:lnTo>
-                  <a:lnTo>
-                    <a:pt x="1212555" y="509960"/>
-                  </a:lnTo>
-                  <a:lnTo>
-                    <a:pt x="1289799" y="537549"/>
-                  </a:lnTo>
-                  <a:lnTo>
-                    <a:pt x="1367042" y="564615"/>
-                  </a:lnTo>
-                  <a:lnTo>
-                    <a:pt x="1444286" y="591169"/>
-                  </a:lnTo>
-                  <a:lnTo>
-                    <a:pt x="1521529" y="617220"/>
-                  </a:lnTo>
-                  <a:lnTo>
-                    <a:pt x="1598773" y="642778"/>
-                  </a:lnTo>
-                  <a:lnTo>
-                    <a:pt x="1676016" y="667852"/>
-                  </a:lnTo>
-                  <a:lnTo>
-                    <a:pt x="1753260" y="692452"/>
-                  </a:lnTo>
-                  <a:lnTo>
-                    <a:pt x="1830504" y="716586"/>
-                  </a:lnTo>
-                  <a:lnTo>
-                    <a:pt x="1907747" y="740264"/>
-                  </a:lnTo>
-                  <a:lnTo>
-                    <a:pt x="1984991" y="763493"/>
-                  </a:lnTo>
-                  <a:lnTo>
-                    <a:pt x="2062234" y="786282"/>
-                  </a:lnTo>
-                  <a:lnTo>
-                    <a:pt x="2139478" y="808641"/>
-                  </a:lnTo>
-                  <a:lnTo>
-                    <a:pt x="2216721" y="830576"/>
-                  </a:lnTo>
-                  <a:lnTo>
-                    <a:pt x="2293965" y="852095"/>
-                  </a:lnTo>
-                  <a:lnTo>
-                    <a:pt x="2371209" y="873208"/>
-                  </a:lnTo>
-                  <a:lnTo>
-                    <a:pt x="2448452" y="893921"/>
-                  </a:lnTo>
-                  <a:lnTo>
-                    <a:pt x="2525696" y="914242"/>
-                  </a:lnTo>
-                  <a:lnTo>
-                    <a:pt x="2602939" y="934178"/>
-                  </a:lnTo>
-                  <a:lnTo>
-                    <a:pt x="2680183" y="953737"/>
-                  </a:lnTo>
-                  <a:lnTo>
-                    <a:pt x="2757426" y="972925"/>
-                  </a:lnTo>
-                  <a:lnTo>
-                    <a:pt x="2834670" y="991751"/>
-                  </a:lnTo>
-                  <a:lnTo>
-                    <a:pt x="2911914" y="1010220"/>
-                  </a:lnTo>
-                  <a:lnTo>
-                    <a:pt x="2989157" y="1028340"/>
-                  </a:lnTo>
-                  <a:lnTo>
-                    <a:pt x="3066401" y="1046116"/>
-                  </a:lnTo>
-                  <a:lnTo>
-                    <a:pt x="3143644" y="1063556"/>
-                  </a:lnTo>
-                  <a:lnTo>
-                    <a:pt x="3220888" y="1080666"/>
-                  </a:lnTo>
-                  <a:lnTo>
-                    <a:pt x="3298131" y="1097453"/>
-                  </a:lnTo>
-                  <a:lnTo>
-                    <a:pt x="3375375" y="1113921"/>
-                  </a:lnTo>
-                  <a:lnTo>
-                    <a:pt x="3452619" y="1130078"/>
-                  </a:lnTo>
-                  <a:lnTo>
-                    <a:pt x="3529862" y="1145929"/>
-                  </a:lnTo>
-                  <a:lnTo>
-                    <a:pt x="3607106" y="1161480"/>
-                  </a:lnTo>
-                  <a:lnTo>
-                    <a:pt x="3684349" y="1176736"/>
-                  </a:lnTo>
-                  <a:lnTo>
-                    <a:pt x="3761593" y="1191704"/>
-                  </a:lnTo>
-                  <a:lnTo>
-                    <a:pt x="3838836" y="1206388"/>
-                  </a:lnTo>
-                  <a:lnTo>
-                    <a:pt x="3916080" y="1220795"/>
-                  </a:lnTo>
-                  <a:lnTo>
-                    <a:pt x="3993324" y="1234929"/>
-                  </a:lnTo>
-                  <a:lnTo>
-                    <a:pt x="4070567" y="1248795"/>
-                  </a:lnTo>
-                  <a:lnTo>
-                    <a:pt x="4147811" y="1262399"/>
-                  </a:lnTo>
-                  <a:lnTo>
-                    <a:pt x="4225054" y="1275745"/>
-                  </a:lnTo>
-                  <a:lnTo>
-                    <a:pt x="4302298" y="1288839"/>
-                  </a:lnTo>
-                  <a:lnTo>
-                    <a:pt x="4379541" y="1301685"/>
-                  </a:lnTo>
-                  <a:lnTo>
-                    <a:pt x="4456785" y="1314288"/>
-                  </a:lnTo>
-                  <a:lnTo>
-                    <a:pt x="4534029" y="1326652"/>
-                  </a:lnTo>
-                  <a:lnTo>
-                    <a:pt x="4611272" y="1338782"/>
-                  </a:lnTo>
-                  <a:lnTo>
-                    <a:pt x="4688516" y="1350683"/>
-                  </a:lnTo>
-                  <a:lnTo>
-                    <a:pt x="4765759" y="1362358"/>
-                  </a:lnTo>
-                  <a:lnTo>
-                    <a:pt x="4843003" y="1373813"/>
-                  </a:lnTo>
-                  <a:lnTo>
-                    <a:pt x="4920246" y="1385050"/>
-                  </a:lnTo>
-                  <a:lnTo>
-                    <a:pt x="4997490" y="1396075"/>
-                  </a:lnTo>
-                  <a:lnTo>
-                    <a:pt x="5074734" y="1406892"/>
-                  </a:lnTo>
-                  <a:lnTo>
-                    <a:pt x="5151977" y="1417503"/>
-                  </a:lnTo>
-                  <a:lnTo>
-                    <a:pt x="5229221" y="1427914"/>
-                  </a:lnTo>
-                  <a:lnTo>
-                    <a:pt x="5306464" y="1438127"/>
-                  </a:lnTo>
-                  <a:lnTo>
-                    <a:pt x="5383708" y="1448148"/>
-                  </a:lnTo>
-                  <a:lnTo>
-                    <a:pt x="5460951" y="1457978"/>
-                  </a:lnTo>
-                  <a:lnTo>
-                    <a:pt x="5538195" y="1467623"/>
-                  </a:lnTo>
-                  <a:lnTo>
-                    <a:pt x="5615439" y="1477085"/>
-                  </a:lnTo>
-                  <a:lnTo>
-                    <a:pt x="5692682" y="1486368"/>
-                  </a:lnTo>
-                  <a:lnTo>
-                    <a:pt x="5769926" y="1495475"/>
-                  </a:lnTo>
-                  <a:lnTo>
-                    <a:pt x="5847169" y="1504410"/>
-                  </a:lnTo>
-                  <a:lnTo>
-                    <a:pt x="5924413" y="1513175"/>
-                  </a:lnTo>
-                  <a:lnTo>
-                    <a:pt x="6001656" y="1521775"/>
-                  </a:lnTo>
-                  <a:lnTo>
-                    <a:pt x="6078900" y="1530212"/>
-                  </a:lnTo>
-                  <a:lnTo>
-                    <a:pt x="6156144" y="1538489"/>
-                  </a:lnTo>
-                  <a:lnTo>
-                    <a:pt x="6233387" y="1546610"/>
-                  </a:lnTo>
-                  <a:lnTo>
-                    <a:pt x="6310631" y="1554577"/>
-                  </a:lnTo>
-                  <a:lnTo>
-                    <a:pt x="6387874" y="1562393"/>
-                  </a:lnTo>
-                  <a:lnTo>
-                    <a:pt x="6465118" y="1570061"/>
-                  </a:lnTo>
-                  <a:lnTo>
-                    <a:pt x="6542361" y="1577584"/>
-                  </a:lnTo>
-                  <a:lnTo>
-                    <a:pt x="6619605" y="1584965"/>
-                  </a:lnTo>
-                  <a:lnTo>
-                    <a:pt x="6696849" y="1592206"/>
-                  </a:lnTo>
-                  <a:lnTo>
-                    <a:pt x="6774092" y="1599310"/>
-                  </a:lnTo>
-                  <a:lnTo>
-                    <a:pt x="6851336" y="1606279"/>
-                  </a:lnTo>
-                  <a:lnTo>
-                    <a:pt x="6928579" y="1613117"/>
-                  </a:lnTo>
-                  <a:lnTo>
-                    <a:pt x="7005823" y="1619825"/>
-                  </a:lnTo>
-                  <a:lnTo>
-                    <a:pt x="7083066" y="1626406"/>
-                  </a:lnTo>
-                  <a:lnTo>
-                    <a:pt x="7160310" y="1632863"/>
-                  </a:lnTo>
-                  <a:lnTo>
-                    <a:pt x="7237554" y="1639197"/>
-                  </a:lnTo>
-                  <a:lnTo>
-                    <a:pt x="7314797" y="1645412"/>
-                  </a:lnTo>
-                  <a:lnTo>
-                    <a:pt x="7392041" y="1651508"/>
+                    <a:pt x="53901" y="24928"/>
+                  </a:lnTo>
+                  <a:lnTo>
+                    <a:pt x="131145" y="59975"/>
+                  </a:lnTo>
+                  <a:lnTo>
+                    <a:pt x="208389" y="94358"/>
+                  </a:lnTo>
+                  <a:lnTo>
+                    <a:pt x="285632" y="128091"/>
+                  </a:lnTo>
+                  <a:lnTo>
+                    <a:pt x="362876" y="161185"/>
+                  </a:lnTo>
+                  <a:lnTo>
+                    <a:pt x="440119" y="193653"/>
+                  </a:lnTo>
+                  <a:lnTo>
+                    <a:pt x="517363" y="225506"/>
+                  </a:lnTo>
+                  <a:lnTo>
+                    <a:pt x="594606" y="256757"/>
+                  </a:lnTo>
+                  <a:lnTo>
+                    <a:pt x="671850" y="287415"/>
+                  </a:lnTo>
+                  <a:lnTo>
+                    <a:pt x="749094" y="317494"/>
+                  </a:lnTo>
+                  <a:lnTo>
+                    <a:pt x="826337" y="347003"/>
+                  </a:lnTo>
+                  <a:lnTo>
+                    <a:pt x="903581" y="375954"/>
+                  </a:lnTo>
+                  <a:lnTo>
+                    <a:pt x="980824" y="404357"/>
+                  </a:lnTo>
+                  <a:lnTo>
+                    <a:pt x="1058068" y="432222"/>
+                  </a:lnTo>
+                  <a:lnTo>
+                    <a:pt x="1135311" y="459560"/>
+                  </a:lnTo>
+                  <a:lnTo>
+                    <a:pt x="1212555" y="486380"/>
+                  </a:lnTo>
+                  <a:lnTo>
+                    <a:pt x="1289799" y="512693"/>
+                  </a:lnTo>
+                  <a:lnTo>
+                    <a:pt x="1367042" y="538507"/>
+                  </a:lnTo>
+                  <a:lnTo>
+                    <a:pt x="1444286" y="563833"/>
+                  </a:lnTo>
+                  <a:lnTo>
+                    <a:pt x="1521529" y="588680"/>
+                  </a:lnTo>
+                  <a:lnTo>
+                    <a:pt x="1598773" y="613056"/>
+                  </a:lnTo>
+                  <a:lnTo>
+                    <a:pt x="1676016" y="636971"/>
+                  </a:lnTo>
+                  <a:lnTo>
+                    <a:pt x="1753260" y="660433"/>
+                  </a:lnTo>
+                  <a:lnTo>
+                    <a:pt x="1830504" y="683452"/>
+                  </a:lnTo>
+                  <a:lnTo>
+                    <a:pt x="1907747" y="706034"/>
+                  </a:lnTo>
+                  <a:lnTo>
+                    <a:pt x="1984991" y="728189"/>
+                  </a:lnTo>
+                  <a:lnTo>
+                    <a:pt x="2062234" y="749925"/>
+                  </a:lnTo>
+                  <a:lnTo>
+                    <a:pt x="2139478" y="771249"/>
+                  </a:lnTo>
+                  <a:lnTo>
+                    <a:pt x="2216721" y="792170"/>
+                  </a:lnTo>
+                  <a:lnTo>
+                    <a:pt x="2293965" y="812695"/>
+                  </a:lnTo>
+                  <a:lnTo>
+                    <a:pt x="2371209" y="832831"/>
+                  </a:lnTo>
+                  <a:lnTo>
+                    <a:pt x="2448452" y="852586"/>
+                  </a:lnTo>
+                  <a:lnTo>
+                    <a:pt x="2525696" y="871967"/>
+                  </a:lnTo>
+                  <a:lnTo>
+                    <a:pt x="2602939" y="890982"/>
+                  </a:lnTo>
+                  <a:lnTo>
+                    <a:pt x="2680183" y="909636"/>
+                  </a:lnTo>
+                  <a:lnTo>
+                    <a:pt x="2757426" y="927938"/>
+                  </a:lnTo>
+                  <a:lnTo>
+                    <a:pt x="2834670" y="945893"/>
+                  </a:lnTo>
+                  <a:lnTo>
+                    <a:pt x="2911914" y="963508"/>
+                  </a:lnTo>
+                  <a:lnTo>
+                    <a:pt x="2989157" y="980790"/>
+                  </a:lnTo>
+                  <a:lnTo>
+                    <a:pt x="3066401" y="997744"/>
+                  </a:lnTo>
+                  <a:lnTo>
+                    <a:pt x="3143644" y="1014378"/>
+                  </a:lnTo>
+                  <a:lnTo>
+                    <a:pt x="3220888" y="1030697"/>
+                  </a:lnTo>
+                  <a:lnTo>
+                    <a:pt x="3298131" y="1046707"/>
+                  </a:lnTo>
+                  <a:lnTo>
+                    <a:pt x="3375375" y="1062414"/>
+                  </a:lnTo>
+                  <a:lnTo>
+                    <a:pt x="3452619" y="1077823"/>
+                  </a:lnTo>
+                  <a:lnTo>
+                    <a:pt x="3529862" y="1092941"/>
+                  </a:lnTo>
+                  <a:lnTo>
+                    <a:pt x="3607106" y="1107773"/>
+                  </a:lnTo>
+                  <a:lnTo>
+                    <a:pt x="3684349" y="1122324"/>
+                  </a:lnTo>
+                  <a:lnTo>
+                    <a:pt x="3761593" y="1136600"/>
+                  </a:lnTo>
+                  <a:lnTo>
+                    <a:pt x="3838836" y="1150605"/>
+                  </a:lnTo>
+                  <a:lnTo>
+                    <a:pt x="3916080" y="1164346"/>
+                  </a:lnTo>
+                  <a:lnTo>
+                    <a:pt x="3993324" y="1177826"/>
+                  </a:lnTo>
+                  <a:lnTo>
+                    <a:pt x="4070567" y="1191051"/>
+                  </a:lnTo>
+                  <a:lnTo>
+                    <a:pt x="4147811" y="1204026"/>
+                  </a:lnTo>
+                  <a:lnTo>
+                    <a:pt x="4225054" y="1216755"/>
+                  </a:lnTo>
+                  <a:lnTo>
+                    <a:pt x="4302298" y="1229244"/>
+                  </a:lnTo>
+                  <a:lnTo>
+                    <a:pt x="4379541" y="1241496"/>
+                  </a:lnTo>
+                  <a:lnTo>
+                    <a:pt x="4456785" y="1253516"/>
+                  </a:lnTo>
+                  <a:lnTo>
+                    <a:pt x="4534029" y="1265308"/>
+                  </a:lnTo>
+                  <a:lnTo>
+                    <a:pt x="4611272" y="1276878"/>
+                  </a:lnTo>
+                  <a:lnTo>
+                    <a:pt x="4688516" y="1288228"/>
+                  </a:lnTo>
+                  <a:lnTo>
+                    <a:pt x="4765759" y="1299363"/>
+                  </a:lnTo>
+                  <a:lnTo>
+                    <a:pt x="4843003" y="1310288"/>
+                  </a:lnTo>
+                  <a:lnTo>
+                    <a:pt x="4920246" y="1321006"/>
+                  </a:lnTo>
+                  <a:lnTo>
+                    <a:pt x="4997490" y="1331521"/>
+                  </a:lnTo>
+                  <a:lnTo>
+                    <a:pt x="5074734" y="1341837"/>
+                  </a:lnTo>
+                  <a:lnTo>
+                    <a:pt x="5151977" y="1351958"/>
+                  </a:lnTo>
+                  <a:lnTo>
+                    <a:pt x="5229221" y="1361887"/>
+                  </a:lnTo>
+                  <a:lnTo>
+                    <a:pt x="5306464" y="1371629"/>
+                  </a:lnTo>
+                  <a:lnTo>
+                    <a:pt x="5383708" y="1381186"/>
+                  </a:lnTo>
+                  <a:lnTo>
+                    <a:pt x="5460951" y="1390562"/>
+                  </a:lnTo>
+                  <a:lnTo>
+                    <a:pt x="5538195" y="1399760"/>
+                  </a:lnTo>
+                  <a:lnTo>
+                    <a:pt x="5615439" y="1408785"/>
+                  </a:lnTo>
+                  <a:lnTo>
+                    <a:pt x="5692682" y="1417638"/>
+                  </a:lnTo>
+                  <a:lnTo>
+                    <a:pt x="5769926" y="1426324"/>
+                  </a:lnTo>
+                  <a:lnTo>
+                    <a:pt x="5847169" y="1434846"/>
+                  </a:lnTo>
+                  <a:lnTo>
+                    <a:pt x="5924413" y="1443207"/>
+                  </a:lnTo>
+                  <a:lnTo>
+                    <a:pt x="6001656" y="1451409"/>
+                  </a:lnTo>
+                  <a:lnTo>
+                    <a:pt x="6078900" y="1459456"/>
+                  </a:lnTo>
+                  <a:lnTo>
+                    <a:pt x="6156144" y="1467350"/>
+                  </a:lnTo>
+                  <a:lnTo>
+                    <a:pt x="6233387" y="1475095"/>
+                  </a:lnTo>
+                  <a:lnTo>
+                    <a:pt x="6310631" y="1482694"/>
+                  </a:lnTo>
+                  <a:lnTo>
+                    <a:pt x="6387874" y="1490149"/>
+                  </a:lnTo>
+                  <a:lnTo>
+                    <a:pt x="6465118" y="1497462"/>
+                  </a:lnTo>
+                  <a:lnTo>
+                    <a:pt x="6542361" y="1504637"/>
+                  </a:lnTo>
+                  <a:lnTo>
+                    <a:pt x="6619605" y="1511677"/>
+                  </a:lnTo>
+                  <a:lnTo>
+                    <a:pt x="6696849" y="1518583"/>
+                  </a:lnTo>
+                  <a:lnTo>
+                    <a:pt x="6774092" y="1525358"/>
+                  </a:lnTo>
+                  <a:lnTo>
+                    <a:pt x="6851336" y="1532006"/>
+                  </a:lnTo>
+                  <a:lnTo>
+                    <a:pt x="6928579" y="1538527"/>
+                  </a:lnTo>
+                  <a:lnTo>
+                    <a:pt x="7005823" y="1544925"/>
+                  </a:lnTo>
+                  <a:lnTo>
+                    <a:pt x="7083066" y="1551202"/>
+                  </a:lnTo>
+                  <a:lnTo>
+                    <a:pt x="7160310" y="1557360"/>
+                  </a:lnTo>
+                  <a:lnTo>
+                    <a:pt x="7237554" y="1563401"/>
+                  </a:lnTo>
+                  <a:lnTo>
+                    <a:pt x="7314797" y="1569328"/>
+                  </a:lnTo>
+                  <a:lnTo>
+                    <a:pt x="7392041" y="1575143"/>
                   </a:lnTo>
                 </a:path>
               </a:pathLst>
@@ -4536,7 +4536,7 @@
           </p:nvSpPr>
           <p:spPr>
             <a:xfrm>
-              <a:off x="817517" y="4679530"/>
+              <a:off x="817517" y="4727786"/>
               <a:ext cx="7799693" cy="0"/>
             </a:xfrm>
             <a:custGeom>
@@ -4579,15 +4579,15 @@
           </p:nvSpPr>
           <p:spPr>
             <a:xfrm>
-              <a:off x="4117484" y="1896563"/>
-              <a:ext cx="0" cy="3826579"/>
+              <a:off x="4117484" y="2073503"/>
+              <a:ext cx="0" cy="3649639"/>
             </a:xfrm>
             <a:custGeom>
               <a:avLst/>
               <a:pathLst>
-                <a:path w="0" h="3826579">
+                <a:path w="0" h="3649639">
                   <a:moveTo>
-                    <a:pt x="0" y="3826579"/>
+                    <a:pt x="0" y="3649639"/>
                   </a:moveTo>
                   <a:lnTo>
                     <a:pt x="0" y="0"/>
@@ -4622,7 +4622,7 @@
           </p:nvSpPr>
           <p:spPr>
             <a:xfrm>
-              <a:off x="692708" y="5509156"/>
+              <a:off x="692708" y="5517199"/>
               <a:ext cx="62179" cy="80101"/>
             </a:xfrm>
             <a:prstGeom prst="rect">
@@ -4668,7 +4668,7 @@
           </p:nvSpPr>
           <p:spPr>
             <a:xfrm>
-              <a:off x="692708" y="4639479"/>
+              <a:off x="692708" y="4687735"/>
               <a:ext cx="62179" cy="80101"/>
             </a:xfrm>
             <a:prstGeom prst="rect">
@@ -4714,7 +4714,7 @@
           </p:nvSpPr>
           <p:spPr>
             <a:xfrm>
-              <a:off x="692708" y="3769802"/>
+              <a:off x="692708" y="3858272"/>
               <a:ext cx="62179" cy="80101"/>
             </a:xfrm>
             <a:prstGeom prst="rect">
@@ -4760,7 +4760,7 @@
           </p:nvSpPr>
           <p:spPr>
             <a:xfrm>
-              <a:off x="692708" y="2900125"/>
+              <a:off x="692708" y="3028808"/>
               <a:ext cx="62179" cy="80101"/>
             </a:xfrm>
             <a:prstGeom prst="rect">
@@ -4806,7 +4806,7 @@
           </p:nvSpPr>
           <p:spPr>
             <a:xfrm>
-              <a:off x="692708" y="2030448"/>
+              <a:off x="692708" y="2199345"/>
               <a:ext cx="62179" cy="80101"/>
             </a:xfrm>
             <a:prstGeom prst="rect">
@@ -5082,7 +5082,7 @@
           </p:nvSpPr>
           <p:spPr>
             <a:xfrm rot="-5400000">
-              <a:off x="68446" y="3759743"/>
+              <a:off x="68446" y="3848213"/>
               <a:ext cx="1016904" cy="100218"/>
             </a:xfrm>
             <a:prstGeom prst="rect">
@@ -5123,6 +5123,52 @@
         <p:sp>
           <p:nvSpPr>
             <p:cNvPr id="38" name="tx38"/>
+            <p:cNvSpPr/>
+            <p:nvPr/>
+          </p:nvSpPr>
+          <p:spPr>
+            <a:xfrm>
+              <a:off x="817517" y="1896563"/>
+              <a:ext cx="5626211" cy="82021"/>
+            </a:xfrm>
+            <a:prstGeom prst="rect">
+              <a:avLst/>
+            </a:prstGeom>
+            <a:noFill/>
+          </p:spPr>
+          <p:txBody>
+            <a:bodyPr lIns="0" rIns="0" tIns="0" bIns="0" anchorCtr="1" anchor="ctr" wrap="none"/>
+            <a:lstStyle/>
+            <a:p>
+              <a:pPr algn="l" marL="0" marR="0" indent="0">
+                <a:lnSpc>
+                  <a:spcPts val="900"/>
+                </a:lnSpc>
+                <a:spcBef>
+                  <a:spcPts val="0"/>
+                </a:spcBef>
+                <a:spcAft>
+                  <a:spcPts val="0"/>
+                </a:spcAft>
+              </a:pPr>
+              <a:r>
+                <a:rPr sz="900">
+                  <a:solidFill>
+                    <a:srgbClr val="404040">
+                      <a:alpha val="100000"/>
+                    </a:srgbClr>
+                  </a:solidFill>
+                  <a:latin typeface="Helvetica"/>
+                  <a:cs typeface="Helvetica"/>
+                </a:rPr>
+                <a:t>subHR per 0.1 ratio decline: 1.25 (0.98-1.58)  |  per IQR decline (Δ = 0.30): 1.91 (0.95-3.84)  |  IQR: [0.84, 1.14]</a:t>
+              </a:r>
+            </a:p>
+          </p:txBody>
+        </p:sp>
+        <p:sp>
+          <p:nvSpPr>
+            <p:cNvPr id="39" name="tx39"/>
             <p:cNvSpPr/>
             <p:nvPr/>
           </p:nvSpPr>

--- a/docs/pptx/auc3/jx-auc3-linsubhr-ratio-akikdigo.pptx
+++ b/docs/pptx/auc3/jx-auc3-linsubhr-ratio-akikdigo.pptx
@@ -5129,7 +5129,7 @@
           <p:spPr>
             <a:xfrm>
               <a:off x="817517" y="1896563"/>
-              <a:ext cx="5626211" cy="82021"/>
+              <a:ext cx="6169365" cy="82021"/>
             </a:xfrm>
             <a:prstGeom prst="rect">
               <a:avLst/>
@@ -5161,7 +5161,7 @@
                   <a:latin typeface="Helvetica"/>
                   <a:cs typeface="Helvetica"/>
                 </a:rPr>
-                <a:t>subHR per 0.1 ratio decline: 1.25 (0.98-1.58)  |  per IQR decline (Δ = 0.30): 1.91 (0.95-3.84)  |  IQR: [0.84, 1.14]</a:t>
+                <a:t>subHR per 0.1 ratio decline: 1.25 (0.98-1.58), p = 0.069  |  per IQR decline (Δ = 0.30): 1.91 (0.95-3.84)  |  IQR: [0.84, 1.14]</a:t>
               </a:r>
             </a:p>
           </p:txBody>

--- a/docs/pptx/auc3/jx-auc3-linsubhr-ratio-akikdigo.pptx
+++ b/docs/pptx/auc3/jx-auc3-linsubhr-ratio-akikdigo.pptx
@@ -5129,7 +5129,7 @@
           <p:spPr>
             <a:xfrm>
               <a:off x="817517" y="1896563"/>
-              <a:ext cx="6169365" cy="82021"/>
+              <a:ext cx="6833128" cy="82021"/>
             </a:xfrm>
             <a:prstGeom prst="rect">
               <a:avLst/>
@@ -5161,7 +5161,7 @@
                   <a:latin typeface="Helvetica"/>
                   <a:cs typeface="Helvetica"/>
                 </a:rPr>
-                <a:t>subHR per 0.1 ratio decline: 1.25 (0.98-1.58), p = 0.069  |  per IQR decline (Δ = 0.30): 1.91 (0.95-3.84)  |  IQR: [0.84, 1.14]</a:t>
+                <a:t>subHR per 0.1 ratio decline: 1.25 (0.98-1.58), p_Bonf = 0.415 (n = 6)  |  per IQR decline (Δ = 0.30): 1.91 (0.95-3.84)  |  IQR: [0.84, 1.14]</a:t>
               </a:r>
             </a:p>
           </p:txBody>

--- a/docs/pptx/auc3/jx-auc3-linsubhr-ratio-akikdigo.pptx
+++ b/docs/pptx/auc3/jx-auc3-linsubhr-ratio-akikdigo.pptx
@@ -2443,7 +2443,7 @@
           </p:nvSpPr>
           <p:spPr>
             <a:xfrm>
-              <a:off x="1615213" y="2073503"/>
+              <a:off x="1531834" y="2073503"/>
               <a:ext cx="0" cy="3649639"/>
             </a:xfrm>
             <a:custGeom>
@@ -2486,7 +2486,7 @@
           </p:nvSpPr>
           <p:spPr>
             <a:xfrm>
-              <a:off x="3387871" y="2073503"/>
+              <a:off x="3586410" y="2073503"/>
               <a:ext cx="0" cy="3649639"/>
             </a:xfrm>
             <a:custGeom>
@@ -2529,7 +2529,7 @@
           </p:nvSpPr>
           <p:spPr>
             <a:xfrm>
-              <a:off x="5160528" y="2073503"/>
+              <a:off x="5640985" y="2073503"/>
               <a:ext cx="0" cy="3649639"/>
             </a:xfrm>
             <a:custGeom>
@@ -2572,7 +2572,7 @@
           </p:nvSpPr>
           <p:spPr>
             <a:xfrm>
-              <a:off x="6933186" y="2073503"/>
+              <a:off x="7695561" y="2073503"/>
               <a:ext cx="0" cy="3649639"/>
             </a:xfrm>
             <a:custGeom>
@@ -2830,7 +2830,7 @@
           </p:nvSpPr>
           <p:spPr>
             <a:xfrm>
-              <a:off x="2501542" y="2073503"/>
+              <a:off x="2559122" y="2073503"/>
               <a:ext cx="0" cy="3649639"/>
             </a:xfrm>
             <a:custGeom>
@@ -2873,7 +2873,7 @@
           </p:nvSpPr>
           <p:spPr>
             <a:xfrm>
-              <a:off x="4274200" y="2073503"/>
+              <a:off x="4613698" y="2073503"/>
               <a:ext cx="0" cy="3649639"/>
             </a:xfrm>
             <a:custGeom>
@@ -2916,7 +2916,7 @@
           </p:nvSpPr>
           <p:spPr>
             <a:xfrm>
-              <a:off x="6046857" y="2073503"/>
+              <a:off x="6668273" y="2073503"/>
               <a:ext cx="0" cy="3649639"/>
             </a:xfrm>
             <a:custGeom>
@@ -2953,625 +2953,591 @@
         </p:sp>
         <p:sp>
           <p:nvSpPr>
-            <p:cNvPr id="20" name="pl20"/>
+            <p:cNvPr id="20" name="pg20"/>
             <p:cNvSpPr/>
             <p:nvPr/>
           </p:nvSpPr>
           <p:spPr>
             <a:xfrm>
-              <a:off x="7819515" y="2073503"/>
-              <a:ext cx="0" cy="3649639"/>
+              <a:off x="1172049" y="2073503"/>
+              <a:ext cx="7090630" cy="3382614"/>
             </a:xfrm>
             <a:custGeom>
               <a:avLst/>
               <a:pathLst>
-                <a:path w="0" h="3649639">
+                <a:path w="7090630" h="3382614">
                   <a:moveTo>
-                    <a:pt x="0" y="3649639"/>
+                    <a:pt x="708906" y="0"/>
                   </a:moveTo>
                   <a:lnTo>
-                    <a:pt x="0" y="0"/>
-                  </a:lnTo>
-                  <a:lnTo>
-                    <a:pt x="0" y="0"/>
-                  </a:lnTo>
-                </a:path>
-              </a:pathLst>
-            </a:custGeom>
-            <a:ln w="13550" cap="flat">
-              <a:solidFill>
-                <a:srgbClr val="EBEBEB">
-                  <a:alpha val="100000"/>
-                </a:srgbClr>
-              </a:solidFill>
-              <a:prstDash val="solid"/>
-              <a:round/>
-            </a:ln>
-          </p:spPr>
-          <p:txBody>
-            <a:bodyPr/>
-            <a:lstStyle/>
-            <a:p/>
-          </p:txBody>
-        </p:sp>
-        <p:sp>
-          <p:nvSpPr>
-            <p:cNvPr id="21" name="pg21"/>
-            <p:cNvSpPr/>
-            <p:nvPr/>
-          </p:nvSpPr>
-          <p:spPr>
-            <a:xfrm>
-              <a:off x="817517" y="2073503"/>
-              <a:ext cx="7392041" cy="3382614"/>
-            </a:xfrm>
-            <a:custGeom>
-              <a:avLst/>
-              <a:pathLst>
-                <a:path w="7392041" h="3382614">
-                  <a:moveTo>
-                    <a:pt x="509469" y="0"/>
-                  </a:moveTo>
-                  <a:lnTo>
-                    <a:pt x="517363" y="14366"/>
-                  </a:lnTo>
-                  <a:lnTo>
-                    <a:pt x="594606" y="149477"/>
-                  </a:lnTo>
-                  <a:lnTo>
-                    <a:pt x="671850" y="279327"/>
-                  </a:lnTo>
-                  <a:lnTo>
-                    <a:pt x="749094" y="404119"/>
-                  </a:lnTo>
-                  <a:lnTo>
-                    <a:pt x="826337" y="524052"/>
-                  </a:lnTo>
-                  <a:lnTo>
-                    <a:pt x="903581" y="639314"/>
-                  </a:lnTo>
-                  <a:lnTo>
-                    <a:pt x="980824" y="750087"/>
-                  </a:lnTo>
-                  <a:lnTo>
-                    <a:pt x="1058068" y="856546"/>
-                  </a:lnTo>
-                  <a:lnTo>
-                    <a:pt x="1135311" y="958859"/>
-                  </a:lnTo>
-                  <a:lnTo>
-                    <a:pt x="1212555" y="1057188"/>
-                  </a:lnTo>
-                  <a:lnTo>
-                    <a:pt x="1289799" y="1151688"/>
-                  </a:lnTo>
-                  <a:lnTo>
-                    <a:pt x="1367042" y="1242507"/>
-                  </a:lnTo>
-                  <a:lnTo>
-                    <a:pt x="1444286" y="1329790"/>
-                  </a:lnTo>
-                  <a:lnTo>
-                    <a:pt x="1521529" y="1413673"/>
-                  </a:lnTo>
-                  <a:lnTo>
-                    <a:pt x="1598773" y="1494290"/>
-                  </a:lnTo>
-                  <a:lnTo>
-                    <a:pt x="1676016" y="1571767"/>
-                  </a:lnTo>
-                  <a:lnTo>
-                    <a:pt x="1753260" y="1646227"/>
-                  </a:lnTo>
-                  <a:lnTo>
-                    <a:pt x="1830504" y="1717787"/>
-                  </a:lnTo>
-                  <a:lnTo>
-                    <a:pt x="1907747" y="1786560"/>
-                  </a:lnTo>
-                  <a:lnTo>
-                    <a:pt x="1984991" y="1852655"/>
-                  </a:lnTo>
-                  <a:lnTo>
-                    <a:pt x="2062234" y="1916176"/>
-                  </a:lnTo>
-                  <a:lnTo>
-                    <a:pt x="2139478" y="1977223"/>
-                  </a:lnTo>
-                  <a:lnTo>
-                    <a:pt x="2216721" y="2035893"/>
-                  </a:lnTo>
-                  <a:lnTo>
-                    <a:pt x="2293965" y="2092278"/>
-                  </a:lnTo>
-                  <a:lnTo>
-                    <a:pt x="2371209" y="2146467"/>
-                  </a:lnTo>
-                  <a:lnTo>
-                    <a:pt x="2448452" y="2198546"/>
-                  </a:lnTo>
-                  <a:lnTo>
-                    <a:pt x="2525696" y="2248597"/>
-                  </a:lnTo>
-                  <a:lnTo>
-                    <a:pt x="2602939" y="2296698"/>
-                  </a:lnTo>
-                  <a:lnTo>
-                    <a:pt x="2680183" y="2342927"/>
-                  </a:lnTo>
-                  <a:lnTo>
-                    <a:pt x="2757426" y="2387355"/>
-                  </a:lnTo>
-                  <a:lnTo>
-                    <a:pt x="2834670" y="2430052"/>
-                  </a:lnTo>
-                  <a:lnTo>
-                    <a:pt x="2911914" y="2471087"/>
-                  </a:lnTo>
-                  <a:lnTo>
-                    <a:pt x="2989157" y="2510524"/>
-                  </a:lnTo>
-                  <a:lnTo>
-                    <a:pt x="3066401" y="2548425"/>
-                  </a:lnTo>
-                  <a:lnTo>
-                    <a:pt x="3143644" y="2584850"/>
-                  </a:lnTo>
-                  <a:lnTo>
-                    <a:pt x="3220888" y="2619857"/>
-                  </a:lnTo>
-                  <a:lnTo>
-                    <a:pt x="3298131" y="2653500"/>
-                  </a:lnTo>
-                  <a:lnTo>
-                    <a:pt x="3375375" y="2653064"/>
-                  </a:lnTo>
-                  <a:lnTo>
-                    <a:pt x="3452619" y="2651813"/>
-                  </a:lnTo>
-                  <a:lnTo>
-                    <a:pt x="3529862" y="2650561"/>
-                  </a:lnTo>
-                  <a:lnTo>
-                    <a:pt x="3607106" y="2649307"/>
-                  </a:lnTo>
-                  <a:lnTo>
-                    <a:pt x="3684349" y="2648051"/>
-                  </a:lnTo>
-                  <a:lnTo>
-                    <a:pt x="3761593" y="2646793"/>
-                  </a:lnTo>
-                  <a:lnTo>
-                    <a:pt x="3838836" y="2645533"/>
-                  </a:lnTo>
-                  <a:lnTo>
-                    <a:pt x="3916080" y="2644271"/>
-                  </a:lnTo>
-                  <a:lnTo>
-                    <a:pt x="3993324" y="2643007"/>
-                  </a:lnTo>
-                  <a:lnTo>
-                    <a:pt x="4070567" y="2641742"/>
-                  </a:lnTo>
-                  <a:lnTo>
-                    <a:pt x="4147811" y="2640474"/>
-                  </a:lnTo>
-                  <a:lnTo>
-                    <a:pt x="4225054" y="2639205"/>
-                  </a:lnTo>
-                  <a:lnTo>
-                    <a:pt x="4302298" y="2637933"/>
-                  </a:lnTo>
-                  <a:lnTo>
-                    <a:pt x="4379541" y="2636660"/>
-                  </a:lnTo>
-                  <a:lnTo>
-                    <a:pt x="4456785" y="2635385"/>
-                  </a:lnTo>
-                  <a:lnTo>
-                    <a:pt x="4534029" y="2634108"/>
-                  </a:lnTo>
-                  <a:lnTo>
-                    <a:pt x="4611272" y="2632829"/>
-                  </a:lnTo>
-                  <a:lnTo>
-                    <a:pt x="4688516" y="2631548"/>
-                  </a:lnTo>
-                  <a:lnTo>
-                    <a:pt x="4765759" y="2630265"/>
-                  </a:lnTo>
-                  <a:lnTo>
-                    <a:pt x="4843003" y="2628980"/>
-                  </a:lnTo>
-                  <a:lnTo>
-                    <a:pt x="4920246" y="2627693"/>
-                  </a:lnTo>
-                  <a:lnTo>
-                    <a:pt x="4997490" y="2626405"/>
-                  </a:lnTo>
-                  <a:lnTo>
-                    <a:pt x="5074734" y="2625114"/>
-                  </a:lnTo>
-                  <a:lnTo>
-                    <a:pt x="5151977" y="2623821"/>
-                  </a:lnTo>
-                  <a:lnTo>
-                    <a:pt x="5229221" y="2622527"/>
-                  </a:lnTo>
-                  <a:lnTo>
-                    <a:pt x="5306464" y="2621230"/>
-                  </a:lnTo>
-                  <a:lnTo>
-                    <a:pt x="5383708" y="2619932"/>
-                  </a:lnTo>
-                  <a:lnTo>
-                    <a:pt x="5460951" y="2618632"/>
-                  </a:lnTo>
-                  <a:lnTo>
-                    <a:pt x="5538195" y="2617329"/>
-                  </a:lnTo>
-                  <a:lnTo>
-                    <a:pt x="5615439" y="2616025"/>
-                  </a:lnTo>
-                  <a:lnTo>
-                    <a:pt x="5692682" y="2614719"/>
-                  </a:lnTo>
-                  <a:lnTo>
-                    <a:pt x="5769926" y="2613411"/>
-                  </a:lnTo>
-                  <a:lnTo>
-                    <a:pt x="5847169" y="2612100"/>
-                  </a:lnTo>
-                  <a:lnTo>
-                    <a:pt x="5924413" y="2610788"/>
-                  </a:lnTo>
-                  <a:lnTo>
-                    <a:pt x="6001656" y="2609474"/>
-                  </a:lnTo>
-                  <a:lnTo>
-                    <a:pt x="6078900" y="2608158"/>
-                  </a:lnTo>
-                  <a:lnTo>
-                    <a:pt x="6156144" y="2606840"/>
-                  </a:lnTo>
-                  <a:lnTo>
-                    <a:pt x="6233387" y="2605520"/>
-                  </a:lnTo>
-                  <a:lnTo>
-                    <a:pt x="6310631" y="2604198"/>
-                  </a:lnTo>
-                  <a:lnTo>
-                    <a:pt x="6387874" y="2602874"/>
-                  </a:lnTo>
-                  <a:lnTo>
-                    <a:pt x="6465118" y="2601548"/>
-                  </a:lnTo>
-                  <a:lnTo>
-                    <a:pt x="6542361" y="2600220"/>
-                  </a:lnTo>
-                  <a:lnTo>
-                    <a:pt x="6619605" y="2598890"/>
-                  </a:lnTo>
-                  <a:lnTo>
-                    <a:pt x="6696849" y="2597558"/>
-                  </a:lnTo>
-                  <a:lnTo>
-                    <a:pt x="6774092" y="2596224"/>
-                  </a:lnTo>
-                  <a:lnTo>
-                    <a:pt x="6851336" y="2594888"/>
-                  </a:lnTo>
-                  <a:lnTo>
-                    <a:pt x="6928579" y="2593550"/>
-                  </a:lnTo>
-                  <a:lnTo>
-                    <a:pt x="7005823" y="2592209"/>
-                  </a:lnTo>
-                  <a:lnTo>
-                    <a:pt x="7083066" y="2590867"/>
-                  </a:lnTo>
-                  <a:lnTo>
-                    <a:pt x="7160310" y="2589523"/>
-                  </a:lnTo>
-                  <a:lnTo>
-                    <a:pt x="7237554" y="2588177"/>
-                  </a:lnTo>
-                  <a:lnTo>
-                    <a:pt x="7314797" y="2586829"/>
-                  </a:lnTo>
-                  <a:lnTo>
-                    <a:pt x="7392041" y="2585479"/>
-                  </a:lnTo>
-                  <a:lnTo>
-                    <a:pt x="7392041" y="3382614"/>
-                  </a:lnTo>
-                  <a:lnTo>
-                    <a:pt x="7314797" y="3378516"/>
-                  </a:lnTo>
-                  <a:lnTo>
-                    <a:pt x="7237554" y="3374252"/>
-                  </a:lnTo>
-                  <a:lnTo>
-                    <a:pt x="7160310" y="3369815"/>
-                  </a:lnTo>
-                  <a:lnTo>
-                    <a:pt x="7083066" y="3365198"/>
-                  </a:lnTo>
-                  <a:lnTo>
-                    <a:pt x="7005823" y="3360394"/>
-                  </a:lnTo>
-                  <a:lnTo>
-                    <a:pt x="6928579" y="3355396"/>
-                  </a:lnTo>
-                  <a:lnTo>
-                    <a:pt x="6851336" y="3350195"/>
-                  </a:lnTo>
-                  <a:lnTo>
-                    <a:pt x="6774092" y="3344783"/>
-                  </a:lnTo>
-                  <a:lnTo>
-                    <a:pt x="6696849" y="3339152"/>
-                  </a:lnTo>
-                  <a:lnTo>
-                    <a:pt x="6619605" y="3333292"/>
-                  </a:lnTo>
-                  <a:lnTo>
-                    <a:pt x="6542361" y="3327196"/>
-                  </a:lnTo>
-                  <a:lnTo>
-                    <a:pt x="6465118" y="3320852"/>
-                  </a:lnTo>
-                  <a:lnTo>
-                    <a:pt x="6387874" y="3314251"/>
-                  </a:lnTo>
-                  <a:lnTo>
-                    <a:pt x="6310631" y="3307383"/>
-                  </a:lnTo>
-                  <a:lnTo>
-                    <a:pt x="6233387" y="3300236"/>
-                  </a:lnTo>
-                  <a:lnTo>
-                    <a:pt x="6156144" y="3292800"/>
-                  </a:lnTo>
-                  <a:lnTo>
-                    <a:pt x="6078900" y="3285063"/>
-                  </a:lnTo>
-                  <a:lnTo>
-                    <a:pt x="6001656" y="3277012"/>
-                  </a:lnTo>
-                  <a:lnTo>
-                    <a:pt x="5924413" y="3268634"/>
-                  </a:lnTo>
-                  <a:lnTo>
-                    <a:pt x="5847169" y="3259918"/>
-                  </a:lnTo>
-                  <a:lnTo>
-                    <a:pt x="5769926" y="3250848"/>
-                  </a:lnTo>
-                  <a:lnTo>
-                    <a:pt x="5692682" y="3241410"/>
-                  </a:lnTo>
-                  <a:lnTo>
-                    <a:pt x="5615439" y="3231590"/>
-                  </a:lnTo>
-                  <a:lnTo>
-                    <a:pt x="5538195" y="3221372"/>
-                  </a:lnTo>
-                  <a:lnTo>
-                    <a:pt x="5460951" y="3210740"/>
-                  </a:lnTo>
-                  <a:lnTo>
-                    <a:pt x="5383708" y="3199678"/>
-                  </a:lnTo>
-                  <a:lnTo>
-                    <a:pt x="5306464" y="3188167"/>
-                  </a:lnTo>
-                  <a:lnTo>
-                    <a:pt x="5229221" y="3176189"/>
-                  </a:lnTo>
-                  <a:lnTo>
-                    <a:pt x="5151977" y="3163726"/>
-                  </a:lnTo>
-                  <a:lnTo>
-                    <a:pt x="5074734" y="3150759"/>
-                  </a:lnTo>
-                  <a:lnTo>
-                    <a:pt x="4997490" y="3137265"/>
-                  </a:lnTo>
-                  <a:lnTo>
-                    <a:pt x="4920246" y="3123225"/>
-                  </a:lnTo>
-                  <a:lnTo>
-                    <a:pt x="4843003" y="3108616"/>
-                  </a:lnTo>
-                  <a:lnTo>
-                    <a:pt x="4765759" y="3093415"/>
-                  </a:lnTo>
-                  <a:lnTo>
-                    <a:pt x="4688516" y="3077598"/>
-                  </a:lnTo>
-                  <a:lnTo>
-                    <a:pt x="4611272" y="3061140"/>
-                  </a:lnTo>
-                  <a:lnTo>
-                    <a:pt x="4534029" y="3044015"/>
-                  </a:lnTo>
-                  <a:lnTo>
-                    <a:pt x="4456785" y="3026197"/>
-                  </a:lnTo>
-                  <a:lnTo>
-                    <a:pt x="4379541" y="3007656"/>
-                  </a:lnTo>
-                  <a:lnTo>
-                    <a:pt x="4302298" y="2988364"/>
-                  </a:lnTo>
-                  <a:lnTo>
-                    <a:pt x="4225054" y="2968290"/>
-                  </a:lnTo>
-                  <a:lnTo>
-                    <a:pt x="4147811" y="2947402"/>
-                  </a:lnTo>
-                  <a:lnTo>
-                    <a:pt x="4070567" y="2925669"/>
-                  </a:lnTo>
-                  <a:lnTo>
-                    <a:pt x="3993324" y="2903054"/>
-                  </a:lnTo>
-                  <a:lnTo>
-                    <a:pt x="3916080" y="2879524"/>
-                  </a:lnTo>
-                  <a:lnTo>
-                    <a:pt x="3838836" y="2855039"/>
-                  </a:lnTo>
-                  <a:lnTo>
-                    <a:pt x="3761593" y="2829563"/>
-                  </a:lnTo>
-                  <a:lnTo>
-                    <a:pt x="3684349" y="2803054"/>
-                  </a:lnTo>
-                  <a:lnTo>
-                    <a:pt x="3607106" y="2775471"/>
-                  </a:lnTo>
-                  <a:lnTo>
-                    <a:pt x="3529862" y="2746770"/>
-                  </a:lnTo>
-                  <a:lnTo>
-                    <a:pt x="3452619" y="2716907"/>
-                  </a:lnTo>
-                  <a:lnTo>
-                    <a:pt x="3375375" y="2685833"/>
-                  </a:lnTo>
-                  <a:lnTo>
-                    <a:pt x="3298131" y="2654312"/>
-                  </a:lnTo>
-                  <a:lnTo>
-                    <a:pt x="3220888" y="2655559"/>
-                  </a:lnTo>
-                  <a:lnTo>
-                    <a:pt x="3143644" y="2656804"/>
-                  </a:lnTo>
-                  <a:lnTo>
-                    <a:pt x="3066401" y="2658047"/>
-                  </a:lnTo>
-                  <a:lnTo>
-                    <a:pt x="2989157" y="2659288"/>
-                  </a:lnTo>
-                  <a:lnTo>
-                    <a:pt x="2911914" y="2660527"/>
-                  </a:lnTo>
-                  <a:lnTo>
-                    <a:pt x="2834670" y="2661765"/>
-                  </a:lnTo>
-                  <a:lnTo>
-                    <a:pt x="2757426" y="2663000"/>
-                  </a:lnTo>
-                  <a:lnTo>
-                    <a:pt x="2680183" y="2664234"/>
-                  </a:lnTo>
-                  <a:lnTo>
-                    <a:pt x="2602939" y="2665466"/>
-                  </a:lnTo>
-                  <a:lnTo>
-                    <a:pt x="2525696" y="2666696"/>
-                  </a:lnTo>
-                  <a:lnTo>
-                    <a:pt x="2448452" y="2667924"/>
-                  </a:lnTo>
-                  <a:lnTo>
-                    <a:pt x="2371209" y="2669150"/>
-                  </a:lnTo>
-                  <a:lnTo>
-                    <a:pt x="2293965" y="2670375"/>
-                  </a:lnTo>
-                  <a:lnTo>
-                    <a:pt x="2216721" y="2671597"/>
-                  </a:lnTo>
-                  <a:lnTo>
-                    <a:pt x="2139478" y="2672818"/>
-                  </a:lnTo>
-                  <a:lnTo>
-                    <a:pt x="2062234" y="2674037"/>
-                  </a:lnTo>
-                  <a:lnTo>
-                    <a:pt x="1984991" y="2675254"/>
-                  </a:lnTo>
-                  <a:lnTo>
-                    <a:pt x="1907747" y="2676469"/>
-                  </a:lnTo>
-                  <a:lnTo>
-                    <a:pt x="1830504" y="2677683"/>
-                  </a:lnTo>
-                  <a:lnTo>
-                    <a:pt x="1753260" y="2678894"/>
-                  </a:lnTo>
-                  <a:lnTo>
-                    <a:pt x="1676016" y="2680104"/>
-                  </a:lnTo>
-                  <a:lnTo>
-                    <a:pt x="1598773" y="2681312"/>
-                  </a:lnTo>
-                  <a:lnTo>
-                    <a:pt x="1521529" y="2682518"/>
-                  </a:lnTo>
-                  <a:lnTo>
-                    <a:pt x="1444286" y="2683722"/>
-                  </a:lnTo>
-                  <a:lnTo>
-                    <a:pt x="1367042" y="2684925"/>
-                  </a:lnTo>
-                  <a:lnTo>
-                    <a:pt x="1289799" y="2686126"/>
-                  </a:lnTo>
-                  <a:lnTo>
-                    <a:pt x="1212555" y="2687325"/>
-                  </a:lnTo>
-                  <a:lnTo>
-                    <a:pt x="1135311" y="2688522"/>
-                  </a:lnTo>
-                  <a:lnTo>
-                    <a:pt x="1058068" y="2689717"/>
-                  </a:lnTo>
-                  <a:lnTo>
-                    <a:pt x="980824" y="2690910"/>
-                  </a:lnTo>
-                  <a:lnTo>
-                    <a:pt x="903581" y="2692102"/>
-                  </a:lnTo>
-                  <a:lnTo>
-                    <a:pt x="826337" y="2693292"/>
-                  </a:lnTo>
-                  <a:lnTo>
-                    <a:pt x="749094" y="2694480"/>
-                  </a:lnTo>
-                  <a:lnTo>
-                    <a:pt x="671850" y="2695667"/>
-                  </a:lnTo>
-                  <a:lnTo>
-                    <a:pt x="594606" y="2696851"/>
-                  </a:lnTo>
-                  <a:lnTo>
-                    <a:pt x="517363" y="2698034"/>
-                  </a:lnTo>
-                  <a:lnTo>
-                    <a:pt x="440119" y="2699215"/>
-                  </a:lnTo>
-                  <a:lnTo>
-                    <a:pt x="362876" y="2700394"/>
-                  </a:lnTo>
-                  <a:lnTo>
-                    <a:pt x="285632" y="2701572"/>
-                  </a:lnTo>
-                  <a:lnTo>
-                    <a:pt x="208389" y="2702747"/>
-                  </a:lnTo>
-                  <a:lnTo>
-                    <a:pt x="131145" y="2703921"/>
-                  </a:lnTo>
-                  <a:lnTo>
-                    <a:pt x="53901" y="2705093"/>
-                  </a:lnTo>
-                  <a:lnTo>
-                    <a:pt x="0" y="2705910"/>
+                    <a:pt x="716225" y="14366"/>
+                  </a:lnTo>
+                  <a:lnTo>
+                    <a:pt x="787847" y="149477"/>
+                  </a:lnTo>
+                  <a:lnTo>
+                    <a:pt x="859470" y="279327"/>
+                  </a:lnTo>
+                  <a:lnTo>
+                    <a:pt x="931092" y="404119"/>
+                  </a:lnTo>
+                  <a:lnTo>
+                    <a:pt x="1002715" y="524052"/>
+                  </a:lnTo>
+                  <a:lnTo>
+                    <a:pt x="1074337" y="639314"/>
+                  </a:lnTo>
+                  <a:lnTo>
+                    <a:pt x="1145960" y="750087"/>
+                  </a:lnTo>
+                  <a:lnTo>
+                    <a:pt x="1217582" y="856546"/>
+                  </a:lnTo>
+                  <a:lnTo>
+                    <a:pt x="1289205" y="958859"/>
+                  </a:lnTo>
+                  <a:lnTo>
+                    <a:pt x="1360827" y="1057188"/>
+                  </a:lnTo>
+                  <a:lnTo>
+                    <a:pt x="1432450" y="1151688"/>
+                  </a:lnTo>
+                  <a:lnTo>
+                    <a:pt x="1504073" y="1242507"/>
+                  </a:lnTo>
+                  <a:lnTo>
+                    <a:pt x="1575695" y="1329790"/>
+                  </a:lnTo>
+                  <a:lnTo>
+                    <a:pt x="1647318" y="1413673"/>
+                  </a:lnTo>
+                  <a:lnTo>
+                    <a:pt x="1718940" y="1494290"/>
+                  </a:lnTo>
+                  <a:lnTo>
+                    <a:pt x="1790563" y="1571767"/>
+                  </a:lnTo>
+                  <a:lnTo>
+                    <a:pt x="1862185" y="1646227"/>
+                  </a:lnTo>
+                  <a:lnTo>
+                    <a:pt x="1933808" y="1717787"/>
+                  </a:lnTo>
+                  <a:lnTo>
+                    <a:pt x="2005430" y="1786560"/>
+                  </a:lnTo>
+                  <a:lnTo>
+                    <a:pt x="2077053" y="1852655"/>
+                  </a:lnTo>
+                  <a:lnTo>
+                    <a:pt x="2148675" y="1916176"/>
+                  </a:lnTo>
+                  <a:lnTo>
+                    <a:pt x="2220298" y="1977223"/>
+                  </a:lnTo>
+                  <a:lnTo>
+                    <a:pt x="2291920" y="2035893"/>
+                  </a:lnTo>
+                  <a:lnTo>
+                    <a:pt x="2363543" y="2092278"/>
+                  </a:lnTo>
+                  <a:lnTo>
+                    <a:pt x="2435165" y="2146467"/>
+                  </a:lnTo>
+                  <a:lnTo>
+                    <a:pt x="2506788" y="2198546"/>
+                  </a:lnTo>
+                  <a:lnTo>
+                    <a:pt x="2578410" y="2248597"/>
+                  </a:lnTo>
+                  <a:lnTo>
+                    <a:pt x="2650033" y="2296698"/>
+                  </a:lnTo>
+                  <a:lnTo>
+                    <a:pt x="2721655" y="2342927"/>
+                  </a:lnTo>
+                  <a:lnTo>
+                    <a:pt x="2793278" y="2387355"/>
+                  </a:lnTo>
+                  <a:lnTo>
+                    <a:pt x="2864901" y="2430052"/>
+                  </a:lnTo>
+                  <a:lnTo>
+                    <a:pt x="2936523" y="2471087"/>
+                  </a:lnTo>
+                  <a:lnTo>
+                    <a:pt x="3008146" y="2510524"/>
+                  </a:lnTo>
+                  <a:lnTo>
+                    <a:pt x="3079768" y="2548425"/>
+                  </a:lnTo>
+                  <a:lnTo>
+                    <a:pt x="3151391" y="2584850"/>
+                  </a:lnTo>
+                  <a:lnTo>
+                    <a:pt x="3223013" y="2619857"/>
+                  </a:lnTo>
+                  <a:lnTo>
+                    <a:pt x="3294636" y="2653500"/>
+                  </a:lnTo>
+                  <a:lnTo>
+                    <a:pt x="3366258" y="2653064"/>
+                  </a:lnTo>
+                  <a:lnTo>
+                    <a:pt x="3437881" y="2651813"/>
+                  </a:lnTo>
+                  <a:lnTo>
+                    <a:pt x="3509503" y="2650561"/>
+                  </a:lnTo>
+                  <a:lnTo>
+                    <a:pt x="3581126" y="2649307"/>
+                  </a:lnTo>
+                  <a:lnTo>
+                    <a:pt x="3652748" y="2648051"/>
+                  </a:lnTo>
+                  <a:lnTo>
+                    <a:pt x="3724371" y="2646793"/>
+                  </a:lnTo>
+                  <a:lnTo>
+                    <a:pt x="3795993" y="2645533"/>
+                  </a:lnTo>
+                  <a:lnTo>
+                    <a:pt x="3867616" y="2644271"/>
+                  </a:lnTo>
+                  <a:lnTo>
+                    <a:pt x="3939238" y="2643007"/>
+                  </a:lnTo>
+                  <a:lnTo>
+                    <a:pt x="4010861" y="2641742"/>
+                  </a:lnTo>
+                  <a:lnTo>
+                    <a:pt x="4082483" y="2640474"/>
+                  </a:lnTo>
+                  <a:lnTo>
+                    <a:pt x="4154106" y="2639205"/>
+                  </a:lnTo>
+                  <a:lnTo>
+                    <a:pt x="4225729" y="2637933"/>
+                  </a:lnTo>
+                  <a:lnTo>
+                    <a:pt x="4297351" y="2636660"/>
+                  </a:lnTo>
+                  <a:lnTo>
+                    <a:pt x="4368974" y="2635385"/>
+                  </a:lnTo>
+                  <a:lnTo>
+                    <a:pt x="4440596" y="2634108"/>
+                  </a:lnTo>
+                  <a:lnTo>
+                    <a:pt x="4512219" y="2632829"/>
+                  </a:lnTo>
+                  <a:lnTo>
+                    <a:pt x="4583841" y="2631548"/>
+                  </a:lnTo>
+                  <a:lnTo>
+                    <a:pt x="4655464" y="2630265"/>
+                  </a:lnTo>
+                  <a:lnTo>
+                    <a:pt x="4727086" y="2628980"/>
+                  </a:lnTo>
+                  <a:lnTo>
+                    <a:pt x="4798709" y="2627693"/>
+                  </a:lnTo>
+                  <a:lnTo>
+                    <a:pt x="4870331" y="2626405"/>
+                  </a:lnTo>
+                  <a:lnTo>
+                    <a:pt x="4941954" y="2625114"/>
+                  </a:lnTo>
+                  <a:lnTo>
+                    <a:pt x="5013576" y="2623821"/>
+                  </a:lnTo>
+                  <a:lnTo>
+                    <a:pt x="5085199" y="2622527"/>
+                  </a:lnTo>
+                  <a:lnTo>
+                    <a:pt x="5156821" y="2621230"/>
+                  </a:lnTo>
+                  <a:lnTo>
+                    <a:pt x="5228444" y="2619932"/>
+                  </a:lnTo>
+                  <a:lnTo>
+                    <a:pt x="5300066" y="2618632"/>
+                  </a:lnTo>
+                  <a:lnTo>
+                    <a:pt x="5371689" y="2617329"/>
+                  </a:lnTo>
+                  <a:lnTo>
+                    <a:pt x="5443311" y="2616025"/>
+                  </a:lnTo>
+                  <a:lnTo>
+                    <a:pt x="5514934" y="2614719"/>
+                  </a:lnTo>
+                  <a:lnTo>
+                    <a:pt x="5586557" y="2613411"/>
+                  </a:lnTo>
+                  <a:lnTo>
+                    <a:pt x="5658179" y="2612100"/>
+                  </a:lnTo>
+                  <a:lnTo>
+                    <a:pt x="5729802" y="2610788"/>
+                  </a:lnTo>
+                  <a:lnTo>
+                    <a:pt x="5801424" y="2609474"/>
+                  </a:lnTo>
+                  <a:lnTo>
+                    <a:pt x="5873047" y="2608158"/>
+                  </a:lnTo>
+                  <a:lnTo>
+                    <a:pt x="5944669" y="2606840"/>
+                  </a:lnTo>
+                  <a:lnTo>
+                    <a:pt x="6016292" y="2605520"/>
+                  </a:lnTo>
+                  <a:lnTo>
+                    <a:pt x="6087914" y="2604198"/>
+                  </a:lnTo>
+                  <a:lnTo>
+                    <a:pt x="6159537" y="2602874"/>
+                  </a:lnTo>
+                  <a:lnTo>
+                    <a:pt x="6231159" y="2601548"/>
+                  </a:lnTo>
+                  <a:lnTo>
+                    <a:pt x="6302782" y="2600220"/>
+                  </a:lnTo>
+                  <a:lnTo>
+                    <a:pt x="6374404" y="2598890"/>
+                  </a:lnTo>
+                  <a:lnTo>
+                    <a:pt x="6446027" y="2597558"/>
+                  </a:lnTo>
+                  <a:lnTo>
+                    <a:pt x="6517649" y="2596224"/>
+                  </a:lnTo>
+                  <a:lnTo>
+                    <a:pt x="6589272" y="2594888"/>
+                  </a:lnTo>
+                  <a:lnTo>
+                    <a:pt x="6660894" y="2593550"/>
+                  </a:lnTo>
+                  <a:lnTo>
+                    <a:pt x="6732517" y="2592209"/>
+                  </a:lnTo>
+                  <a:lnTo>
+                    <a:pt x="6804139" y="2590867"/>
+                  </a:lnTo>
+                  <a:lnTo>
+                    <a:pt x="6875762" y="2589523"/>
+                  </a:lnTo>
+                  <a:lnTo>
+                    <a:pt x="6947385" y="2588177"/>
+                  </a:lnTo>
+                  <a:lnTo>
+                    <a:pt x="7019007" y="2586829"/>
+                  </a:lnTo>
+                  <a:lnTo>
+                    <a:pt x="7090630" y="2585479"/>
+                  </a:lnTo>
+                  <a:lnTo>
+                    <a:pt x="7090630" y="3382614"/>
+                  </a:lnTo>
+                  <a:lnTo>
+                    <a:pt x="7019007" y="3378516"/>
+                  </a:lnTo>
+                  <a:lnTo>
+                    <a:pt x="6947385" y="3374252"/>
+                  </a:lnTo>
+                  <a:lnTo>
+                    <a:pt x="6875762" y="3369815"/>
+                  </a:lnTo>
+                  <a:lnTo>
+                    <a:pt x="6804139" y="3365198"/>
+                  </a:lnTo>
+                  <a:lnTo>
+                    <a:pt x="6732517" y="3360394"/>
+                  </a:lnTo>
+                  <a:lnTo>
+                    <a:pt x="6660894" y="3355396"/>
+                  </a:lnTo>
+                  <a:lnTo>
+                    <a:pt x="6589272" y="3350195"/>
+                  </a:lnTo>
+                  <a:lnTo>
+                    <a:pt x="6517649" y="3344783"/>
+                  </a:lnTo>
+                  <a:lnTo>
+                    <a:pt x="6446027" y="3339152"/>
+                  </a:lnTo>
+                  <a:lnTo>
+                    <a:pt x="6374404" y="3333292"/>
+                  </a:lnTo>
+                  <a:lnTo>
+                    <a:pt x="6302782" y="3327196"/>
+                  </a:lnTo>
+                  <a:lnTo>
+                    <a:pt x="6231159" y="3320852"/>
+                  </a:lnTo>
+                  <a:lnTo>
+                    <a:pt x="6159537" y="3314251"/>
+                  </a:lnTo>
+                  <a:lnTo>
+                    <a:pt x="6087914" y="3307383"/>
+                  </a:lnTo>
+                  <a:lnTo>
+                    <a:pt x="6016292" y="3300236"/>
+                  </a:lnTo>
+                  <a:lnTo>
+                    <a:pt x="5944669" y="3292800"/>
+                  </a:lnTo>
+                  <a:lnTo>
+                    <a:pt x="5873047" y="3285063"/>
+                  </a:lnTo>
+                  <a:lnTo>
+                    <a:pt x="5801424" y="3277012"/>
+                  </a:lnTo>
+                  <a:lnTo>
+                    <a:pt x="5729802" y="3268634"/>
+                  </a:lnTo>
+                  <a:lnTo>
+                    <a:pt x="5658179" y="3259918"/>
+                  </a:lnTo>
+                  <a:lnTo>
+                    <a:pt x="5586557" y="3250848"/>
+                  </a:lnTo>
+                  <a:lnTo>
+                    <a:pt x="5514934" y="3241410"/>
+                  </a:lnTo>
+                  <a:lnTo>
+                    <a:pt x="5443311" y="3231590"/>
+                  </a:lnTo>
+                  <a:lnTo>
+                    <a:pt x="5371689" y="3221372"/>
+                  </a:lnTo>
+                  <a:lnTo>
+                    <a:pt x="5300066" y="3210740"/>
+                  </a:lnTo>
+                  <a:lnTo>
+                    <a:pt x="5228444" y="3199678"/>
+                  </a:lnTo>
+                  <a:lnTo>
+                    <a:pt x="5156821" y="3188167"/>
+                  </a:lnTo>
+                  <a:lnTo>
+                    <a:pt x="5085199" y="3176189"/>
+                  </a:lnTo>
+                  <a:lnTo>
+                    <a:pt x="5013576" y="3163726"/>
+                  </a:lnTo>
+                  <a:lnTo>
+                    <a:pt x="4941954" y="3150759"/>
+                  </a:lnTo>
+                  <a:lnTo>
+                    <a:pt x="4870331" y="3137265"/>
+                  </a:lnTo>
+                  <a:lnTo>
+                    <a:pt x="4798709" y="3123225"/>
+                  </a:lnTo>
+                  <a:lnTo>
+                    <a:pt x="4727086" y="3108616"/>
+                  </a:lnTo>
+                  <a:lnTo>
+                    <a:pt x="4655464" y="3093415"/>
+                  </a:lnTo>
+                  <a:lnTo>
+                    <a:pt x="4583841" y="3077598"/>
+                  </a:lnTo>
+                  <a:lnTo>
+                    <a:pt x="4512219" y="3061140"/>
+                  </a:lnTo>
+                  <a:lnTo>
+                    <a:pt x="4440596" y="3044015"/>
+                  </a:lnTo>
+                  <a:lnTo>
+                    <a:pt x="4368974" y="3026197"/>
+                  </a:lnTo>
+                  <a:lnTo>
+                    <a:pt x="4297351" y="3007656"/>
+                  </a:lnTo>
+                  <a:lnTo>
+                    <a:pt x="4225729" y="2988364"/>
+                  </a:lnTo>
+                  <a:lnTo>
+                    <a:pt x="4154106" y="2968290"/>
+                  </a:lnTo>
+                  <a:lnTo>
+                    <a:pt x="4082483" y="2947402"/>
+                  </a:lnTo>
+                  <a:lnTo>
+                    <a:pt x="4010861" y="2925669"/>
+                  </a:lnTo>
+                  <a:lnTo>
+                    <a:pt x="3939238" y="2903054"/>
+                  </a:lnTo>
+                  <a:lnTo>
+                    <a:pt x="3867616" y="2879524"/>
+                  </a:lnTo>
+                  <a:lnTo>
+                    <a:pt x="3795993" y="2855039"/>
+                  </a:lnTo>
+                  <a:lnTo>
+                    <a:pt x="3724371" y="2829563"/>
+                  </a:lnTo>
+                  <a:lnTo>
+                    <a:pt x="3652748" y="2803054"/>
+                  </a:lnTo>
+                  <a:lnTo>
+                    <a:pt x="3581126" y="2775471"/>
+                  </a:lnTo>
+                  <a:lnTo>
+                    <a:pt x="3509503" y="2746770"/>
+                  </a:lnTo>
+                  <a:lnTo>
+                    <a:pt x="3437881" y="2716907"/>
+                  </a:lnTo>
+                  <a:lnTo>
+                    <a:pt x="3366258" y="2685833"/>
+                  </a:lnTo>
+                  <a:lnTo>
+                    <a:pt x="3294636" y="2654312"/>
+                  </a:lnTo>
+                  <a:lnTo>
+                    <a:pt x="3223013" y="2655559"/>
+                  </a:lnTo>
+                  <a:lnTo>
+                    <a:pt x="3151391" y="2656804"/>
+                  </a:lnTo>
+                  <a:lnTo>
+                    <a:pt x="3079768" y="2658047"/>
+                  </a:lnTo>
+                  <a:lnTo>
+                    <a:pt x="3008146" y="2659288"/>
+                  </a:lnTo>
+                  <a:lnTo>
+                    <a:pt x="2936523" y="2660527"/>
+                  </a:lnTo>
+                  <a:lnTo>
+                    <a:pt x="2864901" y="2661765"/>
+                  </a:lnTo>
+                  <a:lnTo>
+                    <a:pt x="2793278" y="2663000"/>
+                  </a:lnTo>
+                  <a:lnTo>
+                    <a:pt x="2721655" y="2664234"/>
+                  </a:lnTo>
+                  <a:lnTo>
+                    <a:pt x="2650033" y="2665466"/>
+                  </a:lnTo>
+                  <a:lnTo>
+                    <a:pt x="2578410" y="2666696"/>
+                  </a:lnTo>
+                  <a:lnTo>
+                    <a:pt x="2506788" y="2667924"/>
+                  </a:lnTo>
+                  <a:lnTo>
+                    <a:pt x="2435165" y="2669150"/>
+                  </a:lnTo>
+                  <a:lnTo>
+                    <a:pt x="2363543" y="2670375"/>
+                  </a:lnTo>
+                  <a:lnTo>
+                    <a:pt x="2291920" y="2671597"/>
+                  </a:lnTo>
+                  <a:lnTo>
+                    <a:pt x="2220298" y="2672818"/>
+                  </a:lnTo>
+                  <a:lnTo>
+                    <a:pt x="2148675" y="2674037"/>
+                  </a:lnTo>
+                  <a:lnTo>
+                    <a:pt x="2077053" y="2675254"/>
+                  </a:lnTo>
+                  <a:lnTo>
+                    <a:pt x="2005430" y="2676469"/>
+                  </a:lnTo>
+                  <a:lnTo>
+                    <a:pt x="1933808" y="2677683"/>
+                  </a:lnTo>
+                  <a:lnTo>
+                    <a:pt x="1862185" y="2678894"/>
+                  </a:lnTo>
+                  <a:lnTo>
+                    <a:pt x="1790563" y="2680104"/>
+                  </a:lnTo>
+                  <a:lnTo>
+                    <a:pt x="1718940" y="2681312"/>
+                  </a:lnTo>
+                  <a:lnTo>
+                    <a:pt x="1647318" y="2682518"/>
+                  </a:lnTo>
+                  <a:lnTo>
+                    <a:pt x="1575695" y="2683722"/>
+                  </a:lnTo>
+                  <a:lnTo>
+                    <a:pt x="1504073" y="2684925"/>
+                  </a:lnTo>
+                  <a:lnTo>
+                    <a:pt x="1432450" y="2686126"/>
+                  </a:lnTo>
+                  <a:lnTo>
+                    <a:pt x="1360827" y="2687325"/>
+                  </a:lnTo>
+                  <a:lnTo>
+                    <a:pt x="1289205" y="2688522"/>
+                  </a:lnTo>
+                  <a:lnTo>
+                    <a:pt x="1217582" y="2689717"/>
+                  </a:lnTo>
+                  <a:lnTo>
+                    <a:pt x="1145960" y="2690910"/>
+                  </a:lnTo>
+                  <a:lnTo>
+                    <a:pt x="1074337" y="2692102"/>
+                  </a:lnTo>
+                  <a:lnTo>
+                    <a:pt x="1002715" y="2693292"/>
+                  </a:lnTo>
+                  <a:lnTo>
+                    <a:pt x="931092" y="2694480"/>
+                  </a:lnTo>
+                  <a:lnTo>
+                    <a:pt x="859470" y="2695667"/>
+                  </a:lnTo>
+                  <a:lnTo>
+                    <a:pt x="787847" y="2696851"/>
+                  </a:lnTo>
+                  <a:lnTo>
+                    <a:pt x="716225" y="2698034"/>
+                  </a:lnTo>
+                  <a:lnTo>
+                    <a:pt x="644602" y="2699215"/>
+                  </a:lnTo>
+                  <a:lnTo>
+                    <a:pt x="572980" y="2700394"/>
+                  </a:lnTo>
+                  <a:lnTo>
+                    <a:pt x="501357" y="2701572"/>
+                  </a:lnTo>
+                  <a:lnTo>
+                    <a:pt x="429735" y="2702747"/>
+                  </a:lnTo>
+                  <a:lnTo>
+                    <a:pt x="358112" y="2703921"/>
+                  </a:lnTo>
+                  <a:lnTo>
+                    <a:pt x="286490" y="2705093"/>
+                  </a:lnTo>
+                  <a:lnTo>
+                    <a:pt x="214867" y="2706264"/>
+                  </a:lnTo>
+                  <a:lnTo>
+                    <a:pt x="143245" y="2707432"/>
+                  </a:lnTo>
+                  <a:lnTo>
+                    <a:pt x="71622" y="2708599"/>
+                  </a:lnTo>
+                  <a:lnTo>
+                    <a:pt x="0" y="2709765"/>
                   </a:lnTo>
                   <a:close/>
                 </a:path>
@@ -3591,291 +3557,616 @@
         </p:sp>
         <p:sp>
           <p:nvSpPr>
+            <p:cNvPr id="21" name="pl21"/>
+            <p:cNvSpPr/>
+            <p:nvPr/>
+          </p:nvSpPr>
+          <p:spPr>
+            <a:xfrm>
+              <a:off x="1880955" y="2073503"/>
+              <a:ext cx="6381723" cy="2653500"/>
+            </a:xfrm>
+            <a:custGeom>
+              <a:avLst/>
+              <a:pathLst>
+                <a:path w="6381723" h="2653500">
+                  <a:moveTo>
+                    <a:pt x="0" y="0"/>
+                  </a:moveTo>
+                  <a:lnTo>
+                    <a:pt x="7319" y="14366"/>
+                  </a:lnTo>
+                  <a:lnTo>
+                    <a:pt x="78941" y="149477"/>
+                  </a:lnTo>
+                  <a:lnTo>
+                    <a:pt x="150564" y="279327"/>
+                  </a:lnTo>
+                  <a:lnTo>
+                    <a:pt x="222186" y="404119"/>
+                  </a:lnTo>
+                  <a:lnTo>
+                    <a:pt x="293809" y="524052"/>
+                  </a:lnTo>
+                  <a:lnTo>
+                    <a:pt x="365431" y="639314"/>
+                  </a:lnTo>
+                  <a:lnTo>
+                    <a:pt x="437054" y="750087"/>
+                  </a:lnTo>
+                  <a:lnTo>
+                    <a:pt x="508676" y="856546"/>
+                  </a:lnTo>
+                  <a:lnTo>
+                    <a:pt x="580299" y="958859"/>
+                  </a:lnTo>
+                  <a:lnTo>
+                    <a:pt x="651921" y="1057188"/>
+                  </a:lnTo>
+                  <a:lnTo>
+                    <a:pt x="723544" y="1151688"/>
+                  </a:lnTo>
+                  <a:lnTo>
+                    <a:pt x="795166" y="1242507"/>
+                  </a:lnTo>
+                  <a:lnTo>
+                    <a:pt x="866789" y="1329790"/>
+                  </a:lnTo>
+                  <a:lnTo>
+                    <a:pt x="938411" y="1413673"/>
+                  </a:lnTo>
+                  <a:lnTo>
+                    <a:pt x="1010034" y="1494290"/>
+                  </a:lnTo>
+                  <a:lnTo>
+                    <a:pt x="1081657" y="1571767"/>
+                  </a:lnTo>
+                  <a:lnTo>
+                    <a:pt x="1153279" y="1646227"/>
+                  </a:lnTo>
+                  <a:lnTo>
+                    <a:pt x="1224902" y="1717787"/>
+                  </a:lnTo>
+                  <a:lnTo>
+                    <a:pt x="1296524" y="1786560"/>
+                  </a:lnTo>
+                  <a:lnTo>
+                    <a:pt x="1368147" y="1852655"/>
+                  </a:lnTo>
+                  <a:lnTo>
+                    <a:pt x="1439769" y="1916176"/>
+                  </a:lnTo>
+                  <a:lnTo>
+                    <a:pt x="1511392" y="1977223"/>
+                  </a:lnTo>
+                  <a:lnTo>
+                    <a:pt x="1583014" y="2035893"/>
+                  </a:lnTo>
+                  <a:lnTo>
+                    <a:pt x="1654637" y="2092278"/>
+                  </a:lnTo>
+                  <a:lnTo>
+                    <a:pt x="1726259" y="2146467"/>
+                  </a:lnTo>
+                  <a:lnTo>
+                    <a:pt x="1797882" y="2198546"/>
+                  </a:lnTo>
+                  <a:lnTo>
+                    <a:pt x="1869504" y="2248597"/>
+                  </a:lnTo>
+                  <a:lnTo>
+                    <a:pt x="1941127" y="2296698"/>
+                  </a:lnTo>
+                  <a:lnTo>
+                    <a:pt x="2012749" y="2342927"/>
+                  </a:lnTo>
+                  <a:lnTo>
+                    <a:pt x="2084372" y="2387355"/>
+                  </a:lnTo>
+                  <a:lnTo>
+                    <a:pt x="2155994" y="2430052"/>
+                  </a:lnTo>
+                  <a:lnTo>
+                    <a:pt x="2227617" y="2471087"/>
+                  </a:lnTo>
+                  <a:lnTo>
+                    <a:pt x="2299239" y="2510524"/>
+                  </a:lnTo>
+                  <a:lnTo>
+                    <a:pt x="2370862" y="2548425"/>
+                  </a:lnTo>
+                  <a:lnTo>
+                    <a:pt x="2442485" y="2584850"/>
+                  </a:lnTo>
+                  <a:lnTo>
+                    <a:pt x="2514107" y="2619857"/>
+                  </a:lnTo>
+                  <a:lnTo>
+                    <a:pt x="2585730" y="2653500"/>
+                  </a:lnTo>
+                  <a:lnTo>
+                    <a:pt x="2657352" y="2653064"/>
+                  </a:lnTo>
+                  <a:lnTo>
+                    <a:pt x="2728975" y="2651813"/>
+                  </a:lnTo>
+                  <a:lnTo>
+                    <a:pt x="2800597" y="2650561"/>
+                  </a:lnTo>
+                  <a:lnTo>
+                    <a:pt x="2872220" y="2649307"/>
+                  </a:lnTo>
+                  <a:lnTo>
+                    <a:pt x="2943842" y="2648051"/>
+                  </a:lnTo>
+                  <a:lnTo>
+                    <a:pt x="3015465" y="2646793"/>
+                  </a:lnTo>
+                  <a:lnTo>
+                    <a:pt x="3087087" y="2645533"/>
+                  </a:lnTo>
+                  <a:lnTo>
+                    <a:pt x="3158710" y="2644271"/>
+                  </a:lnTo>
+                  <a:lnTo>
+                    <a:pt x="3230332" y="2643007"/>
+                  </a:lnTo>
+                  <a:lnTo>
+                    <a:pt x="3301955" y="2641742"/>
+                  </a:lnTo>
+                  <a:lnTo>
+                    <a:pt x="3373577" y="2640474"/>
+                  </a:lnTo>
+                  <a:lnTo>
+                    <a:pt x="3445200" y="2639205"/>
+                  </a:lnTo>
+                  <a:lnTo>
+                    <a:pt x="3516822" y="2637933"/>
+                  </a:lnTo>
+                  <a:lnTo>
+                    <a:pt x="3588445" y="2636660"/>
+                  </a:lnTo>
+                  <a:lnTo>
+                    <a:pt x="3660067" y="2635385"/>
+                  </a:lnTo>
+                  <a:lnTo>
+                    <a:pt x="3731690" y="2634108"/>
+                  </a:lnTo>
+                  <a:lnTo>
+                    <a:pt x="3803313" y="2632829"/>
+                  </a:lnTo>
+                  <a:lnTo>
+                    <a:pt x="3874935" y="2631548"/>
+                  </a:lnTo>
+                  <a:lnTo>
+                    <a:pt x="3946558" y="2630265"/>
+                  </a:lnTo>
+                  <a:lnTo>
+                    <a:pt x="4018180" y="2628980"/>
+                  </a:lnTo>
+                  <a:lnTo>
+                    <a:pt x="4089803" y="2627693"/>
+                  </a:lnTo>
+                  <a:lnTo>
+                    <a:pt x="4161425" y="2626405"/>
+                  </a:lnTo>
+                  <a:lnTo>
+                    <a:pt x="4233048" y="2625114"/>
+                  </a:lnTo>
+                  <a:lnTo>
+                    <a:pt x="4304670" y="2623821"/>
+                  </a:lnTo>
+                  <a:lnTo>
+                    <a:pt x="4376293" y="2622527"/>
+                  </a:lnTo>
+                  <a:lnTo>
+                    <a:pt x="4447915" y="2621230"/>
+                  </a:lnTo>
+                  <a:lnTo>
+                    <a:pt x="4519538" y="2619932"/>
+                  </a:lnTo>
+                  <a:lnTo>
+                    <a:pt x="4591160" y="2618632"/>
+                  </a:lnTo>
+                  <a:lnTo>
+                    <a:pt x="4662783" y="2617329"/>
+                  </a:lnTo>
+                  <a:lnTo>
+                    <a:pt x="4734405" y="2616025"/>
+                  </a:lnTo>
+                  <a:lnTo>
+                    <a:pt x="4806028" y="2614719"/>
+                  </a:lnTo>
+                  <a:lnTo>
+                    <a:pt x="4877650" y="2613411"/>
+                  </a:lnTo>
+                  <a:lnTo>
+                    <a:pt x="4949273" y="2612100"/>
+                  </a:lnTo>
+                  <a:lnTo>
+                    <a:pt x="5020895" y="2610788"/>
+                  </a:lnTo>
+                  <a:lnTo>
+                    <a:pt x="5092518" y="2609474"/>
+                  </a:lnTo>
+                  <a:lnTo>
+                    <a:pt x="5164141" y="2608158"/>
+                  </a:lnTo>
+                  <a:lnTo>
+                    <a:pt x="5235763" y="2606840"/>
+                  </a:lnTo>
+                  <a:lnTo>
+                    <a:pt x="5307386" y="2605520"/>
+                  </a:lnTo>
+                  <a:lnTo>
+                    <a:pt x="5379008" y="2604198"/>
+                  </a:lnTo>
+                  <a:lnTo>
+                    <a:pt x="5450631" y="2602874"/>
+                  </a:lnTo>
+                  <a:lnTo>
+                    <a:pt x="5522253" y="2601548"/>
+                  </a:lnTo>
+                  <a:lnTo>
+                    <a:pt x="5593876" y="2600220"/>
+                  </a:lnTo>
+                  <a:lnTo>
+                    <a:pt x="5665498" y="2598890"/>
+                  </a:lnTo>
+                  <a:lnTo>
+                    <a:pt x="5737121" y="2597558"/>
+                  </a:lnTo>
+                  <a:lnTo>
+                    <a:pt x="5808743" y="2596224"/>
+                  </a:lnTo>
+                  <a:lnTo>
+                    <a:pt x="5880366" y="2594888"/>
+                  </a:lnTo>
+                  <a:lnTo>
+                    <a:pt x="5951988" y="2593550"/>
+                  </a:lnTo>
+                  <a:lnTo>
+                    <a:pt x="6023611" y="2592209"/>
+                  </a:lnTo>
+                  <a:lnTo>
+                    <a:pt x="6095233" y="2590867"/>
+                  </a:lnTo>
+                  <a:lnTo>
+                    <a:pt x="6166856" y="2589523"/>
+                  </a:lnTo>
+                  <a:lnTo>
+                    <a:pt x="6238478" y="2588177"/>
+                  </a:lnTo>
+                  <a:lnTo>
+                    <a:pt x="6310101" y="2586829"/>
+                  </a:lnTo>
+                  <a:lnTo>
+                    <a:pt x="6381723" y="2585479"/>
+                  </a:lnTo>
+                </a:path>
+              </a:pathLst>
+            </a:custGeom>
+          </p:spPr>
+          <p:txBody>
+            <a:bodyPr/>
+            <a:lstStyle/>
+            <a:p/>
+          </p:txBody>
+        </p:sp>
+        <p:sp>
+          <p:nvSpPr>
             <p:cNvPr id="22" name="pl22"/>
             <p:cNvSpPr/>
             <p:nvPr/>
           </p:nvSpPr>
           <p:spPr>
             <a:xfrm>
-              <a:off x="1326987" y="2073503"/>
-              <a:ext cx="6882571" cy="2653500"/>
+              <a:off x="1172049" y="4727816"/>
+              <a:ext cx="7090630" cy="728301"/>
             </a:xfrm>
             <a:custGeom>
               <a:avLst/>
               <a:pathLst>
-                <a:path w="6882571" h="2653500">
+                <a:path w="7090630" h="728301">
                   <a:moveTo>
-                    <a:pt x="0" y="0"/>
+                    <a:pt x="7090630" y="728301"/>
                   </a:moveTo>
                   <a:lnTo>
-                    <a:pt x="7893" y="14366"/>
-                  </a:lnTo>
-                  <a:lnTo>
-                    <a:pt x="85137" y="149477"/>
-                  </a:lnTo>
-                  <a:lnTo>
-                    <a:pt x="162380" y="279327"/>
-                  </a:lnTo>
-                  <a:lnTo>
-                    <a:pt x="239624" y="404119"/>
-                  </a:lnTo>
-                  <a:lnTo>
-                    <a:pt x="316867" y="524052"/>
-                  </a:lnTo>
-                  <a:lnTo>
-                    <a:pt x="394111" y="639314"/>
-                  </a:lnTo>
-                  <a:lnTo>
-                    <a:pt x="471355" y="750087"/>
-                  </a:lnTo>
-                  <a:lnTo>
-                    <a:pt x="548598" y="856546"/>
-                  </a:lnTo>
-                  <a:lnTo>
-                    <a:pt x="625842" y="958859"/>
-                  </a:lnTo>
-                  <a:lnTo>
-                    <a:pt x="703085" y="1057188"/>
-                  </a:lnTo>
-                  <a:lnTo>
-                    <a:pt x="780329" y="1151688"/>
-                  </a:lnTo>
-                  <a:lnTo>
-                    <a:pt x="857572" y="1242507"/>
-                  </a:lnTo>
-                  <a:lnTo>
-                    <a:pt x="934816" y="1329790"/>
-                  </a:lnTo>
-                  <a:lnTo>
-                    <a:pt x="1012060" y="1413673"/>
-                  </a:lnTo>
-                  <a:lnTo>
-                    <a:pt x="1089303" y="1494290"/>
-                  </a:lnTo>
-                  <a:lnTo>
-                    <a:pt x="1166547" y="1571767"/>
-                  </a:lnTo>
-                  <a:lnTo>
-                    <a:pt x="1243790" y="1646227"/>
-                  </a:lnTo>
-                  <a:lnTo>
-                    <a:pt x="1321034" y="1717787"/>
-                  </a:lnTo>
-                  <a:lnTo>
-                    <a:pt x="1398277" y="1786560"/>
-                  </a:lnTo>
-                  <a:lnTo>
-                    <a:pt x="1475521" y="1852655"/>
-                  </a:lnTo>
-                  <a:lnTo>
-                    <a:pt x="1552765" y="1916176"/>
-                  </a:lnTo>
-                  <a:lnTo>
-                    <a:pt x="1630008" y="1977223"/>
-                  </a:lnTo>
-                  <a:lnTo>
-                    <a:pt x="1707252" y="2035893"/>
-                  </a:lnTo>
-                  <a:lnTo>
-                    <a:pt x="1784495" y="2092278"/>
-                  </a:lnTo>
-                  <a:lnTo>
-                    <a:pt x="1861739" y="2146467"/>
-                  </a:lnTo>
-                  <a:lnTo>
-                    <a:pt x="1938982" y="2198546"/>
-                  </a:lnTo>
-                  <a:lnTo>
-                    <a:pt x="2016226" y="2248597"/>
-                  </a:lnTo>
-                  <a:lnTo>
-                    <a:pt x="2093470" y="2296698"/>
-                  </a:lnTo>
-                  <a:lnTo>
-                    <a:pt x="2170713" y="2342927"/>
-                  </a:lnTo>
-                  <a:lnTo>
-                    <a:pt x="2247957" y="2387355"/>
-                  </a:lnTo>
-                  <a:lnTo>
-                    <a:pt x="2325200" y="2430052"/>
-                  </a:lnTo>
-                  <a:lnTo>
-                    <a:pt x="2402444" y="2471087"/>
-                  </a:lnTo>
-                  <a:lnTo>
-                    <a:pt x="2479687" y="2510524"/>
-                  </a:lnTo>
-                  <a:lnTo>
-                    <a:pt x="2556931" y="2548425"/>
-                  </a:lnTo>
-                  <a:lnTo>
-                    <a:pt x="2634175" y="2584850"/>
-                  </a:lnTo>
-                  <a:lnTo>
-                    <a:pt x="2711418" y="2619857"/>
-                  </a:lnTo>
-                  <a:lnTo>
-                    <a:pt x="2788662" y="2653500"/>
-                  </a:lnTo>
-                  <a:lnTo>
-                    <a:pt x="2865905" y="2653064"/>
-                  </a:lnTo>
-                  <a:lnTo>
-                    <a:pt x="2943149" y="2651813"/>
-                  </a:lnTo>
-                  <a:lnTo>
-                    <a:pt x="3020392" y="2650561"/>
-                  </a:lnTo>
-                  <a:lnTo>
-                    <a:pt x="3097636" y="2649307"/>
-                  </a:lnTo>
-                  <a:lnTo>
-                    <a:pt x="3174880" y="2648051"/>
-                  </a:lnTo>
-                  <a:lnTo>
-                    <a:pt x="3252123" y="2646793"/>
-                  </a:lnTo>
-                  <a:lnTo>
-                    <a:pt x="3329367" y="2645533"/>
-                  </a:lnTo>
-                  <a:lnTo>
-                    <a:pt x="3406610" y="2644271"/>
-                  </a:lnTo>
-                  <a:lnTo>
-                    <a:pt x="3483854" y="2643007"/>
-                  </a:lnTo>
-                  <a:lnTo>
-                    <a:pt x="3561097" y="2641742"/>
-                  </a:lnTo>
-                  <a:lnTo>
-                    <a:pt x="3638341" y="2640474"/>
-                  </a:lnTo>
-                  <a:lnTo>
-                    <a:pt x="3715585" y="2639205"/>
-                  </a:lnTo>
-                  <a:lnTo>
-                    <a:pt x="3792828" y="2637933"/>
-                  </a:lnTo>
-                  <a:lnTo>
-                    <a:pt x="3870072" y="2636660"/>
-                  </a:lnTo>
-                  <a:lnTo>
-                    <a:pt x="3947315" y="2635385"/>
-                  </a:lnTo>
-                  <a:lnTo>
-                    <a:pt x="4024559" y="2634108"/>
-                  </a:lnTo>
-                  <a:lnTo>
-                    <a:pt x="4101802" y="2632829"/>
-                  </a:lnTo>
-                  <a:lnTo>
-                    <a:pt x="4179046" y="2631548"/>
-                  </a:lnTo>
-                  <a:lnTo>
-                    <a:pt x="4256290" y="2630265"/>
-                  </a:lnTo>
-                  <a:lnTo>
-                    <a:pt x="4333533" y="2628980"/>
-                  </a:lnTo>
-                  <a:lnTo>
-                    <a:pt x="4410777" y="2627693"/>
-                  </a:lnTo>
-                  <a:lnTo>
-                    <a:pt x="4488020" y="2626405"/>
-                  </a:lnTo>
-                  <a:lnTo>
-                    <a:pt x="4565264" y="2625114"/>
-                  </a:lnTo>
-                  <a:lnTo>
-                    <a:pt x="4642507" y="2623821"/>
-                  </a:lnTo>
-                  <a:lnTo>
-                    <a:pt x="4719751" y="2622527"/>
-                  </a:lnTo>
-                  <a:lnTo>
-                    <a:pt x="4796995" y="2621230"/>
-                  </a:lnTo>
-                  <a:lnTo>
-                    <a:pt x="4874238" y="2619932"/>
-                  </a:lnTo>
-                  <a:lnTo>
-                    <a:pt x="4951482" y="2618632"/>
-                  </a:lnTo>
-                  <a:lnTo>
-                    <a:pt x="5028725" y="2617329"/>
-                  </a:lnTo>
-                  <a:lnTo>
-                    <a:pt x="5105969" y="2616025"/>
-                  </a:lnTo>
-                  <a:lnTo>
-                    <a:pt x="5183212" y="2614719"/>
-                  </a:lnTo>
-                  <a:lnTo>
-                    <a:pt x="5260456" y="2613411"/>
-                  </a:lnTo>
-                  <a:lnTo>
-                    <a:pt x="5337700" y="2612100"/>
-                  </a:lnTo>
-                  <a:lnTo>
-                    <a:pt x="5414943" y="2610788"/>
-                  </a:lnTo>
-                  <a:lnTo>
-                    <a:pt x="5492187" y="2609474"/>
-                  </a:lnTo>
-                  <a:lnTo>
-                    <a:pt x="5569430" y="2608158"/>
-                  </a:lnTo>
-                  <a:lnTo>
-                    <a:pt x="5646674" y="2606840"/>
-                  </a:lnTo>
-                  <a:lnTo>
-                    <a:pt x="5723917" y="2605520"/>
-                  </a:lnTo>
-                  <a:lnTo>
-                    <a:pt x="5801161" y="2604198"/>
-                  </a:lnTo>
-                  <a:lnTo>
-                    <a:pt x="5878405" y="2602874"/>
-                  </a:lnTo>
-                  <a:lnTo>
-                    <a:pt x="5955648" y="2601548"/>
-                  </a:lnTo>
-                  <a:lnTo>
-                    <a:pt x="6032892" y="2600220"/>
-                  </a:lnTo>
-                  <a:lnTo>
-                    <a:pt x="6110135" y="2598890"/>
-                  </a:lnTo>
-                  <a:lnTo>
-                    <a:pt x="6187379" y="2597558"/>
-                  </a:lnTo>
-                  <a:lnTo>
-                    <a:pt x="6264622" y="2596224"/>
-                  </a:lnTo>
-                  <a:lnTo>
-                    <a:pt x="6341866" y="2594888"/>
-                  </a:lnTo>
-                  <a:lnTo>
-                    <a:pt x="6419110" y="2593550"/>
-                  </a:lnTo>
-                  <a:lnTo>
-                    <a:pt x="6496353" y="2592209"/>
-                  </a:lnTo>
-                  <a:lnTo>
-                    <a:pt x="6573597" y="2590867"/>
-                  </a:lnTo>
-                  <a:lnTo>
-                    <a:pt x="6650840" y="2589523"/>
-                  </a:lnTo>
-                  <a:lnTo>
-                    <a:pt x="6728084" y="2588177"/>
-                  </a:lnTo>
-                  <a:lnTo>
-                    <a:pt x="6805327" y="2586829"/>
-                  </a:lnTo>
-                  <a:lnTo>
-                    <a:pt x="6882571" y="2585479"/>
+                    <a:pt x="7019007" y="724203"/>
+                  </a:lnTo>
+                  <a:lnTo>
+                    <a:pt x="6947385" y="719939"/>
+                  </a:lnTo>
+                  <a:lnTo>
+                    <a:pt x="6875762" y="715502"/>
+                  </a:lnTo>
+                  <a:lnTo>
+                    <a:pt x="6804139" y="710885"/>
+                  </a:lnTo>
+                  <a:lnTo>
+                    <a:pt x="6732517" y="706081"/>
+                  </a:lnTo>
+                  <a:lnTo>
+                    <a:pt x="6660894" y="701083"/>
+                  </a:lnTo>
+                  <a:lnTo>
+                    <a:pt x="6589272" y="695882"/>
+                  </a:lnTo>
+                  <a:lnTo>
+                    <a:pt x="6517649" y="690470"/>
+                  </a:lnTo>
+                  <a:lnTo>
+                    <a:pt x="6446027" y="684839"/>
+                  </a:lnTo>
+                  <a:lnTo>
+                    <a:pt x="6374404" y="678980"/>
+                  </a:lnTo>
+                  <a:lnTo>
+                    <a:pt x="6302782" y="672883"/>
+                  </a:lnTo>
+                  <a:lnTo>
+                    <a:pt x="6231159" y="666539"/>
+                  </a:lnTo>
+                  <a:lnTo>
+                    <a:pt x="6159537" y="659938"/>
+                  </a:lnTo>
+                  <a:lnTo>
+                    <a:pt x="6087914" y="653070"/>
+                  </a:lnTo>
+                  <a:lnTo>
+                    <a:pt x="6016292" y="645923"/>
+                  </a:lnTo>
+                  <a:lnTo>
+                    <a:pt x="5944669" y="638487"/>
+                  </a:lnTo>
+                  <a:lnTo>
+                    <a:pt x="5873047" y="630750"/>
+                  </a:lnTo>
+                  <a:lnTo>
+                    <a:pt x="5801424" y="622699"/>
+                  </a:lnTo>
+                  <a:lnTo>
+                    <a:pt x="5729802" y="614321"/>
+                  </a:lnTo>
+                  <a:lnTo>
+                    <a:pt x="5658179" y="605605"/>
+                  </a:lnTo>
+                  <a:lnTo>
+                    <a:pt x="5586557" y="596535"/>
+                  </a:lnTo>
+                  <a:lnTo>
+                    <a:pt x="5514934" y="587097"/>
+                  </a:lnTo>
+                  <a:lnTo>
+                    <a:pt x="5443311" y="577277"/>
+                  </a:lnTo>
+                  <a:lnTo>
+                    <a:pt x="5371689" y="567059"/>
+                  </a:lnTo>
+                  <a:lnTo>
+                    <a:pt x="5300066" y="556427"/>
+                  </a:lnTo>
+                  <a:lnTo>
+                    <a:pt x="5228444" y="545365"/>
+                  </a:lnTo>
+                  <a:lnTo>
+                    <a:pt x="5156821" y="533854"/>
+                  </a:lnTo>
+                  <a:lnTo>
+                    <a:pt x="5085199" y="521876"/>
+                  </a:lnTo>
+                  <a:lnTo>
+                    <a:pt x="5013576" y="509413"/>
+                  </a:lnTo>
+                  <a:lnTo>
+                    <a:pt x="4941954" y="496446"/>
+                  </a:lnTo>
+                  <a:lnTo>
+                    <a:pt x="4870331" y="482952"/>
+                  </a:lnTo>
+                  <a:lnTo>
+                    <a:pt x="4798709" y="468912"/>
+                  </a:lnTo>
+                  <a:lnTo>
+                    <a:pt x="4727086" y="454303"/>
+                  </a:lnTo>
+                  <a:lnTo>
+                    <a:pt x="4655464" y="439102"/>
+                  </a:lnTo>
+                  <a:lnTo>
+                    <a:pt x="4583841" y="423285"/>
+                  </a:lnTo>
+                  <a:lnTo>
+                    <a:pt x="4512219" y="406827"/>
+                  </a:lnTo>
+                  <a:lnTo>
+                    <a:pt x="4440596" y="389702"/>
+                  </a:lnTo>
+                  <a:lnTo>
+                    <a:pt x="4368974" y="371884"/>
+                  </a:lnTo>
+                  <a:lnTo>
+                    <a:pt x="4297351" y="353343"/>
+                  </a:lnTo>
+                  <a:lnTo>
+                    <a:pt x="4225729" y="334051"/>
+                  </a:lnTo>
+                  <a:lnTo>
+                    <a:pt x="4154106" y="313977"/>
+                  </a:lnTo>
+                  <a:lnTo>
+                    <a:pt x="4082483" y="293090"/>
+                  </a:lnTo>
+                  <a:lnTo>
+                    <a:pt x="4010861" y="271356"/>
+                  </a:lnTo>
+                  <a:lnTo>
+                    <a:pt x="3939238" y="248741"/>
+                  </a:lnTo>
+                  <a:lnTo>
+                    <a:pt x="3867616" y="225211"/>
+                  </a:lnTo>
+                  <a:lnTo>
+                    <a:pt x="3795993" y="200726"/>
+                  </a:lnTo>
+                  <a:lnTo>
+                    <a:pt x="3724371" y="175250"/>
+                  </a:lnTo>
+                  <a:lnTo>
+                    <a:pt x="3652748" y="148741"/>
+                  </a:lnTo>
+                  <a:lnTo>
+                    <a:pt x="3581126" y="121158"/>
+                  </a:lnTo>
+                  <a:lnTo>
+                    <a:pt x="3509503" y="92457"/>
+                  </a:lnTo>
+                  <a:lnTo>
+                    <a:pt x="3437881" y="62594"/>
+                  </a:lnTo>
+                  <a:lnTo>
+                    <a:pt x="3366258" y="31520"/>
+                  </a:lnTo>
+                  <a:lnTo>
+                    <a:pt x="3294636" y="0"/>
+                  </a:lnTo>
+                  <a:lnTo>
+                    <a:pt x="3223013" y="1246"/>
+                  </a:lnTo>
+                  <a:lnTo>
+                    <a:pt x="3151391" y="2491"/>
+                  </a:lnTo>
+                  <a:lnTo>
+                    <a:pt x="3079768" y="3734"/>
+                  </a:lnTo>
+                  <a:lnTo>
+                    <a:pt x="3008146" y="4975"/>
+                  </a:lnTo>
+                  <a:lnTo>
+                    <a:pt x="2936523" y="6214"/>
+                  </a:lnTo>
+                  <a:lnTo>
+                    <a:pt x="2864901" y="7452"/>
+                  </a:lnTo>
+                  <a:lnTo>
+                    <a:pt x="2793278" y="8687"/>
+                  </a:lnTo>
+                  <a:lnTo>
+                    <a:pt x="2721655" y="9921"/>
+                  </a:lnTo>
+                  <a:lnTo>
+                    <a:pt x="2650033" y="11153"/>
+                  </a:lnTo>
+                  <a:lnTo>
+                    <a:pt x="2578410" y="12383"/>
+                  </a:lnTo>
+                  <a:lnTo>
+                    <a:pt x="2506788" y="13611"/>
+                  </a:lnTo>
+                  <a:lnTo>
+                    <a:pt x="2435165" y="14837"/>
+                  </a:lnTo>
+                  <a:lnTo>
+                    <a:pt x="2363543" y="16062"/>
+                  </a:lnTo>
+                  <a:lnTo>
+                    <a:pt x="2291920" y="17284"/>
+                  </a:lnTo>
+                  <a:lnTo>
+                    <a:pt x="2220298" y="18505"/>
+                  </a:lnTo>
+                  <a:lnTo>
+                    <a:pt x="2148675" y="19724"/>
+                  </a:lnTo>
+                  <a:lnTo>
+                    <a:pt x="2077053" y="20941"/>
+                  </a:lnTo>
+                  <a:lnTo>
+                    <a:pt x="2005430" y="22156"/>
+                  </a:lnTo>
+                  <a:lnTo>
+                    <a:pt x="1933808" y="23370"/>
+                  </a:lnTo>
+                  <a:lnTo>
+                    <a:pt x="1862185" y="24581"/>
+                  </a:lnTo>
+                  <a:lnTo>
+                    <a:pt x="1790563" y="25791"/>
+                  </a:lnTo>
+                  <a:lnTo>
+                    <a:pt x="1718940" y="26999"/>
+                  </a:lnTo>
+                  <a:lnTo>
+                    <a:pt x="1647318" y="28205"/>
+                  </a:lnTo>
+                  <a:lnTo>
+                    <a:pt x="1575695" y="29409"/>
+                  </a:lnTo>
+                  <a:lnTo>
+                    <a:pt x="1504073" y="30612"/>
+                  </a:lnTo>
+                  <a:lnTo>
+                    <a:pt x="1432450" y="31813"/>
+                  </a:lnTo>
+                  <a:lnTo>
+                    <a:pt x="1360827" y="33012"/>
+                  </a:lnTo>
+                  <a:lnTo>
+                    <a:pt x="1289205" y="34209"/>
+                  </a:lnTo>
+                  <a:lnTo>
+                    <a:pt x="1217582" y="35404"/>
+                  </a:lnTo>
+                  <a:lnTo>
+                    <a:pt x="1145960" y="36597"/>
+                  </a:lnTo>
+                  <a:lnTo>
+                    <a:pt x="1074337" y="37789"/>
+                  </a:lnTo>
+                  <a:lnTo>
+                    <a:pt x="1002715" y="38979"/>
+                  </a:lnTo>
+                  <a:lnTo>
+                    <a:pt x="931092" y="40167"/>
+                  </a:lnTo>
+                  <a:lnTo>
+                    <a:pt x="859470" y="41354"/>
+                  </a:lnTo>
+                  <a:lnTo>
+                    <a:pt x="787847" y="42538"/>
+                  </a:lnTo>
+                  <a:lnTo>
+                    <a:pt x="716225" y="43721"/>
+                  </a:lnTo>
+                  <a:lnTo>
+                    <a:pt x="644602" y="44902"/>
+                  </a:lnTo>
+                  <a:lnTo>
+                    <a:pt x="572980" y="46081"/>
+                  </a:lnTo>
+                  <a:lnTo>
+                    <a:pt x="501357" y="47259"/>
+                  </a:lnTo>
+                  <a:lnTo>
+                    <a:pt x="429735" y="48434"/>
+                  </a:lnTo>
+                  <a:lnTo>
+                    <a:pt x="358112" y="49608"/>
+                  </a:lnTo>
+                  <a:lnTo>
+                    <a:pt x="286490" y="50780"/>
+                  </a:lnTo>
+                  <a:lnTo>
+                    <a:pt x="214867" y="51951"/>
+                  </a:lnTo>
+                  <a:lnTo>
+                    <a:pt x="143245" y="53119"/>
+                  </a:lnTo>
+                  <a:lnTo>
+                    <a:pt x="71622" y="54286"/>
+                  </a:lnTo>
+                  <a:lnTo>
+                    <a:pt x="0" y="55452"/>
                   </a:lnTo>
                 </a:path>
               </a:pathLst>
@@ -3895,619 +4186,312 @@
           </p:nvSpPr>
           <p:spPr>
             <a:xfrm>
-              <a:off x="817517" y="4727816"/>
-              <a:ext cx="7392041" cy="728301"/>
+              <a:off x="1172049" y="3558550"/>
+              <a:ext cx="7090630" cy="1697296"/>
             </a:xfrm>
             <a:custGeom>
               <a:avLst/>
               <a:pathLst>
-                <a:path w="7392041" h="728301">
-                  <a:moveTo>
-                    <a:pt x="7392041" y="728301"/>
-                  </a:moveTo>
-                  <a:lnTo>
-                    <a:pt x="7314797" y="724203"/>
-                  </a:lnTo>
-                  <a:lnTo>
-                    <a:pt x="7237554" y="719939"/>
-                  </a:lnTo>
-                  <a:lnTo>
-                    <a:pt x="7160310" y="715502"/>
-                  </a:lnTo>
-                  <a:lnTo>
-                    <a:pt x="7083066" y="710885"/>
-                  </a:lnTo>
-                  <a:lnTo>
-                    <a:pt x="7005823" y="706081"/>
-                  </a:lnTo>
-                  <a:lnTo>
-                    <a:pt x="6928579" y="701083"/>
-                  </a:lnTo>
-                  <a:lnTo>
-                    <a:pt x="6851336" y="695882"/>
-                  </a:lnTo>
-                  <a:lnTo>
-                    <a:pt x="6774092" y="690470"/>
-                  </a:lnTo>
-                  <a:lnTo>
-                    <a:pt x="6696849" y="684839"/>
-                  </a:lnTo>
-                  <a:lnTo>
-                    <a:pt x="6619605" y="678980"/>
-                  </a:lnTo>
-                  <a:lnTo>
-                    <a:pt x="6542361" y="672883"/>
-                  </a:lnTo>
-                  <a:lnTo>
-                    <a:pt x="6465118" y="666539"/>
-                  </a:lnTo>
-                  <a:lnTo>
-                    <a:pt x="6387874" y="659938"/>
-                  </a:lnTo>
-                  <a:lnTo>
-                    <a:pt x="6310631" y="653070"/>
-                  </a:lnTo>
-                  <a:lnTo>
-                    <a:pt x="6233387" y="645923"/>
-                  </a:lnTo>
-                  <a:lnTo>
-                    <a:pt x="6156144" y="638487"/>
-                  </a:lnTo>
-                  <a:lnTo>
-                    <a:pt x="6078900" y="630750"/>
-                  </a:lnTo>
-                  <a:lnTo>
-                    <a:pt x="6001656" y="622699"/>
-                  </a:lnTo>
-                  <a:lnTo>
-                    <a:pt x="5924413" y="614321"/>
-                  </a:lnTo>
-                  <a:lnTo>
-                    <a:pt x="5847169" y="605605"/>
-                  </a:lnTo>
-                  <a:lnTo>
-                    <a:pt x="5769926" y="596535"/>
-                  </a:lnTo>
-                  <a:lnTo>
-                    <a:pt x="5692682" y="587097"/>
-                  </a:lnTo>
-                  <a:lnTo>
-                    <a:pt x="5615439" y="577277"/>
-                  </a:lnTo>
-                  <a:lnTo>
-                    <a:pt x="5538195" y="567059"/>
-                  </a:lnTo>
-                  <a:lnTo>
-                    <a:pt x="5460951" y="556427"/>
-                  </a:lnTo>
-                  <a:lnTo>
-                    <a:pt x="5383708" y="545365"/>
-                  </a:lnTo>
-                  <a:lnTo>
-                    <a:pt x="5306464" y="533854"/>
-                  </a:lnTo>
-                  <a:lnTo>
-                    <a:pt x="5229221" y="521876"/>
-                  </a:lnTo>
-                  <a:lnTo>
-                    <a:pt x="5151977" y="509413"/>
-                  </a:lnTo>
-                  <a:lnTo>
-                    <a:pt x="5074734" y="496446"/>
-                  </a:lnTo>
-                  <a:lnTo>
-                    <a:pt x="4997490" y="482952"/>
-                  </a:lnTo>
-                  <a:lnTo>
-                    <a:pt x="4920246" y="468912"/>
-                  </a:lnTo>
-                  <a:lnTo>
-                    <a:pt x="4843003" y="454303"/>
-                  </a:lnTo>
-                  <a:lnTo>
-                    <a:pt x="4765759" y="439102"/>
-                  </a:lnTo>
-                  <a:lnTo>
-                    <a:pt x="4688516" y="423285"/>
-                  </a:lnTo>
-                  <a:lnTo>
-                    <a:pt x="4611272" y="406827"/>
-                  </a:lnTo>
-                  <a:lnTo>
-                    <a:pt x="4534029" y="389702"/>
-                  </a:lnTo>
-                  <a:lnTo>
-                    <a:pt x="4456785" y="371884"/>
-                  </a:lnTo>
-                  <a:lnTo>
-                    <a:pt x="4379541" y="353343"/>
-                  </a:lnTo>
-                  <a:lnTo>
-                    <a:pt x="4302298" y="334051"/>
-                  </a:lnTo>
-                  <a:lnTo>
-                    <a:pt x="4225054" y="313977"/>
-                  </a:lnTo>
-                  <a:lnTo>
-                    <a:pt x="4147811" y="293090"/>
-                  </a:lnTo>
-                  <a:lnTo>
-                    <a:pt x="4070567" y="271356"/>
-                  </a:lnTo>
-                  <a:lnTo>
-                    <a:pt x="3993324" y="248741"/>
-                  </a:lnTo>
-                  <a:lnTo>
-                    <a:pt x="3916080" y="225211"/>
-                  </a:lnTo>
-                  <a:lnTo>
-                    <a:pt x="3838836" y="200726"/>
-                  </a:lnTo>
-                  <a:lnTo>
-                    <a:pt x="3761593" y="175250"/>
-                  </a:lnTo>
-                  <a:lnTo>
-                    <a:pt x="3684349" y="148741"/>
-                  </a:lnTo>
-                  <a:lnTo>
-                    <a:pt x="3607106" y="121158"/>
-                  </a:lnTo>
-                  <a:lnTo>
-                    <a:pt x="3529862" y="92457"/>
-                  </a:lnTo>
-                  <a:lnTo>
-                    <a:pt x="3452619" y="62594"/>
-                  </a:lnTo>
-                  <a:lnTo>
-                    <a:pt x="3375375" y="31520"/>
-                  </a:lnTo>
-                  <a:lnTo>
-                    <a:pt x="3298131" y="0"/>
-                  </a:lnTo>
-                  <a:lnTo>
-                    <a:pt x="3220888" y="1246"/>
-                  </a:lnTo>
-                  <a:lnTo>
-                    <a:pt x="3143644" y="2491"/>
-                  </a:lnTo>
-                  <a:lnTo>
-                    <a:pt x="3066401" y="3734"/>
-                  </a:lnTo>
-                  <a:lnTo>
-                    <a:pt x="2989157" y="4975"/>
-                  </a:lnTo>
-                  <a:lnTo>
-                    <a:pt x="2911914" y="6214"/>
-                  </a:lnTo>
-                  <a:lnTo>
-                    <a:pt x="2834670" y="7452"/>
-                  </a:lnTo>
-                  <a:lnTo>
-                    <a:pt x="2757426" y="8687"/>
-                  </a:lnTo>
-                  <a:lnTo>
-                    <a:pt x="2680183" y="9921"/>
-                  </a:lnTo>
-                  <a:lnTo>
-                    <a:pt x="2602939" y="11153"/>
-                  </a:lnTo>
-                  <a:lnTo>
-                    <a:pt x="2525696" y="12383"/>
-                  </a:lnTo>
-                  <a:lnTo>
-                    <a:pt x="2448452" y="13611"/>
-                  </a:lnTo>
-                  <a:lnTo>
-                    <a:pt x="2371209" y="14837"/>
-                  </a:lnTo>
-                  <a:lnTo>
-                    <a:pt x="2293965" y="16062"/>
-                  </a:lnTo>
-                  <a:lnTo>
-                    <a:pt x="2216721" y="17284"/>
-                  </a:lnTo>
-                  <a:lnTo>
-                    <a:pt x="2139478" y="18505"/>
-                  </a:lnTo>
-                  <a:lnTo>
-                    <a:pt x="2062234" y="19724"/>
-                  </a:lnTo>
-                  <a:lnTo>
-                    <a:pt x="1984991" y="20941"/>
-                  </a:lnTo>
-                  <a:lnTo>
-                    <a:pt x="1907747" y="22156"/>
-                  </a:lnTo>
-                  <a:lnTo>
-                    <a:pt x="1830504" y="23370"/>
-                  </a:lnTo>
-                  <a:lnTo>
-                    <a:pt x="1753260" y="24581"/>
-                  </a:lnTo>
-                  <a:lnTo>
-                    <a:pt x="1676016" y="25791"/>
-                  </a:lnTo>
-                  <a:lnTo>
-                    <a:pt x="1598773" y="26999"/>
-                  </a:lnTo>
-                  <a:lnTo>
-                    <a:pt x="1521529" y="28205"/>
-                  </a:lnTo>
-                  <a:lnTo>
-                    <a:pt x="1444286" y="29409"/>
-                  </a:lnTo>
-                  <a:lnTo>
-                    <a:pt x="1367042" y="30612"/>
-                  </a:lnTo>
-                  <a:lnTo>
-                    <a:pt x="1289799" y="31813"/>
-                  </a:lnTo>
-                  <a:lnTo>
-                    <a:pt x="1212555" y="33012"/>
-                  </a:lnTo>
-                  <a:lnTo>
-                    <a:pt x="1135311" y="34209"/>
-                  </a:lnTo>
-                  <a:lnTo>
-                    <a:pt x="1058068" y="35404"/>
-                  </a:lnTo>
-                  <a:lnTo>
-                    <a:pt x="980824" y="36597"/>
-                  </a:lnTo>
-                  <a:lnTo>
-                    <a:pt x="903581" y="37789"/>
-                  </a:lnTo>
-                  <a:lnTo>
-                    <a:pt x="826337" y="38979"/>
-                  </a:lnTo>
-                  <a:lnTo>
-                    <a:pt x="749094" y="40167"/>
-                  </a:lnTo>
-                  <a:lnTo>
-                    <a:pt x="671850" y="41354"/>
-                  </a:lnTo>
-                  <a:lnTo>
-                    <a:pt x="594606" y="42538"/>
-                  </a:lnTo>
-                  <a:lnTo>
-                    <a:pt x="517363" y="43721"/>
-                  </a:lnTo>
-                  <a:lnTo>
-                    <a:pt x="440119" y="44902"/>
-                  </a:lnTo>
-                  <a:lnTo>
-                    <a:pt x="362876" y="46081"/>
-                  </a:lnTo>
-                  <a:lnTo>
-                    <a:pt x="285632" y="47259"/>
-                  </a:lnTo>
-                  <a:lnTo>
-                    <a:pt x="208389" y="48434"/>
-                  </a:lnTo>
-                  <a:lnTo>
-                    <a:pt x="131145" y="49608"/>
-                  </a:lnTo>
-                  <a:lnTo>
-                    <a:pt x="53901" y="50780"/>
-                  </a:lnTo>
-                  <a:lnTo>
-                    <a:pt x="0" y="51597"/>
-                  </a:lnTo>
-                </a:path>
-              </a:pathLst>
-            </a:custGeom>
-          </p:spPr>
-          <p:txBody>
-            <a:bodyPr/>
-            <a:lstStyle/>
-            <a:p/>
-          </p:txBody>
-        </p:sp>
-        <p:sp>
-          <p:nvSpPr>
-            <p:cNvPr id="24" name="pl24"/>
-            <p:cNvSpPr/>
-            <p:nvPr/>
-          </p:nvSpPr>
-          <p:spPr>
-            <a:xfrm>
-              <a:off x="817517" y="3680702"/>
-              <a:ext cx="7392041" cy="1575143"/>
-            </a:xfrm>
-            <a:custGeom>
-              <a:avLst/>
-              <a:pathLst>
-                <a:path w="7392041" h="1575143">
+                <a:path w="7090630" h="1697296">
                   <a:moveTo>
                     <a:pt x="0" y="0"/>
                   </a:moveTo>
                   <a:lnTo>
-                    <a:pt x="53901" y="24928"/>
-                  </a:lnTo>
-                  <a:lnTo>
-                    <a:pt x="131145" y="59975"/>
-                  </a:lnTo>
-                  <a:lnTo>
-                    <a:pt x="208389" y="94358"/>
-                  </a:lnTo>
-                  <a:lnTo>
-                    <a:pt x="285632" y="128091"/>
-                  </a:lnTo>
-                  <a:lnTo>
-                    <a:pt x="362876" y="161185"/>
-                  </a:lnTo>
-                  <a:lnTo>
-                    <a:pt x="440119" y="193653"/>
-                  </a:lnTo>
-                  <a:lnTo>
-                    <a:pt x="517363" y="225506"/>
-                  </a:lnTo>
-                  <a:lnTo>
-                    <a:pt x="594606" y="256757"/>
-                  </a:lnTo>
-                  <a:lnTo>
-                    <a:pt x="671850" y="287415"/>
-                  </a:lnTo>
-                  <a:lnTo>
-                    <a:pt x="749094" y="317494"/>
-                  </a:lnTo>
-                  <a:lnTo>
-                    <a:pt x="826337" y="347003"/>
-                  </a:lnTo>
-                  <a:lnTo>
-                    <a:pt x="903581" y="375954"/>
-                  </a:lnTo>
-                  <a:lnTo>
-                    <a:pt x="980824" y="404357"/>
-                  </a:lnTo>
-                  <a:lnTo>
-                    <a:pt x="1058068" y="432222"/>
-                  </a:lnTo>
-                  <a:lnTo>
-                    <a:pt x="1135311" y="459560"/>
-                  </a:lnTo>
-                  <a:lnTo>
-                    <a:pt x="1212555" y="486380"/>
-                  </a:lnTo>
-                  <a:lnTo>
-                    <a:pt x="1289799" y="512693"/>
-                  </a:lnTo>
-                  <a:lnTo>
-                    <a:pt x="1367042" y="538507"/>
-                  </a:lnTo>
-                  <a:lnTo>
-                    <a:pt x="1444286" y="563833"/>
-                  </a:lnTo>
-                  <a:lnTo>
-                    <a:pt x="1521529" y="588680"/>
-                  </a:lnTo>
-                  <a:lnTo>
-                    <a:pt x="1598773" y="613056"/>
-                  </a:lnTo>
-                  <a:lnTo>
-                    <a:pt x="1676016" y="636971"/>
-                  </a:lnTo>
-                  <a:lnTo>
-                    <a:pt x="1753260" y="660433"/>
-                  </a:lnTo>
-                  <a:lnTo>
-                    <a:pt x="1830504" y="683452"/>
-                  </a:lnTo>
-                  <a:lnTo>
-                    <a:pt x="1907747" y="706034"/>
-                  </a:lnTo>
-                  <a:lnTo>
-                    <a:pt x="1984991" y="728189"/>
-                  </a:lnTo>
-                  <a:lnTo>
-                    <a:pt x="2062234" y="749925"/>
-                  </a:lnTo>
-                  <a:lnTo>
-                    <a:pt x="2139478" y="771249"/>
-                  </a:lnTo>
-                  <a:lnTo>
-                    <a:pt x="2216721" y="792170"/>
-                  </a:lnTo>
-                  <a:lnTo>
-                    <a:pt x="2293965" y="812695"/>
-                  </a:lnTo>
-                  <a:lnTo>
-                    <a:pt x="2371209" y="832831"/>
-                  </a:lnTo>
-                  <a:lnTo>
-                    <a:pt x="2448452" y="852586"/>
-                  </a:lnTo>
-                  <a:lnTo>
-                    <a:pt x="2525696" y="871967"/>
-                  </a:lnTo>
-                  <a:lnTo>
-                    <a:pt x="2602939" y="890982"/>
-                  </a:lnTo>
-                  <a:lnTo>
-                    <a:pt x="2680183" y="909636"/>
-                  </a:lnTo>
-                  <a:lnTo>
-                    <a:pt x="2757426" y="927938"/>
-                  </a:lnTo>
-                  <a:lnTo>
-                    <a:pt x="2834670" y="945893"/>
-                  </a:lnTo>
-                  <a:lnTo>
-                    <a:pt x="2911914" y="963508"/>
-                  </a:lnTo>
-                  <a:lnTo>
-                    <a:pt x="2989157" y="980790"/>
-                  </a:lnTo>
-                  <a:lnTo>
-                    <a:pt x="3066401" y="997744"/>
-                  </a:lnTo>
-                  <a:lnTo>
-                    <a:pt x="3143644" y="1014378"/>
-                  </a:lnTo>
-                  <a:lnTo>
-                    <a:pt x="3220888" y="1030697"/>
-                  </a:lnTo>
-                  <a:lnTo>
-                    <a:pt x="3298131" y="1046707"/>
-                  </a:lnTo>
-                  <a:lnTo>
-                    <a:pt x="3375375" y="1062414"/>
-                  </a:lnTo>
-                  <a:lnTo>
-                    <a:pt x="3452619" y="1077823"/>
-                  </a:lnTo>
-                  <a:lnTo>
-                    <a:pt x="3529862" y="1092941"/>
-                  </a:lnTo>
-                  <a:lnTo>
-                    <a:pt x="3607106" y="1107773"/>
-                  </a:lnTo>
-                  <a:lnTo>
-                    <a:pt x="3684349" y="1122324"/>
-                  </a:lnTo>
-                  <a:lnTo>
-                    <a:pt x="3761593" y="1136600"/>
-                  </a:lnTo>
-                  <a:lnTo>
-                    <a:pt x="3838836" y="1150605"/>
-                  </a:lnTo>
-                  <a:lnTo>
-                    <a:pt x="3916080" y="1164346"/>
-                  </a:lnTo>
-                  <a:lnTo>
-                    <a:pt x="3993324" y="1177826"/>
-                  </a:lnTo>
-                  <a:lnTo>
-                    <a:pt x="4070567" y="1191051"/>
-                  </a:lnTo>
-                  <a:lnTo>
-                    <a:pt x="4147811" y="1204026"/>
-                  </a:lnTo>
-                  <a:lnTo>
-                    <a:pt x="4225054" y="1216755"/>
-                  </a:lnTo>
-                  <a:lnTo>
-                    <a:pt x="4302298" y="1229244"/>
-                  </a:lnTo>
-                  <a:lnTo>
-                    <a:pt x="4379541" y="1241496"/>
-                  </a:lnTo>
-                  <a:lnTo>
-                    <a:pt x="4456785" y="1253516"/>
-                  </a:lnTo>
-                  <a:lnTo>
-                    <a:pt x="4534029" y="1265308"/>
-                  </a:lnTo>
-                  <a:lnTo>
-                    <a:pt x="4611272" y="1276878"/>
-                  </a:lnTo>
-                  <a:lnTo>
-                    <a:pt x="4688516" y="1288228"/>
-                  </a:lnTo>
-                  <a:lnTo>
-                    <a:pt x="4765759" y="1299363"/>
-                  </a:lnTo>
-                  <a:lnTo>
-                    <a:pt x="4843003" y="1310288"/>
-                  </a:lnTo>
-                  <a:lnTo>
-                    <a:pt x="4920246" y="1321006"/>
-                  </a:lnTo>
-                  <a:lnTo>
-                    <a:pt x="4997490" y="1331521"/>
-                  </a:lnTo>
-                  <a:lnTo>
-                    <a:pt x="5074734" y="1341837"/>
-                  </a:lnTo>
-                  <a:lnTo>
-                    <a:pt x="5151977" y="1351958"/>
-                  </a:lnTo>
-                  <a:lnTo>
-                    <a:pt x="5229221" y="1361887"/>
-                  </a:lnTo>
-                  <a:lnTo>
-                    <a:pt x="5306464" y="1371629"/>
-                  </a:lnTo>
-                  <a:lnTo>
-                    <a:pt x="5383708" y="1381186"/>
-                  </a:lnTo>
-                  <a:lnTo>
-                    <a:pt x="5460951" y="1390562"/>
-                  </a:lnTo>
-                  <a:lnTo>
-                    <a:pt x="5538195" y="1399760"/>
-                  </a:lnTo>
-                  <a:lnTo>
-                    <a:pt x="5615439" y="1408785"/>
-                  </a:lnTo>
-                  <a:lnTo>
-                    <a:pt x="5692682" y="1417638"/>
-                  </a:lnTo>
-                  <a:lnTo>
-                    <a:pt x="5769926" y="1426324"/>
-                  </a:lnTo>
-                  <a:lnTo>
-                    <a:pt x="5847169" y="1434846"/>
-                  </a:lnTo>
-                  <a:lnTo>
-                    <a:pt x="5924413" y="1443207"/>
-                  </a:lnTo>
-                  <a:lnTo>
-                    <a:pt x="6001656" y="1451409"/>
-                  </a:lnTo>
-                  <a:lnTo>
-                    <a:pt x="6078900" y="1459456"/>
-                  </a:lnTo>
-                  <a:lnTo>
-                    <a:pt x="6156144" y="1467350"/>
-                  </a:lnTo>
-                  <a:lnTo>
-                    <a:pt x="6233387" y="1475095"/>
-                  </a:lnTo>
-                  <a:lnTo>
-                    <a:pt x="6310631" y="1482694"/>
-                  </a:lnTo>
-                  <a:lnTo>
-                    <a:pt x="6387874" y="1490149"/>
-                  </a:lnTo>
-                  <a:lnTo>
-                    <a:pt x="6465118" y="1497462"/>
-                  </a:lnTo>
-                  <a:lnTo>
-                    <a:pt x="6542361" y="1504637"/>
-                  </a:lnTo>
-                  <a:lnTo>
-                    <a:pt x="6619605" y="1511677"/>
-                  </a:lnTo>
-                  <a:lnTo>
-                    <a:pt x="6696849" y="1518583"/>
-                  </a:lnTo>
-                  <a:lnTo>
-                    <a:pt x="6774092" y="1525358"/>
-                  </a:lnTo>
-                  <a:lnTo>
-                    <a:pt x="6851336" y="1532006"/>
-                  </a:lnTo>
-                  <a:lnTo>
-                    <a:pt x="6928579" y="1538527"/>
-                  </a:lnTo>
-                  <a:lnTo>
-                    <a:pt x="7005823" y="1544925"/>
-                  </a:lnTo>
-                  <a:lnTo>
-                    <a:pt x="7083066" y="1551202"/>
-                  </a:lnTo>
-                  <a:lnTo>
-                    <a:pt x="7160310" y="1557360"/>
-                  </a:lnTo>
-                  <a:lnTo>
-                    <a:pt x="7237554" y="1563401"/>
-                  </a:lnTo>
-                  <a:lnTo>
-                    <a:pt x="7314797" y="1569328"/>
-                  </a:lnTo>
-                  <a:lnTo>
-                    <a:pt x="7392041" y="1575143"/>
+                    <a:pt x="71622" y="37830"/>
+                  </a:lnTo>
+                  <a:lnTo>
+                    <a:pt x="143245" y="74945"/>
+                  </a:lnTo>
+                  <a:lnTo>
+                    <a:pt x="214867" y="111357"/>
+                  </a:lnTo>
+                  <a:lnTo>
+                    <a:pt x="286490" y="147080"/>
+                  </a:lnTo>
+                  <a:lnTo>
+                    <a:pt x="358112" y="182127"/>
+                  </a:lnTo>
+                  <a:lnTo>
+                    <a:pt x="429735" y="216511"/>
+                  </a:lnTo>
+                  <a:lnTo>
+                    <a:pt x="501357" y="250243"/>
+                  </a:lnTo>
+                  <a:lnTo>
+                    <a:pt x="572980" y="283338"/>
+                  </a:lnTo>
+                  <a:lnTo>
+                    <a:pt x="644602" y="315805"/>
+                  </a:lnTo>
+                  <a:lnTo>
+                    <a:pt x="716225" y="347659"/>
+                  </a:lnTo>
+                  <a:lnTo>
+                    <a:pt x="787847" y="378909"/>
+                  </a:lnTo>
+                  <a:lnTo>
+                    <a:pt x="859470" y="409568"/>
+                  </a:lnTo>
+                  <a:lnTo>
+                    <a:pt x="931092" y="439647"/>
+                  </a:lnTo>
+                  <a:lnTo>
+                    <a:pt x="1002715" y="469156"/>
+                  </a:lnTo>
+                  <a:lnTo>
+                    <a:pt x="1074337" y="498107"/>
+                  </a:lnTo>
+                  <a:lnTo>
+                    <a:pt x="1145960" y="526509"/>
+                  </a:lnTo>
+                  <a:lnTo>
+                    <a:pt x="1217582" y="554374"/>
+                  </a:lnTo>
+                  <a:lnTo>
+                    <a:pt x="1289205" y="581712"/>
+                  </a:lnTo>
+                  <a:lnTo>
+                    <a:pt x="1360827" y="608533"/>
+                  </a:lnTo>
+                  <a:lnTo>
+                    <a:pt x="1432450" y="634845"/>
+                  </a:lnTo>
+                  <a:lnTo>
+                    <a:pt x="1504073" y="660660"/>
+                  </a:lnTo>
+                  <a:lnTo>
+                    <a:pt x="1575695" y="685986"/>
+                  </a:lnTo>
+                  <a:lnTo>
+                    <a:pt x="1647318" y="710832"/>
+                  </a:lnTo>
+                  <a:lnTo>
+                    <a:pt x="1718940" y="735209"/>
+                  </a:lnTo>
+                  <a:lnTo>
+                    <a:pt x="1790563" y="759124"/>
+                  </a:lnTo>
+                  <a:lnTo>
+                    <a:pt x="1862185" y="782586"/>
+                  </a:lnTo>
+                  <a:lnTo>
+                    <a:pt x="1933808" y="805604"/>
+                  </a:lnTo>
+                  <a:lnTo>
+                    <a:pt x="2005430" y="828187"/>
+                  </a:lnTo>
+                  <a:lnTo>
+                    <a:pt x="2077053" y="850342"/>
+                  </a:lnTo>
+                  <a:lnTo>
+                    <a:pt x="2148675" y="872078"/>
+                  </a:lnTo>
+                  <a:lnTo>
+                    <a:pt x="2220298" y="893402"/>
+                  </a:lnTo>
+                  <a:lnTo>
+                    <a:pt x="2291920" y="914323"/>
+                  </a:lnTo>
+                  <a:lnTo>
+                    <a:pt x="2363543" y="934847"/>
+                  </a:lnTo>
+                  <a:lnTo>
+                    <a:pt x="2435165" y="954984"/>
+                  </a:lnTo>
+                  <a:lnTo>
+                    <a:pt x="2506788" y="974739"/>
+                  </a:lnTo>
+                  <a:lnTo>
+                    <a:pt x="2578410" y="994120"/>
+                  </a:lnTo>
+                  <a:lnTo>
+                    <a:pt x="2650033" y="1013134"/>
+                  </a:lnTo>
+                  <a:lnTo>
+                    <a:pt x="2721655" y="1031789"/>
+                  </a:lnTo>
+                  <a:lnTo>
+                    <a:pt x="2793278" y="1050090"/>
+                  </a:lnTo>
+                  <a:lnTo>
+                    <a:pt x="2864901" y="1068045"/>
+                  </a:lnTo>
+                  <a:lnTo>
+                    <a:pt x="2936523" y="1085660"/>
+                  </a:lnTo>
+                  <a:lnTo>
+                    <a:pt x="3008146" y="1102942"/>
+                  </a:lnTo>
+                  <a:lnTo>
+                    <a:pt x="3079768" y="1119897"/>
+                  </a:lnTo>
+                  <a:lnTo>
+                    <a:pt x="3151391" y="1136530"/>
+                  </a:lnTo>
+                  <a:lnTo>
+                    <a:pt x="3223013" y="1152849"/>
+                  </a:lnTo>
+                  <a:lnTo>
+                    <a:pt x="3294636" y="1168859"/>
+                  </a:lnTo>
+                  <a:lnTo>
+                    <a:pt x="3366258" y="1184566"/>
+                  </a:lnTo>
+                  <a:lnTo>
+                    <a:pt x="3437881" y="1199976"/>
+                  </a:lnTo>
+                  <a:lnTo>
+                    <a:pt x="3509503" y="1215094"/>
+                  </a:lnTo>
+                  <a:lnTo>
+                    <a:pt x="3581126" y="1229926"/>
+                  </a:lnTo>
+                  <a:lnTo>
+                    <a:pt x="3652748" y="1244477"/>
+                  </a:lnTo>
+                  <a:lnTo>
+                    <a:pt x="3724371" y="1258753"/>
+                  </a:lnTo>
+                  <a:lnTo>
+                    <a:pt x="3795993" y="1272758"/>
+                  </a:lnTo>
+                  <a:lnTo>
+                    <a:pt x="3867616" y="1286498"/>
+                  </a:lnTo>
+                  <a:lnTo>
+                    <a:pt x="3939238" y="1299979"/>
+                  </a:lnTo>
+                  <a:lnTo>
+                    <a:pt x="4010861" y="1313204"/>
+                  </a:lnTo>
+                  <a:lnTo>
+                    <a:pt x="4082483" y="1326179"/>
+                  </a:lnTo>
+                  <a:lnTo>
+                    <a:pt x="4154106" y="1338908"/>
+                  </a:lnTo>
+                  <a:lnTo>
+                    <a:pt x="4225729" y="1351396"/>
+                  </a:lnTo>
+                  <a:lnTo>
+                    <a:pt x="4297351" y="1363648"/>
+                  </a:lnTo>
+                  <a:lnTo>
+                    <a:pt x="4368974" y="1375668"/>
+                  </a:lnTo>
+                  <a:lnTo>
+                    <a:pt x="4440596" y="1387461"/>
+                  </a:lnTo>
+                  <a:lnTo>
+                    <a:pt x="4512219" y="1399030"/>
+                  </a:lnTo>
+                  <a:lnTo>
+                    <a:pt x="4583841" y="1410381"/>
+                  </a:lnTo>
+                  <a:lnTo>
+                    <a:pt x="4655464" y="1421516"/>
+                  </a:lnTo>
+                  <a:lnTo>
+                    <a:pt x="4727086" y="1432441"/>
+                  </a:lnTo>
+                  <a:lnTo>
+                    <a:pt x="4798709" y="1443159"/>
+                  </a:lnTo>
+                  <a:lnTo>
+                    <a:pt x="4870331" y="1453674"/>
+                  </a:lnTo>
+                  <a:lnTo>
+                    <a:pt x="4941954" y="1463990"/>
+                  </a:lnTo>
+                  <a:lnTo>
+                    <a:pt x="5013576" y="1474111"/>
+                  </a:lnTo>
+                  <a:lnTo>
+                    <a:pt x="5085199" y="1484040"/>
+                  </a:lnTo>
+                  <a:lnTo>
+                    <a:pt x="5156821" y="1493781"/>
+                  </a:lnTo>
+                  <a:lnTo>
+                    <a:pt x="5228444" y="1503338"/>
+                  </a:lnTo>
+                  <a:lnTo>
+                    <a:pt x="5300066" y="1512714"/>
+                  </a:lnTo>
+                  <a:lnTo>
+                    <a:pt x="5371689" y="1521913"/>
+                  </a:lnTo>
+                  <a:lnTo>
+                    <a:pt x="5443311" y="1530937"/>
+                  </a:lnTo>
+                  <a:lnTo>
+                    <a:pt x="5514934" y="1539791"/>
+                  </a:lnTo>
+                  <a:lnTo>
+                    <a:pt x="5586557" y="1548477"/>
+                  </a:lnTo>
+                  <a:lnTo>
+                    <a:pt x="5658179" y="1556999"/>
+                  </a:lnTo>
+                  <a:lnTo>
+                    <a:pt x="5729802" y="1565359"/>
+                  </a:lnTo>
+                  <a:lnTo>
+                    <a:pt x="5801424" y="1573561"/>
+                  </a:lnTo>
+                  <a:lnTo>
+                    <a:pt x="5873047" y="1581608"/>
+                  </a:lnTo>
+                  <a:lnTo>
+                    <a:pt x="5944669" y="1589503"/>
+                  </a:lnTo>
+                  <a:lnTo>
+                    <a:pt x="6016292" y="1597248"/>
+                  </a:lnTo>
+                  <a:lnTo>
+                    <a:pt x="6087914" y="1604846"/>
+                  </a:lnTo>
+                  <a:lnTo>
+                    <a:pt x="6159537" y="1612301"/>
+                  </a:lnTo>
+                  <a:lnTo>
+                    <a:pt x="6231159" y="1619615"/>
+                  </a:lnTo>
+                  <a:lnTo>
+                    <a:pt x="6302782" y="1626790"/>
+                  </a:lnTo>
+                  <a:lnTo>
+                    <a:pt x="6374404" y="1633829"/>
+                  </a:lnTo>
+                  <a:lnTo>
+                    <a:pt x="6446027" y="1640735"/>
+                  </a:lnTo>
+                  <a:lnTo>
+                    <a:pt x="6517649" y="1647511"/>
+                  </a:lnTo>
+                  <a:lnTo>
+                    <a:pt x="6589272" y="1654158"/>
+                  </a:lnTo>
+                  <a:lnTo>
+                    <a:pt x="6660894" y="1660679"/>
+                  </a:lnTo>
+                  <a:lnTo>
+                    <a:pt x="6732517" y="1667077"/>
+                  </a:lnTo>
+                  <a:lnTo>
+                    <a:pt x="6804139" y="1673354"/>
+                  </a:lnTo>
+                  <a:lnTo>
+                    <a:pt x="6875762" y="1679512"/>
+                  </a:lnTo>
+                  <a:lnTo>
+                    <a:pt x="6947385" y="1685554"/>
+                  </a:lnTo>
+                  <a:lnTo>
+                    <a:pt x="7019007" y="1691481"/>
+                  </a:lnTo>
+                  <a:lnTo>
+                    <a:pt x="7090630" y="1697296"/>
                   </a:lnTo>
                 </a:path>
               </a:pathLst>
@@ -4530,7 +4514,7 @@
         </p:sp>
         <p:sp>
           <p:nvSpPr>
-            <p:cNvPr id="25" name="pl25"/>
+            <p:cNvPr id="24" name="pl24"/>
             <p:cNvSpPr/>
             <p:nvPr/>
           </p:nvSpPr>
@@ -4573,13 +4557,13 @@
         </p:sp>
         <p:sp>
           <p:nvSpPr>
-            <p:cNvPr id="26" name="pl26"/>
+            <p:cNvPr id="25" name="pl25"/>
             <p:cNvSpPr/>
             <p:nvPr/>
           </p:nvSpPr>
           <p:spPr>
             <a:xfrm>
-              <a:off x="4117484" y="2073503"/>
+              <a:off x="4468386" y="2073503"/>
               <a:ext cx="0" cy="3649639"/>
             </a:xfrm>
             <a:custGeom>
@@ -4616,7 +4600,7 @@
         </p:sp>
         <p:sp>
           <p:nvSpPr>
-            <p:cNvPr id="27" name="tx27"/>
+            <p:cNvPr id="26" name="tx26"/>
             <p:cNvSpPr/>
             <p:nvPr/>
           </p:nvSpPr>
@@ -4662,7 +4646,7 @@
         </p:sp>
         <p:sp>
           <p:nvSpPr>
-            <p:cNvPr id="28" name="tx28"/>
+            <p:cNvPr id="27" name="tx27"/>
             <p:cNvSpPr/>
             <p:nvPr/>
           </p:nvSpPr>
@@ -4708,7 +4692,7 @@
         </p:sp>
         <p:sp>
           <p:nvSpPr>
-            <p:cNvPr id="29" name="tx29"/>
+            <p:cNvPr id="28" name="tx28"/>
             <p:cNvSpPr/>
             <p:nvPr/>
           </p:nvSpPr>
@@ -4754,7 +4738,7 @@
         </p:sp>
         <p:sp>
           <p:nvSpPr>
-            <p:cNvPr id="30" name="tx30"/>
+            <p:cNvPr id="29" name="tx29"/>
             <p:cNvSpPr/>
             <p:nvPr/>
           </p:nvSpPr>
@@ -4800,7 +4784,7 @@
         </p:sp>
         <p:sp>
           <p:nvSpPr>
-            <p:cNvPr id="31" name="tx31"/>
+            <p:cNvPr id="30" name="tx30"/>
             <p:cNvSpPr/>
             <p:nvPr/>
           </p:nvSpPr>
@@ -4846,14 +4830,14 @@
         </p:sp>
         <p:sp>
           <p:nvSpPr>
-            <p:cNvPr id="32" name="tx32"/>
+            <p:cNvPr id="31" name="tx31"/>
             <p:cNvSpPr/>
             <p:nvPr/>
           </p:nvSpPr>
           <p:spPr>
             <a:xfrm>
-              <a:off x="2423864" y="5785772"/>
-              <a:ext cx="155356" cy="80101"/>
+              <a:off x="2478335" y="5785772"/>
+              <a:ext cx="161574" cy="80101"/>
             </a:xfrm>
             <a:prstGeom prst="rect">
               <a:avLst/>
@@ -4885,21 +4869,21 @@
                   <a:latin typeface="Helvetica"/>
                   <a:cs typeface="Helvetica"/>
                 </a:rPr>
-                <a:t>0.8</a:t>
+                <a:t>-25</a:t>
               </a:r>
             </a:p>
           </p:txBody>
         </p:sp>
         <p:sp>
           <p:nvSpPr>
-            <p:cNvPr id="33" name="tx33"/>
+            <p:cNvPr id="32" name="tx32"/>
             <p:cNvSpPr/>
             <p:nvPr/>
           </p:nvSpPr>
           <p:spPr>
             <a:xfrm>
-              <a:off x="4196521" y="5785772"/>
-              <a:ext cx="155356" cy="80101"/>
+              <a:off x="4582608" y="5785772"/>
+              <a:ext cx="62179" cy="80101"/>
             </a:xfrm>
             <a:prstGeom prst="rect">
               <a:avLst/>
@@ -4931,21 +4915,21 @@
                   <a:latin typeface="Helvetica"/>
                   <a:cs typeface="Helvetica"/>
                 </a:rPr>
-                <a:t>1.0</a:t>
+                <a:t>0</a:t>
               </a:r>
             </a:p>
           </p:txBody>
         </p:sp>
         <p:sp>
           <p:nvSpPr>
-            <p:cNvPr id="34" name="tx34"/>
+            <p:cNvPr id="33" name="tx33"/>
             <p:cNvSpPr/>
             <p:nvPr/>
           </p:nvSpPr>
           <p:spPr>
             <a:xfrm>
-              <a:off x="5969179" y="5785772"/>
-              <a:ext cx="155356" cy="80101"/>
+              <a:off x="6606094" y="5785772"/>
+              <a:ext cx="124358" cy="80101"/>
             </a:xfrm>
             <a:prstGeom prst="rect">
               <a:avLst/>
@@ -4977,67 +4961,21 @@
                   <a:latin typeface="Helvetica"/>
                   <a:cs typeface="Helvetica"/>
                 </a:rPr>
-                <a:t>1.2</a:t>
+                <a:t>25</a:t>
               </a:r>
             </a:p>
           </p:txBody>
         </p:sp>
         <p:sp>
           <p:nvSpPr>
-            <p:cNvPr id="35" name="tx35"/>
+            <p:cNvPr id="34" name="tx34"/>
             <p:cNvSpPr/>
             <p:nvPr/>
           </p:nvSpPr>
           <p:spPr>
             <a:xfrm>
-              <a:off x="7741836" y="5785772"/>
-              <a:ext cx="155356" cy="80101"/>
-            </a:xfrm>
-            <a:prstGeom prst="rect">
-              <a:avLst/>
-            </a:prstGeom>
-            <a:noFill/>
-          </p:spPr>
-          <p:txBody>
-            <a:bodyPr lIns="0" rIns="0" tIns="0" bIns="0" anchorCtr="1" anchor="ctr" wrap="none"/>
-            <a:lstStyle/>
-            <a:p>
-              <a:pPr algn="l" marL="0" marR="0" indent="0">
-                <a:lnSpc>
-                  <a:spcPts val="880"/>
-                </a:lnSpc>
-                <a:spcBef>
-                  <a:spcPts val="0"/>
-                </a:spcBef>
-                <a:spcAft>
-                  <a:spcPts val="0"/>
-                </a:spcAft>
-              </a:pPr>
-              <a:r>
-                <a:rPr sz="880">
-                  <a:solidFill>
-                    <a:srgbClr val="4D4D4D">
-                      <a:alpha val="100000"/>
-                    </a:srgbClr>
-                  </a:solidFill>
-                  <a:latin typeface="Helvetica"/>
-                  <a:cs typeface="Helvetica"/>
-                </a:rPr>
-                <a:t>1.4</a:t>
-              </a:r>
-            </a:p>
-          </p:txBody>
-        </p:sp>
-        <p:sp>
-          <p:nvSpPr>
-            <p:cNvPr id="36" name="tx36"/>
-            <p:cNvSpPr/>
-            <p:nvPr/>
-          </p:nvSpPr>
-          <p:spPr>
-            <a:xfrm>
-              <a:off x="3879271" y="5925448"/>
-              <a:ext cx="1676186" cy="100218"/>
+              <a:off x="2928340" y="5925448"/>
+              <a:ext cx="3578047" cy="100218"/>
             </a:xfrm>
             <a:prstGeom prst="rect">
               <a:avLst/>
@@ -5069,14 +5007,14 @@
                   <a:latin typeface="Helvetica"/>
                   <a:cs typeface="Helvetica"/>
                 </a:rPr>
-                <a:t>CKD-EPI Cr-Cys / CG ratio</a:t>
+                <a:t>eGFR difference (%): 100 × (CKD-EPI Cr-Cys − CG) / CG</a:t>
               </a:r>
             </a:p>
           </p:txBody>
         </p:sp>
         <p:sp>
           <p:nvSpPr>
-            <p:cNvPr id="37" name="tx37"/>
+            <p:cNvPr id="35" name="tx35"/>
             <p:cNvSpPr/>
             <p:nvPr/>
           </p:nvSpPr>
@@ -5122,14 +5060,14 @@
         </p:sp>
         <p:sp>
           <p:nvSpPr>
-            <p:cNvPr id="38" name="tx38"/>
+            <p:cNvPr id="36" name="tx36"/>
             <p:cNvSpPr/>
             <p:nvPr/>
           </p:nvSpPr>
           <p:spPr>
             <a:xfrm>
               <a:off x="817517" y="1896563"/>
-              <a:ext cx="6833128" cy="82021"/>
+              <a:ext cx="6985375" cy="82021"/>
             </a:xfrm>
             <a:prstGeom prst="rect">
               <a:avLst/>
@@ -5161,14 +5099,14 @@
                   <a:latin typeface="Helvetica"/>
                   <a:cs typeface="Helvetica"/>
                 </a:rPr>
-                <a:t>subHR per 0.1 ratio decline: 1.25 (0.98-1.58), p_Bonf = 0.415 (n = 6)  |  per IQR decline (Δ = 0.30): 1.91 (0.95-3.84)  |  IQR: [0.84, 1.14]</a:t>
+                <a:t>subHR per 10 % decline: 1.25 (0.98-1.58), p_Bonf = 0.415 (n = 6)  |  per IQR decline (Δ = 29.5 %): 1.91 (0.95-3.84)  |  IQR: [-15.6, 13.9] %</a:t>
               </a:r>
             </a:p>
           </p:txBody>
         </p:sp>
         <p:sp>
           <p:nvSpPr>
-            <p:cNvPr id="39" name="tx39"/>
+            <p:cNvPr id="37" name="tx37"/>
             <p:cNvSpPr/>
             <p:nvPr/>
           </p:nvSpPr>

--- a/docs/pptx/auc3/jx-auc3-linsubhr-ratio-akikdigo.pptx
+++ b/docs/pptx/auc3/jx-auc3-linsubhr-ratio-akikdigo.pptx
@@ -2265,34 +2265,26 @@
         </p:sp>
         <p:sp>
           <p:nvSpPr>
-            <p:cNvPr id="4" name="pl4"/>
+            <p:cNvPr id="4" name="rc4"/>
             <p:cNvSpPr/>
             <p:nvPr/>
           </p:nvSpPr>
           <p:spPr>
             <a:xfrm>
-              <a:off x="817517" y="5142518"/>
-              <a:ext cx="7799693" cy="0"/>
+              <a:off x="457200" y="1600200"/>
+              <a:ext cx="8229600" cy="4525962"/>
             </a:xfrm>
-            <a:custGeom>
+            <a:prstGeom prst="rect">
               <a:avLst/>
-              <a:pathLst>
-                <a:path w="7799693" h="0">
-                  <a:moveTo>
-                    <a:pt x="0" y="0"/>
-                  </a:moveTo>
-                  <a:lnTo>
-                    <a:pt x="7799693" y="0"/>
-                  </a:lnTo>
-                  <a:lnTo>
-                    <a:pt x="7799693" y="0"/>
-                  </a:lnTo>
-                </a:path>
-              </a:pathLst>
-            </a:custGeom>
-            <a:ln w="6775" cap="flat">
+            </a:prstGeom>
+            <a:solidFill>
+              <a:srgbClr val="FFFFFF">
+                <a:alpha val="100000"/>
+              </a:srgbClr>
+            </a:solidFill>
+            <a:ln w="13550" cap="rnd">
               <a:solidFill>
-                <a:srgbClr val="EBEBEB">
+                <a:srgbClr val="FFFFFF">
                   <a:alpha val="100000"/>
                 </a:srgbClr>
               </a:solidFill>
@@ -2314,21 +2306,21 @@
           </p:nvSpPr>
           <p:spPr>
             <a:xfrm>
-              <a:off x="817517" y="4313054"/>
-              <a:ext cx="7799693" cy="0"/>
+              <a:off x="887106" y="3250627"/>
+              <a:ext cx="7660515" cy="0"/>
             </a:xfrm>
             <a:custGeom>
               <a:avLst/>
               <a:pathLst>
-                <a:path w="7799693" h="0">
+                <a:path w="7660515" h="0">
                   <a:moveTo>
                     <a:pt x="0" y="0"/>
                   </a:moveTo>
                   <a:lnTo>
-                    <a:pt x="7799693" y="0"/>
-                  </a:lnTo>
-                  <a:lnTo>
-                    <a:pt x="7799693" y="0"/>
+                    <a:pt x="7660515" y="0"/>
+                  </a:lnTo>
+                  <a:lnTo>
+                    <a:pt x="7660515" y="0"/>
                   </a:lnTo>
                 </a:path>
               </a:pathLst>
@@ -2357,21 +2349,21 @@
           </p:nvSpPr>
           <p:spPr>
             <a:xfrm>
-              <a:off x="817517" y="3483591"/>
-              <a:ext cx="7799693" cy="0"/>
+              <a:off x="887106" y="2951293"/>
+              <a:ext cx="7660515" cy="0"/>
             </a:xfrm>
             <a:custGeom>
               <a:avLst/>
               <a:pathLst>
-                <a:path w="7799693" h="0">
+                <a:path w="7660515" h="0">
                   <a:moveTo>
                     <a:pt x="0" y="0"/>
                   </a:moveTo>
                   <a:lnTo>
-                    <a:pt x="7799693" y="0"/>
-                  </a:lnTo>
-                  <a:lnTo>
-                    <a:pt x="7799693" y="0"/>
+                    <a:pt x="7660515" y="0"/>
+                  </a:lnTo>
+                  <a:lnTo>
+                    <a:pt x="7660515" y="0"/>
                   </a:lnTo>
                 </a:path>
               </a:pathLst>
@@ -2400,21 +2392,21 @@
           </p:nvSpPr>
           <p:spPr>
             <a:xfrm>
-              <a:off x="817517" y="2654127"/>
-              <a:ext cx="7799693" cy="0"/>
+              <a:off x="887106" y="2651959"/>
+              <a:ext cx="7660515" cy="0"/>
             </a:xfrm>
             <a:custGeom>
               <a:avLst/>
               <a:pathLst>
-                <a:path w="7799693" h="0">
+                <a:path w="7660515" h="0">
                   <a:moveTo>
                     <a:pt x="0" y="0"/>
                   </a:moveTo>
                   <a:lnTo>
-                    <a:pt x="7799693" y="0"/>
-                  </a:lnTo>
-                  <a:lnTo>
-                    <a:pt x="7799693" y="0"/>
+                    <a:pt x="7660515" y="0"/>
+                  </a:lnTo>
+                  <a:lnTo>
+                    <a:pt x="7660515" y="0"/>
                   </a:lnTo>
                 </a:path>
               </a:pathLst>
@@ -2443,21 +2435,21 @@
           </p:nvSpPr>
           <p:spPr>
             <a:xfrm>
-              <a:off x="1531834" y="2073503"/>
-              <a:ext cx="0" cy="3649639"/>
+              <a:off x="887106" y="2352625"/>
+              <a:ext cx="7660515" cy="0"/>
             </a:xfrm>
             <a:custGeom>
               <a:avLst/>
               <a:pathLst>
-                <a:path w="0" h="3649639">
+                <a:path w="7660515" h="0">
                   <a:moveTo>
-                    <a:pt x="0" y="3649639"/>
+                    <a:pt x="0" y="0"/>
                   </a:moveTo>
                   <a:lnTo>
-                    <a:pt x="0" y="0"/>
-                  </a:lnTo>
-                  <a:lnTo>
-                    <a:pt x="0" y="0"/>
+                    <a:pt x="7660515" y="0"/>
+                  </a:lnTo>
+                  <a:lnTo>
+                    <a:pt x="7660515" y="0"/>
                   </a:lnTo>
                 </a:path>
               </a:pathLst>
@@ -2486,15 +2478,15 @@
           </p:nvSpPr>
           <p:spPr>
             <a:xfrm>
-              <a:off x="3586410" y="2073503"/>
-              <a:ext cx="0" cy="3649639"/>
+              <a:off x="1588677" y="2143092"/>
+              <a:ext cx="0" cy="1317069"/>
             </a:xfrm>
             <a:custGeom>
               <a:avLst/>
               <a:pathLst>
-                <a:path w="0" h="3649639">
+                <a:path w="0" h="1317069">
                   <a:moveTo>
-                    <a:pt x="0" y="3649639"/>
+                    <a:pt x="0" y="1317069"/>
                   </a:moveTo>
                   <a:lnTo>
                     <a:pt x="0" y="0"/>
@@ -2529,15 +2521,15 @@
           </p:nvSpPr>
           <p:spPr>
             <a:xfrm>
-              <a:off x="5640985" y="2073503"/>
-              <a:ext cx="0" cy="3649639"/>
+              <a:off x="3606590" y="2143092"/>
+              <a:ext cx="0" cy="1317069"/>
             </a:xfrm>
             <a:custGeom>
               <a:avLst/>
               <a:pathLst>
-                <a:path w="0" h="3649639">
+                <a:path w="0" h="1317069">
                   <a:moveTo>
-                    <a:pt x="0" y="3649639"/>
+                    <a:pt x="0" y="1317069"/>
                   </a:moveTo>
                   <a:lnTo>
                     <a:pt x="0" y="0"/>
@@ -2572,15 +2564,15 @@
           </p:nvSpPr>
           <p:spPr>
             <a:xfrm>
-              <a:off x="7695561" y="2073503"/>
-              <a:ext cx="0" cy="3649639"/>
+              <a:off x="5624504" y="2143092"/>
+              <a:ext cx="0" cy="1317069"/>
             </a:xfrm>
             <a:custGeom>
               <a:avLst/>
               <a:pathLst>
-                <a:path w="0" h="3649639">
+                <a:path w="0" h="1317069">
                   <a:moveTo>
-                    <a:pt x="0" y="3649639"/>
+                    <a:pt x="0" y="1317069"/>
                   </a:moveTo>
                   <a:lnTo>
                     <a:pt x="0" y="0"/>
@@ -2615,26 +2607,26 @@
           </p:nvSpPr>
           <p:spPr>
             <a:xfrm>
-              <a:off x="817517" y="5557249"/>
-              <a:ext cx="7799693" cy="0"/>
+              <a:off x="7642418" y="2143092"/>
+              <a:ext cx="0" cy="1317069"/>
             </a:xfrm>
             <a:custGeom>
               <a:avLst/>
               <a:pathLst>
-                <a:path w="7799693" h="0">
+                <a:path w="0" h="1317069">
                   <a:moveTo>
+                    <a:pt x="0" y="1317069"/>
+                  </a:moveTo>
+                  <a:lnTo>
                     <a:pt x="0" y="0"/>
-                  </a:moveTo>
-                  <a:lnTo>
-                    <a:pt x="7799693" y="0"/>
-                  </a:lnTo>
-                  <a:lnTo>
-                    <a:pt x="7799693" y="0"/>
+                  </a:lnTo>
+                  <a:lnTo>
+                    <a:pt x="0" y="0"/>
                   </a:lnTo>
                 </a:path>
               </a:pathLst>
             </a:custGeom>
-            <a:ln w="13550" cap="flat">
+            <a:ln w="6775" cap="flat">
               <a:solidFill>
                 <a:srgbClr val="EBEBEB">
                   <a:alpha val="100000"/>
@@ -2658,21 +2650,21 @@
           </p:nvSpPr>
           <p:spPr>
             <a:xfrm>
-              <a:off x="817517" y="4727786"/>
-              <a:ext cx="7799693" cy="0"/>
+              <a:off x="887106" y="3400294"/>
+              <a:ext cx="7660515" cy="0"/>
             </a:xfrm>
             <a:custGeom>
               <a:avLst/>
               <a:pathLst>
-                <a:path w="7799693" h="0">
+                <a:path w="7660515" h="0">
                   <a:moveTo>
                     <a:pt x="0" y="0"/>
                   </a:moveTo>
                   <a:lnTo>
-                    <a:pt x="7799693" y="0"/>
-                  </a:lnTo>
-                  <a:lnTo>
-                    <a:pt x="7799693" y="0"/>
+                    <a:pt x="7660515" y="0"/>
+                  </a:lnTo>
+                  <a:lnTo>
+                    <a:pt x="7660515" y="0"/>
                   </a:lnTo>
                 </a:path>
               </a:pathLst>
@@ -2701,21 +2693,21 @@
           </p:nvSpPr>
           <p:spPr>
             <a:xfrm>
-              <a:off x="817517" y="3898322"/>
-              <a:ext cx="7799693" cy="0"/>
+              <a:off x="887106" y="3100960"/>
+              <a:ext cx="7660515" cy="0"/>
             </a:xfrm>
             <a:custGeom>
               <a:avLst/>
               <a:pathLst>
-                <a:path w="7799693" h="0">
+                <a:path w="7660515" h="0">
                   <a:moveTo>
                     <a:pt x="0" y="0"/>
                   </a:moveTo>
                   <a:lnTo>
-                    <a:pt x="7799693" y="0"/>
-                  </a:lnTo>
-                  <a:lnTo>
-                    <a:pt x="7799693" y="0"/>
+                    <a:pt x="7660515" y="0"/>
+                  </a:lnTo>
+                  <a:lnTo>
+                    <a:pt x="7660515" y="0"/>
                   </a:lnTo>
                 </a:path>
               </a:pathLst>
@@ -2744,21 +2736,21 @@
           </p:nvSpPr>
           <p:spPr>
             <a:xfrm>
-              <a:off x="817517" y="3068859"/>
-              <a:ext cx="7799693" cy="0"/>
+              <a:off x="887106" y="2801626"/>
+              <a:ext cx="7660515" cy="0"/>
             </a:xfrm>
             <a:custGeom>
               <a:avLst/>
               <a:pathLst>
-                <a:path w="7799693" h="0">
+                <a:path w="7660515" h="0">
                   <a:moveTo>
                     <a:pt x="0" y="0"/>
                   </a:moveTo>
                   <a:lnTo>
-                    <a:pt x="7799693" y="0"/>
-                  </a:lnTo>
-                  <a:lnTo>
-                    <a:pt x="7799693" y="0"/>
+                    <a:pt x="7660515" y="0"/>
+                  </a:lnTo>
+                  <a:lnTo>
+                    <a:pt x="7660515" y="0"/>
                   </a:lnTo>
                 </a:path>
               </a:pathLst>
@@ -2787,21 +2779,21 @@
           </p:nvSpPr>
           <p:spPr>
             <a:xfrm>
-              <a:off x="817517" y="2239395"/>
-              <a:ext cx="7799693" cy="0"/>
+              <a:off x="887106" y="2502292"/>
+              <a:ext cx="7660515" cy="0"/>
             </a:xfrm>
             <a:custGeom>
               <a:avLst/>
               <a:pathLst>
-                <a:path w="7799693" h="0">
+                <a:path w="7660515" h="0">
                   <a:moveTo>
                     <a:pt x="0" y="0"/>
                   </a:moveTo>
                   <a:lnTo>
-                    <a:pt x="7799693" y="0"/>
-                  </a:lnTo>
-                  <a:lnTo>
-                    <a:pt x="7799693" y="0"/>
+                    <a:pt x="7660515" y="0"/>
+                  </a:lnTo>
+                  <a:lnTo>
+                    <a:pt x="7660515" y="0"/>
                   </a:lnTo>
                 </a:path>
               </a:pathLst>
@@ -2830,21 +2822,21 @@
           </p:nvSpPr>
           <p:spPr>
             <a:xfrm>
-              <a:off x="2559122" y="2073503"/>
-              <a:ext cx="0" cy="3649639"/>
+              <a:off x="887106" y="2202958"/>
+              <a:ext cx="7660515" cy="0"/>
             </a:xfrm>
             <a:custGeom>
               <a:avLst/>
               <a:pathLst>
-                <a:path w="0" h="3649639">
+                <a:path w="7660515" h="0">
                   <a:moveTo>
-                    <a:pt x="0" y="3649639"/>
+                    <a:pt x="0" y="0"/>
                   </a:moveTo>
                   <a:lnTo>
-                    <a:pt x="0" y="0"/>
-                  </a:lnTo>
-                  <a:lnTo>
-                    <a:pt x="0" y="0"/>
+                    <a:pt x="7660515" y="0"/>
+                  </a:lnTo>
+                  <a:lnTo>
+                    <a:pt x="7660515" y="0"/>
                   </a:lnTo>
                 </a:path>
               </a:pathLst>
@@ -2873,15 +2865,15 @@
           </p:nvSpPr>
           <p:spPr>
             <a:xfrm>
-              <a:off x="4613698" y="2073503"/>
-              <a:ext cx="0" cy="3649639"/>
+              <a:off x="2597634" y="2143092"/>
+              <a:ext cx="0" cy="1317069"/>
             </a:xfrm>
             <a:custGeom>
               <a:avLst/>
               <a:pathLst>
-                <a:path w="0" h="3649639">
+                <a:path w="0" h="1317069">
                   <a:moveTo>
-                    <a:pt x="0" y="3649639"/>
+                    <a:pt x="0" y="1317069"/>
                   </a:moveTo>
                   <a:lnTo>
                     <a:pt x="0" y="0"/>
@@ -2916,15 +2908,15 @@
           </p:nvSpPr>
           <p:spPr>
             <a:xfrm>
-              <a:off x="6668273" y="2073503"/>
-              <a:ext cx="0" cy="3649639"/>
+              <a:off x="4615547" y="2143092"/>
+              <a:ext cx="0" cy="1317069"/>
             </a:xfrm>
             <a:custGeom>
               <a:avLst/>
               <a:pathLst>
-                <a:path w="0" h="3649639">
+                <a:path w="0" h="1317069">
                   <a:moveTo>
-                    <a:pt x="0" y="3649639"/>
+                    <a:pt x="0" y="1317069"/>
                   </a:moveTo>
                   <a:lnTo>
                     <a:pt x="0" y="0"/>
@@ -2953,591 +2945,634 @@
         </p:sp>
         <p:sp>
           <p:nvSpPr>
-            <p:cNvPr id="20" name="pg20"/>
+            <p:cNvPr id="20" name="pl20"/>
             <p:cNvSpPr/>
             <p:nvPr/>
           </p:nvSpPr>
           <p:spPr>
             <a:xfrm>
-              <a:off x="1172049" y="2073503"/>
-              <a:ext cx="7090630" cy="3382614"/>
+              <a:off x="6633461" y="2143092"/>
+              <a:ext cx="0" cy="1317069"/>
             </a:xfrm>
             <a:custGeom>
               <a:avLst/>
               <a:pathLst>
-                <a:path w="7090630" h="3382614">
+                <a:path w="0" h="1317069">
                   <a:moveTo>
-                    <a:pt x="708906" y="0"/>
+                    <a:pt x="0" y="1317069"/>
                   </a:moveTo>
                   <a:lnTo>
-                    <a:pt x="716225" y="14366"/>
-                  </a:lnTo>
-                  <a:lnTo>
-                    <a:pt x="787847" y="149477"/>
-                  </a:lnTo>
-                  <a:lnTo>
-                    <a:pt x="859470" y="279327"/>
-                  </a:lnTo>
-                  <a:lnTo>
-                    <a:pt x="931092" y="404119"/>
-                  </a:lnTo>
-                  <a:lnTo>
-                    <a:pt x="1002715" y="524052"/>
-                  </a:lnTo>
-                  <a:lnTo>
-                    <a:pt x="1074337" y="639314"/>
-                  </a:lnTo>
-                  <a:lnTo>
-                    <a:pt x="1145960" y="750087"/>
-                  </a:lnTo>
-                  <a:lnTo>
-                    <a:pt x="1217582" y="856546"/>
-                  </a:lnTo>
-                  <a:lnTo>
-                    <a:pt x="1289205" y="958859"/>
-                  </a:lnTo>
-                  <a:lnTo>
-                    <a:pt x="1360827" y="1057188"/>
-                  </a:lnTo>
-                  <a:lnTo>
-                    <a:pt x="1432450" y="1151688"/>
-                  </a:lnTo>
-                  <a:lnTo>
-                    <a:pt x="1504073" y="1242507"/>
-                  </a:lnTo>
-                  <a:lnTo>
-                    <a:pt x="1575695" y="1329790"/>
-                  </a:lnTo>
-                  <a:lnTo>
-                    <a:pt x="1647318" y="1413673"/>
-                  </a:lnTo>
-                  <a:lnTo>
-                    <a:pt x="1718940" y="1494290"/>
-                  </a:lnTo>
-                  <a:lnTo>
-                    <a:pt x="1790563" y="1571767"/>
-                  </a:lnTo>
-                  <a:lnTo>
-                    <a:pt x="1862185" y="1646227"/>
-                  </a:lnTo>
-                  <a:lnTo>
-                    <a:pt x="1933808" y="1717787"/>
-                  </a:lnTo>
-                  <a:lnTo>
-                    <a:pt x="2005430" y="1786560"/>
-                  </a:lnTo>
-                  <a:lnTo>
-                    <a:pt x="2077053" y="1852655"/>
-                  </a:lnTo>
-                  <a:lnTo>
-                    <a:pt x="2148675" y="1916176"/>
-                  </a:lnTo>
-                  <a:lnTo>
-                    <a:pt x="2220298" y="1977223"/>
-                  </a:lnTo>
-                  <a:lnTo>
-                    <a:pt x="2291920" y="2035893"/>
-                  </a:lnTo>
-                  <a:lnTo>
-                    <a:pt x="2363543" y="2092278"/>
-                  </a:lnTo>
-                  <a:lnTo>
-                    <a:pt x="2435165" y="2146467"/>
-                  </a:lnTo>
-                  <a:lnTo>
-                    <a:pt x="2506788" y="2198546"/>
-                  </a:lnTo>
-                  <a:lnTo>
-                    <a:pt x="2578410" y="2248597"/>
-                  </a:lnTo>
-                  <a:lnTo>
-                    <a:pt x="2650033" y="2296698"/>
-                  </a:lnTo>
-                  <a:lnTo>
-                    <a:pt x="2721655" y="2342927"/>
-                  </a:lnTo>
-                  <a:lnTo>
-                    <a:pt x="2793278" y="2387355"/>
-                  </a:lnTo>
-                  <a:lnTo>
-                    <a:pt x="2864901" y="2430052"/>
-                  </a:lnTo>
-                  <a:lnTo>
-                    <a:pt x="2936523" y="2471087"/>
-                  </a:lnTo>
-                  <a:lnTo>
-                    <a:pt x="3008146" y="2510524"/>
-                  </a:lnTo>
-                  <a:lnTo>
-                    <a:pt x="3079768" y="2548425"/>
-                  </a:lnTo>
-                  <a:lnTo>
-                    <a:pt x="3151391" y="2584850"/>
-                  </a:lnTo>
-                  <a:lnTo>
-                    <a:pt x="3223013" y="2619857"/>
-                  </a:lnTo>
-                  <a:lnTo>
-                    <a:pt x="3294636" y="2653500"/>
-                  </a:lnTo>
-                  <a:lnTo>
-                    <a:pt x="3366258" y="2653064"/>
-                  </a:lnTo>
-                  <a:lnTo>
-                    <a:pt x="3437881" y="2651813"/>
-                  </a:lnTo>
-                  <a:lnTo>
-                    <a:pt x="3509503" y="2650561"/>
-                  </a:lnTo>
-                  <a:lnTo>
-                    <a:pt x="3581126" y="2649307"/>
-                  </a:lnTo>
-                  <a:lnTo>
-                    <a:pt x="3652748" y="2648051"/>
-                  </a:lnTo>
-                  <a:lnTo>
-                    <a:pt x="3724371" y="2646793"/>
-                  </a:lnTo>
-                  <a:lnTo>
-                    <a:pt x="3795993" y="2645533"/>
-                  </a:lnTo>
-                  <a:lnTo>
-                    <a:pt x="3867616" y="2644271"/>
-                  </a:lnTo>
-                  <a:lnTo>
-                    <a:pt x="3939238" y="2643007"/>
-                  </a:lnTo>
-                  <a:lnTo>
-                    <a:pt x="4010861" y="2641742"/>
-                  </a:lnTo>
-                  <a:lnTo>
-                    <a:pt x="4082483" y="2640474"/>
-                  </a:lnTo>
-                  <a:lnTo>
-                    <a:pt x="4154106" y="2639205"/>
-                  </a:lnTo>
-                  <a:lnTo>
-                    <a:pt x="4225729" y="2637933"/>
-                  </a:lnTo>
-                  <a:lnTo>
-                    <a:pt x="4297351" y="2636660"/>
-                  </a:lnTo>
-                  <a:lnTo>
-                    <a:pt x="4368974" y="2635385"/>
-                  </a:lnTo>
-                  <a:lnTo>
-                    <a:pt x="4440596" y="2634108"/>
-                  </a:lnTo>
-                  <a:lnTo>
-                    <a:pt x="4512219" y="2632829"/>
-                  </a:lnTo>
-                  <a:lnTo>
-                    <a:pt x="4583841" y="2631548"/>
-                  </a:lnTo>
-                  <a:lnTo>
-                    <a:pt x="4655464" y="2630265"/>
-                  </a:lnTo>
-                  <a:lnTo>
-                    <a:pt x="4727086" y="2628980"/>
-                  </a:lnTo>
-                  <a:lnTo>
-                    <a:pt x="4798709" y="2627693"/>
-                  </a:lnTo>
-                  <a:lnTo>
-                    <a:pt x="4870331" y="2626405"/>
-                  </a:lnTo>
-                  <a:lnTo>
-                    <a:pt x="4941954" y="2625114"/>
-                  </a:lnTo>
-                  <a:lnTo>
-                    <a:pt x="5013576" y="2623821"/>
-                  </a:lnTo>
-                  <a:lnTo>
-                    <a:pt x="5085199" y="2622527"/>
-                  </a:lnTo>
-                  <a:lnTo>
-                    <a:pt x="5156821" y="2621230"/>
-                  </a:lnTo>
-                  <a:lnTo>
-                    <a:pt x="5228444" y="2619932"/>
-                  </a:lnTo>
-                  <a:lnTo>
-                    <a:pt x="5300066" y="2618632"/>
-                  </a:lnTo>
-                  <a:lnTo>
-                    <a:pt x="5371689" y="2617329"/>
-                  </a:lnTo>
-                  <a:lnTo>
-                    <a:pt x="5443311" y="2616025"/>
-                  </a:lnTo>
-                  <a:lnTo>
-                    <a:pt x="5514934" y="2614719"/>
-                  </a:lnTo>
-                  <a:lnTo>
-                    <a:pt x="5586557" y="2613411"/>
-                  </a:lnTo>
-                  <a:lnTo>
-                    <a:pt x="5658179" y="2612100"/>
-                  </a:lnTo>
-                  <a:lnTo>
-                    <a:pt x="5729802" y="2610788"/>
-                  </a:lnTo>
-                  <a:lnTo>
-                    <a:pt x="5801424" y="2609474"/>
-                  </a:lnTo>
-                  <a:lnTo>
-                    <a:pt x="5873047" y="2608158"/>
-                  </a:lnTo>
-                  <a:lnTo>
-                    <a:pt x="5944669" y="2606840"/>
-                  </a:lnTo>
-                  <a:lnTo>
-                    <a:pt x="6016292" y="2605520"/>
-                  </a:lnTo>
-                  <a:lnTo>
-                    <a:pt x="6087914" y="2604198"/>
-                  </a:lnTo>
-                  <a:lnTo>
-                    <a:pt x="6159537" y="2602874"/>
-                  </a:lnTo>
-                  <a:lnTo>
-                    <a:pt x="6231159" y="2601548"/>
-                  </a:lnTo>
-                  <a:lnTo>
-                    <a:pt x="6302782" y="2600220"/>
-                  </a:lnTo>
-                  <a:lnTo>
-                    <a:pt x="6374404" y="2598890"/>
-                  </a:lnTo>
-                  <a:lnTo>
-                    <a:pt x="6446027" y="2597558"/>
-                  </a:lnTo>
-                  <a:lnTo>
-                    <a:pt x="6517649" y="2596224"/>
-                  </a:lnTo>
-                  <a:lnTo>
-                    <a:pt x="6589272" y="2594888"/>
-                  </a:lnTo>
-                  <a:lnTo>
-                    <a:pt x="6660894" y="2593550"/>
-                  </a:lnTo>
-                  <a:lnTo>
-                    <a:pt x="6732517" y="2592209"/>
-                  </a:lnTo>
-                  <a:lnTo>
-                    <a:pt x="6804139" y="2590867"/>
-                  </a:lnTo>
-                  <a:lnTo>
-                    <a:pt x="6875762" y="2589523"/>
-                  </a:lnTo>
-                  <a:lnTo>
-                    <a:pt x="6947385" y="2588177"/>
-                  </a:lnTo>
-                  <a:lnTo>
-                    <a:pt x="7019007" y="2586829"/>
-                  </a:lnTo>
-                  <a:lnTo>
-                    <a:pt x="7090630" y="2585479"/>
-                  </a:lnTo>
-                  <a:lnTo>
-                    <a:pt x="7090630" y="3382614"/>
-                  </a:lnTo>
-                  <a:lnTo>
-                    <a:pt x="7019007" y="3378516"/>
-                  </a:lnTo>
-                  <a:lnTo>
-                    <a:pt x="6947385" y="3374252"/>
-                  </a:lnTo>
-                  <a:lnTo>
-                    <a:pt x="6875762" y="3369815"/>
-                  </a:lnTo>
-                  <a:lnTo>
-                    <a:pt x="6804139" y="3365198"/>
-                  </a:lnTo>
-                  <a:lnTo>
-                    <a:pt x="6732517" y="3360394"/>
-                  </a:lnTo>
-                  <a:lnTo>
-                    <a:pt x="6660894" y="3355396"/>
-                  </a:lnTo>
-                  <a:lnTo>
-                    <a:pt x="6589272" y="3350195"/>
-                  </a:lnTo>
-                  <a:lnTo>
-                    <a:pt x="6517649" y="3344783"/>
-                  </a:lnTo>
-                  <a:lnTo>
-                    <a:pt x="6446027" y="3339152"/>
-                  </a:lnTo>
-                  <a:lnTo>
-                    <a:pt x="6374404" y="3333292"/>
-                  </a:lnTo>
-                  <a:lnTo>
-                    <a:pt x="6302782" y="3327196"/>
-                  </a:lnTo>
-                  <a:lnTo>
-                    <a:pt x="6231159" y="3320852"/>
-                  </a:lnTo>
-                  <a:lnTo>
-                    <a:pt x="6159537" y="3314251"/>
-                  </a:lnTo>
-                  <a:lnTo>
-                    <a:pt x="6087914" y="3307383"/>
-                  </a:lnTo>
-                  <a:lnTo>
-                    <a:pt x="6016292" y="3300236"/>
-                  </a:lnTo>
-                  <a:lnTo>
-                    <a:pt x="5944669" y="3292800"/>
-                  </a:lnTo>
-                  <a:lnTo>
-                    <a:pt x="5873047" y="3285063"/>
-                  </a:lnTo>
-                  <a:lnTo>
-                    <a:pt x="5801424" y="3277012"/>
-                  </a:lnTo>
-                  <a:lnTo>
-                    <a:pt x="5729802" y="3268634"/>
-                  </a:lnTo>
-                  <a:lnTo>
-                    <a:pt x="5658179" y="3259918"/>
-                  </a:lnTo>
-                  <a:lnTo>
-                    <a:pt x="5586557" y="3250848"/>
-                  </a:lnTo>
-                  <a:lnTo>
-                    <a:pt x="5514934" y="3241410"/>
-                  </a:lnTo>
-                  <a:lnTo>
-                    <a:pt x="5443311" y="3231590"/>
-                  </a:lnTo>
-                  <a:lnTo>
-                    <a:pt x="5371689" y="3221372"/>
-                  </a:lnTo>
-                  <a:lnTo>
-                    <a:pt x="5300066" y="3210740"/>
-                  </a:lnTo>
-                  <a:lnTo>
-                    <a:pt x="5228444" y="3199678"/>
-                  </a:lnTo>
-                  <a:lnTo>
-                    <a:pt x="5156821" y="3188167"/>
-                  </a:lnTo>
-                  <a:lnTo>
-                    <a:pt x="5085199" y="3176189"/>
-                  </a:lnTo>
-                  <a:lnTo>
-                    <a:pt x="5013576" y="3163726"/>
-                  </a:lnTo>
-                  <a:lnTo>
-                    <a:pt x="4941954" y="3150759"/>
-                  </a:lnTo>
-                  <a:lnTo>
-                    <a:pt x="4870331" y="3137265"/>
-                  </a:lnTo>
-                  <a:lnTo>
-                    <a:pt x="4798709" y="3123225"/>
-                  </a:lnTo>
-                  <a:lnTo>
-                    <a:pt x="4727086" y="3108616"/>
-                  </a:lnTo>
-                  <a:lnTo>
-                    <a:pt x="4655464" y="3093415"/>
-                  </a:lnTo>
-                  <a:lnTo>
-                    <a:pt x="4583841" y="3077598"/>
-                  </a:lnTo>
-                  <a:lnTo>
-                    <a:pt x="4512219" y="3061140"/>
-                  </a:lnTo>
-                  <a:lnTo>
-                    <a:pt x="4440596" y="3044015"/>
-                  </a:lnTo>
-                  <a:lnTo>
-                    <a:pt x="4368974" y="3026197"/>
-                  </a:lnTo>
-                  <a:lnTo>
-                    <a:pt x="4297351" y="3007656"/>
-                  </a:lnTo>
-                  <a:lnTo>
-                    <a:pt x="4225729" y="2988364"/>
-                  </a:lnTo>
-                  <a:lnTo>
-                    <a:pt x="4154106" y="2968290"/>
-                  </a:lnTo>
-                  <a:lnTo>
-                    <a:pt x="4082483" y="2947402"/>
-                  </a:lnTo>
-                  <a:lnTo>
-                    <a:pt x="4010861" y="2925669"/>
-                  </a:lnTo>
-                  <a:lnTo>
-                    <a:pt x="3939238" y="2903054"/>
-                  </a:lnTo>
-                  <a:lnTo>
-                    <a:pt x="3867616" y="2879524"/>
-                  </a:lnTo>
-                  <a:lnTo>
-                    <a:pt x="3795993" y="2855039"/>
-                  </a:lnTo>
-                  <a:lnTo>
-                    <a:pt x="3724371" y="2829563"/>
-                  </a:lnTo>
-                  <a:lnTo>
-                    <a:pt x="3652748" y="2803054"/>
-                  </a:lnTo>
-                  <a:lnTo>
-                    <a:pt x="3581126" y="2775471"/>
-                  </a:lnTo>
-                  <a:lnTo>
-                    <a:pt x="3509503" y="2746770"/>
-                  </a:lnTo>
-                  <a:lnTo>
-                    <a:pt x="3437881" y="2716907"/>
-                  </a:lnTo>
-                  <a:lnTo>
-                    <a:pt x="3366258" y="2685833"/>
-                  </a:lnTo>
-                  <a:lnTo>
-                    <a:pt x="3294636" y="2654312"/>
-                  </a:lnTo>
-                  <a:lnTo>
-                    <a:pt x="3223013" y="2655559"/>
-                  </a:lnTo>
-                  <a:lnTo>
-                    <a:pt x="3151391" y="2656804"/>
-                  </a:lnTo>
-                  <a:lnTo>
-                    <a:pt x="3079768" y="2658047"/>
-                  </a:lnTo>
-                  <a:lnTo>
-                    <a:pt x="3008146" y="2659288"/>
-                  </a:lnTo>
-                  <a:lnTo>
-                    <a:pt x="2936523" y="2660527"/>
-                  </a:lnTo>
-                  <a:lnTo>
-                    <a:pt x="2864901" y="2661765"/>
-                  </a:lnTo>
-                  <a:lnTo>
-                    <a:pt x="2793278" y="2663000"/>
-                  </a:lnTo>
-                  <a:lnTo>
-                    <a:pt x="2721655" y="2664234"/>
-                  </a:lnTo>
-                  <a:lnTo>
-                    <a:pt x="2650033" y="2665466"/>
-                  </a:lnTo>
-                  <a:lnTo>
-                    <a:pt x="2578410" y="2666696"/>
-                  </a:lnTo>
-                  <a:lnTo>
-                    <a:pt x="2506788" y="2667924"/>
-                  </a:lnTo>
-                  <a:lnTo>
-                    <a:pt x="2435165" y="2669150"/>
-                  </a:lnTo>
-                  <a:lnTo>
-                    <a:pt x="2363543" y="2670375"/>
-                  </a:lnTo>
-                  <a:lnTo>
-                    <a:pt x="2291920" y="2671597"/>
-                  </a:lnTo>
-                  <a:lnTo>
-                    <a:pt x="2220298" y="2672818"/>
-                  </a:lnTo>
-                  <a:lnTo>
-                    <a:pt x="2148675" y="2674037"/>
-                  </a:lnTo>
-                  <a:lnTo>
-                    <a:pt x="2077053" y="2675254"/>
-                  </a:lnTo>
-                  <a:lnTo>
-                    <a:pt x="2005430" y="2676469"/>
-                  </a:lnTo>
-                  <a:lnTo>
-                    <a:pt x="1933808" y="2677683"/>
-                  </a:lnTo>
-                  <a:lnTo>
-                    <a:pt x="1862185" y="2678894"/>
-                  </a:lnTo>
-                  <a:lnTo>
-                    <a:pt x="1790563" y="2680104"/>
-                  </a:lnTo>
-                  <a:lnTo>
-                    <a:pt x="1718940" y="2681312"/>
-                  </a:lnTo>
-                  <a:lnTo>
-                    <a:pt x="1647318" y="2682518"/>
-                  </a:lnTo>
-                  <a:lnTo>
-                    <a:pt x="1575695" y="2683722"/>
-                  </a:lnTo>
-                  <a:lnTo>
-                    <a:pt x="1504073" y="2684925"/>
-                  </a:lnTo>
-                  <a:lnTo>
-                    <a:pt x="1432450" y="2686126"/>
-                  </a:lnTo>
-                  <a:lnTo>
-                    <a:pt x="1360827" y="2687325"/>
-                  </a:lnTo>
-                  <a:lnTo>
-                    <a:pt x="1289205" y="2688522"/>
-                  </a:lnTo>
-                  <a:lnTo>
-                    <a:pt x="1217582" y="2689717"/>
-                  </a:lnTo>
-                  <a:lnTo>
-                    <a:pt x="1145960" y="2690910"/>
-                  </a:lnTo>
-                  <a:lnTo>
-                    <a:pt x="1074337" y="2692102"/>
-                  </a:lnTo>
-                  <a:lnTo>
-                    <a:pt x="1002715" y="2693292"/>
-                  </a:lnTo>
-                  <a:lnTo>
-                    <a:pt x="931092" y="2694480"/>
-                  </a:lnTo>
-                  <a:lnTo>
-                    <a:pt x="859470" y="2695667"/>
-                  </a:lnTo>
-                  <a:lnTo>
-                    <a:pt x="787847" y="2696851"/>
-                  </a:lnTo>
-                  <a:lnTo>
-                    <a:pt x="716225" y="2698034"/>
-                  </a:lnTo>
-                  <a:lnTo>
-                    <a:pt x="644602" y="2699215"/>
-                  </a:lnTo>
-                  <a:lnTo>
-                    <a:pt x="572980" y="2700394"/>
-                  </a:lnTo>
-                  <a:lnTo>
-                    <a:pt x="501357" y="2701572"/>
-                  </a:lnTo>
-                  <a:lnTo>
-                    <a:pt x="429735" y="2702747"/>
-                  </a:lnTo>
-                  <a:lnTo>
-                    <a:pt x="358112" y="2703921"/>
-                  </a:lnTo>
-                  <a:lnTo>
-                    <a:pt x="286490" y="2705093"/>
-                  </a:lnTo>
-                  <a:lnTo>
-                    <a:pt x="214867" y="2706264"/>
-                  </a:lnTo>
-                  <a:lnTo>
-                    <a:pt x="143245" y="2707432"/>
-                  </a:lnTo>
-                  <a:lnTo>
-                    <a:pt x="71622" y="2708599"/>
-                  </a:lnTo>
-                  <a:lnTo>
-                    <a:pt x="0" y="2709765"/>
+                    <a:pt x="0" y="0"/>
+                  </a:lnTo>
+                  <a:lnTo>
+                    <a:pt x="0" y="0"/>
+                  </a:lnTo>
+                </a:path>
+              </a:pathLst>
+            </a:custGeom>
+            <a:ln w="13550" cap="flat">
+              <a:solidFill>
+                <a:srgbClr val="EBEBEB">
+                  <a:alpha val="100000"/>
+                </a:srgbClr>
+              </a:solidFill>
+              <a:prstDash val="solid"/>
+              <a:round/>
+            </a:ln>
+          </p:spPr>
+          <p:txBody>
+            <a:bodyPr/>
+            <a:lstStyle/>
+            <a:p/>
+          </p:txBody>
+        </p:sp>
+        <p:sp>
+          <p:nvSpPr>
+            <p:cNvPr id="21" name="pg21"/>
+            <p:cNvSpPr/>
+            <p:nvPr/>
+          </p:nvSpPr>
+          <p:spPr>
+            <a:xfrm>
+              <a:off x="1235312" y="2143092"/>
+              <a:ext cx="6964104" cy="1220705"/>
+            </a:xfrm>
+            <a:custGeom>
+              <a:avLst/>
+              <a:pathLst>
+                <a:path w="6964104" h="1220705">
+                  <a:moveTo>
+                    <a:pt x="696256" y="0"/>
+                  </a:moveTo>
+                  <a:lnTo>
+                    <a:pt x="703444" y="5184"/>
+                  </a:lnTo>
+                  <a:lnTo>
+                    <a:pt x="773789" y="53942"/>
+                  </a:lnTo>
+                  <a:lnTo>
+                    <a:pt x="844133" y="100802"/>
+                  </a:lnTo>
+                  <a:lnTo>
+                    <a:pt x="914478" y="145837"/>
+                  </a:lnTo>
+                  <a:lnTo>
+                    <a:pt x="984822" y="189118"/>
+                  </a:lnTo>
+                  <a:lnTo>
+                    <a:pt x="1055167" y="230713"/>
+                  </a:lnTo>
+                  <a:lnTo>
+                    <a:pt x="1125511" y="270688"/>
+                  </a:lnTo>
+                  <a:lnTo>
+                    <a:pt x="1195856" y="309107"/>
+                  </a:lnTo>
+                  <a:lnTo>
+                    <a:pt x="1266200" y="346029"/>
+                  </a:lnTo>
+                  <a:lnTo>
+                    <a:pt x="1336545" y="381514"/>
+                  </a:lnTo>
+                  <a:lnTo>
+                    <a:pt x="1406889" y="415617"/>
+                  </a:lnTo>
+                  <a:lnTo>
+                    <a:pt x="1477234" y="448391"/>
+                  </a:lnTo>
+                  <a:lnTo>
+                    <a:pt x="1547578" y="479890"/>
+                  </a:lnTo>
+                  <a:lnTo>
+                    <a:pt x="1617923" y="510161"/>
+                  </a:lnTo>
+                  <a:lnTo>
+                    <a:pt x="1688267" y="539254"/>
+                  </a:lnTo>
+                  <a:lnTo>
+                    <a:pt x="1758612" y="567213"/>
+                  </a:lnTo>
+                  <a:lnTo>
+                    <a:pt x="1828956" y="594084"/>
+                  </a:lnTo>
+                  <a:lnTo>
+                    <a:pt x="1899301" y="619909"/>
+                  </a:lnTo>
+                  <a:lnTo>
+                    <a:pt x="1969645" y="644727"/>
+                  </a:lnTo>
+                  <a:lnTo>
+                    <a:pt x="2039990" y="668579"/>
+                  </a:lnTo>
+                  <a:lnTo>
+                    <a:pt x="2110334" y="691503"/>
+                  </a:lnTo>
+                  <a:lnTo>
+                    <a:pt x="2180679" y="713533"/>
+                  </a:lnTo>
+                  <a:lnTo>
+                    <a:pt x="2251023" y="734706"/>
+                  </a:lnTo>
+                  <a:lnTo>
+                    <a:pt x="2321368" y="755054"/>
+                  </a:lnTo>
+                  <a:lnTo>
+                    <a:pt x="2391712" y="774609"/>
+                  </a:lnTo>
+                  <a:lnTo>
+                    <a:pt x="2462057" y="793403"/>
+                  </a:lnTo>
+                  <a:lnTo>
+                    <a:pt x="2532401" y="811465"/>
+                  </a:lnTo>
+                  <a:lnTo>
+                    <a:pt x="2602746" y="828824"/>
+                  </a:lnTo>
+                  <a:lnTo>
+                    <a:pt x="2673090" y="845507"/>
+                  </a:lnTo>
+                  <a:lnTo>
+                    <a:pt x="2743435" y="861540"/>
+                  </a:lnTo>
+                  <a:lnTo>
+                    <a:pt x="2813779" y="876948"/>
+                  </a:lnTo>
+                  <a:lnTo>
+                    <a:pt x="2884124" y="891757"/>
+                  </a:lnTo>
+                  <a:lnTo>
+                    <a:pt x="2954468" y="905989"/>
+                  </a:lnTo>
+                  <a:lnTo>
+                    <a:pt x="3024813" y="919666"/>
+                  </a:lnTo>
+                  <a:lnTo>
+                    <a:pt x="3095157" y="932811"/>
+                  </a:lnTo>
+                  <a:lnTo>
+                    <a:pt x="3165502" y="945444"/>
+                  </a:lnTo>
+                  <a:lnTo>
+                    <a:pt x="3235846" y="957585"/>
+                  </a:lnTo>
+                  <a:lnTo>
+                    <a:pt x="3306191" y="957428"/>
+                  </a:lnTo>
+                  <a:lnTo>
+                    <a:pt x="3376535" y="956977"/>
+                  </a:lnTo>
+                  <a:lnTo>
+                    <a:pt x="3446880" y="956525"/>
+                  </a:lnTo>
+                  <a:lnTo>
+                    <a:pt x="3517224" y="956072"/>
+                  </a:lnTo>
+                  <a:lnTo>
+                    <a:pt x="3587569" y="955619"/>
+                  </a:lnTo>
+                  <a:lnTo>
+                    <a:pt x="3657913" y="955165"/>
+                  </a:lnTo>
+                  <a:lnTo>
+                    <a:pt x="3728257" y="954710"/>
+                  </a:lnTo>
+                  <a:lnTo>
+                    <a:pt x="3798602" y="954255"/>
+                  </a:lnTo>
+                  <a:lnTo>
+                    <a:pt x="3868946" y="953799"/>
+                  </a:lnTo>
+                  <a:lnTo>
+                    <a:pt x="3939291" y="953342"/>
+                  </a:lnTo>
+                  <a:lnTo>
+                    <a:pt x="4009635" y="952885"/>
+                  </a:lnTo>
+                  <a:lnTo>
+                    <a:pt x="4079980" y="952427"/>
+                  </a:lnTo>
+                  <a:lnTo>
+                    <a:pt x="4150324" y="951968"/>
+                  </a:lnTo>
+                  <a:lnTo>
+                    <a:pt x="4220669" y="951508"/>
+                  </a:lnTo>
+                  <a:lnTo>
+                    <a:pt x="4291013" y="951048"/>
+                  </a:lnTo>
+                  <a:lnTo>
+                    <a:pt x="4361358" y="950587"/>
+                  </a:lnTo>
+                  <a:lnTo>
+                    <a:pt x="4431702" y="950126"/>
+                  </a:lnTo>
+                  <a:lnTo>
+                    <a:pt x="4502047" y="949663"/>
+                  </a:lnTo>
+                  <a:lnTo>
+                    <a:pt x="4572391" y="949200"/>
+                  </a:lnTo>
+                  <a:lnTo>
+                    <a:pt x="4642736" y="948737"/>
+                  </a:lnTo>
+                  <a:lnTo>
+                    <a:pt x="4713080" y="948272"/>
+                  </a:lnTo>
+                  <a:lnTo>
+                    <a:pt x="4783425" y="947807"/>
+                  </a:lnTo>
+                  <a:lnTo>
+                    <a:pt x="4853769" y="947342"/>
+                  </a:lnTo>
+                  <a:lnTo>
+                    <a:pt x="4924114" y="946875"/>
+                  </a:lnTo>
+                  <a:lnTo>
+                    <a:pt x="4994458" y="946408"/>
+                  </a:lnTo>
+                  <a:lnTo>
+                    <a:pt x="5064803" y="945940"/>
+                  </a:lnTo>
+                  <a:lnTo>
+                    <a:pt x="5135147" y="945472"/>
+                  </a:lnTo>
+                  <a:lnTo>
+                    <a:pt x="5205492" y="945002"/>
+                  </a:lnTo>
+                  <a:lnTo>
+                    <a:pt x="5275836" y="944532"/>
+                  </a:lnTo>
+                  <a:lnTo>
+                    <a:pt x="5346181" y="944062"/>
+                  </a:lnTo>
+                  <a:lnTo>
+                    <a:pt x="5416525" y="943590"/>
+                  </a:lnTo>
+                  <a:lnTo>
+                    <a:pt x="5486870" y="943118"/>
+                  </a:lnTo>
+                  <a:lnTo>
+                    <a:pt x="5557214" y="942645"/>
+                  </a:lnTo>
+                  <a:lnTo>
+                    <a:pt x="5627559" y="942172"/>
+                  </a:lnTo>
+                  <a:lnTo>
+                    <a:pt x="5697903" y="941698"/>
+                  </a:lnTo>
+                  <a:lnTo>
+                    <a:pt x="5768248" y="941223"/>
+                  </a:lnTo>
+                  <a:lnTo>
+                    <a:pt x="5838592" y="940747"/>
+                  </a:lnTo>
+                  <a:lnTo>
+                    <a:pt x="5908937" y="940271"/>
+                  </a:lnTo>
+                  <a:lnTo>
+                    <a:pt x="5979281" y="939793"/>
+                  </a:lnTo>
+                  <a:lnTo>
+                    <a:pt x="6049626" y="939316"/>
+                  </a:lnTo>
+                  <a:lnTo>
+                    <a:pt x="6119970" y="938837"/>
+                  </a:lnTo>
+                  <a:lnTo>
+                    <a:pt x="6190315" y="938358"/>
+                  </a:lnTo>
+                  <a:lnTo>
+                    <a:pt x="6260659" y="937878"/>
+                  </a:lnTo>
+                  <a:lnTo>
+                    <a:pt x="6331004" y="937397"/>
+                  </a:lnTo>
+                  <a:lnTo>
+                    <a:pt x="6401348" y="936916"/>
+                  </a:lnTo>
+                  <a:lnTo>
+                    <a:pt x="6471693" y="936434"/>
+                  </a:lnTo>
+                  <a:lnTo>
+                    <a:pt x="6542037" y="935951"/>
+                  </a:lnTo>
+                  <a:lnTo>
+                    <a:pt x="6612382" y="935467"/>
+                  </a:lnTo>
+                  <a:lnTo>
+                    <a:pt x="6682726" y="934983"/>
+                  </a:lnTo>
+                  <a:lnTo>
+                    <a:pt x="6753071" y="934498"/>
+                  </a:lnTo>
+                  <a:lnTo>
+                    <a:pt x="6823415" y="934012"/>
+                  </a:lnTo>
+                  <a:lnTo>
+                    <a:pt x="6893760" y="933525"/>
+                  </a:lnTo>
+                  <a:lnTo>
+                    <a:pt x="6964104" y="933038"/>
+                  </a:lnTo>
+                  <a:lnTo>
+                    <a:pt x="6964104" y="1220705"/>
+                  </a:lnTo>
+                  <a:lnTo>
+                    <a:pt x="6893760" y="1219227"/>
+                  </a:lnTo>
+                  <a:lnTo>
+                    <a:pt x="6823415" y="1217688"/>
+                  </a:lnTo>
+                  <a:lnTo>
+                    <a:pt x="6753071" y="1216087"/>
+                  </a:lnTo>
+                  <a:lnTo>
+                    <a:pt x="6682726" y="1214420"/>
+                  </a:lnTo>
+                  <a:lnTo>
+                    <a:pt x="6612382" y="1212687"/>
+                  </a:lnTo>
+                  <a:lnTo>
+                    <a:pt x="6542037" y="1210883"/>
+                  </a:lnTo>
+                  <a:lnTo>
+                    <a:pt x="6471693" y="1209006"/>
+                  </a:lnTo>
+                  <a:lnTo>
+                    <a:pt x="6401348" y="1207053"/>
+                  </a:lnTo>
+                  <a:lnTo>
+                    <a:pt x="6331004" y="1205021"/>
+                  </a:lnTo>
+                  <a:lnTo>
+                    <a:pt x="6260659" y="1202907"/>
+                  </a:lnTo>
+                  <a:lnTo>
+                    <a:pt x="6190315" y="1200706"/>
+                  </a:lnTo>
+                  <a:lnTo>
+                    <a:pt x="6119970" y="1198417"/>
+                  </a:lnTo>
+                  <a:lnTo>
+                    <a:pt x="6049626" y="1196035"/>
+                  </a:lnTo>
+                  <a:lnTo>
+                    <a:pt x="5979281" y="1193556"/>
+                  </a:lnTo>
+                  <a:lnTo>
+                    <a:pt x="5908937" y="1190977"/>
+                  </a:lnTo>
+                  <a:lnTo>
+                    <a:pt x="5838592" y="1188294"/>
+                  </a:lnTo>
+                  <a:lnTo>
+                    <a:pt x="5768248" y="1185502"/>
+                  </a:lnTo>
+                  <a:lnTo>
+                    <a:pt x="5697903" y="1182596"/>
+                  </a:lnTo>
+                  <a:lnTo>
+                    <a:pt x="5627559" y="1179573"/>
+                  </a:lnTo>
+                  <a:lnTo>
+                    <a:pt x="5557214" y="1176427"/>
+                  </a:lnTo>
+                  <a:lnTo>
+                    <a:pt x="5486870" y="1173154"/>
+                  </a:lnTo>
+                  <a:lnTo>
+                    <a:pt x="5416525" y="1169748"/>
+                  </a:lnTo>
+                  <a:lnTo>
+                    <a:pt x="5346181" y="1166205"/>
+                  </a:lnTo>
+                  <a:lnTo>
+                    <a:pt x="5275836" y="1162517"/>
+                  </a:lnTo>
+                  <a:lnTo>
+                    <a:pt x="5205492" y="1158680"/>
+                  </a:lnTo>
+                  <a:lnTo>
+                    <a:pt x="5135147" y="1154688"/>
+                  </a:lnTo>
+                  <a:lnTo>
+                    <a:pt x="5064803" y="1150534"/>
+                  </a:lnTo>
+                  <a:lnTo>
+                    <a:pt x="4994458" y="1146212"/>
+                  </a:lnTo>
+                  <a:lnTo>
+                    <a:pt x="4924114" y="1141714"/>
+                  </a:lnTo>
+                  <a:lnTo>
+                    <a:pt x="4853769" y="1137034"/>
+                  </a:lnTo>
+                  <a:lnTo>
+                    <a:pt x="4783425" y="1132165"/>
+                  </a:lnTo>
+                  <a:lnTo>
+                    <a:pt x="4713080" y="1127098"/>
+                  </a:lnTo>
+                  <a:lnTo>
+                    <a:pt x="4642736" y="1121826"/>
+                  </a:lnTo>
+                  <a:lnTo>
+                    <a:pt x="4572391" y="1116340"/>
+                  </a:lnTo>
+                  <a:lnTo>
+                    <a:pt x="4502047" y="1110632"/>
+                  </a:lnTo>
+                  <a:lnTo>
+                    <a:pt x="4431702" y="1104693"/>
+                  </a:lnTo>
+                  <a:lnTo>
+                    <a:pt x="4361358" y="1098513"/>
+                  </a:lnTo>
+                  <a:lnTo>
+                    <a:pt x="4291013" y="1092083"/>
+                  </a:lnTo>
+                  <a:lnTo>
+                    <a:pt x="4220669" y="1085392"/>
+                  </a:lnTo>
+                  <a:lnTo>
+                    <a:pt x="4150324" y="1078430"/>
+                  </a:lnTo>
+                  <a:lnTo>
+                    <a:pt x="4079980" y="1071186"/>
+                  </a:lnTo>
+                  <a:lnTo>
+                    <a:pt x="4009635" y="1063648"/>
+                  </a:lnTo>
+                  <a:lnTo>
+                    <a:pt x="3939291" y="1055805"/>
+                  </a:lnTo>
+                  <a:lnTo>
+                    <a:pt x="3868946" y="1047644"/>
+                  </a:lnTo>
+                  <a:lnTo>
+                    <a:pt x="3798602" y="1039152"/>
+                  </a:lnTo>
+                  <a:lnTo>
+                    <a:pt x="3728257" y="1030316"/>
+                  </a:lnTo>
+                  <a:lnTo>
+                    <a:pt x="3657913" y="1021122"/>
+                  </a:lnTo>
+                  <a:lnTo>
+                    <a:pt x="3587569" y="1011556"/>
+                  </a:lnTo>
+                  <a:lnTo>
+                    <a:pt x="3517224" y="1001602"/>
+                  </a:lnTo>
+                  <a:lnTo>
+                    <a:pt x="3446880" y="991245"/>
+                  </a:lnTo>
+                  <a:lnTo>
+                    <a:pt x="3376535" y="980467"/>
+                  </a:lnTo>
+                  <a:lnTo>
+                    <a:pt x="3306191" y="969254"/>
+                  </a:lnTo>
+                  <a:lnTo>
+                    <a:pt x="3235846" y="957879"/>
+                  </a:lnTo>
+                  <a:lnTo>
+                    <a:pt x="3165502" y="958329"/>
+                  </a:lnTo>
+                  <a:lnTo>
+                    <a:pt x="3095157" y="958778"/>
+                  </a:lnTo>
+                  <a:lnTo>
+                    <a:pt x="3024813" y="959226"/>
+                  </a:lnTo>
+                  <a:lnTo>
+                    <a:pt x="2954468" y="959674"/>
+                  </a:lnTo>
+                  <a:lnTo>
+                    <a:pt x="2884124" y="960121"/>
+                  </a:lnTo>
+                  <a:lnTo>
+                    <a:pt x="2813779" y="960568"/>
+                  </a:lnTo>
+                  <a:lnTo>
+                    <a:pt x="2743435" y="961014"/>
+                  </a:lnTo>
+                  <a:lnTo>
+                    <a:pt x="2673090" y="961459"/>
+                  </a:lnTo>
+                  <a:lnTo>
+                    <a:pt x="2602746" y="961904"/>
+                  </a:lnTo>
+                  <a:lnTo>
+                    <a:pt x="2532401" y="962347"/>
+                  </a:lnTo>
+                  <a:lnTo>
+                    <a:pt x="2462057" y="962791"/>
+                  </a:lnTo>
+                  <a:lnTo>
+                    <a:pt x="2391712" y="963233"/>
+                  </a:lnTo>
+                  <a:lnTo>
+                    <a:pt x="2321368" y="963675"/>
+                  </a:lnTo>
+                  <a:lnTo>
+                    <a:pt x="2251023" y="964116"/>
+                  </a:lnTo>
+                  <a:lnTo>
+                    <a:pt x="2180679" y="964557"/>
+                  </a:lnTo>
+                  <a:lnTo>
+                    <a:pt x="2110334" y="964997"/>
+                  </a:lnTo>
+                  <a:lnTo>
+                    <a:pt x="2039990" y="965436"/>
+                  </a:lnTo>
+                  <a:lnTo>
+                    <a:pt x="1969645" y="965874"/>
+                  </a:lnTo>
+                  <a:lnTo>
+                    <a:pt x="1899301" y="966312"/>
+                  </a:lnTo>
+                  <a:lnTo>
+                    <a:pt x="1828956" y="966750"/>
+                  </a:lnTo>
+                  <a:lnTo>
+                    <a:pt x="1758612" y="967186"/>
+                  </a:lnTo>
+                  <a:lnTo>
+                    <a:pt x="1688267" y="967622"/>
+                  </a:lnTo>
+                  <a:lnTo>
+                    <a:pt x="1617923" y="968057"/>
+                  </a:lnTo>
+                  <a:lnTo>
+                    <a:pt x="1547578" y="968492"/>
+                  </a:lnTo>
+                  <a:lnTo>
+                    <a:pt x="1477234" y="968926"/>
+                  </a:lnTo>
+                  <a:lnTo>
+                    <a:pt x="1406889" y="969359"/>
+                  </a:lnTo>
+                  <a:lnTo>
+                    <a:pt x="1336545" y="969792"/>
+                  </a:lnTo>
+                  <a:lnTo>
+                    <a:pt x="1266200" y="970224"/>
+                  </a:lnTo>
+                  <a:lnTo>
+                    <a:pt x="1195856" y="970655"/>
+                  </a:lnTo>
+                  <a:lnTo>
+                    <a:pt x="1125511" y="971086"/>
+                  </a:lnTo>
+                  <a:lnTo>
+                    <a:pt x="1055167" y="971516"/>
+                  </a:lnTo>
+                  <a:lnTo>
+                    <a:pt x="984822" y="971945"/>
+                  </a:lnTo>
+                  <a:lnTo>
+                    <a:pt x="914478" y="972374"/>
+                  </a:lnTo>
+                  <a:lnTo>
+                    <a:pt x="844133" y="972802"/>
+                  </a:lnTo>
+                  <a:lnTo>
+                    <a:pt x="773789" y="973230"/>
+                  </a:lnTo>
+                  <a:lnTo>
+                    <a:pt x="703444" y="973657"/>
+                  </a:lnTo>
+                  <a:lnTo>
+                    <a:pt x="633100" y="974083"/>
+                  </a:lnTo>
+                  <a:lnTo>
+                    <a:pt x="562755" y="974508"/>
+                  </a:lnTo>
+                  <a:lnTo>
+                    <a:pt x="492411" y="974933"/>
+                  </a:lnTo>
+                  <a:lnTo>
+                    <a:pt x="422066" y="975358"/>
+                  </a:lnTo>
+                  <a:lnTo>
+                    <a:pt x="351722" y="975781"/>
+                  </a:lnTo>
+                  <a:lnTo>
+                    <a:pt x="281377" y="976204"/>
+                  </a:lnTo>
+                  <a:lnTo>
+                    <a:pt x="211033" y="976627"/>
+                  </a:lnTo>
+                  <a:lnTo>
+                    <a:pt x="140688" y="977048"/>
+                  </a:lnTo>
+                  <a:lnTo>
+                    <a:pt x="70344" y="977469"/>
+                  </a:lnTo>
+                  <a:lnTo>
+                    <a:pt x="0" y="977890"/>
                   </a:lnTo>
                   <a:close/>
                 </a:path>
@@ -3557,616 +3592,291 @@
         </p:sp>
         <p:sp>
           <p:nvSpPr>
-            <p:cNvPr id="21" name="pl21"/>
-            <p:cNvSpPr/>
-            <p:nvPr/>
-          </p:nvSpPr>
-          <p:spPr>
-            <a:xfrm>
-              <a:off x="1880955" y="2073503"/>
-              <a:ext cx="6381723" cy="2653500"/>
-            </a:xfrm>
-            <a:custGeom>
-              <a:avLst/>
-              <a:pathLst>
-                <a:path w="6381723" h="2653500">
-                  <a:moveTo>
-                    <a:pt x="0" y="0"/>
-                  </a:moveTo>
-                  <a:lnTo>
-                    <a:pt x="7319" y="14366"/>
-                  </a:lnTo>
-                  <a:lnTo>
-                    <a:pt x="78941" y="149477"/>
-                  </a:lnTo>
-                  <a:lnTo>
-                    <a:pt x="150564" y="279327"/>
-                  </a:lnTo>
-                  <a:lnTo>
-                    <a:pt x="222186" y="404119"/>
-                  </a:lnTo>
-                  <a:lnTo>
-                    <a:pt x="293809" y="524052"/>
-                  </a:lnTo>
-                  <a:lnTo>
-                    <a:pt x="365431" y="639314"/>
-                  </a:lnTo>
-                  <a:lnTo>
-                    <a:pt x="437054" y="750087"/>
-                  </a:lnTo>
-                  <a:lnTo>
-                    <a:pt x="508676" y="856546"/>
-                  </a:lnTo>
-                  <a:lnTo>
-                    <a:pt x="580299" y="958859"/>
-                  </a:lnTo>
-                  <a:lnTo>
-                    <a:pt x="651921" y="1057188"/>
-                  </a:lnTo>
-                  <a:lnTo>
-                    <a:pt x="723544" y="1151688"/>
-                  </a:lnTo>
-                  <a:lnTo>
-                    <a:pt x="795166" y="1242507"/>
-                  </a:lnTo>
-                  <a:lnTo>
-                    <a:pt x="866789" y="1329790"/>
-                  </a:lnTo>
-                  <a:lnTo>
-                    <a:pt x="938411" y="1413673"/>
-                  </a:lnTo>
-                  <a:lnTo>
-                    <a:pt x="1010034" y="1494290"/>
-                  </a:lnTo>
-                  <a:lnTo>
-                    <a:pt x="1081657" y="1571767"/>
-                  </a:lnTo>
-                  <a:lnTo>
-                    <a:pt x="1153279" y="1646227"/>
-                  </a:lnTo>
-                  <a:lnTo>
-                    <a:pt x="1224902" y="1717787"/>
-                  </a:lnTo>
-                  <a:lnTo>
-                    <a:pt x="1296524" y="1786560"/>
-                  </a:lnTo>
-                  <a:lnTo>
-                    <a:pt x="1368147" y="1852655"/>
-                  </a:lnTo>
-                  <a:lnTo>
-                    <a:pt x="1439769" y="1916176"/>
-                  </a:lnTo>
-                  <a:lnTo>
-                    <a:pt x="1511392" y="1977223"/>
-                  </a:lnTo>
-                  <a:lnTo>
-                    <a:pt x="1583014" y="2035893"/>
-                  </a:lnTo>
-                  <a:lnTo>
-                    <a:pt x="1654637" y="2092278"/>
-                  </a:lnTo>
-                  <a:lnTo>
-                    <a:pt x="1726259" y="2146467"/>
-                  </a:lnTo>
-                  <a:lnTo>
-                    <a:pt x="1797882" y="2198546"/>
-                  </a:lnTo>
-                  <a:lnTo>
-                    <a:pt x="1869504" y="2248597"/>
-                  </a:lnTo>
-                  <a:lnTo>
-                    <a:pt x="1941127" y="2296698"/>
-                  </a:lnTo>
-                  <a:lnTo>
-                    <a:pt x="2012749" y="2342927"/>
-                  </a:lnTo>
-                  <a:lnTo>
-                    <a:pt x="2084372" y="2387355"/>
-                  </a:lnTo>
-                  <a:lnTo>
-                    <a:pt x="2155994" y="2430052"/>
-                  </a:lnTo>
-                  <a:lnTo>
-                    <a:pt x="2227617" y="2471087"/>
-                  </a:lnTo>
-                  <a:lnTo>
-                    <a:pt x="2299239" y="2510524"/>
-                  </a:lnTo>
-                  <a:lnTo>
-                    <a:pt x="2370862" y="2548425"/>
-                  </a:lnTo>
-                  <a:lnTo>
-                    <a:pt x="2442485" y="2584850"/>
-                  </a:lnTo>
-                  <a:lnTo>
-                    <a:pt x="2514107" y="2619857"/>
-                  </a:lnTo>
-                  <a:lnTo>
-                    <a:pt x="2585730" y="2653500"/>
-                  </a:lnTo>
-                  <a:lnTo>
-                    <a:pt x="2657352" y="2653064"/>
-                  </a:lnTo>
-                  <a:lnTo>
-                    <a:pt x="2728975" y="2651813"/>
-                  </a:lnTo>
-                  <a:lnTo>
-                    <a:pt x="2800597" y="2650561"/>
-                  </a:lnTo>
-                  <a:lnTo>
-                    <a:pt x="2872220" y="2649307"/>
-                  </a:lnTo>
-                  <a:lnTo>
-                    <a:pt x="2943842" y="2648051"/>
-                  </a:lnTo>
-                  <a:lnTo>
-                    <a:pt x="3015465" y="2646793"/>
-                  </a:lnTo>
-                  <a:lnTo>
-                    <a:pt x="3087087" y="2645533"/>
-                  </a:lnTo>
-                  <a:lnTo>
-                    <a:pt x="3158710" y="2644271"/>
-                  </a:lnTo>
-                  <a:lnTo>
-                    <a:pt x="3230332" y="2643007"/>
-                  </a:lnTo>
-                  <a:lnTo>
-                    <a:pt x="3301955" y="2641742"/>
-                  </a:lnTo>
-                  <a:lnTo>
-                    <a:pt x="3373577" y="2640474"/>
-                  </a:lnTo>
-                  <a:lnTo>
-                    <a:pt x="3445200" y="2639205"/>
-                  </a:lnTo>
-                  <a:lnTo>
-                    <a:pt x="3516822" y="2637933"/>
-                  </a:lnTo>
-                  <a:lnTo>
-                    <a:pt x="3588445" y="2636660"/>
-                  </a:lnTo>
-                  <a:lnTo>
-                    <a:pt x="3660067" y="2635385"/>
-                  </a:lnTo>
-                  <a:lnTo>
-                    <a:pt x="3731690" y="2634108"/>
-                  </a:lnTo>
-                  <a:lnTo>
-                    <a:pt x="3803313" y="2632829"/>
-                  </a:lnTo>
-                  <a:lnTo>
-                    <a:pt x="3874935" y="2631548"/>
-                  </a:lnTo>
-                  <a:lnTo>
-                    <a:pt x="3946558" y="2630265"/>
-                  </a:lnTo>
-                  <a:lnTo>
-                    <a:pt x="4018180" y="2628980"/>
-                  </a:lnTo>
-                  <a:lnTo>
-                    <a:pt x="4089803" y="2627693"/>
-                  </a:lnTo>
-                  <a:lnTo>
-                    <a:pt x="4161425" y="2626405"/>
-                  </a:lnTo>
-                  <a:lnTo>
-                    <a:pt x="4233048" y="2625114"/>
-                  </a:lnTo>
-                  <a:lnTo>
-                    <a:pt x="4304670" y="2623821"/>
-                  </a:lnTo>
-                  <a:lnTo>
-                    <a:pt x="4376293" y="2622527"/>
-                  </a:lnTo>
-                  <a:lnTo>
-                    <a:pt x="4447915" y="2621230"/>
-                  </a:lnTo>
-                  <a:lnTo>
-                    <a:pt x="4519538" y="2619932"/>
-                  </a:lnTo>
-                  <a:lnTo>
-                    <a:pt x="4591160" y="2618632"/>
-                  </a:lnTo>
-                  <a:lnTo>
-                    <a:pt x="4662783" y="2617329"/>
-                  </a:lnTo>
-                  <a:lnTo>
-                    <a:pt x="4734405" y="2616025"/>
-                  </a:lnTo>
-                  <a:lnTo>
-                    <a:pt x="4806028" y="2614719"/>
-                  </a:lnTo>
-                  <a:lnTo>
-                    <a:pt x="4877650" y="2613411"/>
-                  </a:lnTo>
-                  <a:lnTo>
-                    <a:pt x="4949273" y="2612100"/>
-                  </a:lnTo>
-                  <a:lnTo>
-                    <a:pt x="5020895" y="2610788"/>
-                  </a:lnTo>
-                  <a:lnTo>
-                    <a:pt x="5092518" y="2609474"/>
-                  </a:lnTo>
-                  <a:lnTo>
-                    <a:pt x="5164141" y="2608158"/>
-                  </a:lnTo>
-                  <a:lnTo>
-                    <a:pt x="5235763" y="2606840"/>
-                  </a:lnTo>
-                  <a:lnTo>
-                    <a:pt x="5307386" y="2605520"/>
-                  </a:lnTo>
-                  <a:lnTo>
-                    <a:pt x="5379008" y="2604198"/>
-                  </a:lnTo>
-                  <a:lnTo>
-                    <a:pt x="5450631" y="2602874"/>
-                  </a:lnTo>
-                  <a:lnTo>
-                    <a:pt x="5522253" y="2601548"/>
-                  </a:lnTo>
-                  <a:lnTo>
-                    <a:pt x="5593876" y="2600220"/>
-                  </a:lnTo>
-                  <a:lnTo>
-                    <a:pt x="5665498" y="2598890"/>
-                  </a:lnTo>
-                  <a:lnTo>
-                    <a:pt x="5737121" y="2597558"/>
-                  </a:lnTo>
-                  <a:lnTo>
-                    <a:pt x="5808743" y="2596224"/>
-                  </a:lnTo>
-                  <a:lnTo>
-                    <a:pt x="5880366" y="2594888"/>
-                  </a:lnTo>
-                  <a:lnTo>
-                    <a:pt x="5951988" y="2593550"/>
-                  </a:lnTo>
-                  <a:lnTo>
-                    <a:pt x="6023611" y="2592209"/>
-                  </a:lnTo>
-                  <a:lnTo>
-                    <a:pt x="6095233" y="2590867"/>
-                  </a:lnTo>
-                  <a:lnTo>
-                    <a:pt x="6166856" y="2589523"/>
-                  </a:lnTo>
-                  <a:lnTo>
-                    <a:pt x="6238478" y="2588177"/>
-                  </a:lnTo>
-                  <a:lnTo>
-                    <a:pt x="6310101" y="2586829"/>
-                  </a:lnTo>
-                  <a:lnTo>
-                    <a:pt x="6381723" y="2585479"/>
-                  </a:lnTo>
-                </a:path>
-              </a:pathLst>
-            </a:custGeom>
-          </p:spPr>
-          <p:txBody>
-            <a:bodyPr/>
-            <a:lstStyle/>
-            <a:p/>
-          </p:txBody>
-        </p:sp>
-        <p:sp>
-          <p:nvSpPr>
             <p:cNvPr id="22" name="pl22"/>
             <p:cNvSpPr/>
             <p:nvPr/>
           </p:nvSpPr>
           <p:spPr>
             <a:xfrm>
-              <a:off x="1172049" y="4727816"/>
-              <a:ext cx="7090630" cy="728301"/>
+              <a:off x="1931568" y="2143092"/>
+              <a:ext cx="6267848" cy="957585"/>
             </a:xfrm>
             <a:custGeom>
               <a:avLst/>
               <a:pathLst>
-                <a:path w="7090630" h="728301">
+                <a:path w="6267848" h="957585">
                   <a:moveTo>
-                    <a:pt x="7090630" y="728301"/>
+                    <a:pt x="0" y="0"/>
                   </a:moveTo>
                   <a:lnTo>
-                    <a:pt x="7019007" y="724203"/>
-                  </a:lnTo>
-                  <a:lnTo>
-                    <a:pt x="6947385" y="719939"/>
-                  </a:lnTo>
-                  <a:lnTo>
-                    <a:pt x="6875762" y="715502"/>
-                  </a:lnTo>
-                  <a:lnTo>
-                    <a:pt x="6804139" y="710885"/>
-                  </a:lnTo>
-                  <a:lnTo>
-                    <a:pt x="6732517" y="706081"/>
-                  </a:lnTo>
-                  <a:lnTo>
-                    <a:pt x="6660894" y="701083"/>
-                  </a:lnTo>
-                  <a:lnTo>
-                    <a:pt x="6589272" y="695882"/>
-                  </a:lnTo>
-                  <a:lnTo>
-                    <a:pt x="6517649" y="690470"/>
-                  </a:lnTo>
-                  <a:lnTo>
-                    <a:pt x="6446027" y="684839"/>
-                  </a:lnTo>
-                  <a:lnTo>
-                    <a:pt x="6374404" y="678980"/>
-                  </a:lnTo>
-                  <a:lnTo>
-                    <a:pt x="6302782" y="672883"/>
-                  </a:lnTo>
-                  <a:lnTo>
-                    <a:pt x="6231159" y="666539"/>
-                  </a:lnTo>
-                  <a:lnTo>
-                    <a:pt x="6159537" y="659938"/>
-                  </a:lnTo>
-                  <a:lnTo>
-                    <a:pt x="6087914" y="653070"/>
-                  </a:lnTo>
-                  <a:lnTo>
-                    <a:pt x="6016292" y="645923"/>
-                  </a:lnTo>
-                  <a:lnTo>
-                    <a:pt x="5944669" y="638487"/>
-                  </a:lnTo>
-                  <a:lnTo>
-                    <a:pt x="5873047" y="630750"/>
-                  </a:lnTo>
-                  <a:lnTo>
-                    <a:pt x="5801424" y="622699"/>
-                  </a:lnTo>
-                  <a:lnTo>
-                    <a:pt x="5729802" y="614321"/>
-                  </a:lnTo>
-                  <a:lnTo>
-                    <a:pt x="5658179" y="605605"/>
-                  </a:lnTo>
-                  <a:lnTo>
-                    <a:pt x="5586557" y="596535"/>
-                  </a:lnTo>
-                  <a:lnTo>
-                    <a:pt x="5514934" y="587097"/>
-                  </a:lnTo>
-                  <a:lnTo>
-                    <a:pt x="5443311" y="577277"/>
-                  </a:lnTo>
-                  <a:lnTo>
-                    <a:pt x="5371689" y="567059"/>
-                  </a:lnTo>
-                  <a:lnTo>
-                    <a:pt x="5300066" y="556427"/>
-                  </a:lnTo>
-                  <a:lnTo>
-                    <a:pt x="5228444" y="545365"/>
-                  </a:lnTo>
-                  <a:lnTo>
-                    <a:pt x="5156821" y="533854"/>
-                  </a:lnTo>
-                  <a:lnTo>
-                    <a:pt x="5085199" y="521876"/>
-                  </a:lnTo>
-                  <a:lnTo>
-                    <a:pt x="5013576" y="509413"/>
-                  </a:lnTo>
-                  <a:lnTo>
-                    <a:pt x="4941954" y="496446"/>
-                  </a:lnTo>
-                  <a:lnTo>
-                    <a:pt x="4870331" y="482952"/>
-                  </a:lnTo>
-                  <a:lnTo>
-                    <a:pt x="4798709" y="468912"/>
-                  </a:lnTo>
-                  <a:lnTo>
-                    <a:pt x="4727086" y="454303"/>
-                  </a:lnTo>
-                  <a:lnTo>
-                    <a:pt x="4655464" y="439102"/>
-                  </a:lnTo>
-                  <a:lnTo>
-                    <a:pt x="4583841" y="423285"/>
-                  </a:lnTo>
-                  <a:lnTo>
-                    <a:pt x="4512219" y="406827"/>
-                  </a:lnTo>
-                  <a:lnTo>
-                    <a:pt x="4440596" y="389702"/>
-                  </a:lnTo>
-                  <a:lnTo>
-                    <a:pt x="4368974" y="371884"/>
-                  </a:lnTo>
-                  <a:lnTo>
-                    <a:pt x="4297351" y="353343"/>
-                  </a:lnTo>
-                  <a:lnTo>
-                    <a:pt x="4225729" y="334051"/>
-                  </a:lnTo>
-                  <a:lnTo>
-                    <a:pt x="4154106" y="313977"/>
-                  </a:lnTo>
-                  <a:lnTo>
-                    <a:pt x="4082483" y="293090"/>
-                  </a:lnTo>
-                  <a:lnTo>
-                    <a:pt x="4010861" y="271356"/>
-                  </a:lnTo>
-                  <a:lnTo>
-                    <a:pt x="3939238" y="248741"/>
-                  </a:lnTo>
-                  <a:lnTo>
-                    <a:pt x="3867616" y="225211"/>
-                  </a:lnTo>
-                  <a:lnTo>
-                    <a:pt x="3795993" y="200726"/>
-                  </a:lnTo>
-                  <a:lnTo>
-                    <a:pt x="3724371" y="175250"/>
-                  </a:lnTo>
-                  <a:lnTo>
-                    <a:pt x="3652748" y="148741"/>
-                  </a:lnTo>
-                  <a:lnTo>
-                    <a:pt x="3581126" y="121158"/>
-                  </a:lnTo>
-                  <a:lnTo>
-                    <a:pt x="3509503" y="92457"/>
-                  </a:lnTo>
-                  <a:lnTo>
-                    <a:pt x="3437881" y="62594"/>
-                  </a:lnTo>
-                  <a:lnTo>
-                    <a:pt x="3366258" y="31520"/>
-                  </a:lnTo>
-                  <a:lnTo>
-                    <a:pt x="3294636" y="0"/>
-                  </a:lnTo>
-                  <a:lnTo>
-                    <a:pt x="3223013" y="1246"/>
-                  </a:lnTo>
-                  <a:lnTo>
-                    <a:pt x="3151391" y="2491"/>
-                  </a:lnTo>
-                  <a:lnTo>
-                    <a:pt x="3079768" y="3734"/>
-                  </a:lnTo>
-                  <a:lnTo>
-                    <a:pt x="3008146" y="4975"/>
-                  </a:lnTo>
-                  <a:lnTo>
-                    <a:pt x="2936523" y="6214"/>
-                  </a:lnTo>
-                  <a:lnTo>
-                    <a:pt x="2864901" y="7452"/>
-                  </a:lnTo>
-                  <a:lnTo>
-                    <a:pt x="2793278" y="8687"/>
-                  </a:lnTo>
-                  <a:lnTo>
-                    <a:pt x="2721655" y="9921"/>
-                  </a:lnTo>
-                  <a:lnTo>
-                    <a:pt x="2650033" y="11153"/>
-                  </a:lnTo>
-                  <a:lnTo>
-                    <a:pt x="2578410" y="12383"/>
-                  </a:lnTo>
-                  <a:lnTo>
-                    <a:pt x="2506788" y="13611"/>
-                  </a:lnTo>
-                  <a:lnTo>
-                    <a:pt x="2435165" y="14837"/>
-                  </a:lnTo>
-                  <a:lnTo>
-                    <a:pt x="2363543" y="16062"/>
-                  </a:lnTo>
-                  <a:lnTo>
-                    <a:pt x="2291920" y="17284"/>
-                  </a:lnTo>
-                  <a:lnTo>
-                    <a:pt x="2220298" y="18505"/>
-                  </a:lnTo>
-                  <a:lnTo>
-                    <a:pt x="2148675" y="19724"/>
-                  </a:lnTo>
-                  <a:lnTo>
-                    <a:pt x="2077053" y="20941"/>
-                  </a:lnTo>
-                  <a:lnTo>
-                    <a:pt x="2005430" y="22156"/>
-                  </a:lnTo>
-                  <a:lnTo>
-                    <a:pt x="1933808" y="23370"/>
-                  </a:lnTo>
-                  <a:lnTo>
-                    <a:pt x="1862185" y="24581"/>
-                  </a:lnTo>
-                  <a:lnTo>
-                    <a:pt x="1790563" y="25791"/>
-                  </a:lnTo>
-                  <a:lnTo>
-                    <a:pt x="1718940" y="26999"/>
-                  </a:lnTo>
-                  <a:lnTo>
-                    <a:pt x="1647318" y="28205"/>
-                  </a:lnTo>
-                  <a:lnTo>
-                    <a:pt x="1575695" y="29409"/>
-                  </a:lnTo>
-                  <a:lnTo>
-                    <a:pt x="1504073" y="30612"/>
-                  </a:lnTo>
-                  <a:lnTo>
-                    <a:pt x="1432450" y="31813"/>
-                  </a:lnTo>
-                  <a:lnTo>
-                    <a:pt x="1360827" y="33012"/>
-                  </a:lnTo>
-                  <a:lnTo>
-                    <a:pt x="1289205" y="34209"/>
-                  </a:lnTo>
-                  <a:lnTo>
-                    <a:pt x="1217582" y="35404"/>
-                  </a:lnTo>
-                  <a:lnTo>
-                    <a:pt x="1145960" y="36597"/>
-                  </a:lnTo>
-                  <a:lnTo>
-                    <a:pt x="1074337" y="37789"/>
-                  </a:lnTo>
-                  <a:lnTo>
-                    <a:pt x="1002715" y="38979"/>
-                  </a:lnTo>
-                  <a:lnTo>
-                    <a:pt x="931092" y="40167"/>
-                  </a:lnTo>
-                  <a:lnTo>
-                    <a:pt x="859470" y="41354"/>
-                  </a:lnTo>
-                  <a:lnTo>
-                    <a:pt x="787847" y="42538"/>
-                  </a:lnTo>
-                  <a:lnTo>
-                    <a:pt x="716225" y="43721"/>
-                  </a:lnTo>
-                  <a:lnTo>
-                    <a:pt x="644602" y="44902"/>
-                  </a:lnTo>
-                  <a:lnTo>
-                    <a:pt x="572980" y="46081"/>
-                  </a:lnTo>
-                  <a:lnTo>
-                    <a:pt x="501357" y="47259"/>
-                  </a:lnTo>
-                  <a:lnTo>
-                    <a:pt x="429735" y="48434"/>
-                  </a:lnTo>
-                  <a:lnTo>
-                    <a:pt x="358112" y="49608"/>
-                  </a:lnTo>
-                  <a:lnTo>
-                    <a:pt x="286490" y="50780"/>
-                  </a:lnTo>
-                  <a:lnTo>
-                    <a:pt x="214867" y="51951"/>
-                  </a:lnTo>
-                  <a:lnTo>
-                    <a:pt x="143245" y="53119"/>
-                  </a:lnTo>
-                  <a:lnTo>
-                    <a:pt x="71622" y="54286"/>
-                  </a:lnTo>
-                  <a:lnTo>
-                    <a:pt x="0" y="55452"/>
+                    <a:pt x="7188" y="5184"/>
+                  </a:lnTo>
+                  <a:lnTo>
+                    <a:pt x="77533" y="53942"/>
+                  </a:lnTo>
+                  <a:lnTo>
+                    <a:pt x="147877" y="100802"/>
+                  </a:lnTo>
+                  <a:lnTo>
+                    <a:pt x="218222" y="145837"/>
+                  </a:lnTo>
+                  <a:lnTo>
+                    <a:pt x="288566" y="189118"/>
+                  </a:lnTo>
+                  <a:lnTo>
+                    <a:pt x="358911" y="230713"/>
+                  </a:lnTo>
+                  <a:lnTo>
+                    <a:pt x="429255" y="270688"/>
+                  </a:lnTo>
+                  <a:lnTo>
+                    <a:pt x="499599" y="309107"/>
+                  </a:lnTo>
+                  <a:lnTo>
+                    <a:pt x="569944" y="346029"/>
+                  </a:lnTo>
+                  <a:lnTo>
+                    <a:pt x="640288" y="381514"/>
+                  </a:lnTo>
+                  <a:lnTo>
+                    <a:pt x="710633" y="415617"/>
+                  </a:lnTo>
+                  <a:lnTo>
+                    <a:pt x="780977" y="448391"/>
+                  </a:lnTo>
+                  <a:lnTo>
+                    <a:pt x="851322" y="479890"/>
+                  </a:lnTo>
+                  <a:lnTo>
+                    <a:pt x="921666" y="510161"/>
+                  </a:lnTo>
+                  <a:lnTo>
+                    <a:pt x="992011" y="539254"/>
+                  </a:lnTo>
+                  <a:lnTo>
+                    <a:pt x="1062355" y="567213"/>
+                  </a:lnTo>
+                  <a:lnTo>
+                    <a:pt x="1132700" y="594084"/>
+                  </a:lnTo>
+                  <a:lnTo>
+                    <a:pt x="1203044" y="619909"/>
+                  </a:lnTo>
+                  <a:lnTo>
+                    <a:pt x="1273389" y="644727"/>
+                  </a:lnTo>
+                  <a:lnTo>
+                    <a:pt x="1343733" y="668579"/>
+                  </a:lnTo>
+                  <a:lnTo>
+                    <a:pt x="1414078" y="691503"/>
+                  </a:lnTo>
+                  <a:lnTo>
+                    <a:pt x="1484422" y="713533"/>
+                  </a:lnTo>
+                  <a:lnTo>
+                    <a:pt x="1554767" y="734706"/>
+                  </a:lnTo>
+                  <a:lnTo>
+                    <a:pt x="1625111" y="755054"/>
+                  </a:lnTo>
+                  <a:lnTo>
+                    <a:pt x="1695456" y="774609"/>
+                  </a:lnTo>
+                  <a:lnTo>
+                    <a:pt x="1765800" y="793403"/>
+                  </a:lnTo>
+                  <a:lnTo>
+                    <a:pt x="1836145" y="811465"/>
+                  </a:lnTo>
+                  <a:lnTo>
+                    <a:pt x="1906489" y="828824"/>
+                  </a:lnTo>
+                  <a:lnTo>
+                    <a:pt x="1976834" y="845507"/>
+                  </a:lnTo>
+                  <a:lnTo>
+                    <a:pt x="2047178" y="861540"/>
+                  </a:lnTo>
+                  <a:lnTo>
+                    <a:pt x="2117523" y="876948"/>
+                  </a:lnTo>
+                  <a:lnTo>
+                    <a:pt x="2187867" y="891757"/>
+                  </a:lnTo>
+                  <a:lnTo>
+                    <a:pt x="2258212" y="905989"/>
+                  </a:lnTo>
+                  <a:lnTo>
+                    <a:pt x="2328556" y="919666"/>
+                  </a:lnTo>
+                  <a:lnTo>
+                    <a:pt x="2398901" y="932811"/>
+                  </a:lnTo>
+                  <a:lnTo>
+                    <a:pt x="2469245" y="945444"/>
+                  </a:lnTo>
+                  <a:lnTo>
+                    <a:pt x="2539590" y="957585"/>
+                  </a:lnTo>
+                  <a:lnTo>
+                    <a:pt x="2609934" y="957428"/>
+                  </a:lnTo>
+                  <a:lnTo>
+                    <a:pt x="2680279" y="956977"/>
+                  </a:lnTo>
+                  <a:lnTo>
+                    <a:pt x="2750623" y="956525"/>
+                  </a:lnTo>
+                  <a:lnTo>
+                    <a:pt x="2820968" y="956072"/>
+                  </a:lnTo>
+                  <a:lnTo>
+                    <a:pt x="2891312" y="955619"/>
+                  </a:lnTo>
+                  <a:lnTo>
+                    <a:pt x="2961657" y="955165"/>
+                  </a:lnTo>
+                  <a:lnTo>
+                    <a:pt x="3032001" y="954710"/>
+                  </a:lnTo>
+                  <a:lnTo>
+                    <a:pt x="3102346" y="954255"/>
+                  </a:lnTo>
+                  <a:lnTo>
+                    <a:pt x="3172690" y="953799"/>
+                  </a:lnTo>
+                  <a:lnTo>
+                    <a:pt x="3243035" y="953342"/>
+                  </a:lnTo>
+                  <a:lnTo>
+                    <a:pt x="3313379" y="952885"/>
+                  </a:lnTo>
+                  <a:lnTo>
+                    <a:pt x="3383724" y="952427"/>
+                  </a:lnTo>
+                  <a:lnTo>
+                    <a:pt x="3454068" y="951968"/>
+                  </a:lnTo>
+                  <a:lnTo>
+                    <a:pt x="3524413" y="951508"/>
+                  </a:lnTo>
+                  <a:lnTo>
+                    <a:pt x="3594757" y="951048"/>
+                  </a:lnTo>
+                  <a:lnTo>
+                    <a:pt x="3665102" y="950587"/>
+                  </a:lnTo>
+                  <a:lnTo>
+                    <a:pt x="3735446" y="950126"/>
+                  </a:lnTo>
+                  <a:lnTo>
+                    <a:pt x="3805791" y="949663"/>
+                  </a:lnTo>
+                  <a:lnTo>
+                    <a:pt x="3876135" y="949200"/>
+                  </a:lnTo>
+                  <a:lnTo>
+                    <a:pt x="3946480" y="948737"/>
+                  </a:lnTo>
+                  <a:lnTo>
+                    <a:pt x="4016824" y="948272"/>
+                  </a:lnTo>
+                  <a:lnTo>
+                    <a:pt x="4087169" y="947807"/>
+                  </a:lnTo>
+                  <a:lnTo>
+                    <a:pt x="4157513" y="947342"/>
+                  </a:lnTo>
+                  <a:lnTo>
+                    <a:pt x="4227857" y="946875"/>
+                  </a:lnTo>
+                  <a:lnTo>
+                    <a:pt x="4298202" y="946408"/>
+                  </a:lnTo>
+                  <a:lnTo>
+                    <a:pt x="4368546" y="945940"/>
+                  </a:lnTo>
+                  <a:lnTo>
+                    <a:pt x="4438891" y="945472"/>
+                  </a:lnTo>
+                  <a:lnTo>
+                    <a:pt x="4509235" y="945002"/>
+                  </a:lnTo>
+                  <a:lnTo>
+                    <a:pt x="4579580" y="944532"/>
+                  </a:lnTo>
+                  <a:lnTo>
+                    <a:pt x="4649924" y="944062"/>
+                  </a:lnTo>
+                  <a:lnTo>
+                    <a:pt x="4720269" y="943590"/>
+                  </a:lnTo>
+                  <a:lnTo>
+                    <a:pt x="4790613" y="943118"/>
+                  </a:lnTo>
+                  <a:lnTo>
+                    <a:pt x="4860958" y="942645"/>
+                  </a:lnTo>
+                  <a:lnTo>
+                    <a:pt x="4931302" y="942172"/>
+                  </a:lnTo>
+                  <a:lnTo>
+                    <a:pt x="5001647" y="941698"/>
+                  </a:lnTo>
+                  <a:lnTo>
+                    <a:pt x="5071991" y="941223"/>
+                  </a:lnTo>
+                  <a:lnTo>
+                    <a:pt x="5142336" y="940747"/>
+                  </a:lnTo>
+                  <a:lnTo>
+                    <a:pt x="5212680" y="940271"/>
+                  </a:lnTo>
+                  <a:lnTo>
+                    <a:pt x="5283025" y="939793"/>
+                  </a:lnTo>
+                  <a:lnTo>
+                    <a:pt x="5353369" y="939316"/>
+                  </a:lnTo>
+                  <a:lnTo>
+                    <a:pt x="5423714" y="938837"/>
+                  </a:lnTo>
+                  <a:lnTo>
+                    <a:pt x="5494058" y="938358"/>
+                  </a:lnTo>
+                  <a:lnTo>
+                    <a:pt x="5564403" y="937878"/>
+                  </a:lnTo>
+                  <a:lnTo>
+                    <a:pt x="5634747" y="937397"/>
+                  </a:lnTo>
+                  <a:lnTo>
+                    <a:pt x="5705092" y="936916"/>
+                  </a:lnTo>
+                  <a:lnTo>
+                    <a:pt x="5775436" y="936434"/>
+                  </a:lnTo>
+                  <a:lnTo>
+                    <a:pt x="5845781" y="935951"/>
+                  </a:lnTo>
+                  <a:lnTo>
+                    <a:pt x="5916125" y="935467"/>
+                  </a:lnTo>
+                  <a:lnTo>
+                    <a:pt x="5986470" y="934983"/>
+                  </a:lnTo>
+                  <a:lnTo>
+                    <a:pt x="6056814" y="934498"/>
+                  </a:lnTo>
+                  <a:lnTo>
+                    <a:pt x="6127159" y="934012"/>
+                  </a:lnTo>
+                  <a:lnTo>
+                    <a:pt x="6197503" y="933525"/>
+                  </a:lnTo>
+                  <a:lnTo>
+                    <a:pt x="6267848" y="933038"/>
                   </a:lnTo>
                 </a:path>
               </a:pathLst>
@@ -4186,312 +3896,637 @@
           </p:nvSpPr>
           <p:spPr>
             <a:xfrm>
-              <a:off x="1172049" y="3558550"/>
-              <a:ext cx="7090630" cy="1697296"/>
+              <a:off x="1235312" y="3100971"/>
+              <a:ext cx="6964104" cy="262826"/>
             </a:xfrm>
             <a:custGeom>
               <a:avLst/>
               <a:pathLst>
-                <a:path w="7090630" h="1697296">
+                <a:path w="6964104" h="262826">
+                  <a:moveTo>
+                    <a:pt x="6964104" y="262826"/>
+                  </a:moveTo>
+                  <a:lnTo>
+                    <a:pt x="6893760" y="261347"/>
+                  </a:lnTo>
+                  <a:lnTo>
+                    <a:pt x="6823415" y="259809"/>
+                  </a:lnTo>
+                  <a:lnTo>
+                    <a:pt x="6753071" y="258207"/>
+                  </a:lnTo>
+                  <a:lnTo>
+                    <a:pt x="6682726" y="256541"/>
+                  </a:lnTo>
+                  <a:lnTo>
+                    <a:pt x="6612382" y="254808"/>
+                  </a:lnTo>
+                  <a:lnTo>
+                    <a:pt x="6542037" y="253004"/>
+                  </a:lnTo>
+                  <a:lnTo>
+                    <a:pt x="6471693" y="251127"/>
+                  </a:lnTo>
+                  <a:lnTo>
+                    <a:pt x="6401348" y="249174"/>
+                  </a:lnTo>
+                  <a:lnTo>
+                    <a:pt x="6331004" y="247142"/>
+                  </a:lnTo>
+                  <a:lnTo>
+                    <a:pt x="6260659" y="245027"/>
+                  </a:lnTo>
+                  <a:lnTo>
+                    <a:pt x="6190315" y="242827"/>
+                  </a:lnTo>
+                  <a:lnTo>
+                    <a:pt x="6119970" y="240538"/>
+                  </a:lnTo>
+                  <a:lnTo>
+                    <a:pt x="6049626" y="238156"/>
+                  </a:lnTo>
+                  <a:lnTo>
+                    <a:pt x="5979281" y="235677"/>
+                  </a:lnTo>
+                  <a:lnTo>
+                    <a:pt x="5908937" y="233098"/>
+                  </a:lnTo>
+                  <a:lnTo>
+                    <a:pt x="5838592" y="230415"/>
+                  </a:lnTo>
+                  <a:lnTo>
+                    <a:pt x="5768248" y="227622"/>
+                  </a:lnTo>
+                  <a:lnTo>
+                    <a:pt x="5697903" y="224717"/>
+                  </a:lnTo>
+                  <a:lnTo>
+                    <a:pt x="5627559" y="221694"/>
+                  </a:lnTo>
+                  <a:lnTo>
+                    <a:pt x="5557214" y="218548"/>
+                  </a:lnTo>
+                  <a:lnTo>
+                    <a:pt x="5486870" y="215275"/>
+                  </a:lnTo>
+                  <a:lnTo>
+                    <a:pt x="5416525" y="211869"/>
+                  </a:lnTo>
+                  <a:lnTo>
+                    <a:pt x="5346181" y="208325"/>
+                  </a:lnTo>
+                  <a:lnTo>
+                    <a:pt x="5275836" y="204638"/>
+                  </a:lnTo>
+                  <a:lnTo>
+                    <a:pt x="5205492" y="200801"/>
+                  </a:lnTo>
+                  <a:lnTo>
+                    <a:pt x="5135147" y="196809"/>
+                  </a:lnTo>
+                  <a:lnTo>
+                    <a:pt x="5064803" y="192655"/>
+                  </a:lnTo>
+                  <a:lnTo>
+                    <a:pt x="4994458" y="188333"/>
+                  </a:lnTo>
+                  <a:lnTo>
+                    <a:pt x="4924114" y="183835"/>
+                  </a:lnTo>
+                  <a:lnTo>
+                    <a:pt x="4853769" y="179155"/>
+                  </a:lnTo>
+                  <a:lnTo>
+                    <a:pt x="4783425" y="174286"/>
+                  </a:lnTo>
+                  <a:lnTo>
+                    <a:pt x="4713080" y="169219"/>
+                  </a:lnTo>
+                  <a:lnTo>
+                    <a:pt x="4642736" y="163947"/>
+                  </a:lnTo>
+                  <a:lnTo>
+                    <a:pt x="4572391" y="158461"/>
+                  </a:lnTo>
+                  <a:lnTo>
+                    <a:pt x="4502047" y="152753"/>
+                  </a:lnTo>
+                  <a:lnTo>
+                    <a:pt x="4431702" y="146814"/>
+                  </a:lnTo>
+                  <a:lnTo>
+                    <a:pt x="4361358" y="140634"/>
+                  </a:lnTo>
+                  <a:lnTo>
+                    <a:pt x="4291013" y="134204"/>
+                  </a:lnTo>
+                  <a:lnTo>
+                    <a:pt x="4220669" y="127513"/>
+                  </a:lnTo>
+                  <a:lnTo>
+                    <a:pt x="4150324" y="120551"/>
+                  </a:lnTo>
+                  <a:lnTo>
+                    <a:pt x="4079980" y="113307"/>
+                  </a:lnTo>
+                  <a:lnTo>
+                    <a:pt x="4009635" y="105769"/>
+                  </a:lnTo>
+                  <a:lnTo>
+                    <a:pt x="3939291" y="97926"/>
+                  </a:lnTo>
+                  <a:lnTo>
+                    <a:pt x="3868946" y="89765"/>
+                  </a:lnTo>
+                  <a:lnTo>
+                    <a:pt x="3798602" y="81273"/>
+                  </a:lnTo>
+                  <a:lnTo>
+                    <a:pt x="3728257" y="72437"/>
+                  </a:lnTo>
+                  <a:lnTo>
+                    <a:pt x="3657913" y="63243"/>
+                  </a:lnTo>
+                  <a:lnTo>
+                    <a:pt x="3587569" y="53677"/>
+                  </a:lnTo>
+                  <a:lnTo>
+                    <a:pt x="3517224" y="43723"/>
+                  </a:lnTo>
+                  <a:lnTo>
+                    <a:pt x="3446880" y="33365"/>
+                  </a:lnTo>
+                  <a:lnTo>
+                    <a:pt x="3376535" y="22588"/>
+                  </a:lnTo>
+                  <a:lnTo>
+                    <a:pt x="3306191" y="11374"/>
+                  </a:lnTo>
+                  <a:lnTo>
+                    <a:pt x="3235846" y="0"/>
+                  </a:lnTo>
+                  <a:lnTo>
+                    <a:pt x="3165502" y="449"/>
+                  </a:lnTo>
+                  <a:lnTo>
+                    <a:pt x="3095157" y="899"/>
+                  </a:lnTo>
+                  <a:lnTo>
+                    <a:pt x="3024813" y="1347"/>
+                  </a:lnTo>
+                  <a:lnTo>
+                    <a:pt x="2954468" y="1795"/>
+                  </a:lnTo>
+                  <a:lnTo>
+                    <a:pt x="2884124" y="2242"/>
+                  </a:lnTo>
+                  <a:lnTo>
+                    <a:pt x="2813779" y="2689"/>
+                  </a:lnTo>
+                  <a:lnTo>
+                    <a:pt x="2743435" y="3135"/>
+                  </a:lnTo>
+                  <a:lnTo>
+                    <a:pt x="2673090" y="3580"/>
+                  </a:lnTo>
+                  <a:lnTo>
+                    <a:pt x="2602746" y="4024"/>
+                  </a:lnTo>
+                  <a:lnTo>
+                    <a:pt x="2532401" y="4468"/>
+                  </a:lnTo>
+                  <a:lnTo>
+                    <a:pt x="2462057" y="4912"/>
+                  </a:lnTo>
+                  <a:lnTo>
+                    <a:pt x="2391712" y="5354"/>
+                  </a:lnTo>
+                  <a:lnTo>
+                    <a:pt x="2321368" y="5796"/>
+                  </a:lnTo>
+                  <a:lnTo>
+                    <a:pt x="2251023" y="6237"/>
+                  </a:lnTo>
+                  <a:lnTo>
+                    <a:pt x="2180679" y="6678"/>
+                  </a:lnTo>
+                  <a:lnTo>
+                    <a:pt x="2110334" y="7118"/>
+                  </a:lnTo>
+                  <a:lnTo>
+                    <a:pt x="2039990" y="7557"/>
+                  </a:lnTo>
+                  <a:lnTo>
+                    <a:pt x="1969645" y="7995"/>
+                  </a:lnTo>
+                  <a:lnTo>
+                    <a:pt x="1899301" y="8433"/>
+                  </a:lnTo>
+                  <a:lnTo>
+                    <a:pt x="1828956" y="8870"/>
+                  </a:lnTo>
+                  <a:lnTo>
+                    <a:pt x="1758612" y="9307"/>
+                  </a:lnTo>
+                  <a:lnTo>
+                    <a:pt x="1688267" y="9743"/>
+                  </a:lnTo>
+                  <a:lnTo>
+                    <a:pt x="1617923" y="10178"/>
+                  </a:lnTo>
+                  <a:lnTo>
+                    <a:pt x="1547578" y="10613"/>
+                  </a:lnTo>
+                  <a:lnTo>
+                    <a:pt x="1477234" y="11047"/>
+                  </a:lnTo>
+                  <a:lnTo>
+                    <a:pt x="1406889" y="11480"/>
+                  </a:lnTo>
+                  <a:lnTo>
+                    <a:pt x="1336545" y="11913"/>
+                  </a:lnTo>
+                  <a:lnTo>
+                    <a:pt x="1266200" y="12345"/>
+                  </a:lnTo>
+                  <a:lnTo>
+                    <a:pt x="1195856" y="12776"/>
+                  </a:lnTo>
+                  <a:lnTo>
+                    <a:pt x="1125511" y="13207"/>
+                  </a:lnTo>
+                  <a:lnTo>
+                    <a:pt x="1055167" y="13637"/>
+                  </a:lnTo>
+                  <a:lnTo>
+                    <a:pt x="984822" y="14066"/>
+                  </a:lnTo>
+                  <a:lnTo>
+                    <a:pt x="914478" y="14495"/>
+                  </a:lnTo>
+                  <a:lnTo>
+                    <a:pt x="844133" y="14923"/>
+                  </a:lnTo>
+                  <a:lnTo>
+                    <a:pt x="773789" y="15351"/>
+                  </a:lnTo>
+                  <a:lnTo>
+                    <a:pt x="703444" y="15778"/>
+                  </a:lnTo>
+                  <a:lnTo>
+                    <a:pt x="633100" y="16204"/>
+                  </a:lnTo>
+                  <a:lnTo>
+                    <a:pt x="562755" y="16629"/>
+                  </a:lnTo>
+                  <a:lnTo>
+                    <a:pt x="492411" y="17054"/>
+                  </a:lnTo>
+                  <a:lnTo>
+                    <a:pt x="422066" y="17479"/>
+                  </a:lnTo>
+                  <a:lnTo>
+                    <a:pt x="351722" y="17902"/>
+                  </a:lnTo>
+                  <a:lnTo>
+                    <a:pt x="281377" y="18325"/>
+                  </a:lnTo>
+                  <a:lnTo>
+                    <a:pt x="211033" y="18748"/>
+                  </a:lnTo>
+                  <a:lnTo>
+                    <a:pt x="140688" y="19169"/>
+                  </a:lnTo>
+                  <a:lnTo>
+                    <a:pt x="70344" y="19590"/>
+                  </a:lnTo>
+                  <a:lnTo>
+                    <a:pt x="0" y="20011"/>
+                  </a:lnTo>
+                </a:path>
+              </a:pathLst>
+            </a:custGeom>
+          </p:spPr>
+          <p:txBody>
+            <a:bodyPr/>
+            <a:lstStyle/>
+            <a:p/>
+          </p:txBody>
+        </p:sp>
+        <p:sp>
+          <p:nvSpPr>
+            <p:cNvPr id="24" name="pl24"/>
+            <p:cNvSpPr/>
+            <p:nvPr/>
+          </p:nvSpPr>
+          <p:spPr>
+            <a:xfrm>
+              <a:off x="1235312" y="2679010"/>
+              <a:ext cx="6964104" cy="612514"/>
+            </a:xfrm>
+            <a:custGeom>
+              <a:avLst/>
+              <a:pathLst>
+                <a:path w="6964104" h="612514">
                   <a:moveTo>
                     <a:pt x="0" y="0"/>
                   </a:moveTo>
                   <a:lnTo>
-                    <a:pt x="71622" y="37830"/>
-                  </a:lnTo>
-                  <a:lnTo>
-                    <a:pt x="143245" y="74945"/>
-                  </a:lnTo>
-                  <a:lnTo>
-                    <a:pt x="214867" y="111357"/>
-                  </a:lnTo>
-                  <a:lnTo>
-                    <a:pt x="286490" y="147080"/>
-                  </a:lnTo>
-                  <a:lnTo>
-                    <a:pt x="358112" y="182127"/>
-                  </a:lnTo>
-                  <a:lnTo>
-                    <a:pt x="429735" y="216511"/>
-                  </a:lnTo>
-                  <a:lnTo>
-                    <a:pt x="501357" y="250243"/>
-                  </a:lnTo>
-                  <a:lnTo>
-                    <a:pt x="572980" y="283338"/>
-                  </a:lnTo>
-                  <a:lnTo>
-                    <a:pt x="644602" y="315805"/>
-                  </a:lnTo>
-                  <a:lnTo>
-                    <a:pt x="716225" y="347659"/>
-                  </a:lnTo>
-                  <a:lnTo>
-                    <a:pt x="787847" y="378909"/>
-                  </a:lnTo>
-                  <a:lnTo>
-                    <a:pt x="859470" y="409568"/>
-                  </a:lnTo>
-                  <a:lnTo>
-                    <a:pt x="931092" y="439647"/>
-                  </a:lnTo>
-                  <a:lnTo>
-                    <a:pt x="1002715" y="469156"/>
-                  </a:lnTo>
-                  <a:lnTo>
-                    <a:pt x="1074337" y="498107"/>
-                  </a:lnTo>
-                  <a:lnTo>
-                    <a:pt x="1145960" y="526509"/>
-                  </a:lnTo>
-                  <a:lnTo>
-                    <a:pt x="1217582" y="554374"/>
-                  </a:lnTo>
-                  <a:lnTo>
-                    <a:pt x="1289205" y="581712"/>
-                  </a:lnTo>
-                  <a:lnTo>
-                    <a:pt x="1360827" y="608533"/>
-                  </a:lnTo>
-                  <a:lnTo>
-                    <a:pt x="1432450" y="634845"/>
-                  </a:lnTo>
-                  <a:lnTo>
-                    <a:pt x="1504073" y="660660"/>
-                  </a:lnTo>
-                  <a:lnTo>
-                    <a:pt x="1575695" y="685986"/>
-                  </a:lnTo>
-                  <a:lnTo>
-                    <a:pt x="1647318" y="710832"/>
-                  </a:lnTo>
-                  <a:lnTo>
-                    <a:pt x="1718940" y="735209"/>
-                  </a:lnTo>
-                  <a:lnTo>
-                    <a:pt x="1790563" y="759124"/>
-                  </a:lnTo>
-                  <a:lnTo>
-                    <a:pt x="1862185" y="782586"/>
-                  </a:lnTo>
-                  <a:lnTo>
-                    <a:pt x="1933808" y="805604"/>
-                  </a:lnTo>
-                  <a:lnTo>
-                    <a:pt x="2005430" y="828187"/>
-                  </a:lnTo>
-                  <a:lnTo>
-                    <a:pt x="2077053" y="850342"/>
-                  </a:lnTo>
-                  <a:lnTo>
-                    <a:pt x="2148675" y="872078"/>
-                  </a:lnTo>
-                  <a:lnTo>
-                    <a:pt x="2220298" y="893402"/>
-                  </a:lnTo>
-                  <a:lnTo>
-                    <a:pt x="2291920" y="914323"/>
-                  </a:lnTo>
-                  <a:lnTo>
-                    <a:pt x="2363543" y="934847"/>
-                  </a:lnTo>
-                  <a:lnTo>
-                    <a:pt x="2435165" y="954984"/>
-                  </a:lnTo>
-                  <a:lnTo>
-                    <a:pt x="2506788" y="974739"/>
-                  </a:lnTo>
-                  <a:lnTo>
-                    <a:pt x="2578410" y="994120"/>
-                  </a:lnTo>
-                  <a:lnTo>
-                    <a:pt x="2650033" y="1013134"/>
-                  </a:lnTo>
-                  <a:lnTo>
-                    <a:pt x="2721655" y="1031789"/>
-                  </a:lnTo>
-                  <a:lnTo>
-                    <a:pt x="2793278" y="1050090"/>
-                  </a:lnTo>
-                  <a:lnTo>
-                    <a:pt x="2864901" y="1068045"/>
-                  </a:lnTo>
-                  <a:lnTo>
-                    <a:pt x="2936523" y="1085660"/>
-                  </a:lnTo>
-                  <a:lnTo>
-                    <a:pt x="3008146" y="1102942"/>
-                  </a:lnTo>
-                  <a:lnTo>
-                    <a:pt x="3079768" y="1119897"/>
-                  </a:lnTo>
-                  <a:lnTo>
-                    <a:pt x="3151391" y="1136530"/>
-                  </a:lnTo>
-                  <a:lnTo>
-                    <a:pt x="3223013" y="1152849"/>
-                  </a:lnTo>
-                  <a:lnTo>
-                    <a:pt x="3294636" y="1168859"/>
-                  </a:lnTo>
-                  <a:lnTo>
-                    <a:pt x="3366258" y="1184566"/>
-                  </a:lnTo>
-                  <a:lnTo>
-                    <a:pt x="3437881" y="1199976"/>
-                  </a:lnTo>
-                  <a:lnTo>
-                    <a:pt x="3509503" y="1215094"/>
-                  </a:lnTo>
-                  <a:lnTo>
-                    <a:pt x="3581126" y="1229926"/>
-                  </a:lnTo>
-                  <a:lnTo>
-                    <a:pt x="3652748" y="1244477"/>
-                  </a:lnTo>
-                  <a:lnTo>
-                    <a:pt x="3724371" y="1258753"/>
-                  </a:lnTo>
-                  <a:lnTo>
-                    <a:pt x="3795993" y="1272758"/>
-                  </a:lnTo>
-                  <a:lnTo>
-                    <a:pt x="3867616" y="1286498"/>
-                  </a:lnTo>
-                  <a:lnTo>
-                    <a:pt x="3939238" y="1299979"/>
-                  </a:lnTo>
-                  <a:lnTo>
-                    <a:pt x="4010861" y="1313204"/>
-                  </a:lnTo>
-                  <a:lnTo>
-                    <a:pt x="4082483" y="1326179"/>
-                  </a:lnTo>
-                  <a:lnTo>
-                    <a:pt x="4154106" y="1338908"/>
-                  </a:lnTo>
-                  <a:lnTo>
-                    <a:pt x="4225729" y="1351396"/>
-                  </a:lnTo>
-                  <a:lnTo>
-                    <a:pt x="4297351" y="1363648"/>
-                  </a:lnTo>
-                  <a:lnTo>
-                    <a:pt x="4368974" y="1375668"/>
-                  </a:lnTo>
-                  <a:lnTo>
-                    <a:pt x="4440596" y="1387461"/>
-                  </a:lnTo>
-                  <a:lnTo>
-                    <a:pt x="4512219" y="1399030"/>
-                  </a:lnTo>
-                  <a:lnTo>
-                    <a:pt x="4583841" y="1410381"/>
-                  </a:lnTo>
-                  <a:lnTo>
-                    <a:pt x="4655464" y="1421516"/>
-                  </a:lnTo>
-                  <a:lnTo>
-                    <a:pt x="4727086" y="1432441"/>
-                  </a:lnTo>
-                  <a:lnTo>
-                    <a:pt x="4798709" y="1443159"/>
-                  </a:lnTo>
-                  <a:lnTo>
-                    <a:pt x="4870331" y="1453674"/>
-                  </a:lnTo>
-                  <a:lnTo>
-                    <a:pt x="4941954" y="1463990"/>
-                  </a:lnTo>
-                  <a:lnTo>
-                    <a:pt x="5013576" y="1474111"/>
-                  </a:lnTo>
-                  <a:lnTo>
-                    <a:pt x="5085199" y="1484040"/>
-                  </a:lnTo>
-                  <a:lnTo>
-                    <a:pt x="5156821" y="1493781"/>
-                  </a:lnTo>
-                  <a:lnTo>
-                    <a:pt x="5228444" y="1503338"/>
-                  </a:lnTo>
-                  <a:lnTo>
-                    <a:pt x="5300066" y="1512714"/>
-                  </a:lnTo>
-                  <a:lnTo>
-                    <a:pt x="5371689" y="1521913"/>
-                  </a:lnTo>
-                  <a:lnTo>
-                    <a:pt x="5443311" y="1530937"/>
-                  </a:lnTo>
-                  <a:lnTo>
-                    <a:pt x="5514934" y="1539791"/>
-                  </a:lnTo>
-                  <a:lnTo>
-                    <a:pt x="5586557" y="1548477"/>
-                  </a:lnTo>
-                  <a:lnTo>
-                    <a:pt x="5658179" y="1556999"/>
-                  </a:lnTo>
-                  <a:lnTo>
-                    <a:pt x="5729802" y="1565359"/>
-                  </a:lnTo>
-                  <a:lnTo>
-                    <a:pt x="5801424" y="1573561"/>
-                  </a:lnTo>
-                  <a:lnTo>
-                    <a:pt x="5873047" y="1581608"/>
-                  </a:lnTo>
-                  <a:lnTo>
-                    <a:pt x="5944669" y="1589503"/>
-                  </a:lnTo>
-                  <a:lnTo>
-                    <a:pt x="6016292" y="1597248"/>
-                  </a:lnTo>
-                  <a:lnTo>
-                    <a:pt x="6087914" y="1604846"/>
-                  </a:lnTo>
-                  <a:lnTo>
-                    <a:pt x="6159537" y="1612301"/>
-                  </a:lnTo>
-                  <a:lnTo>
-                    <a:pt x="6231159" y="1619615"/>
-                  </a:lnTo>
-                  <a:lnTo>
-                    <a:pt x="6302782" y="1626790"/>
-                  </a:lnTo>
-                  <a:lnTo>
-                    <a:pt x="6374404" y="1633829"/>
-                  </a:lnTo>
-                  <a:lnTo>
-                    <a:pt x="6446027" y="1640735"/>
-                  </a:lnTo>
-                  <a:lnTo>
-                    <a:pt x="6517649" y="1647511"/>
-                  </a:lnTo>
-                  <a:lnTo>
-                    <a:pt x="6589272" y="1654158"/>
-                  </a:lnTo>
-                  <a:lnTo>
-                    <a:pt x="6660894" y="1660679"/>
-                  </a:lnTo>
-                  <a:lnTo>
-                    <a:pt x="6732517" y="1667077"/>
-                  </a:lnTo>
-                  <a:lnTo>
-                    <a:pt x="6804139" y="1673354"/>
-                  </a:lnTo>
-                  <a:lnTo>
-                    <a:pt x="6875762" y="1679512"/>
-                  </a:lnTo>
-                  <a:lnTo>
-                    <a:pt x="6947385" y="1685554"/>
-                  </a:lnTo>
-                  <a:lnTo>
-                    <a:pt x="7019007" y="1691481"/>
-                  </a:lnTo>
-                  <a:lnTo>
-                    <a:pt x="7090630" y="1697296"/>
+                    <a:pt x="70344" y="13652"/>
+                  </a:lnTo>
+                  <a:lnTo>
+                    <a:pt x="140688" y="27046"/>
+                  </a:lnTo>
+                  <a:lnTo>
+                    <a:pt x="211033" y="40186"/>
+                  </a:lnTo>
+                  <a:lnTo>
+                    <a:pt x="281377" y="53077"/>
+                  </a:lnTo>
+                  <a:lnTo>
+                    <a:pt x="351722" y="65725"/>
+                  </a:lnTo>
+                  <a:lnTo>
+                    <a:pt x="422066" y="78133"/>
+                  </a:lnTo>
+                  <a:lnTo>
+                    <a:pt x="492411" y="90307"/>
+                  </a:lnTo>
+                  <a:lnTo>
+                    <a:pt x="562755" y="102250"/>
+                  </a:lnTo>
+                  <a:lnTo>
+                    <a:pt x="633100" y="113966"/>
+                  </a:lnTo>
+                  <a:lnTo>
+                    <a:pt x="703444" y="125462"/>
+                  </a:lnTo>
+                  <a:lnTo>
+                    <a:pt x="773789" y="136739"/>
+                  </a:lnTo>
+                  <a:lnTo>
+                    <a:pt x="844133" y="147803"/>
+                  </a:lnTo>
+                  <a:lnTo>
+                    <a:pt x="914478" y="158658"/>
+                  </a:lnTo>
+                  <a:lnTo>
+                    <a:pt x="984822" y="169307"/>
+                  </a:lnTo>
+                  <a:lnTo>
+                    <a:pt x="1055167" y="179755"/>
+                  </a:lnTo>
+                  <a:lnTo>
+                    <a:pt x="1125511" y="190005"/>
+                  </a:lnTo>
+                  <a:lnTo>
+                    <a:pt x="1195856" y="200060"/>
+                  </a:lnTo>
+                  <a:lnTo>
+                    <a:pt x="1266200" y="209926"/>
+                  </a:lnTo>
+                  <a:lnTo>
+                    <a:pt x="1336545" y="219605"/>
+                  </a:lnTo>
+                  <a:lnTo>
+                    <a:pt x="1406889" y="229100"/>
+                  </a:lnTo>
+                  <a:lnTo>
+                    <a:pt x="1477234" y="238416"/>
+                  </a:lnTo>
+                  <a:lnTo>
+                    <a:pt x="1547578" y="247556"/>
+                  </a:lnTo>
+                  <a:lnTo>
+                    <a:pt x="1617923" y="256522"/>
+                  </a:lnTo>
+                  <a:lnTo>
+                    <a:pt x="1688267" y="265319"/>
+                  </a:lnTo>
+                  <a:lnTo>
+                    <a:pt x="1758612" y="273950"/>
+                  </a:lnTo>
+                  <a:lnTo>
+                    <a:pt x="1828956" y="282417"/>
+                  </a:lnTo>
+                  <a:lnTo>
+                    <a:pt x="1899301" y="290723"/>
+                  </a:lnTo>
+                  <a:lnTo>
+                    <a:pt x="1969645" y="298873"/>
+                  </a:lnTo>
+                  <a:lnTo>
+                    <a:pt x="2039990" y="306868"/>
+                  </a:lnTo>
+                  <a:lnTo>
+                    <a:pt x="2110334" y="314712"/>
+                  </a:lnTo>
+                  <a:lnTo>
+                    <a:pt x="2180679" y="322407"/>
+                  </a:lnTo>
+                  <a:lnTo>
+                    <a:pt x="2251023" y="329957"/>
+                  </a:lnTo>
+                  <a:lnTo>
+                    <a:pt x="2321368" y="337364"/>
+                  </a:lnTo>
+                  <a:lnTo>
+                    <a:pt x="2391712" y="344631"/>
+                  </a:lnTo>
+                  <a:lnTo>
+                    <a:pt x="2462057" y="351760"/>
+                  </a:lnTo>
+                  <a:lnTo>
+                    <a:pt x="2532401" y="358754"/>
+                  </a:lnTo>
+                  <a:lnTo>
+                    <a:pt x="2602746" y="365616"/>
+                  </a:lnTo>
+                  <a:lnTo>
+                    <a:pt x="2673090" y="372348"/>
+                  </a:lnTo>
+                  <a:lnTo>
+                    <a:pt x="2743435" y="378953"/>
+                  </a:lnTo>
+                  <a:lnTo>
+                    <a:pt x="2813779" y="385432"/>
+                  </a:lnTo>
+                  <a:lnTo>
+                    <a:pt x="2884124" y="391789"/>
+                  </a:lnTo>
+                  <a:lnTo>
+                    <a:pt x="2954468" y="398026"/>
+                  </a:lnTo>
+                  <a:lnTo>
+                    <a:pt x="3024813" y="404144"/>
+                  </a:lnTo>
+                  <a:lnTo>
+                    <a:pt x="3095157" y="410147"/>
+                  </a:lnTo>
+                  <a:lnTo>
+                    <a:pt x="3165502" y="416036"/>
+                  </a:lnTo>
+                  <a:lnTo>
+                    <a:pt x="3235846" y="421813"/>
+                  </a:lnTo>
+                  <a:lnTo>
+                    <a:pt x="3306191" y="427482"/>
+                  </a:lnTo>
+                  <a:lnTo>
+                    <a:pt x="3376535" y="433043"/>
+                  </a:lnTo>
+                  <a:lnTo>
+                    <a:pt x="3446880" y="438498"/>
+                  </a:lnTo>
+                  <a:lnTo>
+                    <a:pt x="3517224" y="443851"/>
+                  </a:lnTo>
+                  <a:lnTo>
+                    <a:pt x="3587569" y="449102"/>
+                  </a:lnTo>
+                  <a:lnTo>
+                    <a:pt x="3657913" y="454254"/>
+                  </a:lnTo>
+                  <a:lnTo>
+                    <a:pt x="3728257" y="459308"/>
+                  </a:lnTo>
+                  <a:lnTo>
+                    <a:pt x="3798602" y="464267"/>
+                  </a:lnTo>
+                  <a:lnTo>
+                    <a:pt x="3868946" y="469131"/>
+                  </a:lnTo>
+                  <a:lnTo>
+                    <a:pt x="3939291" y="473904"/>
+                  </a:lnTo>
+                  <a:lnTo>
+                    <a:pt x="4009635" y="478586"/>
+                  </a:lnTo>
+                  <a:lnTo>
+                    <a:pt x="4079980" y="483180"/>
+                  </a:lnTo>
+                  <a:lnTo>
+                    <a:pt x="4150324" y="487687"/>
+                  </a:lnTo>
+                  <a:lnTo>
+                    <a:pt x="4220669" y="492108"/>
+                  </a:lnTo>
+                  <a:lnTo>
+                    <a:pt x="4291013" y="496446"/>
+                  </a:lnTo>
+                  <a:lnTo>
+                    <a:pt x="4361358" y="500702"/>
+                  </a:lnTo>
+                  <a:lnTo>
+                    <a:pt x="4431702" y="504877"/>
+                  </a:lnTo>
+                  <a:lnTo>
+                    <a:pt x="4502047" y="508973"/>
+                  </a:lnTo>
+                  <a:lnTo>
+                    <a:pt x="4572391" y="512991"/>
+                  </a:lnTo>
+                  <a:lnTo>
+                    <a:pt x="4642736" y="516934"/>
+                  </a:lnTo>
+                  <a:lnTo>
+                    <a:pt x="4713080" y="520802"/>
+                  </a:lnTo>
+                  <a:lnTo>
+                    <a:pt x="4783425" y="524596"/>
+                  </a:lnTo>
+                  <a:lnTo>
+                    <a:pt x="4853769" y="528319"/>
+                  </a:lnTo>
+                  <a:lnTo>
+                    <a:pt x="4924114" y="531972"/>
+                  </a:lnTo>
+                  <a:lnTo>
+                    <a:pt x="4994458" y="535555"/>
+                  </a:lnTo>
+                  <a:lnTo>
+                    <a:pt x="5064803" y="539070"/>
+                  </a:lnTo>
+                  <a:lnTo>
+                    <a:pt x="5135147" y="542519"/>
+                  </a:lnTo>
+                  <a:lnTo>
+                    <a:pt x="5205492" y="545903"/>
+                  </a:lnTo>
+                  <a:lnTo>
+                    <a:pt x="5275836" y="549222"/>
+                  </a:lnTo>
+                  <a:lnTo>
+                    <a:pt x="5346181" y="552479"/>
+                  </a:lnTo>
+                  <a:lnTo>
+                    <a:pt x="5416525" y="555674"/>
+                  </a:lnTo>
+                  <a:lnTo>
+                    <a:pt x="5486870" y="558809"/>
+                  </a:lnTo>
+                  <a:lnTo>
+                    <a:pt x="5557214" y="561884"/>
+                  </a:lnTo>
+                  <a:lnTo>
+                    <a:pt x="5627559" y="564901"/>
+                  </a:lnTo>
+                  <a:lnTo>
+                    <a:pt x="5697903" y="567861"/>
+                  </a:lnTo>
+                  <a:lnTo>
+                    <a:pt x="5768248" y="570765"/>
+                  </a:lnTo>
+                  <a:lnTo>
+                    <a:pt x="5838592" y="573614"/>
+                  </a:lnTo>
+                  <a:lnTo>
+                    <a:pt x="5908937" y="576409"/>
+                  </a:lnTo>
+                  <a:lnTo>
+                    <a:pt x="5979281" y="579151"/>
+                  </a:lnTo>
+                  <a:lnTo>
+                    <a:pt x="6049626" y="581841"/>
+                  </a:lnTo>
+                  <a:lnTo>
+                    <a:pt x="6119970" y="584481"/>
+                  </a:lnTo>
+                  <a:lnTo>
+                    <a:pt x="6190315" y="587070"/>
+                  </a:lnTo>
+                  <a:lnTo>
+                    <a:pt x="6260659" y="589610"/>
+                  </a:lnTo>
+                  <a:lnTo>
+                    <a:pt x="6331004" y="592103"/>
+                  </a:lnTo>
+                  <a:lnTo>
+                    <a:pt x="6401348" y="594548"/>
+                  </a:lnTo>
+                  <a:lnTo>
+                    <a:pt x="6471693" y="596946"/>
+                  </a:lnTo>
+                  <a:lnTo>
+                    <a:pt x="6542037" y="599300"/>
+                  </a:lnTo>
+                  <a:lnTo>
+                    <a:pt x="6612382" y="601609"/>
+                  </a:lnTo>
+                  <a:lnTo>
+                    <a:pt x="6682726" y="603874"/>
+                  </a:lnTo>
+                  <a:lnTo>
+                    <a:pt x="6753071" y="606096"/>
+                  </a:lnTo>
+                  <a:lnTo>
+                    <a:pt x="6823415" y="608276"/>
+                  </a:lnTo>
+                  <a:lnTo>
+                    <a:pt x="6893760" y="610415"/>
+                  </a:lnTo>
+                  <a:lnTo>
+                    <a:pt x="6964104" y="612514"/>
                   </a:lnTo>
                 </a:path>
               </a:pathLst>
@@ -4514,27 +4549,27 @@
         </p:sp>
         <p:sp>
           <p:nvSpPr>
-            <p:cNvPr id="24" name="pl24"/>
+            <p:cNvPr id="25" name="pl25"/>
             <p:cNvSpPr/>
             <p:nvPr/>
           </p:nvSpPr>
           <p:spPr>
             <a:xfrm>
-              <a:off x="817517" y="4727786"/>
-              <a:ext cx="7799693" cy="0"/>
+              <a:off x="887106" y="3100960"/>
+              <a:ext cx="7660515" cy="0"/>
             </a:xfrm>
             <a:custGeom>
               <a:avLst/>
               <a:pathLst>
-                <a:path w="7799693" h="0">
+                <a:path w="7660515" h="0">
                   <a:moveTo>
                     <a:pt x="0" y="0"/>
                   </a:moveTo>
                   <a:lnTo>
-                    <a:pt x="7799693" y="0"/>
-                  </a:lnTo>
-                  <a:lnTo>
-                    <a:pt x="7799693" y="0"/>
+                    <a:pt x="7660515" y="0"/>
+                  </a:lnTo>
+                  <a:lnTo>
+                    <a:pt x="7660515" y="0"/>
                   </a:lnTo>
                 </a:path>
               </a:pathLst>
@@ -4557,21 +4592,21 @@
         </p:sp>
         <p:sp>
           <p:nvSpPr>
-            <p:cNvPr id="25" name="pl25"/>
+            <p:cNvPr id="26" name="pl26"/>
             <p:cNvSpPr/>
             <p:nvPr/>
           </p:nvSpPr>
           <p:spPr>
             <a:xfrm>
-              <a:off x="4468386" y="2073503"/>
-              <a:ext cx="0" cy="3649639"/>
+              <a:off x="4472829" y="2143092"/>
+              <a:ext cx="0" cy="1317069"/>
             </a:xfrm>
             <a:custGeom>
               <a:avLst/>
               <a:pathLst>
-                <a:path w="0" h="3649639">
+                <a:path w="0" h="1317069">
                   <a:moveTo>
-                    <a:pt x="0" y="3649639"/>
+                    <a:pt x="0" y="1317069"/>
                   </a:moveTo>
                   <a:lnTo>
                     <a:pt x="0" y="0"/>
@@ -4600,13 +4635,13 @@
         </p:sp>
         <p:sp>
           <p:nvSpPr>
-            <p:cNvPr id="26" name="tx26"/>
+            <p:cNvPr id="27" name="tx27"/>
             <p:cNvSpPr/>
             <p:nvPr/>
           </p:nvSpPr>
           <p:spPr>
             <a:xfrm>
-              <a:off x="692708" y="5517199"/>
+              <a:off x="762297" y="3360243"/>
               <a:ext cx="62179" cy="80101"/>
             </a:xfrm>
             <a:prstGeom prst="rect">
@@ -4646,13 +4681,13 @@
         </p:sp>
         <p:sp>
           <p:nvSpPr>
-            <p:cNvPr id="27" name="tx27"/>
+            <p:cNvPr id="28" name="tx28"/>
             <p:cNvSpPr/>
             <p:nvPr/>
           </p:nvSpPr>
           <p:spPr>
             <a:xfrm>
-              <a:off x="692708" y="4687735"/>
+              <a:off x="762297" y="3060909"/>
               <a:ext cx="62179" cy="80101"/>
             </a:xfrm>
             <a:prstGeom prst="rect">
@@ -4692,13 +4727,13 @@
         </p:sp>
         <p:sp>
           <p:nvSpPr>
-            <p:cNvPr id="28" name="tx28"/>
+            <p:cNvPr id="29" name="tx29"/>
             <p:cNvSpPr/>
             <p:nvPr/>
           </p:nvSpPr>
           <p:spPr>
             <a:xfrm>
-              <a:off x="692708" y="3858272"/>
+              <a:off x="762297" y="2761575"/>
               <a:ext cx="62179" cy="80101"/>
             </a:xfrm>
             <a:prstGeom prst="rect">
@@ -4738,13 +4773,13 @@
         </p:sp>
         <p:sp>
           <p:nvSpPr>
-            <p:cNvPr id="29" name="tx29"/>
+            <p:cNvPr id="30" name="tx30"/>
             <p:cNvSpPr/>
             <p:nvPr/>
           </p:nvSpPr>
           <p:spPr>
             <a:xfrm>
-              <a:off x="692708" y="3028808"/>
+              <a:off x="762297" y="2462242"/>
               <a:ext cx="62179" cy="80101"/>
             </a:xfrm>
             <a:prstGeom prst="rect">
@@ -4784,13 +4819,13 @@
         </p:sp>
         <p:sp>
           <p:nvSpPr>
-            <p:cNvPr id="30" name="tx30"/>
+            <p:cNvPr id="31" name="tx31"/>
             <p:cNvSpPr/>
             <p:nvPr/>
           </p:nvSpPr>
           <p:spPr>
             <a:xfrm>
-              <a:off x="692708" y="2199345"/>
+              <a:off x="762297" y="2162908"/>
               <a:ext cx="62179" cy="80101"/>
             </a:xfrm>
             <a:prstGeom prst="rect">
@@ -4830,13 +4865,13 @@
         </p:sp>
         <p:sp>
           <p:nvSpPr>
-            <p:cNvPr id="31" name="tx31"/>
+            <p:cNvPr id="32" name="tx32"/>
             <p:cNvSpPr/>
             <p:nvPr/>
           </p:nvSpPr>
           <p:spPr>
             <a:xfrm>
-              <a:off x="2478335" y="5785772"/>
+              <a:off x="2516846" y="3522791"/>
               <a:ext cx="161574" cy="80101"/>
             </a:xfrm>
             <a:prstGeom prst="rect">
@@ -4876,13 +4911,13 @@
         </p:sp>
         <p:sp>
           <p:nvSpPr>
-            <p:cNvPr id="32" name="tx32"/>
+            <p:cNvPr id="33" name="tx33"/>
             <p:cNvSpPr/>
             <p:nvPr/>
           </p:nvSpPr>
           <p:spPr>
             <a:xfrm>
-              <a:off x="4582608" y="5785772"/>
+              <a:off x="4584458" y="3522791"/>
               <a:ext cx="62179" cy="80101"/>
             </a:xfrm>
             <a:prstGeom prst="rect">
@@ -4922,13 +4957,13 @@
         </p:sp>
         <p:sp>
           <p:nvSpPr>
-            <p:cNvPr id="33" name="tx33"/>
+            <p:cNvPr id="34" name="tx34"/>
             <p:cNvSpPr/>
             <p:nvPr/>
           </p:nvSpPr>
           <p:spPr>
             <a:xfrm>
-              <a:off x="6606094" y="5785772"/>
+              <a:off x="6571282" y="3522791"/>
               <a:ext cx="124358" cy="80101"/>
             </a:xfrm>
             <a:prstGeom prst="rect">
@@ -4968,13 +5003,13 @@
         </p:sp>
         <p:sp>
           <p:nvSpPr>
-            <p:cNvPr id="34" name="tx34"/>
+            <p:cNvPr id="35" name="tx35"/>
             <p:cNvSpPr/>
             <p:nvPr/>
           </p:nvSpPr>
           <p:spPr>
             <a:xfrm>
-              <a:off x="2928340" y="5925448"/>
+              <a:off x="2928340" y="3662467"/>
               <a:ext cx="3578047" cy="100218"/>
             </a:xfrm>
             <a:prstGeom prst="rect">
@@ -5014,13 +5049,13 @@
         </p:sp>
         <p:sp>
           <p:nvSpPr>
-            <p:cNvPr id="35" name="tx35"/>
+            <p:cNvPr id="36" name="tx36"/>
             <p:cNvSpPr/>
             <p:nvPr/>
           </p:nvSpPr>
           <p:spPr>
             <a:xfrm rot="-5400000">
-              <a:off x="68446" y="3848213"/>
+              <a:off x="138035" y="2751517"/>
               <a:ext cx="1016904" cy="100218"/>
             </a:xfrm>
             <a:prstGeom prst="rect">
@@ -5060,13 +5095,13 @@
         </p:sp>
         <p:sp>
           <p:nvSpPr>
-            <p:cNvPr id="36" name="tx36"/>
+            <p:cNvPr id="37" name="tx37"/>
             <p:cNvSpPr/>
             <p:nvPr/>
           </p:nvSpPr>
           <p:spPr>
             <a:xfrm>
-              <a:off x="817517" y="1896563"/>
+              <a:off x="887106" y="1966152"/>
               <a:ext cx="6985375" cy="82021"/>
             </a:xfrm>
             <a:prstGeom prst="rect">
@@ -5106,13 +5141,3692 @@
         </p:sp>
         <p:sp>
           <p:nvSpPr>
-            <p:cNvPr id="37" name="tx37"/>
+            <p:cNvPr id="38" name="tx38"/>
             <p:cNvSpPr/>
             <p:nvPr/>
           </p:nvSpPr>
           <p:spPr>
             <a:xfrm>
-              <a:off x="817517" y="1669789"/>
+              <a:off x="887106" y="1739378"/>
+              <a:ext cx="2661269" cy="120152"/>
+            </a:xfrm>
+            <a:prstGeom prst="rect">
+              <a:avLst/>
+            </a:prstGeom>
+            <a:noFill/>
+          </p:spPr>
+          <p:txBody>
+            <a:bodyPr lIns="0" rIns="0" tIns="0" bIns="0" anchorCtr="1" anchor="ctr" wrap="none"/>
+            <a:lstStyle/>
+            <a:p>
+              <a:pPr algn="l" marL="0" marR="0" indent="0">
+                <a:lnSpc>
+                  <a:spcPts val="1320"/>
+                </a:lnSpc>
+                <a:spcBef>
+                  <a:spcPts val="0"/>
+                </a:spcBef>
+                <a:spcAft>
+                  <a:spcPts val="0"/>
+                </a:spcAft>
+              </a:pPr>
+              <a:r>
+                <a:rPr sz="1320">
+                  <a:solidFill>
+                    <a:srgbClr val="000000">
+                      <a:alpha val="100000"/>
+                    </a:srgbClr>
+                  </a:solidFill>
+                  <a:latin typeface="Helvetica"/>
+                  <a:cs typeface="Helvetica"/>
+                </a:rPr>
+                <a:t>AKI (KDIGO) (Carboplatin AUC ≥ 3)</a:t>
+              </a:r>
+            </a:p>
+          </p:txBody>
+        </p:sp>
+        <p:sp>
+          <p:nvSpPr>
+            <p:cNvPr id="39" name="pl39"/>
+            <p:cNvSpPr/>
+            <p:nvPr/>
+          </p:nvSpPr>
+          <p:spPr>
+            <a:xfrm>
+              <a:off x="887106" y="5444019"/>
+              <a:ext cx="7660515" cy="0"/>
+            </a:xfrm>
+            <a:custGeom>
+              <a:avLst/>
+              <a:pathLst>
+                <a:path w="7660515" h="0">
+                  <a:moveTo>
+                    <a:pt x="0" y="0"/>
+                  </a:moveTo>
+                  <a:lnTo>
+                    <a:pt x="7660515" y="0"/>
+                  </a:lnTo>
+                  <a:lnTo>
+                    <a:pt x="7660515" y="0"/>
+                  </a:lnTo>
+                </a:path>
+              </a:pathLst>
+            </a:custGeom>
+            <a:ln w="6775" cap="flat">
+              <a:solidFill>
+                <a:srgbClr val="EBEBEB">
+                  <a:alpha val="100000"/>
+                </a:srgbClr>
+              </a:solidFill>
+              <a:prstDash val="solid"/>
+              <a:round/>
+            </a:ln>
+          </p:spPr>
+          <p:txBody>
+            <a:bodyPr/>
+            <a:lstStyle/>
+            <a:p/>
+          </p:txBody>
+        </p:sp>
+        <p:sp>
+          <p:nvSpPr>
+            <p:cNvPr id="40" name="pl40"/>
+            <p:cNvSpPr/>
+            <p:nvPr/>
+          </p:nvSpPr>
+          <p:spPr>
+            <a:xfrm>
+              <a:off x="887106" y="5144686"/>
+              <a:ext cx="7660515" cy="0"/>
+            </a:xfrm>
+            <a:custGeom>
+              <a:avLst/>
+              <a:pathLst>
+                <a:path w="7660515" h="0">
+                  <a:moveTo>
+                    <a:pt x="0" y="0"/>
+                  </a:moveTo>
+                  <a:lnTo>
+                    <a:pt x="7660515" y="0"/>
+                  </a:lnTo>
+                  <a:lnTo>
+                    <a:pt x="7660515" y="0"/>
+                  </a:lnTo>
+                </a:path>
+              </a:pathLst>
+            </a:custGeom>
+            <a:ln w="6775" cap="flat">
+              <a:solidFill>
+                <a:srgbClr val="EBEBEB">
+                  <a:alpha val="100000"/>
+                </a:srgbClr>
+              </a:solidFill>
+              <a:prstDash val="solid"/>
+              <a:round/>
+            </a:ln>
+          </p:spPr>
+          <p:txBody>
+            <a:bodyPr/>
+            <a:lstStyle/>
+            <a:p/>
+          </p:txBody>
+        </p:sp>
+        <p:sp>
+          <p:nvSpPr>
+            <p:cNvPr id="41" name="pl41"/>
+            <p:cNvSpPr/>
+            <p:nvPr/>
+          </p:nvSpPr>
+          <p:spPr>
+            <a:xfrm>
+              <a:off x="887106" y="4845352"/>
+              <a:ext cx="7660515" cy="0"/>
+            </a:xfrm>
+            <a:custGeom>
+              <a:avLst/>
+              <a:pathLst>
+                <a:path w="7660515" h="0">
+                  <a:moveTo>
+                    <a:pt x="0" y="0"/>
+                  </a:moveTo>
+                  <a:lnTo>
+                    <a:pt x="7660515" y="0"/>
+                  </a:lnTo>
+                  <a:lnTo>
+                    <a:pt x="7660515" y="0"/>
+                  </a:lnTo>
+                </a:path>
+              </a:pathLst>
+            </a:custGeom>
+            <a:ln w="6775" cap="flat">
+              <a:solidFill>
+                <a:srgbClr val="EBEBEB">
+                  <a:alpha val="100000"/>
+                </a:srgbClr>
+              </a:solidFill>
+              <a:prstDash val="solid"/>
+              <a:round/>
+            </a:ln>
+          </p:spPr>
+          <p:txBody>
+            <a:bodyPr/>
+            <a:lstStyle/>
+            <a:p/>
+          </p:txBody>
+        </p:sp>
+        <p:sp>
+          <p:nvSpPr>
+            <p:cNvPr id="42" name="pl42"/>
+            <p:cNvSpPr/>
+            <p:nvPr/>
+          </p:nvSpPr>
+          <p:spPr>
+            <a:xfrm>
+              <a:off x="887106" y="4546018"/>
+              <a:ext cx="7660515" cy="0"/>
+            </a:xfrm>
+            <a:custGeom>
+              <a:avLst/>
+              <a:pathLst>
+                <a:path w="7660515" h="0">
+                  <a:moveTo>
+                    <a:pt x="0" y="0"/>
+                  </a:moveTo>
+                  <a:lnTo>
+                    <a:pt x="7660515" y="0"/>
+                  </a:lnTo>
+                  <a:lnTo>
+                    <a:pt x="7660515" y="0"/>
+                  </a:lnTo>
+                </a:path>
+              </a:pathLst>
+            </a:custGeom>
+            <a:ln w="6775" cap="flat">
+              <a:solidFill>
+                <a:srgbClr val="EBEBEB">
+                  <a:alpha val="100000"/>
+                </a:srgbClr>
+              </a:solidFill>
+              <a:prstDash val="solid"/>
+              <a:round/>
+            </a:ln>
+          </p:spPr>
+          <p:txBody>
+            <a:bodyPr/>
+            <a:lstStyle/>
+            <a:p/>
+          </p:txBody>
+        </p:sp>
+        <p:sp>
+          <p:nvSpPr>
+            <p:cNvPr id="43" name="pl43"/>
+            <p:cNvSpPr/>
+            <p:nvPr/>
+          </p:nvSpPr>
+          <p:spPr>
+            <a:xfrm>
+              <a:off x="983303" y="4336484"/>
+              <a:ext cx="0" cy="1317069"/>
+            </a:xfrm>
+            <a:custGeom>
+              <a:avLst/>
+              <a:pathLst>
+                <a:path w="0" h="1317069">
+                  <a:moveTo>
+                    <a:pt x="0" y="1317069"/>
+                  </a:moveTo>
+                  <a:lnTo>
+                    <a:pt x="0" y="0"/>
+                  </a:lnTo>
+                  <a:lnTo>
+                    <a:pt x="0" y="0"/>
+                  </a:lnTo>
+                </a:path>
+              </a:pathLst>
+            </a:custGeom>
+            <a:ln w="6775" cap="flat">
+              <a:solidFill>
+                <a:srgbClr val="EBEBEB">
+                  <a:alpha val="100000"/>
+                </a:srgbClr>
+              </a:solidFill>
+              <a:prstDash val="solid"/>
+              <a:round/>
+            </a:ln>
+          </p:spPr>
+          <p:txBody>
+            <a:bodyPr/>
+            <a:lstStyle/>
+            <a:p/>
+          </p:txBody>
+        </p:sp>
+        <p:sp>
+          <p:nvSpPr>
+            <p:cNvPr id="44" name="pl44"/>
+            <p:cNvSpPr/>
+            <p:nvPr/>
+          </p:nvSpPr>
+          <p:spPr>
+            <a:xfrm>
+              <a:off x="1790468" y="4336484"/>
+              <a:ext cx="0" cy="1317069"/>
+            </a:xfrm>
+            <a:custGeom>
+              <a:avLst/>
+              <a:pathLst>
+                <a:path w="0" h="1317069">
+                  <a:moveTo>
+                    <a:pt x="0" y="1317069"/>
+                  </a:moveTo>
+                  <a:lnTo>
+                    <a:pt x="0" y="0"/>
+                  </a:lnTo>
+                  <a:lnTo>
+                    <a:pt x="0" y="0"/>
+                  </a:lnTo>
+                </a:path>
+              </a:pathLst>
+            </a:custGeom>
+            <a:ln w="6775" cap="flat">
+              <a:solidFill>
+                <a:srgbClr val="EBEBEB">
+                  <a:alpha val="100000"/>
+                </a:srgbClr>
+              </a:solidFill>
+              <a:prstDash val="solid"/>
+              <a:round/>
+            </a:ln>
+          </p:spPr>
+          <p:txBody>
+            <a:bodyPr/>
+            <a:lstStyle/>
+            <a:p/>
+          </p:txBody>
+        </p:sp>
+        <p:sp>
+          <p:nvSpPr>
+            <p:cNvPr id="45" name="pl45"/>
+            <p:cNvSpPr/>
+            <p:nvPr/>
+          </p:nvSpPr>
+          <p:spPr>
+            <a:xfrm>
+              <a:off x="2597634" y="4336484"/>
+              <a:ext cx="0" cy="1317069"/>
+            </a:xfrm>
+            <a:custGeom>
+              <a:avLst/>
+              <a:pathLst>
+                <a:path w="0" h="1317069">
+                  <a:moveTo>
+                    <a:pt x="0" y="1317069"/>
+                  </a:moveTo>
+                  <a:lnTo>
+                    <a:pt x="0" y="0"/>
+                  </a:lnTo>
+                  <a:lnTo>
+                    <a:pt x="0" y="0"/>
+                  </a:lnTo>
+                </a:path>
+              </a:pathLst>
+            </a:custGeom>
+            <a:ln w="6775" cap="flat">
+              <a:solidFill>
+                <a:srgbClr val="EBEBEB">
+                  <a:alpha val="100000"/>
+                </a:srgbClr>
+              </a:solidFill>
+              <a:prstDash val="solid"/>
+              <a:round/>
+            </a:ln>
+          </p:spPr>
+          <p:txBody>
+            <a:bodyPr/>
+            <a:lstStyle/>
+            <a:p/>
+          </p:txBody>
+        </p:sp>
+        <p:sp>
+          <p:nvSpPr>
+            <p:cNvPr id="46" name="pl46"/>
+            <p:cNvSpPr/>
+            <p:nvPr/>
+          </p:nvSpPr>
+          <p:spPr>
+            <a:xfrm>
+              <a:off x="3404799" y="4336484"/>
+              <a:ext cx="0" cy="1317069"/>
+            </a:xfrm>
+            <a:custGeom>
+              <a:avLst/>
+              <a:pathLst>
+                <a:path w="0" h="1317069">
+                  <a:moveTo>
+                    <a:pt x="0" y="1317069"/>
+                  </a:moveTo>
+                  <a:lnTo>
+                    <a:pt x="0" y="0"/>
+                  </a:lnTo>
+                  <a:lnTo>
+                    <a:pt x="0" y="0"/>
+                  </a:lnTo>
+                </a:path>
+              </a:pathLst>
+            </a:custGeom>
+            <a:ln w="6775" cap="flat">
+              <a:solidFill>
+                <a:srgbClr val="EBEBEB">
+                  <a:alpha val="100000"/>
+                </a:srgbClr>
+              </a:solidFill>
+              <a:prstDash val="solid"/>
+              <a:round/>
+            </a:ln>
+          </p:spPr>
+          <p:txBody>
+            <a:bodyPr/>
+            <a:lstStyle/>
+            <a:p/>
+          </p:txBody>
+        </p:sp>
+        <p:sp>
+          <p:nvSpPr>
+            <p:cNvPr id="47" name="pl47"/>
+            <p:cNvSpPr/>
+            <p:nvPr/>
+          </p:nvSpPr>
+          <p:spPr>
+            <a:xfrm>
+              <a:off x="4211965" y="4336484"/>
+              <a:ext cx="0" cy="1317069"/>
+            </a:xfrm>
+            <a:custGeom>
+              <a:avLst/>
+              <a:pathLst>
+                <a:path w="0" h="1317069">
+                  <a:moveTo>
+                    <a:pt x="0" y="1317069"/>
+                  </a:moveTo>
+                  <a:lnTo>
+                    <a:pt x="0" y="0"/>
+                  </a:lnTo>
+                  <a:lnTo>
+                    <a:pt x="0" y="0"/>
+                  </a:lnTo>
+                </a:path>
+              </a:pathLst>
+            </a:custGeom>
+            <a:ln w="6775" cap="flat">
+              <a:solidFill>
+                <a:srgbClr val="EBEBEB">
+                  <a:alpha val="100000"/>
+                </a:srgbClr>
+              </a:solidFill>
+              <a:prstDash val="solid"/>
+              <a:round/>
+            </a:ln>
+          </p:spPr>
+          <p:txBody>
+            <a:bodyPr/>
+            <a:lstStyle/>
+            <a:p/>
+          </p:txBody>
+        </p:sp>
+        <p:sp>
+          <p:nvSpPr>
+            <p:cNvPr id="48" name="pl48"/>
+            <p:cNvSpPr/>
+            <p:nvPr/>
+          </p:nvSpPr>
+          <p:spPr>
+            <a:xfrm>
+              <a:off x="5019130" y="4336484"/>
+              <a:ext cx="0" cy="1317069"/>
+            </a:xfrm>
+            <a:custGeom>
+              <a:avLst/>
+              <a:pathLst>
+                <a:path w="0" h="1317069">
+                  <a:moveTo>
+                    <a:pt x="0" y="1317069"/>
+                  </a:moveTo>
+                  <a:lnTo>
+                    <a:pt x="0" y="0"/>
+                  </a:lnTo>
+                  <a:lnTo>
+                    <a:pt x="0" y="0"/>
+                  </a:lnTo>
+                </a:path>
+              </a:pathLst>
+            </a:custGeom>
+            <a:ln w="6775" cap="flat">
+              <a:solidFill>
+                <a:srgbClr val="EBEBEB">
+                  <a:alpha val="100000"/>
+                </a:srgbClr>
+              </a:solidFill>
+              <a:prstDash val="solid"/>
+              <a:round/>
+            </a:ln>
+          </p:spPr>
+          <p:txBody>
+            <a:bodyPr/>
+            <a:lstStyle/>
+            <a:p/>
+          </p:txBody>
+        </p:sp>
+        <p:sp>
+          <p:nvSpPr>
+            <p:cNvPr id="49" name="pl49"/>
+            <p:cNvSpPr/>
+            <p:nvPr/>
+          </p:nvSpPr>
+          <p:spPr>
+            <a:xfrm>
+              <a:off x="5826296" y="4336484"/>
+              <a:ext cx="0" cy="1317069"/>
+            </a:xfrm>
+            <a:custGeom>
+              <a:avLst/>
+              <a:pathLst>
+                <a:path w="0" h="1317069">
+                  <a:moveTo>
+                    <a:pt x="0" y="1317069"/>
+                  </a:moveTo>
+                  <a:lnTo>
+                    <a:pt x="0" y="0"/>
+                  </a:lnTo>
+                  <a:lnTo>
+                    <a:pt x="0" y="0"/>
+                  </a:lnTo>
+                </a:path>
+              </a:pathLst>
+            </a:custGeom>
+            <a:ln w="6775" cap="flat">
+              <a:solidFill>
+                <a:srgbClr val="EBEBEB">
+                  <a:alpha val="100000"/>
+                </a:srgbClr>
+              </a:solidFill>
+              <a:prstDash val="solid"/>
+              <a:round/>
+            </a:ln>
+          </p:spPr>
+          <p:txBody>
+            <a:bodyPr/>
+            <a:lstStyle/>
+            <a:p/>
+          </p:txBody>
+        </p:sp>
+        <p:sp>
+          <p:nvSpPr>
+            <p:cNvPr id="50" name="pl50"/>
+            <p:cNvSpPr/>
+            <p:nvPr/>
+          </p:nvSpPr>
+          <p:spPr>
+            <a:xfrm>
+              <a:off x="6633461" y="4336484"/>
+              <a:ext cx="0" cy="1317069"/>
+            </a:xfrm>
+            <a:custGeom>
+              <a:avLst/>
+              <a:pathLst>
+                <a:path w="0" h="1317069">
+                  <a:moveTo>
+                    <a:pt x="0" y="1317069"/>
+                  </a:moveTo>
+                  <a:lnTo>
+                    <a:pt x="0" y="0"/>
+                  </a:lnTo>
+                  <a:lnTo>
+                    <a:pt x="0" y="0"/>
+                  </a:lnTo>
+                </a:path>
+              </a:pathLst>
+            </a:custGeom>
+            <a:ln w="6775" cap="flat">
+              <a:solidFill>
+                <a:srgbClr val="EBEBEB">
+                  <a:alpha val="100000"/>
+                </a:srgbClr>
+              </a:solidFill>
+              <a:prstDash val="solid"/>
+              <a:round/>
+            </a:ln>
+          </p:spPr>
+          <p:txBody>
+            <a:bodyPr/>
+            <a:lstStyle/>
+            <a:p/>
+          </p:txBody>
+        </p:sp>
+        <p:sp>
+          <p:nvSpPr>
+            <p:cNvPr id="51" name="pl51"/>
+            <p:cNvSpPr/>
+            <p:nvPr/>
+          </p:nvSpPr>
+          <p:spPr>
+            <a:xfrm>
+              <a:off x="7440627" y="4336484"/>
+              <a:ext cx="0" cy="1317069"/>
+            </a:xfrm>
+            <a:custGeom>
+              <a:avLst/>
+              <a:pathLst>
+                <a:path w="0" h="1317069">
+                  <a:moveTo>
+                    <a:pt x="0" y="1317069"/>
+                  </a:moveTo>
+                  <a:lnTo>
+                    <a:pt x="0" y="0"/>
+                  </a:lnTo>
+                  <a:lnTo>
+                    <a:pt x="0" y="0"/>
+                  </a:lnTo>
+                </a:path>
+              </a:pathLst>
+            </a:custGeom>
+            <a:ln w="6775" cap="flat">
+              <a:solidFill>
+                <a:srgbClr val="EBEBEB">
+                  <a:alpha val="100000"/>
+                </a:srgbClr>
+              </a:solidFill>
+              <a:prstDash val="solid"/>
+              <a:round/>
+            </a:ln>
+          </p:spPr>
+          <p:txBody>
+            <a:bodyPr/>
+            <a:lstStyle/>
+            <a:p/>
+          </p:txBody>
+        </p:sp>
+        <p:sp>
+          <p:nvSpPr>
+            <p:cNvPr id="52" name="pl52"/>
+            <p:cNvSpPr/>
+            <p:nvPr/>
+          </p:nvSpPr>
+          <p:spPr>
+            <a:xfrm>
+              <a:off x="8247792" y="4336484"/>
+              <a:ext cx="0" cy="1317069"/>
+            </a:xfrm>
+            <a:custGeom>
+              <a:avLst/>
+              <a:pathLst>
+                <a:path w="0" h="1317069">
+                  <a:moveTo>
+                    <a:pt x="0" y="1317069"/>
+                  </a:moveTo>
+                  <a:lnTo>
+                    <a:pt x="0" y="0"/>
+                  </a:lnTo>
+                  <a:lnTo>
+                    <a:pt x="0" y="0"/>
+                  </a:lnTo>
+                </a:path>
+              </a:pathLst>
+            </a:custGeom>
+            <a:ln w="6775" cap="flat">
+              <a:solidFill>
+                <a:srgbClr val="EBEBEB">
+                  <a:alpha val="100000"/>
+                </a:srgbClr>
+              </a:solidFill>
+              <a:prstDash val="solid"/>
+              <a:round/>
+            </a:ln>
+          </p:spPr>
+          <p:txBody>
+            <a:bodyPr/>
+            <a:lstStyle/>
+            <a:p/>
+          </p:txBody>
+        </p:sp>
+        <p:sp>
+          <p:nvSpPr>
+            <p:cNvPr id="53" name="pl53"/>
+            <p:cNvSpPr/>
+            <p:nvPr/>
+          </p:nvSpPr>
+          <p:spPr>
+            <a:xfrm>
+              <a:off x="887106" y="5593686"/>
+              <a:ext cx="7660515" cy="0"/>
+            </a:xfrm>
+            <a:custGeom>
+              <a:avLst/>
+              <a:pathLst>
+                <a:path w="7660515" h="0">
+                  <a:moveTo>
+                    <a:pt x="0" y="0"/>
+                  </a:moveTo>
+                  <a:lnTo>
+                    <a:pt x="7660515" y="0"/>
+                  </a:lnTo>
+                  <a:lnTo>
+                    <a:pt x="7660515" y="0"/>
+                  </a:lnTo>
+                </a:path>
+              </a:pathLst>
+            </a:custGeom>
+            <a:ln w="13550" cap="flat">
+              <a:solidFill>
+                <a:srgbClr val="EBEBEB">
+                  <a:alpha val="100000"/>
+                </a:srgbClr>
+              </a:solidFill>
+              <a:prstDash val="solid"/>
+              <a:round/>
+            </a:ln>
+          </p:spPr>
+          <p:txBody>
+            <a:bodyPr/>
+            <a:lstStyle/>
+            <a:p/>
+          </p:txBody>
+        </p:sp>
+        <p:sp>
+          <p:nvSpPr>
+            <p:cNvPr id="54" name="pl54"/>
+            <p:cNvSpPr/>
+            <p:nvPr/>
+          </p:nvSpPr>
+          <p:spPr>
+            <a:xfrm>
+              <a:off x="887106" y="5294352"/>
+              <a:ext cx="7660515" cy="0"/>
+            </a:xfrm>
+            <a:custGeom>
+              <a:avLst/>
+              <a:pathLst>
+                <a:path w="7660515" h="0">
+                  <a:moveTo>
+                    <a:pt x="0" y="0"/>
+                  </a:moveTo>
+                  <a:lnTo>
+                    <a:pt x="7660515" y="0"/>
+                  </a:lnTo>
+                  <a:lnTo>
+                    <a:pt x="7660515" y="0"/>
+                  </a:lnTo>
+                </a:path>
+              </a:pathLst>
+            </a:custGeom>
+            <a:ln w="13550" cap="flat">
+              <a:solidFill>
+                <a:srgbClr val="EBEBEB">
+                  <a:alpha val="100000"/>
+                </a:srgbClr>
+              </a:solidFill>
+              <a:prstDash val="solid"/>
+              <a:round/>
+            </a:ln>
+          </p:spPr>
+          <p:txBody>
+            <a:bodyPr/>
+            <a:lstStyle/>
+            <a:p/>
+          </p:txBody>
+        </p:sp>
+        <p:sp>
+          <p:nvSpPr>
+            <p:cNvPr id="55" name="pl55"/>
+            <p:cNvSpPr/>
+            <p:nvPr/>
+          </p:nvSpPr>
+          <p:spPr>
+            <a:xfrm>
+              <a:off x="887106" y="4995019"/>
+              <a:ext cx="7660515" cy="0"/>
+            </a:xfrm>
+            <a:custGeom>
+              <a:avLst/>
+              <a:pathLst>
+                <a:path w="7660515" h="0">
+                  <a:moveTo>
+                    <a:pt x="0" y="0"/>
+                  </a:moveTo>
+                  <a:lnTo>
+                    <a:pt x="7660515" y="0"/>
+                  </a:lnTo>
+                  <a:lnTo>
+                    <a:pt x="7660515" y="0"/>
+                  </a:lnTo>
+                </a:path>
+              </a:pathLst>
+            </a:custGeom>
+            <a:ln w="13550" cap="flat">
+              <a:solidFill>
+                <a:srgbClr val="EBEBEB">
+                  <a:alpha val="100000"/>
+                </a:srgbClr>
+              </a:solidFill>
+              <a:prstDash val="solid"/>
+              <a:round/>
+            </a:ln>
+          </p:spPr>
+          <p:txBody>
+            <a:bodyPr/>
+            <a:lstStyle/>
+            <a:p/>
+          </p:txBody>
+        </p:sp>
+        <p:sp>
+          <p:nvSpPr>
+            <p:cNvPr id="56" name="pl56"/>
+            <p:cNvSpPr/>
+            <p:nvPr/>
+          </p:nvSpPr>
+          <p:spPr>
+            <a:xfrm>
+              <a:off x="887106" y="4695685"/>
+              <a:ext cx="7660515" cy="0"/>
+            </a:xfrm>
+            <a:custGeom>
+              <a:avLst/>
+              <a:pathLst>
+                <a:path w="7660515" h="0">
+                  <a:moveTo>
+                    <a:pt x="0" y="0"/>
+                  </a:moveTo>
+                  <a:lnTo>
+                    <a:pt x="7660515" y="0"/>
+                  </a:lnTo>
+                  <a:lnTo>
+                    <a:pt x="7660515" y="0"/>
+                  </a:lnTo>
+                </a:path>
+              </a:pathLst>
+            </a:custGeom>
+            <a:ln w="13550" cap="flat">
+              <a:solidFill>
+                <a:srgbClr val="EBEBEB">
+                  <a:alpha val="100000"/>
+                </a:srgbClr>
+              </a:solidFill>
+              <a:prstDash val="solid"/>
+              <a:round/>
+            </a:ln>
+          </p:spPr>
+          <p:txBody>
+            <a:bodyPr/>
+            <a:lstStyle/>
+            <a:p/>
+          </p:txBody>
+        </p:sp>
+        <p:sp>
+          <p:nvSpPr>
+            <p:cNvPr id="57" name="pl57"/>
+            <p:cNvSpPr/>
+            <p:nvPr/>
+          </p:nvSpPr>
+          <p:spPr>
+            <a:xfrm>
+              <a:off x="887106" y="4396351"/>
+              <a:ext cx="7660515" cy="0"/>
+            </a:xfrm>
+            <a:custGeom>
+              <a:avLst/>
+              <a:pathLst>
+                <a:path w="7660515" h="0">
+                  <a:moveTo>
+                    <a:pt x="0" y="0"/>
+                  </a:moveTo>
+                  <a:lnTo>
+                    <a:pt x="7660515" y="0"/>
+                  </a:lnTo>
+                  <a:lnTo>
+                    <a:pt x="7660515" y="0"/>
+                  </a:lnTo>
+                </a:path>
+              </a:pathLst>
+            </a:custGeom>
+            <a:ln w="13550" cap="flat">
+              <a:solidFill>
+                <a:srgbClr val="EBEBEB">
+                  <a:alpha val="100000"/>
+                </a:srgbClr>
+              </a:solidFill>
+              <a:prstDash val="solid"/>
+              <a:round/>
+            </a:ln>
+          </p:spPr>
+          <p:txBody>
+            <a:bodyPr/>
+            <a:lstStyle/>
+            <a:p/>
+          </p:txBody>
+        </p:sp>
+        <p:sp>
+          <p:nvSpPr>
+            <p:cNvPr id="58" name="pl58"/>
+            <p:cNvSpPr/>
+            <p:nvPr/>
+          </p:nvSpPr>
+          <p:spPr>
+            <a:xfrm>
+              <a:off x="1386885" y="4336484"/>
+              <a:ext cx="0" cy="1317069"/>
+            </a:xfrm>
+            <a:custGeom>
+              <a:avLst/>
+              <a:pathLst>
+                <a:path w="0" h="1317069">
+                  <a:moveTo>
+                    <a:pt x="0" y="1317069"/>
+                  </a:moveTo>
+                  <a:lnTo>
+                    <a:pt x="0" y="0"/>
+                  </a:lnTo>
+                  <a:lnTo>
+                    <a:pt x="0" y="0"/>
+                  </a:lnTo>
+                </a:path>
+              </a:pathLst>
+            </a:custGeom>
+            <a:ln w="13550" cap="flat">
+              <a:solidFill>
+                <a:srgbClr val="EBEBEB">
+                  <a:alpha val="100000"/>
+                </a:srgbClr>
+              </a:solidFill>
+              <a:prstDash val="solid"/>
+              <a:round/>
+            </a:ln>
+          </p:spPr>
+          <p:txBody>
+            <a:bodyPr/>
+            <a:lstStyle/>
+            <a:p/>
+          </p:txBody>
+        </p:sp>
+        <p:sp>
+          <p:nvSpPr>
+            <p:cNvPr id="59" name="pl59"/>
+            <p:cNvSpPr/>
+            <p:nvPr/>
+          </p:nvSpPr>
+          <p:spPr>
+            <a:xfrm>
+              <a:off x="2194051" y="4336484"/>
+              <a:ext cx="0" cy="1317069"/>
+            </a:xfrm>
+            <a:custGeom>
+              <a:avLst/>
+              <a:pathLst>
+                <a:path w="0" h="1317069">
+                  <a:moveTo>
+                    <a:pt x="0" y="1317069"/>
+                  </a:moveTo>
+                  <a:lnTo>
+                    <a:pt x="0" y="0"/>
+                  </a:lnTo>
+                  <a:lnTo>
+                    <a:pt x="0" y="0"/>
+                  </a:lnTo>
+                </a:path>
+              </a:pathLst>
+            </a:custGeom>
+            <a:ln w="13550" cap="flat">
+              <a:solidFill>
+                <a:srgbClr val="EBEBEB">
+                  <a:alpha val="100000"/>
+                </a:srgbClr>
+              </a:solidFill>
+              <a:prstDash val="solid"/>
+              <a:round/>
+            </a:ln>
+          </p:spPr>
+          <p:txBody>
+            <a:bodyPr/>
+            <a:lstStyle/>
+            <a:p/>
+          </p:txBody>
+        </p:sp>
+        <p:sp>
+          <p:nvSpPr>
+            <p:cNvPr id="60" name="pl60"/>
+            <p:cNvSpPr/>
+            <p:nvPr/>
+          </p:nvSpPr>
+          <p:spPr>
+            <a:xfrm>
+              <a:off x="3001216" y="4336484"/>
+              <a:ext cx="0" cy="1317069"/>
+            </a:xfrm>
+            <a:custGeom>
+              <a:avLst/>
+              <a:pathLst>
+                <a:path w="0" h="1317069">
+                  <a:moveTo>
+                    <a:pt x="0" y="1317069"/>
+                  </a:moveTo>
+                  <a:lnTo>
+                    <a:pt x="0" y="0"/>
+                  </a:lnTo>
+                  <a:lnTo>
+                    <a:pt x="0" y="0"/>
+                  </a:lnTo>
+                </a:path>
+              </a:pathLst>
+            </a:custGeom>
+            <a:ln w="13550" cap="flat">
+              <a:solidFill>
+                <a:srgbClr val="EBEBEB">
+                  <a:alpha val="100000"/>
+                </a:srgbClr>
+              </a:solidFill>
+              <a:prstDash val="solid"/>
+              <a:round/>
+            </a:ln>
+          </p:spPr>
+          <p:txBody>
+            <a:bodyPr/>
+            <a:lstStyle/>
+            <a:p/>
+          </p:txBody>
+        </p:sp>
+        <p:sp>
+          <p:nvSpPr>
+            <p:cNvPr id="61" name="pl61"/>
+            <p:cNvSpPr/>
+            <p:nvPr/>
+          </p:nvSpPr>
+          <p:spPr>
+            <a:xfrm>
+              <a:off x="3808382" y="4336484"/>
+              <a:ext cx="0" cy="1317069"/>
+            </a:xfrm>
+            <a:custGeom>
+              <a:avLst/>
+              <a:pathLst>
+                <a:path w="0" h="1317069">
+                  <a:moveTo>
+                    <a:pt x="0" y="1317069"/>
+                  </a:moveTo>
+                  <a:lnTo>
+                    <a:pt x="0" y="0"/>
+                  </a:lnTo>
+                  <a:lnTo>
+                    <a:pt x="0" y="0"/>
+                  </a:lnTo>
+                </a:path>
+              </a:pathLst>
+            </a:custGeom>
+            <a:ln w="13550" cap="flat">
+              <a:solidFill>
+                <a:srgbClr val="EBEBEB">
+                  <a:alpha val="100000"/>
+                </a:srgbClr>
+              </a:solidFill>
+              <a:prstDash val="solid"/>
+              <a:round/>
+            </a:ln>
+          </p:spPr>
+          <p:txBody>
+            <a:bodyPr/>
+            <a:lstStyle/>
+            <a:p/>
+          </p:txBody>
+        </p:sp>
+        <p:sp>
+          <p:nvSpPr>
+            <p:cNvPr id="62" name="pl62"/>
+            <p:cNvSpPr/>
+            <p:nvPr/>
+          </p:nvSpPr>
+          <p:spPr>
+            <a:xfrm>
+              <a:off x="4615547" y="4336484"/>
+              <a:ext cx="0" cy="1317069"/>
+            </a:xfrm>
+            <a:custGeom>
+              <a:avLst/>
+              <a:pathLst>
+                <a:path w="0" h="1317069">
+                  <a:moveTo>
+                    <a:pt x="0" y="1317069"/>
+                  </a:moveTo>
+                  <a:lnTo>
+                    <a:pt x="0" y="0"/>
+                  </a:lnTo>
+                  <a:lnTo>
+                    <a:pt x="0" y="0"/>
+                  </a:lnTo>
+                </a:path>
+              </a:pathLst>
+            </a:custGeom>
+            <a:ln w="13550" cap="flat">
+              <a:solidFill>
+                <a:srgbClr val="EBEBEB">
+                  <a:alpha val="100000"/>
+                </a:srgbClr>
+              </a:solidFill>
+              <a:prstDash val="solid"/>
+              <a:round/>
+            </a:ln>
+          </p:spPr>
+          <p:txBody>
+            <a:bodyPr/>
+            <a:lstStyle/>
+            <a:p/>
+          </p:txBody>
+        </p:sp>
+        <p:sp>
+          <p:nvSpPr>
+            <p:cNvPr id="63" name="pl63"/>
+            <p:cNvSpPr/>
+            <p:nvPr/>
+          </p:nvSpPr>
+          <p:spPr>
+            <a:xfrm>
+              <a:off x="5422713" y="4336484"/>
+              <a:ext cx="0" cy="1317069"/>
+            </a:xfrm>
+            <a:custGeom>
+              <a:avLst/>
+              <a:pathLst>
+                <a:path w="0" h="1317069">
+                  <a:moveTo>
+                    <a:pt x="0" y="1317069"/>
+                  </a:moveTo>
+                  <a:lnTo>
+                    <a:pt x="0" y="0"/>
+                  </a:lnTo>
+                  <a:lnTo>
+                    <a:pt x="0" y="0"/>
+                  </a:lnTo>
+                </a:path>
+              </a:pathLst>
+            </a:custGeom>
+            <a:ln w="13550" cap="flat">
+              <a:solidFill>
+                <a:srgbClr val="EBEBEB">
+                  <a:alpha val="100000"/>
+                </a:srgbClr>
+              </a:solidFill>
+              <a:prstDash val="solid"/>
+              <a:round/>
+            </a:ln>
+          </p:spPr>
+          <p:txBody>
+            <a:bodyPr/>
+            <a:lstStyle/>
+            <a:p/>
+          </p:txBody>
+        </p:sp>
+        <p:sp>
+          <p:nvSpPr>
+            <p:cNvPr id="64" name="pl64"/>
+            <p:cNvSpPr/>
+            <p:nvPr/>
+          </p:nvSpPr>
+          <p:spPr>
+            <a:xfrm>
+              <a:off x="6229878" y="4336484"/>
+              <a:ext cx="0" cy="1317069"/>
+            </a:xfrm>
+            <a:custGeom>
+              <a:avLst/>
+              <a:pathLst>
+                <a:path w="0" h="1317069">
+                  <a:moveTo>
+                    <a:pt x="0" y="1317069"/>
+                  </a:moveTo>
+                  <a:lnTo>
+                    <a:pt x="0" y="0"/>
+                  </a:lnTo>
+                  <a:lnTo>
+                    <a:pt x="0" y="0"/>
+                  </a:lnTo>
+                </a:path>
+              </a:pathLst>
+            </a:custGeom>
+            <a:ln w="13550" cap="flat">
+              <a:solidFill>
+                <a:srgbClr val="EBEBEB">
+                  <a:alpha val="100000"/>
+                </a:srgbClr>
+              </a:solidFill>
+              <a:prstDash val="solid"/>
+              <a:round/>
+            </a:ln>
+          </p:spPr>
+          <p:txBody>
+            <a:bodyPr/>
+            <a:lstStyle/>
+            <a:p/>
+          </p:txBody>
+        </p:sp>
+        <p:sp>
+          <p:nvSpPr>
+            <p:cNvPr id="65" name="pl65"/>
+            <p:cNvSpPr/>
+            <p:nvPr/>
+          </p:nvSpPr>
+          <p:spPr>
+            <a:xfrm>
+              <a:off x="7037044" y="4336484"/>
+              <a:ext cx="0" cy="1317069"/>
+            </a:xfrm>
+            <a:custGeom>
+              <a:avLst/>
+              <a:pathLst>
+                <a:path w="0" h="1317069">
+                  <a:moveTo>
+                    <a:pt x="0" y="1317069"/>
+                  </a:moveTo>
+                  <a:lnTo>
+                    <a:pt x="0" y="0"/>
+                  </a:lnTo>
+                  <a:lnTo>
+                    <a:pt x="0" y="0"/>
+                  </a:lnTo>
+                </a:path>
+              </a:pathLst>
+            </a:custGeom>
+            <a:ln w="13550" cap="flat">
+              <a:solidFill>
+                <a:srgbClr val="EBEBEB">
+                  <a:alpha val="100000"/>
+                </a:srgbClr>
+              </a:solidFill>
+              <a:prstDash val="solid"/>
+              <a:round/>
+            </a:ln>
+          </p:spPr>
+          <p:txBody>
+            <a:bodyPr/>
+            <a:lstStyle/>
+            <a:p/>
+          </p:txBody>
+        </p:sp>
+        <p:sp>
+          <p:nvSpPr>
+            <p:cNvPr id="66" name="pl66"/>
+            <p:cNvSpPr/>
+            <p:nvPr/>
+          </p:nvSpPr>
+          <p:spPr>
+            <a:xfrm>
+              <a:off x="7844209" y="4336484"/>
+              <a:ext cx="0" cy="1317069"/>
+            </a:xfrm>
+            <a:custGeom>
+              <a:avLst/>
+              <a:pathLst>
+                <a:path w="0" h="1317069">
+                  <a:moveTo>
+                    <a:pt x="0" y="1317069"/>
+                  </a:moveTo>
+                  <a:lnTo>
+                    <a:pt x="0" y="0"/>
+                  </a:lnTo>
+                  <a:lnTo>
+                    <a:pt x="0" y="0"/>
+                  </a:lnTo>
+                </a:path>
+              </a:pathLst>
+            </a:custGeom>
+            <a:ln w="13550" cap="flat">
+              <a:solidFill>
+                <a:srgbClr val="EBEBEB">
+                  <a:alpha val="100000"/>
+                </a:srgbClr>
+              </a:solidFill>
+              <a:prstDash val="solid"/>
+              <a:round/>
+            </a:ln>
+          </p:spPr>
+          <p:txBody>
+            <a:bodyPr/>
+            <a:lstStyle/>
+            <a:p/>
+          </p:txBody>
+        </p:sp>
+        <p:sp>
+          <p:nvSpPr>
+            <p:cNvPr id="67" name="pg67"/>
+            <p:cNvSpPr/>
+            <p:nvPr/>
+          </p:nvSpPr>
+          <p:spPr>
+            <a:xfrm>
+              <a:off x="1235312" y="4336484"/>
+              <a:ext cx="6964104" cy="1220705"/>
+            </a:xfrm>
+            <a:custGeom>
+              <a:avLst/>
+              <a:pathLst>
+                <a:path w="6964104" h="1220705">
+                  <a:moveTo>
+                    <a:pt x="696256" y="0"/>
+                  </a:moveTo>
+                  <a:lnTo>
+                    <a:pt x="703444" y="5184"/>
+                  </a:lnTo>
+                  <a:lnTo>
+                    <a:pt x="773789" y="53942"/>
+                  </a:lnTo>
+                  <a:lnTo>
+                    <a:pt x="844133" y="100802"/>
+                  </a:lnTo>
+                  <a:lnTo>
+                    <a:pt x="914478" y="145837"/>
+                  </a:lnTo>
+                  <a:lnTo>
+                    <a:pt x="984822" y="189118"/>
+                  </a:lnTo>
+                  <a:lnTo>
+                    <a:pt x="1055167" y="230713"/>
+                  </a:lnTo>
+                  <a:lnTo>
+                    <a:pt x="1125511" y="270688"/>
+                  </a:lnTo>
+                  <a:lnTo>
+                    <a:pt x="1195856" y="309107"/>
+                  </a:lnTo>
+                  <a:lnTo>
+                    <a:pt x="1266200" y="346029"/>
+                  </a:lnTo>
+                  <a:lnTo>
+                    <a:pt x="1336545" y="381514"/>
+                  </a:lnTo>
+                  <a:lnTo>
+                    <a:pt x="1406889" y="415617"/>
+                  </a:lnTo>
+                  <a:lnTo>
+                    <a:pt x="1477234" y="448391"/>
+                  </a:lnTo>
+                  <a:lnTo>
+                    <a:pt x="1547578" y="479890"/>
+                  </a:lnTo>
+                  <a:lnTo>
+                    <a:pt x="1617923" y="510161"/>
+                  </a:lnTo>
+                  <a:lnTo>
+                    <a:pt x="1688267" y="539254"/>
+                  </a:lnTo>
+                  <a:lnTo>
+                    <a:pt x="1758612" y="567213"/>
+                  </a:lnTo>
+                  <a:lnTo>
+                    <a:pt x="1828956" y="594084"/>
+                  </a:lnTo>
+                  <a:lnTo>
+                    <a:pt x="1899301" y="619909"/>
+                  </a:lnTo>
+                  <a:lnTo>
+                    <a:pt x="1969645" y="644727"/>
+                  </a:lnTo>
+                  <a:lnTo>
+                    <a:pt x="2039990" y="668579"/>
+                  </a:lnTo>
+                  <a:lnTo>
+                    <a:pt x="2110334" y="691503"/>
+                  </a:lnTo>
+                  <a:lnTo>
+                    <a:pt x="2180679" y="713533"/>
+                  </a:lnTo>
+                  <a:lnTo>
+                    <a:pt x="2251023" y="734706"/>
+                  </a:lnTo>
+                  <a:lnTo>
+                    <a:pt x="2321368" y="755054"/>
+                  </a:lnTo>
+                  <a:lnTo>
+                    <a:pt x="2391712" y="774609"/>
+                  </a:lnTo>
+                  <a:lnTo>
+                    <a:pt x="2462057" y="793403"/>
+                  </a:lnTo>
+                  <a:lnTo>
+                    <a:pt x="2532401" y="811465"/>
+                  </a:lnTo>
+                  <a:lnTo>
+                    <a:pt x="2602746" y="828824"/>
+                  </a:lnTo>
+                  <a:lnTo>
+                    <a:pt x="2673090" y="845507"/>
+                  </a:lnTo>
+                  <a:lnTo>
+                    <a:pt x="2743435" y="861540"/>
+                  </a:lnTo>
+                  <a:lnTo>
+                    <a:pt x="2813779" y="876948"/>
+                  </a:lnTo>
+                  <a:lnTo>
+                    <a:pt x="2884124" y="891757"/>
+                  </a:lnTo>
+                  <a:lnTo>
+                    <a:pt x="2954468" y="905989"/>
+                  </a:lnTo>
+                  <a:lnTo>
+                    <a:pt x="3024813" y="919666"/>
+                  </a:lnTo>
+                  <a:lnTo>
+                    <a:pt x="3095157" y="932811"/>
+                  </a:lnTo>
+                  <a:lnTo>
+                    <a:pt x="3165502" y="945444"/>
+                  </a:lnTo>
+                  <a:lnTo>
+                    <a:pt x="3235846" y="957585"/>
+                  </a:lnTo>
+                  <a:lnTo>
+                    <a:pt x="3306191" y="957428"/>
+                  </a:lnTo>
+                  <a:lnTo>
+                    <a:pt x="3376535" y="956977"/>
+                  </a:lnTo>
+                  <a:lnTo>
+                    <a:pt x="3446880" y="956525"/>
+                  </a:lnTo>
+                  <a:lnTo>
+                    <a:pt x="3517224" y="956072"/>
+                  </a:lnTo>
+                  <a:lnTo>
+                    <a:pt x="3587569" y="955619"/>
+                  </a:lnTo>
+                  <a:lnTo>
+                    <a:pt x="3657913" y="955165"/>
+                  </a:lnTo>
+                  <a:lnTo>
+                    <a:pt x="3728257" y="954710"/>
+                  </a:lnTo>
+                  <a:lnTo>
+                    <a:pt x="3798602" y="954255"/>
+                  </a:lnTo>
+                  <a:lnTo>
+                    <a:pt x="3868946" y="953799"/>
+                  </a:lnTo>
+                  <a:lnTo>
+                    <a:pt x="3939291" y="953342"/>
+                  </a:lnTo>
+                  <a:lnTo>
+                    <a:pt x="4009635" y="952885"/>
+                  </a:lnTo>
+                  <a:lnTo>
+                    <a:pt x="4079980" y="952427"/>
+                  </a:lnTo>
+                  <a:lnTo>
+                    <a:pt x="4150324" y="951968"/>
+                  </a:lnTo>
+                  <a:lnTo>
+                    <a:pt x="4220669" y="951508"/>
+                  </a:lnTo>
+                  <a:lnTo>
+                    <a:pt x="4291013" y="951048"/>
+                  </a:lnTo>
+                  <a:lnTo>
+                    <a:pt x="4361358" y="950587"/>
+                  </a:lnTo>
+                  <a:lnTo>
+                    <a:pt x="4431702" y="950126"/>
+                  </a:lnTo>
+                  <a:lnTo>
+                    <a:pt x="4502047" y="949663"/>
+                  </a:lnTo>
+                  <a:lnTo>
+                    <a:pt x="4572391" y="949200"/>
+                  </a:lnTo>
+                  <a:lnTo>
+                    <a:pt x="4642736" y="948737"/>
+                  </a:lnTo>
+                  <a:lnTo>
+                    <a:pt x="4713080" y="948272"/>
+                  </a:lnTo>
+                  <a:lnTo>
+                    <a:pt x="4783425" y="947807"/>
+                  </a:lnTo>
+                  <a:lnTo>
+                    <a:pt x="4853769" y="947342"/>
+                  </a:lnTo>
+                  <a:lnTo>
+                    <a:pt x="4924114" y="946875"/>
+                  </a:lnTo>
+                  <a:lnTo>
+                    <a:pt x="4994458" y="946408"/>
+                  </a:lnTo>
+                  <a:lnTo>
+                    <a:pt x="5064803" y="945940"/>
+                  </a:lnTo>
+                  <a:lnTo>
+                    <a:pt x="5135147" y="945472"/>
+                  </a:lnTo>
+                  <a:lnTo>
+                    <a:pt x="5205492" y="945002"/>
+                  </a:lnTo>
+                  <a:lnTo>
+                    <a:pt x="5275836" y="944532"/>
+                  </a:lnTo>
+                  <a:lnTo>
+                    <a:pt x="5346181" y="944062"/>
+                  </a:lnTo>
+                  <a:lnTo>
+                    <a:pt x="5416525" y="943590"/>
+                  </a:lnTo>
+                  <a:lnTo>
+                    <a:pt x="5486870" y="943118"/>
+                  </a:lnTo>
+                  <a:lnTo>
+                    <a:pt x="5557214" y="942645"/>
+                  </a:lnTo>
+                  <a:lnTo>
+                    <a:pt x="5627559" y="942172"/>
+                  </a:lnTo>
+                  <a:lnTo>
+                    <a:pt x="5697903" y="941698"/>
+                  </a:lnTo>
+                  <a:lnTo>
+                    <a:pt x="5768248" y="941223"/>
+                  </a:lnTo>
+                  <a:lnTo>
+                    <a:pt x="5838592" y="940747"/>
+                  </a:lnTo>
+                  <a:lnTo>
+                    <a:pt x="5908937" y="940271"/>
+                  </a:lnTo>
+                  <a:lnTo>
+                    <a:pt x="5979281" y="939793"/>
+                  </a:lnTo>
+                  <a:lnTo>
+                    <a:pt x="6049626" y="939316"/>
+                  </a:lnTo>
+                  <a:lnTo>
+                    <a:pt x="6119970" y="938837"/>
+                  </a:lnTo>
+                  <a:lnTo>
+                    <a:pt x="6190315" y="938358"/>
+                  </a:lnTo>
+                  <a:lnTo>
+                    <a:pt x="6260659" y="937878"/>
+                  </a:lnTo>
+                  <a:lnTo>
+                    <a:pt x="6331004" y="937397"/>
+                  </a:lnTo>
+                  <a:lnTo>
+                    <a:pt x="6401348" y="936916"/>
+                  </a:lnTo>
+                  <a:lnTo>
+                    <a:pt x="6471693" y="936434"/>
+                  </a:lnTo>
+                  <a:lnTo>
+                    <a:pt x="6542037" y="935951"/>
+                  </a:lnTo>
+                  <a:lnTo>
+                    <a:pt x="6612382" y="935467"/>
+                  </a:lnTo>
+                  <a:lnTo>
+                    <a:pt x="6682726" y="934983"/>
+                  </a:lnTo>
+                  <a:lnTo>
+                    <a:pt x="6753071" y="934498"/>
+                  </a:lnTo>
+                  <a:lnTo>
+                    <a:pt x="6823415" y="934012"/>
+                  </a:lnTo>
+                  <a:lnTo>
+                    <a:pt x="6893760" y="933525"/>
+                  </a:lnTo>
+                  <a:lnTo>
+                    <a:pt x="6964104" y="933038"/>
+                  </a:lnTo>
+                  <a:lnTo>
+                    <a:pt x="6964104" y="1220705"/>
+                  </a:lnTo>
+                  <a:lnTo>
+                    <a:pt x="6893760" y="1219227"/>
+                  </a:lnTo>
+                  <a:lnTo>
+                    <a:pt x="6823415" y="1217688"/>
+                  </a:lnTo>
+                  <a:lnTo>
+                    <a:pt x="6753071" y="1216087"/>
+                  </a:lnTo>
+                  <a:lnTo>
+                    <a:pt x="6682726" y="1214420"/>
+                  </a:lnTo>
+                  <a:lnTo>
+                    <a:pt x="6612382" y="1212687"/>
+                  </a:lnTo>
+                  <a:lnTo>
+                    <a:pt x="6542037" y="1210883"/>
+                  </a:lnTo>
+                  <a:lnTo>
+                    <a:pt x="6471693" y="1209006"/>
+                  </a:lnTo>
+                  <a:lnTo>
+                    <a:pt x="6401348" y="1207053"/>
+                  </a:lnTo>
+                  <a:lnTo>
+                    <a:pt x="6331004" y="1205021"/>
+                  </a:lnTo>
+                  <a:lnTo>
+                    <a:pt x="6260659" y="1202907"/>
+                  </a:lnTo>
+                  <a:lnTo>
+                    <a:pt x="6190315" y="1200706"/>
+                  </a:lnTo>
+                  <a:lnTo>
+                    <a:pt x="6119970" y="1198417"/>
+                  </a:lnTo>
+                  <a:lnTo>
+                    <a:pt x="6049626" y="1196035"/>
+                  </a:lnTo>
+                  <a:lnTo>
+                    <a:pt x="5979281" y="1193556"/>
+                  </a:lnTo>
+                  <a:lnTo>
+                    <a:pt x="5908937" y="1190977"/>
+                  </a:lnTo>
+                  <a:lnTo>
+                    <a:pt x="5838592" y="1188294"/>
+                  </a:lnTo>
+                  <a:lnTo>
+                    <a:pt x="5768248" y="1185502"/>
+                  </a:lnTo>
+                  <a:lnTo>
+                    <a:pt x="5697903" y="1182596"/>
+                  </a:lnTo>
+                  <a:lnTo>
+                    <a:pt x="5627559" y="1179573"/>
+                  </a:lnTo>
+                  <a:lnTo>
+                    <a:pt x="5557214" y="1176427"/>
+                  </a:lnTo>
+                  <a:lnTo>
+                    <a:pt x="5486870" y="1173154"/>
+                  </a:lnTo>
+                  <a:lnTo>
+                    <a:pt x="5416525" y="1169748"/>
+                  </a:lnTo>
+                  <a:lnTo>
+                    <a:pt x="5346181" y="1166205"/>
+                  </a:lnTo>
+                  <a:lnTo>
+                    <a:pt x="5275836" y="1162517"/>
+                  </a:lnTo>
+                  <a:lnTo>
+                    <a:pt x="5205492" y="1158680"/>
+                  </a:lnTo>
+                  <a:lnTo>
+                    <a:pt x="5135147" y="1154688"/>
+                  </a:lnTo>
+                  <a:lnTo>
+                    <a:pt x="5064803" y="1150534"/>
+                  </a:lnTo>
+                  <a:lnTo>
+                    <a:pt x="4994458" y="1146212"/>
+                  </a:lnTo>
+                  <a:lnTo>
+                    <a:pt x="4924114" y="1141714"/>
+                  </a:lnTo>
+                  <a:lnTo>
+                    <a:pt x="4853769" y="1137034"/>
+                  </a:lnTo>
+                  <a:lnTo>
+                    <a:pt x="4783425" y="1132165"/>
+                  </a:lnTo>
+                  <a:lnTo>
+                    <a:pt x="4713080" y="1127098"/>
+                  </a:lnTo>
+                  <a:lnTo>
+                    <a:pt x="4642736" y="1121826"/>
+                  </a:lnTo>
+                  <a:lnTo>
+                    <a:pt x="4572391" y="1116340"/>
+                  </a:lnTo>
+                  <a:lnTo>
+                    <a:pt x="4502047" y="1110632"/>
+                  </a:lnTo>
+                  <a:lnTo>
+                    <a:pt x="4431702" y="1104693"/>
+                  </a:lnTo>
+                  <a:lnTo>
+                    <a:pt x="4361358" y="1098513"/>
+                  </a:lnTo>
+                  <a:lnTo>
+                    <a:pt x="4291013" y="1092083"/>
+                  </a:lnTo>
+                  <a:lnTo>
+                    <a:pt x="4220669" y="1085392"/>
+                  </a:lnTo>
+                  <a:lnTo>
+                    <a:pt x="4150324" y="1078430"/>
+                  </a:lnTo>
+                  <a:lnTo>
+                    <a:pt x="4079980" y="1071186"/>
+                  </a:lnTo>
+                  <a:lnTo>
+                    <a:pt x="4009635" y="1063648"/>
+                  </a:lnTo>
+                  <a:lnTo>
+                    <a:pt x="3939291" y="1055805"/>
+                  </a:lnTo>
+                  <a:lnTo>
+                    <a:pt x="3868946" y="1047644"/>
+                  </a:lnTo>
+                  <a:lnTo>
+                    <a:pt x="3798602" y="1039152"/>
+                  </a:lnTo>
+                  <a:lnTo>
+                    <a:pt x="3728257" y="1030316"/>
+                  </a:lnTo>
+                  <a:lnTo>
+                    <a:pt x="3657913" y="1021122"/>
+                  </a:lnTo>
+                  <a:lnTo>
+                    <a:pt x="3587569" y="1011556"/>
+                  </a:lnTo>
+                  <a:lnTo>
+                    <a:pt x="3517224" y="1001602"/>
+                  </a:lnTo>
+                  <a:lnTo>
+                    <a:pt x="3446880" y="991245"/>
+                  </a:lnTo>
+                  <a:lnTo>
+                    <a:pt x="3376535" y="980467"/>
+                  </a:lnTo>
+                  <a:lnTo>
+                    <a:pt x="3306191" y="969254"/>
+                  </a:lnTo>
+                  <a:lnTo>
+                    <a:pt x="3235846" y="957879"/>
+                  </a:lnTo>
+                  <a:lnTo>
+                    <a:pt x="3165502" y="958329"/>
+                  </a:lnTo>
+                  <a:lnTo>
+                    <a:pt x="3095157" y="958778"/>
+                  </a:lnTo>
+                  <a:lnTo>
+                    <a:pt x="3024813" y="959226"/>
+                  </a:lnTo>
+                  <a:lnTo>
+                    <a:pt x="2954468" y="959674"/>
+                  </a:lnTo>
+                  <a:lnTo>
+                    <a:pt x="2884124" y="960121"/>
+                  </a:lnTo>
+                  <a:lnTo>
+                    <a:pt x="2813779" y="960568"/>
+                  </a:lnTo>
+                  <a:lnTo>
+                    <a:pt x="2743435" y="961014"/>
+                  </a:lnTo>
+                  <a:lnTo>
+                    <a:pt x="2673090" y="961459"/>
+                  </a:lnTo>
+                  <a:lnTo>
+                    <a:pt x="2602746" y="961904"/>
+                  </a:lnTo>
+                  <a:lnTo>
+                    <a:pt x="2532401" y="962347"/>
+                  </a:lnTo>
+                  <a:lnTo>
+                    <a:pt x="2462057" y="962791"/>
+                  </a:lnTo>
+                  <a:lnTo>
+                    <a:pt x="2391712" y="963233"/>
+                  </a:lnTo>
+                  <a:lnTo>
+                    <a:pt x="2321368" y="963675"/>
+                  </a:lnTo>
+                  <a:lnTo>
+                    <a:pt x="2251023" y="964116"/>
+                  </a:lnTo>
+                  <a:lnTo>
+                    <a:pt x="2180679" y="964557"/>
+                  </a:lnTo>
+                  <a:lnTo>
+                    <a:pt x="2110334" y="964997"/>
+                  </a:lnTo>
+                  <a:lnTo>
+                    <a:pt x="2039990" y="965436"/>
+                  </a:lnTo>
+                  <a:lnTo>
+                    <a:pt x="1969645" y="965874"/>
+                  </a:lnTo>
+                  <a:lnTo>
+                    <a:pt x="1899301" y="966312"/>
+                  </a:lnTo>
+                  <a:lnTo>
+                    <a:pt x="1828956" y="966750"/>
+                  </a:lnTo>
+                  <a:lnTo>
+                    <a:pt x="1758612" y="967186"/>
+                  </a:lnTo>
+                  <a:lnTo>
+                    <a:pt x="1688267" y="967622"/>
+                  </a:lnTo>
+                  <a:lnTo>
+                    <a:pt x="1617923" y="968057"/>
+                  </a:lnTo>
+                  <a:lnTo>
+                    <a:pt x="1547578" y="968492"/>
+                  </a:lnTo>
+                  <a:lnTo>
+                    <a:pt x="1477234" y="968926"/>
+                  </a:lnTo>
+                  <a:lnTo>
+                    <a:pt x="1406889" y="969359"/>
+                  </a:lnTo>
+                  <a:lnTo>
+                    <a:pt x="1336545" y="969792"/>
+                  </a:lnTo>
+                  <a:lnTo>
+                    <a:pt x="1266200" y="970224"/>
+                  </a:lnTo>
+                  <a:lnTo>
+                    <a:pt x="1195856" y="970655"/>
+                  </a:lnTo>
+                  <a:lnTo>
+                    <a:pt x="1125511" y="971086"/>
+                  </a:lnTo>
+                  <a:lnTo>
+                    <a:pt x="1055167" y="971516"/>
+                  </a:lnTo>
+                  <a:lnTo>
+                    <a:pt x="984822" y="971945"/>
+                  </a:lnTo>
+                  <a:lnTo>
+                    <a:pt x="914478" y="972374"/>
+                  </a:lnTo>
+                  <a:lnTo>
+                    <a:pt x="844133" y="972802"/>
+                  </a:lnTo>
+                  <a:lnTo>
+                    <a:pt x="773789" y="973230"/>
+                  </a:lnTo>
+                  <a:lnTo>
+                    <a:pt x="703444" y="973657"/>
+                  </a:lnTo>
+                  <a:lnTo>
+                    <a:pt x="633100" y="974083"/>
+                  </a:lnTo>
+                  <a:lnTo>
+                    <a:pt x="562755" y="974508"/>
+                  </a:lnTo>
+                  <a:lnTo>
+                    <a:pt x="492411" y="974933"/>
+                  </a:lnTo>
+                  <a:lnTo>
+                    <a:pt x="422066" y="975358"/>
+                  </a:lnTo>
+                  <a:lnTo>
+                    <a:pt x="351722" y="975781"/>
+                  </a:lnTo>
+                  <a:lnTo>
+                    <a:pt x="281377" y="976204"/>
+                  </a:lnTo>
+                  <a:lnTo>
+                    <a:pt x="211033" y="976627"/>
+                  </a:lnTo>
+                  <a:lnTo>
+                    <a:pt x="140688" y="977048"/>
+                  </a:lnTo>
+                  <a:lnTo>
+                    <a:pt x="70344" y="977469"/>
+                  </a:lnTo>
+                  <a:lnTo>
+                    <a:pt x="0" y="977890"/>
+                  </a:lnTo>
+                  <a:close/>
+                </a:path>
+              </a:pathLst>
+            </a:custGeom>
+            <a:solidFill>
+              <a:srgbClr val="FF8C00">
+                <a:alpha val="20000"/>
+              </a:srgbClr>
+            </a:solidFill>
+          </p:spPr>
+          <p:txBody>
+            <a:bodyPr/>
+            <a:lstStyle/>
+            <a:p/>
+          </p:txBody>
+        </p:sp>
+        <p:sp>
+          <p:nvSpPr>
+            <p:cNvPr id="68" name="pl68"/>
+            <p:cNvSpPr/>
+            <p:nvPr/>
+          </p:nvSpPr>
+          <p:spPr>
+            <a:xfrm>
+              <a:off x="1931568" y="4336484"/>
+              <a:ext cx="6267848" cy="957585"/>
+            </a:xfrm>
+            <a:custGeom>
+              <a:avLst/>
+              <a:pathLst>
+                <a:path w="6267848" h="957585">
+                  <a:moveTo>
+                    <a:pt x="0" y="0"/>
+                  </a:moveTo>
+                  <a:lnTo>
+                    <a:pt x="7188" y="5184"/>
+                  </a:lnTo>
+                  <a:lnTo>
+                    <a:pt x="77533" y="53942"/>
+                  </a:lnTo>
+                  <a:lnTo>
+                    <a:pt x="147877" y="100802"/>
+                  </a:lnTo>
+                  <a:lnTo>
+                    <a:pt x="218222" y="145837"/>
+                  </a:lnTo>
+                  <a:lnTo>
+                    <a:pt x="288566" y="189118"/>
+                  </a:lnTo>
+                  <a:lnTo>
+                    <a:pt x="358911" y="230713"/>
+                  </a:lnTo>
+                  <a:lnTo>
+                    <a:pt x="429255" y="270688"/>
+                  </a:lnTo>
+                  <a:lnTo>
+                    <a:pt x="499599" y="309107"/>
+                  </a:lnTo>
+                  <a:lnTo>
+                    <a:pt x="569944" y="346029"/>
+                  </a:lnTo>
+                  <a:lnTo>
+                    <a:pt x="640288" y="381514"/>
+                  </a:lnTo>
+                  <a:lnTo>
+                    <a:pt x="710633" y="415617"/>
+                  </a:lnTo>
+                  <a:lnTo>
+                    <a:pt x="780977" y="448391"/>
+                  </a:lnTo>
+                  <a:lnTo>
+                    <a:pt x="851322" y="479890"/>
+                  </a:lnTo>
+                  <a:lnTo>
+                    <a:pt x="921666" y="510161"/>
+                  </a:lnTo>
+                  <a:lnTo>
+                    <a:pt x="992011" y="539254"/>
+                  </a:lnTo>
+                  <a:lnTo>
+                    <a:pt x="1062355" y="567213"/>
+                  </a:lnTo>
+                  <a:lnTo>
+                    <a:pt x="1132700" y="594084"/>
+                  </a:lnTo>
+                  <a:lnTo>
+                    <a:pt x="1203044" y="619909"/>
+                  </a:lnTo>
+                  <a:lnTo>
+                    <a:pt x="1273389" y="644727"/>
+                  </a:lnTo>
+                  <a:lnTo>
+                    <a:pt x="1343733" y="668579"/>
+                  </a:lnTo>
+                  <a:lnTo>
+                    <a:pt x="1414078" y="691503"/>
+                  </a:lnTo>
+                  <a:lnTo>
+                    <a:pt x="1484422" y="713533"/>
+                  </a:lnTo>
+                  <a:lnTo>
+                    <a:pt x="1554767" y="734706"/>
+                  </a:lnTo>
+                  <a:lnTo>
+                    <a:pt x="1625111" y="755054"/>
+                  </a:lnTo>
+                  <a:lnTo>
+                    <a:pt x="1695456" y="774609"/>
+                  </a:lnTo>
+                  <a:lnTo>
+                    <a:pt x="1765800" y="793403"/>
+                  </a:lnTo>
+                  <a:lnTo>
+                    <a:pt x="1836145" y="811465"/>
+                  </a:lnTo>
+                  <a:lnTo>
+                    <a:pt x="1906489" y="828824"/>
+                  </a:lnTo>
+                  <a:lnTo>
+                    <a:pt x="1976834" y="845507"/>
+                  </a:lnTo>
+                  <a:lnTo>
+                    <a:pt x="2047178" y="861540"/>
+                  </a:lnTo>
+                  <a:lnTo>
+                    <a:pt x="2117523" y="876948"/>
+                  </a:lnTo>
+                  <a:lnTo>
+                    <a:pt x="2187867" y="891757"/>
+                  </a:lnTo>
+                  <a:lnTo>
+                    <a:pt x="2258212" y="905989"/>
+                  </a:lnTo>
+                  <a:lnTo>
+                    <a:pt x="2328556" y="919666"/>
+                  </a:lnTo>
+                  <a:lnTo>
+                    <a:pt x="2398901" y="932811"/>
+                  </a:lnTo>
+                  <a:lnTo>
+                    <a:pt x="2469245" y="945444"/>
+                  </a:lnTo>
+                  <a:lnTo>
+                    <a:pt x="2539590" y="957585"/>
+                  </a:lnTo>
+                  <a:lnTo>
+                    <a:pt x="2609934" y="957428"/>
+                  </a:lnTo>
+                  <a:lnTo>
+                    <a:pt x="2680279" y="956977"/>
+                  </a:lnTo>
+                  <a:lnTo>
+                    <a:pt x="2750623" y="956525"/>
+                  </a:lnTo>
+                  <a:lnTo>
+                    <a:pt x="2820968" y="956072"/>
+                  </a:lnTo>
+                  <a:lnTo>
+                    <a:pt x="2891312" y="955619"/>
+                  </a:lnTo>
+                  <a:lnTo>
+                    <a:pt x="2961657" y="955165"/>
+                  </a:lnTo>
+                  <a:lnTo>
+                    <a:pt x="3032001" y="954710"/>
+                  </a:lnTo>
+                  <a:lnTo>
+                    <a:pt x="3102346" y="954255"/>
+                  </a:lnTo>
+                  <a:lnTo>
+                    <a:pt x="3172690" y="953799"/>
+                  </a:lnTo>
+                  <a:lnTo>
+                    <a:pt x="3243035" y="953342"/>
+                  </a:lnTo>
+                  <a:lnTo>
+                    <a:pt x="3313379" y="952885"/>
+                  </a:lnTo>
+                  <a:lnTo>
+                    <a:pt x="3383724" y="952427"/>
+                  </a:lnTo>
+                  <a:lnTo>
+                    <a:pt x="3454068" y="951968"/>
+                  </a:lnTo>
+                  <a:lnTo>
+                    <a:pt x="3524413" y="951508"/>
+                  </a:lnTo>
+                  <a:lnTo>
+                    <a:pt x="3594757" y="951048"/>
+                  </a:lnTo>
+                  <a:lnTo>
+                    <a:pt x="3665102" y="950587"/>
+                  </a:lnTo>
+                  <a:lnTo>
+                    <a:pt x="3735446" y="950126"/>
+                  </a:lnTo>
+                  <a:lnTo>
+                    <a:pt x="3805791" y="949663"/>
+                  </a:lnTo>
+                  <a:lnTo>
+                    <a:pt x="3876135" y="949200"/>
+                  </a:lnTo>
+                  <a:lnTo>
+                    <a:pt x="3946480" y="948737"/>
+                  </a:lnTo>
+                  <a:lnTo>
+                    <a:pt x="4016824" y="948272"/>
+                  </a:lnTo>
+                  <a:lnTo>
+                    <a:pt x="4087169" y="947807"/>
+                  </a:lnTo>
+                  <a:lnTo>
+                    <a:pt x="4157513" y="947342"/>
+                  </a:lnTo>
+                  <a:lnTo>
+                    <a:pt x="4227857" y="946875"/>
+                  </a:lnTo>
+                  <a:lnTo>
+                    <a:pt x="4298202" y="946408"/>
+                  </a:lnTo>
+                  <a:lnTo>
+                    <a:pt x="4368546" y="945940"/>
+                  </a:lnTo>
+                  <a:lnTo>
+                    <a:pt x="4438891" y="945472"/>
+                  </a:lnTo>
+                  <a:lnTo>
+                    <a:pt x="4509235" y="945002"/>
+                  </a:lnTo>
+                  <a:lnTo>
+                    <a:pt x="4579580" y="944532"/>
+                  </a:lnTo>
+                  <a:lnTo>
+                    <a:pt x="4649924" y="944062"/>
+                  </a:lnTo>
+                  <a:lnTo>
+                    <a:pt x="4720269" y="943590"/>
+                  </a:lnTo>
+                  <a:lnTo>
+                    <a:pt x="4790613" y="943118"/>
+                  </a:lnTo>
+                  <a:lnTo>
+                    <a:pt x="4860958" y="942645"/>
+                  </a:lnTo>
+                  <a:lnTo>
+                    <a:pt x="4931302" y="942172"/>
+                  </a:lnTo>
+                  <a:lnTo>
+                    <a:pt x="5001647" y="941698"/>
+                  </a:lnTo>
+                  <a:lnTo>
+                    <a:pt x="5071991" y="941223"/>
+                  </a:lnTo>
+                  <a:lnTo>
+                    <a:pt x="5142336" y="940747"/>
+                  </a:lnTo>
+                  <a:lnTo>
+                    <a:pt x="5212680" y="940271"/>
+                  </a:lnTo>
+                  <a:lnTo>
+                    <a:pt x="5283025" y="939793"/>
+                  </a:lnTo>
+                  <a:lnTo>
+                    <a:pt x="5353369" y="939316"/>
+                  </a:lnTo>
+                  <a:lnTo>
+                    <a:pt x="5423714" y="938837"/>
+                  </a:lnTo>
+                  <a:lnTo>
+                    <a:pt x="5494058" y="938358"/>
+                  </a:lnTo>
+                  <a:lnTo>
+                    <a:pt x="5564403" y="937878"/>
+                  </a:lnTo>
+                  <a:lnTo>
+                    <a:pt x="5634747" y="937397"/>
+                  </a:lnTo>
+                  <a:lnTo>
+                    <a:pt x="5705092" y="936916"/>
+                  </a:lnTo>
+                  <a:lnTo>
+                    <a:pt x="5775436" y="936434"/>
+                  </a:lnTo>
+                  <a:lnTo>
+                    <a:pt x="5845781" y="935951"/>
+                  </a:lnTo>
+                  <a:lnTo>
+                    <a:pt x="5916125" y="935467"/>
+                  </a:lnTo>
+                  <a:lnTo>
+                    <a:pt x="5986470" y="934983"/>
+                  </a:lnTo>
+                  <a:lnTo>
+                    <a:pt x="6056814" y="934498"/>
+                  </a:lnTo>
+                  <a:lnTo>
+                    <a:pt x="6127159" y="934012"/>
+                  </a:lnTo>
+                  <a:lnTo>
+                    <a:pt x="6197503" y="933525"/>
+                  </a:lnTo>
+                  <a:lnTo>
+                    <a:pt x="6267848" y="933038"/>
+                  </a:lnTo>
+                </a:path>
+              </a:pathLst>
+            </a:custGeom>
+          </p:spPr>
+          <p:txBody>
+            <a:bodyPr/>
+            <a:lstStyle/>
+            <a:p/>
+          </p:txBody>
+        </p:sp>
+        <p:sp>
+          <p:nvSpPr>
+            <p:cNvPr id="69" name="pl69"/>
+            <p:cNvSpPr/>
+            <p:nvPr/>
+          </p:nvSpPr>
+          <p:spPr>
+            <a:xfrm>
+              <a:off x="1235312" y="5294363"/>
+              <a:ext cx="6964104" cy="262826"/>
+            </a:xfrm>
+            <a:custGeom>
+              <a:avLst/>
+              <a:pathLst>
+                <a:path w="6964104" h="262826">
+                  <a:moveTo>
+                    <a:pt x="6964104" y="262826"/>
+                  </a:moveTo>
+                  <a:lnTo>
+                    <a:pt x="6893760" y="261347"/>
+                  </a:lnTo>
+                  <a:lnTo>
+                    <a:pt x="6823415" y="259809"/>
+                  </a:lnTo>
+                  <a:lnTo>
+                    <a:pt x="6753071" y="258207"/>
+                  </a:lnTo>
+                  <a:lnTo>
+                    <a:pt x="6682726" y="256541"/>
+                  </a:lnTo>
+                  <a:lnTo>
+                    <a:pt x="6612382" y="254808"/>
+                  </a:lnTo>
+                  <a:lnTo>
+                    <a:pt x="6542037" y="253004"/>
+                  </a:lnTo>
+                  <a:lnTo>
+                    <a:pt x="6471693" y="251127"/>
+                  </a:lnTo>
+                  <a:lnTo>
+                    <a:pt x="6401348" y="249174"/>
+                  </a:lnTo>
+                  <a:lnTo>
+                    <a:pt x="6331004" y="247142"/>
+                  </a:lnTo>
+                  <a:lnTo>
+                    <a:pt x="6260659" y="245027"/>
+                  </a:lnTo>
+                  <a:lnTo>
+                    <a:pt x="6190315" y="242827"/>
+                  </a:lnTo>
+                  <a:lnTo>
+                    <a:pt x="6119970" y="240538"/>
+                  </a:lnTo>
+                  <a:lnTo>
+                    <a:pt x="6049626" y="238156"/>
+                  </a:lnTo>
+                  <a:lnTo>
+                    <a:pt x="5979281" y="235677"/>
+                  </a:lnTo>
+                  <a:lnTo>
+                    <a:pt x="5908937" y="233098"/>
+                  </a:lnTo>
+                  <a:lnTo>
+                    <a:pt x="5838592" y="230415"/>
+                  </a:lnTo>
+                  <a:lnTo>
+                    <a:pt x="5768248" y="227622"/>
+                  </a:lnTo>
+                  <a:lnTo>
+                    <a:pt x="5697903" y="224717"/>
+                  </a:lnTo>
+                  <a:lnTo>
+                    <a:pt x="5627559" y="221694"/>
+                  </a:lnTo>
+                  <a:lnTo>
+                    <a:pt x="5557214" y="218548"/>
+                  </a:lnTo>
+                  <a:lnTo>
+                    <a:pt x="5486870" y="215275"/>
+                  </a:lnTo>
+                  <a:lnTo>
+                    <a:pt x="5416525" y="211869"/>
+                  </a:lnTo>
+                  <a:lnTo>
+                    <a:pt x="5346181" y="208325"/>
+                  </a:lnTo>
+                  <a:lnTo>
+                    <a:pt x="5275836" y="204638"/>
+                  </a:lnTo>
+                  <a:lnTo>
+                    <a:pt x="5205492" y="200801"/>
+                  </a:lnTo>
+                  <a:lnTo>
+                    <a:pt x="5135147" y="196809"/>
+                  </a:lnTo>
+                  <a:lnTo>
+                    <a:pt x="5064803" y="192655"/>
+                  </a:lnTo>
+                  <a:lnTo>
+                    <a:pt x="4994458" y="188333"/>
+                  </a:lnTo>
+                  <a:lnTo>
+                    <a:pt x="4924114" y="183835"/>
+                  </a:lnTo>
+                  <a:lnTo>
+                    <a:pt x="4853769" y="179155"/>
+                  </a:lnTo>
+                  <a:lnTo>
+                    <a:pt x="4783425" y="174286"/>
+                  </a:lnTo>
+                  <a:lnTo>
+                    <a:pt x="4713080" y="169219"/>
+                  </a:lnTo>
+                  <a:lnTo>
+                    <a:pt x="4642736" y="163947"/>
+                  </a:lnTo>
+                  <a:lnTo>
+                    <a:pt x="4572391" y="158461"/>
+                  </a:lnTo>
+                  <a:lnTo>
+                    <a:pt x="4502047" y="152753"/>
+                  </a:lnTo>
+                  <a:lnTo>
+                    <a:pt x="4431702" y="146814"/>
+                  </a:lnTo>
+                  <a:lnTo>
+                    <a:pt x="4361358" y="140634"/>
+                  </a:lnTo>
+                  <a:lnTo>
+                    <a:pt x="4291013" y="134204"/>
+                  </a:lnTo>
+                  <a:lnTo>
+                    <a:pt x="4220669" y="127513"/>
+                  </a:lnTo>
+                  <a:lnTo>
+                    <a:pt x="4150324" y="120551"/>
+                  </a:lnTo>
+                  <a:lnTo>
+                    <a:pt x="4079980" y="113307"/>
+                  </a:lnTo>
+                  <a:lnTo>
+                    <a:pt x="4009635" y="105769"/>
+                  </a:lnTo>
+                  <a:lnTo>
+                    <a:pt x="3939291" y="97926"/>
+                  </a:lnTo>
+                  <a:lnTo>
+                    <a:pt x="3868946" y="89765"/>
+                  </a:lnTo>
+                  <a:lnTo>
+                    <a:pt x="3798602" y="81273"/>
+                  </a:lnTo>
+                  <a:lnTo>
+                    <a:pt x="3728257" y="72437"/>
+                  </a:lnTo>
+                  <a:lnTo>
+                    <a:pt x="3657913" y="63243"/>
+                  </a:lnTo>
+                  <a:lnTo>
+                    <a:pt x="3587569" y="53677"/>
+                  </a:lnTo>
+                  <a:lnTo>
+                    <a:pt x="3517224" y="43723"/>
+                  </a:lnTo>
+                  <a:lnTo>
+                    <a:pt x="3446880" y="33365"/>
+                  </a:lnTo>
+                  <a:lnTo>
+                    <a:pt x="3376535" y="22588"/>
+                  </a:lnTo>
+                  <a:lnTo>
+                    <a:pt x="3306191" y="11374"/>
+                  </a:lnTo>
+                  <a:lnTo>
+                    <a:pt x="3235846" y="0"/>
+                  </a:lnTo>
+                  <a:lnTo>
+                    <a:pt x="3165502" y="449"/>
+                  </a:lnTo>
+                  <a:lnTo>
+                    <a:pt x="3095157" y="899"/>
+                  </a:lnTo>
+                  <a:lnTo>
+                    <a:pt x="3024813" y="1347"/>
+                  </a:lnTo>
+                  <a:lnTo>
+                    <a:pt x="2954468" y="1795"/>
+                  </a:lnTo>
+                  <a:lnTo>
+                    <a:pt x="2884124" y="2242"/>
+                  </a:lnTo>
+                  <a:lnTo>
+                    <a:pt x="2813779" y="2689"/>
+                  </a:lnTo>
+                  <a:lnTo>
+                    <a:pt x="2743435" y="3135"/>
+                  </a:lnTo>
+                  <a:lnTo>
+                    <a:pt x="2673090" y="3580"/>
+                  </a:lnTo>
+                  <a:lnTo>
+                    <a:pt x="2602746" y="4024"/>
+                  </a:lnTo>
+                  <a:lnTo>
+                    <a:pt x="2532401" y="4468"/>
+                  </a:lnTo>
+                  <a:lnTo>
+                    <a:pt x="2462057" y="4912"/>
+                  </a:lnTo>
+                  <a:lnTo>
+                    <a:pt x="2391712" y="5354"/>
+                  </a:lnTo>
+                  <a:lnTo>
+                    <a:pt x="2321368" y="5796"/>
+                  </a:lnTo>
+                  <a:lnTo>
+                    <a:pt x="2251023" y="6237"/>
+                  </a:lnTo>
+                  <a:lnTo>
+                    <a:pt x="2180679" y="6678"/>
+                  </a:lnTo>
+                  <a:lnTo>
+                    <a:pt x="2110334" y="7118"/>
+                  </a:lnTo>
+                  <a:lnTo>
+                    <a:pt x="2039990" y="7557"/>
+                  </a:lnTo>
+                  <a:lnTo>
+                    <a:pt x="1969645" y="7995"/>
+                  </a:lnTo>
+                  <a:lnTo>
+                    <a:pt x="1899301" y="8433"/>
+                  </a:lnTo>
+                  <a:lnTo>
+                    <a:pt x="1828956" y="8870"/>
+                  </a:lnTo>
+                  <a:lnTo>
+                    <a:pt x="1758612" y="9307"/>
+                  </a:lnTo>
+                  <a:lnTo>
+                    <a:pt x="1688267" y="9743"/>
+                  </a:lnTo>
+                  <a:lnTo>
+                    <a:pt x="1617923" y="10178"/>
+                  </a:lnTo>
+                  <a:lnTo>
+                    <a:pt x="1547578" y="10613"/>
+                  </a:lnTo>
+                  <a:lnTo>
+                    <a:pt x="1477234" y="11047"/>
+                  </a:lnTo>
+                  <a:lnTo>
+                    <a:pt x="1406889" y="11480"/>
+                  </a:lnTo>
+                  <a:lnTo>
+                    <a:pt x="1336545" y="11913"/>
+                  </a:lnTo>
+                  <a:lnTo>
+                    <a:pt x="1266200" y="12345"/>
+                  </a:lnTo>
+                  <a:lnTo>
+                    <a:pt x="1195856" y="12776"/>
+                  </a:lnTo>
+                  <a:lnTo>
+                    <a:pt x="1125511" y="13207"/>
+                  </a:lnTo>
+                  <a:lnTo>
+                    <a:pt x="1055167" y="13637"/>
+                  </a:lnTo>
+                  <a:lnTo>
+                    <a:pt x="984822" y="14066"/>
+                  </a:lnTo>
+                  <a:lnTo>
+                    <a:pt x="914478" y="14495"/>
+                  </a:lnTo>
+                  <a:lnTo>
+                    <a:pt x="844133" y="14923"/>
+                  </a:lnTo>
+                  <a:lnTo>
+                    <a:pt x="773789" y="15351"/>
+                  </a:lnTo>
+                  <a:lnTo>
+                    <a:pt x="703444" y="15778"/>
+                  </a:lnTo>
+                  <a:lnTo>
+                    <a:pt x="633100" y="16204"/>
+                  </a:lnTo>
+                  <a:lnTo>
+                    <a:pt x="562755" y="16629"/>
+                  </a:lnTo>
+                  <a:lnTo>
+                    <a:pt x="492411" y="17054"/>
+                  </a:lnTo>
+                  <a:lnTo>
+                    <a:pt x="422066" y="17479"/>
+                  </a:lnTo>
+                  <a:lnTo>
+                    <a:pt x="351722" y="17902"/>
+                  </a:lnTo>
+                  <a:lnTo>
+                    <a:pt x="281377" y="18325"/>
+                  </a:lnTo>
+                  <a:lnTo>
+                    <a:pt x="211033" y="18748"/>
+                  </a:lnTo>
+                  <a:lnTo>
+                    <a:pt x="140688" y="19169"/>
+                  </a:lnTo>
+                  <a:lnTo>
+                    <a:pt x="70344" y="19590"/>
+                  </a:lnTo>
+                  <a:lnTo>
+                    <a:pt x="0" y="20011"/>
+                  </a:lnTo>
+                </a:path>
+              </a:pathLst>
+            </a:custGeom>
+          </p:spPr>
+          <p:txBody>
+            <a:bodyPr/>
+            <a:lstStyle/>
+            <a:p/>
+          </p:txBody>
+        </p:sp>
+        <p:sp>
+          <p:nvSpPr>
+            <p:cNvPr id="70" name="pl70"/>
+            <p:cNvSpPr/>
+            <p:nvPr/>
+          </p:nvSpPr>
+          <p:spPr>
+            <a:xfrm>
+              <a:off x="1235312" y="4872403"/>
+              <a:ext cx="6964104" cy="612514"/>
+            </a:xfrm>
+            <a:custGeom>
+              <a:avLst/>
+              <a:pathLst>
+                <a:path w="6964104" h="612514">
+                  <a:moveTo>
+                    <a:pt x="0" y="0"/>
+                  </a:moveTo>
+                  <a:lnTo>
+                    <a:pt x="70344" y="13652"/>
+                  </a:lnTo>
+                  <a:lnTo>
+                    <a:pt x="140688" y="27046"/>
+                  </a:lnTo>
+                  <a:lnTo>
+                    <a:pt x="211033" y="40186"/>
+                  </a:lnTo>
+                  <a:lnTo>
+                    <a:pt x="281377" y="53077"/>
+                  </a:lnTo>
+                  <a:lnTo>
+                    <a:pt x="351722" y="65725"/>
+                  </a:lnTo>
+                  <a:lnTo>
+                    <a:pt x="422066" y="78133"/>
+                  </a:lnTo>
+                  <a:lnTo>
+                    <a:pt x="492411" y="90307"/>
+                  </a:lnTo>
+                  <a:lnTo>
+                    <a:pt x="562755" y="102250"/>
+                  </a:lnTo>
+                  <a:lnTo>
+                    <a:pt x="633100" y="113966"/>
+                  </a:lnTo>
+                  <a:lnTo>
+                    <a:pt x="703444" y="125462"/>
+                  </a:lnTo>
+                  <a:lnTo>
+                    <a:pt x="773789" y="136739"/>
+                  </a:lnTo>
+                  <a:lnTo>
+                    <a:pt x="844133" y="147803"/>
+                  </a:lnTo>
+                  <a:lnTo>
+                    <a:pt x="914478" y="158658"/>
+                  </a:lnTo>
+                  <a:lnTo>
+                    <a:pt x="984822" y="169307"/>
+                  </a:lnTo>
+                  <a:lnTo>
+                    <a:pt x="1055167" y="179755"/>
+                  </a:lnTo>
+                  <a:lnTo>
+                    <a:pt x="1125511" y="190005"/>
+                  </a:lnTo>
+                  <a:lnTo>
+                    <a:pt x="1195856" y="200060"/>
+                  </a:lnTo>
+                  <a:lnTo>
+                    <a:pt x="1266200" y="209926"/>
+                  </a:lnTo>
+                  <a:lnTo>
+                    <a:pt x="1336545" y="219605"/>
+                  </a:lnTo>
+                  <a:lnTo>
+                    <a:pt x="1406889" y="229100"/>
+                  </a:lnTo>
+                  <a:lnTo>
+                    <a:pt x="1477234" y="238416"/>
+                  </a:lnTo>
+                  <a:lnTo>
+                    <a:pt x="1547578" y="247556"/>
+                  </a:lnTo>
+                  <a:lnTo>
+                    <a:pt x="1617923" y="256522"/>
+                  </a:lnTo>
+                  <a:lnTo>
+                    <a:pt x="1688267" y="265319"/>
+                  </a:lnTo>
+                  <a:lnTo>
+                    <a:pt x="1758612" y="273950"/>
+                  </a:lnTo>
+                  <a:lnTo>
+                    <a:pt x="1828956" y="282417"/>
+                  </a:lnTo>
+                  <a:lnTo>
+                    <a:pt x="1899301" y="290723"/>
+                  </a:lnTo>
+                  <a:lnTo>
+                    <a:pt x="1969645" y="298873"/>
+                  </a:lnTo>
+                  <a:lnTo>
+                    <a:pt x="2039990" y="306868"/>
+                  </a:lnTo>
+                  <a:lnTo>
+                    <a:pt x="2110334" y="314712"/>
+                  </a:lnTo>
+                  <a:lnTo>
+                    <a:pt x="2180679" y="322407"/>
+                  </a:lnTo>
+                  <a:lnTo>
+                    <a:pt x="2251023" y="329957"/>
+                  </a:lnTo>
+                  <a:lnTo>
+                    <a:pt x="2321368" y="337364"/>
+                  </a:lnTo>
+                  <a:lnTo>
+                    <a:pt x="2391712" y="344631"/>
+                  </a:lnTo>
+                  <a:lnTo>
+                    <a:pt x="2462057" y="351760"/>
+                  </a:lnTo>
+                  <a:lnTo>
+                    <a:pt x="2532401" y="358754"/>
+                  </a:lnTo>
+                  <a:lnTo>
+                    <a:pt x="2602746" y="365616"/>
+                  </a:lnTo>
+                  <a:lnTo>
+                    <a:pt x="2673090" y="372348"/>
+                  </a:lnTo>
+                  <a:lnTo>
+                    <a:pt x="2743435" y="378953"/>
+                  </a:lnTo>
+                  <a:lnTo>
+                    <a:pt x="2813779" y="385432"/>
+                  </a:lnTo>
+                  <a:lnTo>
+                    <a:pt x="2884124" y="391789"/>
+                  </a:lnTo>
+                  <a:lnTo>
+                    <a:pt x="2954468" y="398026"/>
+                  </a:lnTo>
+                  <a:lnTo>
+                    <a:pt x="3024813" y="404144"/>
+                  </a:lnTo>
+                  <a:lnTo>
+                    <a:pt x="3095157" y="410147"/>
+                  </a:lnTo>
+                  <a:lnTo>
+                    <a:pt x="3165502" y="416036"/>
+                  </a:lnTo>
+                  <a:lnTo>
+                    <a:pt x="3235846" y="421813"/>
+                  </a:lnTo>
+                  <a:lnTo>
+                    <a:pt x="3306191" y="427482"/>
+                  </a:lnTo>
+                  <a:lnTo>
+                    <a:pt x="3376535" y="433043"/>
+                  </a:lnTo>
+                  <a:lnTo>
+                    <a:pt x="3446880" y="438498"/>
+                  </a:lnTo>
+                  <a:lnTo>
+                    <a:pt x="3517224" y="443851"/>
+                  </a:lnTo>
+                  <a:lnTo>
+                    <a:pt x="3587569" y="449102"/>
+                  </a:lnTo>
+                  <a:lnTo>
+                    <a:pt x="3657913" y="454254"/>
+                  </a:lnTo>
+                  <a:lnTo>
+                    <a:pt x="3728257" y="459308"/>
+                  </a:lnTo>
+                  <a:lnTo>
+                    <a:pt x="3798602" y="464267"/>
+                  </a:lnTo>
+                  <a:lnTo>
+                    <a:pt x="3868946" y="469131"/>
+                  </a:lnTo>
+                  <a:lnTo>
+                    <a:pt x="3939291" y="473904"/>
+                  </a:lnTo>
+                  <a:lnTo>
+                    <a:pt x="4009635" y="478586"/>
+                  </a:lnTo>
+                  <a:lnTo>
+                    <a:pt x="4079980" y="483180"/>
+                  </a:lnTo>
+                  <a:lnTo>
+                    <a:pt x="4150324" y="487687"/>
+                  </a:lnTo>
+                  <a:lnTo>
+                    <a:pt x="4220669" y="492108"/>
+                  </a:lnTo>
+                  <a:lnTo>
+                    <a:pt x="4291013" y="496446"/>
+                  </a:lnTo>
+                  <a:lnTo>
+                    <a:pt x="4361358" y="500702"/>
+                  </a:lnTo>
+                  <a:lnTo>
+                    <a:pt x="4431702" y="504877"/>
+                  </a:lnTo>
+                  <a:lnTo>
+                    <a:pt x="4502047" y="508973"/>
+                  </a:lnTo>
+                  <a:lnTo>
+                    <a:pt x="4572391" y="512991"/>
+                  </a:lnTo>
+                  <a:lnTo>
+                    <a:pt x="4642736" y="516934"/>
+                  </a:lnTo>
+                  <a:lnTo>
+                    <a:pt x="4713080" y="520802"/>
+                  </a:lnTo>
+                  <a:lnTo>
+                    <a:pt x="4783425" y="524596"/>
+                  </a:lnTo>
+                  <a:lnTo>
+                    <a:pt x="4853769" y="528319"/>
+                  </a:lnTo>
+                  <a:lnTo>
+                    <a:pt x="4924114" y="531972"/>
+                  </a:lnTo>
+                  <a:lnTo>
+                    <a:pt x="4994458" y="535555"/>
+                  </a:lnTo>
+                  <a:lnTo>
+                    <a:pt x="5064803" y="539070"/>
+                  </a:lnTo>
+                  <a:lnTo>
+                    <a:pt x="5135147" y="542519"/>
+                  </a:lnTo>
+                  <a:lnTo>
+                    <a:pt x="5205492" y="545903"/>
+                  </a:lnTo>
+                  <a:lnTo>
+                    <a:pt x="5275836" y="549222"/>
+                  </a:lnTo>
+                  <a:lnTo>
+                    <a:pt x="5346181" y="552479"/>
+                  </a:lnTo>
+                  <a:lnTo>
+                    <a:pt x="5416525" y="555674"/>
+                  </a:lnTo>
+                  <a:lnTo>
+                    <a:pt x="5486870" y="558809"/>
+                  </a:lnTo>
+                  <a:lnTo>
+                    <a:pt x="5557214" y="561884"/>
+                  </a:lnTo>
+                  <a:lnTo>
+                    <a:pt x="5627559" y="564901"/>
+                  </a:lnTo>
+                  <a:lnTo>
+                    <a:pt x="5697903" y="567861"/>
+                  </a:lnTo>
+                  <a:lnTo>
+                    <a:pt x="5768248" y="570765"/>
+                  </a:lnTo>
+                  <a:lnTo>
+                    <a:pt x="5838592" y="573614"/>
+                  </a:lnTo>
+                  <a:lnTo>
+                    <a:pt x="5908937" y="576409"/>
+                  </a:lnTo>
+                  <a:lnTo>
+                    <a:pt x="5979281" y="579151"/>
+                  </a:lnTo>
+                  <a:lnTo>
+                    <a:pt x="6049626" y="581841"/>
+                  </a:lnTo>
+                  <a:lnTo>
+                    <a:pt x="6119970" y="584481"/>
+                  </a:lnTo>
+                  <a:lnTo>
+                    <a:pt x="6190315" y="587070"/>
+                  </a:lnTo>
+                  <a:lnTo>
+                    <a:pt x="6260659" y="589610"/>
+                  </a:lnTo>
+                  <a:lnTo>
+                    <a:pt x="6331004" y="592103"/>
+                  </a:lnTo>
+                  <a:lnTo>
+                    <a:pt x="6401348" y="594548"/>
+                  </a:lnTo>
+                  <a:lnTo>
+                    <a:pt x="6471693" y="596946"/>
+                  </a:lnTo>
+                  <a:lnTo>
+                    <a:pt x="6542037" y="599300"/>
+                  </a:lnTo>
+                  <a:lnTo>
+                    <a:pt x="6612382" y="601609"/>
+                  </a:lnTo>
+                  <a:lnTo>
+                    <a:pt x="6682726" y="603874"/>
+                  </a:lnTo>
+                  <a:lnTo>
+                    <a:pt x="6753071" y="606096"/>
+                  </a:lnTo>
+                  <a:lnTo>
+                    <a:pt x="6823415" y="608276"/>
+                  </a:lnTo>
+                  <a:lnTo>
+                    <a:pt x="6893760" y="610415"/>
+                  </a:lnTo>
+                  <a:lnTo>
+                    <a:pt x="6964104" y="612514"/>
+                  </a:lnTo>
+                </a:path>
+              </a:pathLst>
+            </a:custGeom>
+            <a:ln w="27101" cap="flat">
+              <a:solidFill>
+                <a:srgbClr val="FF8C00">
+                  <a:alpha val="100000"/>
+                </a:srgbClr>
+              </a:solidFill>
+              <a:prstDash val="solid"/>
+              <a:round/>
+            </a:ln>
+          </p:spPr>
+          <p:txBody>
+            <a:bodyPr/>
+            <a:lstStyle/>
+            <a:p/>
+          </p:txBody>
+        </p:sp>
+        <p:sp>
+          <p:nvSpPr>
+            <p:cNvPr id="71" name="pl71"/>
+            <p:cNvSpPr/>
+            <p:nvPr/>
+          </p:nvSpPr>
+          <p:spPr>
+            <a:xfrm>
+              <a:off x="887106" y="5294352"/>
+              <a:ext cx="7660515" cy="0"/>
+            </a:xfrm>
+            <a:custGeom>
+              <a:avLst/>
+              <a:pathLst>
+                <a:path w="7660515" h="0">
+                  <a:moveTo>
+                    <a:pt x="0" y="0"/>
+                  </a:moveTo>
+                  <a:lnTo>
+                    <a:pt x="7660515" y="0"/>
+                  </a:lnTo>
+                  <a:lnTo>
+                    <a:pt x="7660515" y="0"/>
+                  </a:lnTo>
+                </a:path>
+              </a:pathLst>
+            </a:custGeom>
+            <a:ln w="13550" cap="flat">
+              <a:solidFill>
+                <a:srgbClr val="7F7F7F">
+                  <a:alpha val="100000"/>
+                </a:srgbClr>
+              </a:solidFill>
+              <a:prstDash val="dash"/>
+              <a:round/>
+            </a:ln>
+          </p:spPr>
+          <p:txBody>
+            <a:bodyPr/>
+            <a:lstStyle/>
+            <a:p/>
+          </p:txBody>
+        </p:sp>
+        <p:sp>
+          <p:nvSpPr>
+            <p:cNvPr id="72" name="pl72"/>
+            <p:cNvSpPr/>
+            <p:nvPr/>
+          </p:nvSpPr>
+          <p:spPr>
+            <a:xfrm>
+              <a:off x="4472829" y="4336484"/>
+              <a:ext cx="0" cy="1317069"/>
+            </a:xfrm>
+            <a:custGeom>
+              <a:avLst/>
+              <a:pathLst>
+                <a:path w="0" h="1317069">
+                  <a:moveTo>
+                    <a:pt x="0" y="1317069"/>
+                  </a:moveTo>
+                  <a:lnTo>
+                    <a:pt x="0" y="0"/>
+                  </a:lnTo>
+                  <a:lnTo>
+                    <a:pt x="0" y="0"/>
+                  </a:lnTo>
+                </a:path>
+              </a:pathLst>
+            </a:custGeom>
+            <a:ln w="13550" cap="flat">
+              <a:solidFill>
+                <a:srgbClr val="666666">
+                  <a:alpha val="100000"/>
+                </a:srgbClr>
+              </a:solidFill>
+              <a:prstDash val="dot"/>
+              <a:round/>
+            </a:ln>
+          </p:spPr>
+          <p:txBody>
+            <a:bodyPr/>
+            <a:lstStyle/>
+            <a:p/>
+          </p:txBody>
+        </p:sp>
+        <p:sp>
+          <p:nvSpPr>
+            <p:cNvPr id="73" name="tx73"/>
+            <p:cNvSpPr/>
+            <p:nvPr/>
+          </p:nvSpPr>
+          <p:spPr>
+            <a:xfrm>
+              <a:off x="762297" y="5553636"/>
+              <a:ext cx="62179" cy="80101"/>
+            </a:xfrm>
+            <a:prstGeom prst="rect">
+              <a:avLst/>
+            </a:prstGeom>
+            <a:noFill/>
+          </p:spPr>
+          <p:txBody>
+            <a:bodyPr lIns="0" rIns="0" tIns="0" bIns="0" anchorCtr="1" anchor="ctr" wrap="none"/>
+            <a:lstStyle/>
+            <a:p>
+              <a:pPr algn="l" marL="0" marR="0" indent="0">
+                <a:lnSpc>
+                  <a:spcPts val="880"/>
+                </a:lnSpc>
+                <a:spcBef>
+                  <a:spcPts val="0"/>
+                </a:spcBef>
+                <a:spcAft>
+                  <a:spcPts val="0"/>
+                </a:spcAft>
+              </a:pPr>
+              <a:r>
+                <a:rPr sz="880">
+                  <a:solidFill>
+                    <a:srgbClr val="4D4D4D">
+                      <a:alpha val="100000"/>
+                    </a:srgbClr>
+                  </a:solidFill>
+                  <a:latin typeface="Helvetica"/>
+                  <a:cs typeface="Helvetica"/>
+                </a:rPr>
+                <a:t>0</a:t>
+              </a:r>
+            </a:p>
+          </p:txBody>
+        </p:sp>
+        <p:sp>
+          <p:nvSpPr>
+            <p:cNvPr id="74" name="tx74"/>
+            <p:cNvSpPr/>
+            <p:nvPr/>
+          </p:nvSpPr>
+          <p:spPr>
+            <a:xfrm>
+              <a:off x="762297" y="5254302"/>
+              <a:ext cx="62179" cy="80101"/>
+            </a:xfrm>
+            <a:prstGeom prst="rect">
+              <a:avLst/>
+            </a:prstGeom>
+            <a:noFill/>
+          </p:spPr>
+          <p:txBody>
+            <a:bodyPr lIns="0" rIns="0" tIns="0" bIns="0" anchorCtr="1" anchor="ctr" wrap="none"/>
+            <a:lstStyle/>
+            <a:p>
+              <a:pPr algn="l" marL="0" marR="0" indent="0">
+                <a:lnSpc>
+                  <a:spcPts val="880"/>
+                </a:lnSpc>
+                <a:spcBef>
+                  <a:spcPts val="0"/>
+                </a:spcBef>
+                <a:spcAft>
+                  <a:spcPts val="0"/>
+                </a:spcAft>
+              </a:pPr>
+              <a:r>
+                <a:rPr sz="880">
+                  <a:solidFill>
+                    <a:srgbClr val="4D4D4D">
+                      <a:alpha val="100000"/>
+                    </a:srgbClr>
+                  </a:solidFill>
+                  <a:latin typeface="Helvetica"/>
+                  <a:cs typeface="Helvetica"/>
+                </a:rPr>
+                <a:t>1</a:t>
+              </a:r>
+            </a:p>
+          </p:txBody>
+        </p:sp>
+        <p:sp>
+          <p:nvSpPr>
+            <p:cNvPr id="75" name="tx75"/>
+            <p:cNvSpPr/>
+            <p:nvPr/>
+          </p:nvSpPr>
+          <p:spPr>
+            <a:xfrm>
+              <a:off x="762297" y="4954968"/>
+              <a:ext cx="62179" cy="80101"/>
+            </a:xfrm>
+            <a:prstGeom prst="rect">
+              <a:avLst/>
+            </a:prstGeom>
+            <a:noFill/>
+          </p:spPr>
+          <p:txBody>
+            <a:bodyPr lIns="0" rIns="0" tIns="0" bIns="0" anchorCtr="1" anchor="ctr" wrap="none"/>
+            <a:lstStyle/>
+            <a:p>
+              <a:pPr algn="l" marL="0" marR="0" indent="0">
+                <a:lnSpc>
+                  <a:spcPts val="880"/>
+                </a:lnSpc>
+                <a:spcBef>
+                  <a:spcPts val="0"/>
+                </a:spcBef>
+                <a:spcAft>
+                  <a:spcPts val="0"/>
+                </a:spcAft>
+              </a:pPr>
+              <a:r>
+                <a:rPr sz="880">
+                  <a:solidFill>
+                    <a:srgbClr val="4D4D4D">
+                      <a:alpha val="100000"/>
+                    </a:srgbClr>
+                  </a:solidFill>
+                  <a:latin typeface="Helvetica"/>
+                  <a:cs typeface="Helvetica"/>
+                </a:rPr>
+                <a:t>2</a:t>
+              </a:r>
+            </a:p>
+          </p:txBody>
+        </p:sp>
+        <p:sp>
+          <p:nvSpPr>
+            <p:cNvPr id="76" name="tx76"/>
+            <p:cNvSpPr/>
+            <p:nvPr/>
+          </p:nvSpPr>
+          <p:spPr>
+            <a:xfrm>
+              <a:off x="762297" y="4655634"/>
+              <a:ext cx="62179" cy="80101"/>
+            </a:xfrm>
+            <a:prstGeom prst="rect">
+              <a:avLst/>
+            </a:prstGeom>
+            <a:noFill/>
+          </p:spPr>
+          <p:txBody>
+            <a:bodyPr lIns="0" rIns="0" tIns="0" bIns="0" anchorCtr="1" anchor="ctr" wrap="none"/>
+            <a:lstStyle/>
+            <a:p>
+              <a:pPr algn="l" marL="0" marR="0" indent="0">
+                <a:lnSpc>
+                  <a:spcPts val="880"/>
+                </a:lnSpc>
+                <a:spcBef>
+                  <a:spcPts val="0"/>
+                </a:spcBef>
+                <a:spcAft>
+                  <a:spcPts val="0"/>
+                </a:spcAft>
+              </a:pPr>
+              <a:r>
+                <a:rPr sz="880">
+                  <a:solidFill>
+                    <a:srgbClr val="4D4D4D">
+                      <a:alpha val="100000"/>
+                    </a:srgbClr>
+                  </a:solidFill>
+                  <a:latin typeface="Helvetica"/>
+                  <a:cs typeface="Helvetica"/>
+                </a:rPr>
+                <a:t>3</a:t>
+              </a:r>
+            </a:p>
+          </p:txBody>
+        </p:sp>
+        <p:sp>
+          <p:nvSpPr>
+            <p:cNvPr id="77" name="tx77"/>
+            <p:cNvSpPr/>
+            <p:nvPr/>
+          </p:nvSpPr>
+          <p:spPr>
+            <a:xfrm>
+              <a:off x="762297" y="4356300"/>
+              <a:ext cx="62179" cy="80101"/>
+            </a:xfrm>
+            <a:prstGeom prst="rect">
+              <a:avLst/>
+            </a:prstGeom>
+            <a:noFill/>
+          </p:spPr>
+          <p:txBody>
+            <a:bodyPr lIns="0" rIns="0" tIns="0" bIns="0" anchorCtr="1" anchor="ctr" wrap="none"/>
+            <a:lstStyle/>
+            <a:p>
+              <a:pPr algn="l" marL="0" marR="0" indent="0">
+                <a:lnSpc>
+                  <a:spcPts val="880"/>
+                </a:lnSpc>
+                <a:spcBef>
+                  <a:spcPts val="0"/>
+                </a:spcBef>
+                <a:spcAft>
+                  <a:spcPts val="0"/>
+                </a:spcAft>
+              </a:pPr>
+              <a:r>
+                <a:rPr sz="880">
+                  <a:solidFill>
+                    <a:srgbClr val="4D4D4D">
+                      <a:alpha val="100000"/>
+                    </a:srgbClr>
+                  </a:solidFill>
+                  <a:latin typeface="Helvetica"/>
+                  <a:cs typeface="Helvetica"/>
+                </a:rPr>
+                <a:t>4</a:t>
+              </a:r>
+            </a:p>
+          </p:txBody>
+        </p:sp>
+        <p:sp>
+          <p:nvSpPr>
+            <p:cNvPr id="78" name="tx78"/>
+            <p:cNvSpPr/>
+            <p:nvPr/>
+          </p:nvSpPr>
+          <p:spPr>
+            <a:xfrm>
+              <a:off x="1306098" y="5716183"/>
+              <a:ext cx="161574" cy="80101"/>
+            </a:xfrm>
+            <a:prstGeom prst="rect">
+              <a:avLst/>
+            </a:prstGeom>
+            <a:noFill/>
+          </p:spPr>
+          <p:txBody>
+            <a:bodyPr lIns="0" rIns="0" tIns="0" bIns="0" anchorCtr="1" anchor="ctr" wrap="none"/>
+            <a:lstStyle/>
+            <a:p>
+              <a:pPr algn="l" marL="0" marR="0" indent="0">
+                <a:lnSpc>
+                  <a:spcPts val="880"/>
+                </a:lnSpc>
+                <a:spcBef>
+                  <a:spcPts val="0"/>
+                </a:spcBef>
+                <a:spcAft>
+                  <a:spcPts val="0"/>
+                </a:spcAft>
+              </a:pPr>
+              <a:r>
+                <a:rPr sz="880">
+                  <a:solidFill>
+                    <a:srgbClr val="4D4D4D">
+                      <a:alpha val="100000"/>
+                    </a:srgbClr>
+                  </a:solidFill>
+                  <a:latin typeface="Helvetica"/>
+                  <a:cs typeface="Helvetica"/>
+                </a:rPr>
+                <a:t>-40</a:t>
+              </a:r>
+            </a:p>
+          </p:txBody>
+        </p:sp>
+        <p:sp>
+          <p:nvSpPr>
+            <p:cNvPr id="79" name="tx79"/>
+            <p:cNvSpPr/>
+            <p:nvPr/>
+          </p:nvSpPr>
+          <p:spPr>
+            <a:xfrm>
+              <a:off x="2113264" y="5716183"/>
+              <a:ext cx="161574" cy="80101"/>
+            </a:xfrm>
+            <a:prstGeom prst="rect">
+              <a:avLst/>
+            </a:prstGeom>
+            <a:noFill/>
+          </p:spPr>
+          <p:txBody>
+            <a:bodyPr lIns="0" rIns="0" tIns="0" bIns="0" anchorCtr="1" anchor="ctr" wrap="none"/>
+            <a:lstStyle/>
+            <a:p>
+              <a:pPr algn="l" marL="0" marR="0" indent="0">
+                <a:lnSpc>
+                  <a:spcPts val="880"/>
+                </a:lnSpc>
+                <a:spcBef>
+                  <a:spcPts val="0"/>
+                </a:spcBef>
+                <a:spcAft>
+                  <a:spcPts val="0"/>
+                </a:spcAft>
+              </a:pPr>
+              <a:r>
+                <a:rPr sz="880">
+                  <a:solidFill>
+                    <a:srgbClr val="4D4D4D">
+                      <a:alpha val="100000"/>
+                    </a:srgbClr>
+                  </a:solidFill>
+                  <a:latin typeface="Helvetica"/>
+                  <a:cs typeface="Helvetica"/>
+                </a:rPr>
+                <a:t>-30</a:t>
+              </a:r>
+            </a:p>
+          </p:txBody>
+        </p:sp>
+        <p:sp>
+          <p:nvSpPr>
+            <p:cNvPr id="80" name="tx80"/>
+            <p:cNvSpPr/>
+            <p:nvPr/>
+          </p:nvSpPr>
+          <p:spPr>
+            <a:xfrm>
+              <a:off x="2920429" y="5716183"/>
+              <a:ext cx="161574" cy="80101"/>
+            </a:xfrm>
+            <a:prstGeom prst="rect">
+              <a:avLst/>
+            </a:prstGeom>
+            <a:noFill/>
+          </p:spPr>
+          <p:txBody>
+            <a:bodyPr lIns="0" rIns="0" tIns="0" bIns="0" anchorCtr="1" anchor="ctr" wrap="none"/>
+            <a:lstStyle/>
+            <a:p>
+              <a:pPr algn="l" marL="0" marR="0" indent="0">
+                <a:lnSpc>
+                  <a:spcPts val="880"/>
+                </a:lnSpc>
+                <a:spcBef>
+                  <a:spcPts val="0"/>
+                </a:spcBef>
+                <a:spcAft>
+                  <a:spcPts val="0"/>
+                </a:spcAft>
+              </a:pPr>
+              <a:r>
+                <a:rPr sz="880">
+                  <a:solidFill>
+                    <a:srgbClr val="4D4D4D">
+                      <a:alpha val="100000"/>
+                    </a:srgbClr>
+                  </a:solidFill>
+                  <a:latin typeface="Helvetica"/>
+                  <a:cs typeface="Helvetica"/>
+                </a:rPr>
+                <a:t>-20</a:t>
+              </a:r>
+            </a:p>
+          </p:txBody>
+        </p:sp>
+        <p:sp>
+          <p:nvSpPr>
+            <p:cNvPr id="81" name="tx81"/>
+            <p:cNvSpPr/>
+            <p:nvPr/>
+          </p:nvSpPr>
+          <p:spPr>
+            <a:xfrm>
+              <a:off x="3727595" y="5716183"/>
+              <a:ext cx="161574" cy="80101"/>
+            </a:xfrm>
+            <a:prstGeom prst="rect">
+              <a:avLst/>
+            </a:prstGeom>
+            <a:noFill/>
+          </p:spPr>
+          <p:txBody>
+            <a:bodyPr lIns="0" rIns="0" tIns="0" bIns="0" anchorCtr="1" anchor="ctr" wrap="none"/>
+            <a:lstStyle/>
+            <a:p>
+              <a:pPr algn="l" marL="0" marR="0" indent="0">
+                <a:lnSpc>
+                  <a:spcPts val="880"/>
+                </a:lnSpc>
+                <a:spcBef>
+                  <a:spcPts val="0"/>
+                </a:spcBef>
+                <a:spcAft>
+                  <a:spcPts val="0"/>
+                </a:spcAft>
+              </a:pPr>
+              <a:r>
+                <a:rPr sz="880">
+                  <a:solidFill>
+                    <a:srgbClr val="4D4D4D">
+                      <a:alpha val="100000"/>
+                    </a:srgbClr>
+                  </a:solidFill>
+                  <a:latin typeface="Helvetica"/>
+                  <a:cs typeface="Helvetica"/>
+                </a:rPr>
+                <a:t>-10</a:t>
+              </a:r>
+            </a:p>
+          </p:txBody>
+        </p:sp>
+        <p:sp>
+          <p:nvSpPr>
+            <p:cNvPr id="82" name="tx82"/>
+            <p:cNvSpPr/>
+            <p:nvPr/>
+          </p:nvSpPr>
+          <p:spPr>
+            <a:xfrm>
+              <a:off x="4584458" y="5716183"/>
+              <a:ext cx="62179" cy="80101"/>
+            </a:xfrm>
+            <a:prstGeom prst="rect">
+              <a:avLst/>
+            </a:prstGeom>
+            <a:noFill/>
+          </p:spPr>
+          <p:txBody>
+            <a:bodyPr lIns="0" rIns="0" tIns="0" bIns="0" anchorCtr="1" anchor="ctr" wrap="none"/>
+            <a:lstStyle/>
+            <a:p>
+              <a:pPr algn="l" marL="0" marR="0" indent="0">
+                <a:lnSpc>
+                  <a:spcPts val="880"/>
+                </a:lnSpc>
+                <a:spcBef>
+                  <a:spcPts val="0"/>
+                </a:spcBef>
+                <a:spcAft>
+                  <a:spcPts val="0"/>
+                </a:spcAft>
+              </a:pPr>
+              <a:r>
+                <a:rPr sz="880">
+                  <a:solidFill>
+                    <a:srgbClr val="4D4D4D">
+                      <a:alpha val="100000"/>
+                    </a:srgbClr>
+                  </a:solidFill>
+                  <a:latin typeface="Helvetica"/>
+                  <a:cs typeface="Helvetica"/>
+                </a:rPr>
+                <a:t>0</a:t>
+              </a:r>
+            </a:p>
+          </p:txBody>
+        </p:sp>
+        <p:sp>
+          <p:nvSpPr>
+            <p:cNvPr id="83" name="tx83"/>
+            <p:cNvSpPr/>
+            <p:nvPr/>
+          </p:nvSpPr>
+          <p:spPr>
+            <a:xfrm>
+              <a:off x="5360534" y="5716183"/>
+              <a:ext cx="124358" cy="80101"/>
+            </a:xfrm>
+            <a:prstGeom prst="rect">
+              <a:avLst/>
+            </a:prstGeom>
+            <a:noFill/>
+          </p:spPr>
+          <p:txBody>
+            <a:bodyPr lIns="0" rIns="0" tIns="0" bIns="0" anchorCtr="1" anchor="ctr" wrap="none"/>
+            <a:lstStyle/>
+            <a:p>
+              <a:pPr algn="l" marL="0" marR="0" indent="0">
+                <a:lnSpc>
+                  <a:spcPts val="880"/>
+                </a:lnSpc>
+                <a:spcBef>
+                  <a:spcPts val="0"/>
+                </a:spcBef>
+                <a:spcAft>
+                  <a:spcPts val="0"/>
+                </a:spcAft>
+              </a:pPr>
+              <a:r>
+                <a:rPr sz="880">
+                  <a:solidFill>
+                    <a:srgbClr val="4D4D4D">
+                      <a:alpha val="100000"/>
+                    </a:srgbClr>
+                  </a:solidFill>
+                  <a:latin typeface="Helvetica"/>
+                  <a:cs typeface="Helvetica"/>
+                </a:rPr>
+                <a:t>10</a:t>
+              </a:r>
+            </a:p>
+          </p:txBody>
+        </p:sp>
+        <p:sp>
+          <p:nvSpPr>
+            <p:cNvPr id="84" name="tx84"/>
+            <p:cNvSpPr/>
+            <p:nvPr/>
+          </p:nvSpPr>
+          <p:spPr>
+            <a:xfrm>
+              <a:off x="6167699" y="5716183"/>
+              <a:ext cx="124358" cy="80101"/>
+            </a:xfrm>
+            <a:prstGeom prst="rect">
+              <a:avLst/>
+            </a:prstGeom>
+            <a:noFill/>
+          </p:spPr>
+          <p:txBody>
+            <a:bodyPr lIns="0" rIns="0" tIns="0" bIns="0" anchorCtr="1" anchor="ctr" wrap="none"/>
+            <a:lstStyle/>
+            <a:p>
+              <a:pPr algn="l" marL="0" marR="0" indent="0">
+                <a:lnSpc>
+                  <a:spcPts val="880"/>
+                </a:lnSpc>
+                <a:spcBef>
+                  <a:spcPts val="0"/>
+                </a:spcBef>
+                <a:spcAft>
+                  <a:spcPts val="0"/>
+                </a:spcAft>
+              </a:pPr>
+              <a:r>
+                <a:rPr sz="880">
+                  <a:solidFill>
+                    <a:srgbClr val="4D4D4D">
+                      <a:alpha val="100000"/>
+                    </a:srgbClr>
+                  </a:solidFill>
+                  <a:latin typeface="Helvetica"/>
+                  <a:cs typeface="Helvetica"/>
+                </a:rPr>
+                <a:t>20</a:t>
+              </a:r>
+            </a:p>
+          </p:txBody>
+        </p:sp>
+        <p:sp>
+          <p:nvSpPr>
+            <p:cNvPr id="85" name="tx85"/>
+            <p:cNvSpPr/>
+            <p:nvPr/>
+          </p:nvSpPr>
+          <p:spPr>
+            <a:xfrm>
+              <a:off x="6974865" y="5716183"/>
+              <a:ext cx="124358" cy="80101"/>
+            </a:xfrm>
+            <a:prstGeom prst="rect">
+              <a:avLst/>
+            </a:prstGeom>
+            <a:noFill/>
+          </p:spPr>
+          <p:txBody>
+            <a:bodyPr lIns="0" rIns="0" tIns="0" bIns="0" anchorCtr="1" anchor="ctr" wrap="none"/>
+            <a:lstStyle/>
+            <a:p>
+              <a:pPr algn="l" marL="0" marR="0" indent="0">
+                <a:lnSpc>
+                  <a:spcPts val="880"/>
+                </a:lnSpc>
+                <a:spcBef>
+                  <a:spcPts val="0"/>
+                </a:spcBef>
+                <a:spcAft>
+                  <a:spcPts val="0"/>
+                </a:spcAft>
+              </a:pPr>
+              <a:r>
+                <a:rPr sz="880">
+                  <a:solidFill>
+                    <a:srgbClr val="4D4D4D">
+                      <a:alpha val="100000"/>
+                    </a:srgbClr>
+                  </a:solidFill>
+                  <a:latin typeface="Helvetica"/>
+                  <a:cs typeface="Helvetica"/>
+                </a:rPr>
+                <a:t>30</a:t>
+              </a:r>
+            </a:p>
+          </p:txBody>
+        </p:sp>
+        <p:sp>
+          <p:nvSpPr>
+            <p:cNvPr id="86" name="tx86"/>
+            <p:cNvSpPr/>
+            <p:nvPr/>
+          </p:nvSpPr>
+          <p:spPr>
+            <a:xfrm>
+              <a:off x="7782030" y="5716183"/>
+              <a:ext cx="124358" cy="80101"/>
+            </a:xfrm>
+            <a:prstGeom prst="rect">
+              <a:avLst/>
+            </a:prstGeom>
+            <a:noFill/>
+          </p:spPr>
+          <p:txBody>
+            <a:bodyPr lIns="0" rIns="0" tIns="0" bIns="0" anchorCtr="1" anchor="ctr" wrap="none"/>
+            <a:lstStyle/>
+            <a:p>
+              <a:pPr algn="l" marL="0" marR="0" indent="0">
+                <a:lnSpc>
+                  <a:spcPts val="880"/>
+                </a:lnSpc>
+                <a:spcBef>
+                  <a:spcPts val="0"/>
+                </a:spcBef>
+                <a:spcAft>
+                  <a:spcPts val="0"/>
+                </a:spcAft>
+              </a:pPr>
+              <a:r>
+                <a:rPr sz="880">
+                  <a:solidFill>
+                    <a:srgbClr val="4D4D4D">
+                      <a:alpha val="100000"/>
+                    </a:srgbClr>
+                  </a:solidFill>
+                  <a:latin typeface="Helvetica"/>
+                  <a:cs typeface="Helvetica"/>
+                </a:rPr>
+                <a:t>40</a:t>
+              </a:r>
+            </a:p>
+          </p:txBody>
+        </p:sp>
+        <p:sp>
+          <p:nvSpPr>
+            <p:cNvPr id="87" name="tx87"/>
+            <p:cNvSpPr/>
+            <p:nvPr/>
+          </p:nvSpPr>
+          <p:spPr>
+            <a:xfrm>
+              <a:off x="2928340" y="5855859"/>
+              <a:ext cx="3578047" cy="100218"/>
+            </a:xfrm>
+            <a:prstGeom prst="rect">
+              <a:avLst/>
+            </a:prstGeom>
+            <a:noFill/>
+          </p:spPr>
+          <p:txBody>
+            <a:bodyPr lIns="0" rIns="0" tIns="0" bIns="0" anchorCtr="1" anchor="ctr" wrap="none"/>
+            <a:lstStyle/>
+            <a:p>
+              <a:pPr algn="l" marL="0" marR="0" indent="0">
+                <a:lnSpc>
+                  <a:spcPts val="1100"/>
+                </a:lnSpc>
+                <a:spcBef>
+                  <a:spcPts val="0"/>
+                </a:spcBef>
+                <a:spcAft>
+                  <a:spcPts val="0"/>
+                </a:spcAft>
+              </a:pPr>
+              <a:r>
+                <a:rPr sz="1100">
+                  <a:solidFill>
+                    <a:srgbClr val="000000">
+                      <a:alpha val="100000"/>
+                    </a:srgbClr>
+                  </a:solidFill>
+                  <a:latin typeface="Helvetica"/>
+                  <a:cs typeface="Helvetica"/>
+                </a:rPr>
+                <a:t>eGFR difference (%): 100 × (CKD-EPI Cr-Cys − CG) / CG</a:t>
+              </a:r>
+            </a:p>
+          </p:txBody>
+        </p:sp>
+        <p:sp>
+          <p:nvSpPr>
+            <p:cNvPr id="88" name="tx88"/>
+            <p:cNvSpPr/>
+            <p:nvPr/>
+          </p:nvSpPr>
+          <p:spPr>
+            <a:xfrm rot="-5400000">
+              <a:off x="138035" y="4944909"/>
+              <a:ext cx="1016904" cy="100218"/>
+            </a:xfrm>
+            <a:prstGeom prst="rect">
+              <a:avLst/>
+            </a:prstGeom>
+            <a:noFill/>
+          </p:spPr>
+          <p:txBody>
+            <a:bodyPr lIns="0" rIns="0" tIns="0" bIns="0" anchorCtr="1" anchor="ctr" wrap="none"/>
+            <a:lstStyle/>
+            <a:p>
+              <a:pPr algn="l" marL="0" marR="0" indent="0">
+                <a:lnSpc>
+                  <a:spcPts val="1100"/>
+                </a:lnSpc>
+                <a:spcBef>
+                  <a:spcPts val="0"/>
+                </a:spcBef>
+                <a:spcAft>
+                  <a:spcPts val="0"/>
+                </a:spcAft>
+              </a:pPr>
+              <a:r>
+                <a:rPr sz="1100">
+                  <a:solidFill>
+                    <a:srgbClr val="000000">
+                      <a:alpha val="100000"/>
+                    </a:srgbClr>
+                  </a:solidFill>
+                  <a:latin typeface="Helvetica"/>
+                  <a:cs typeface="Helvetica"/>
+                </a:rPr>
+                <a:t>subHR (95% CI)</a:t>
+              </a:r>
+            </a:p>
+          </p:txBody>
+        </p:sp>
+        <p:sp>
+          <p:nvSpPr>
+            <p:cNvPr id="89" name="tx89"/>
+            <p:cNvSpPr/>
+            <p:nvPr/>
+          </p:nvSpPr>
+          <p:spPr>
+            <a:xfrm>
+              <a:off x="887106" y="4159544"/>
+              <a:ext cx="6985375" cy="82021"/>
+            </a:xfrm>
+            <a:prstGeom prst="rect">
+              <a:avLst/>
+            </a:prstGeom>
+            <a:noFill/>
+          </p:spPr>
+          <p:txBody>
+            <a:bodyPr lIns="0" rIns="0" tIns="0" bIns="0" anchorCtr="1" anchor="ctr" wrap="none"/>
+            <a:lstStyle/>
+            <a:p>
+              <a:pPr algn="l" marL="0" marR="0" indent="0">
+                <a:lnSpc>
+                  <a:spcPts val="900"/>
+                </a:lnSpc>
+                <a:spcBef>
+                  <a:spcPts val="0"/>
+                </a:spcBef>
+                <a:spcAft>
+                  <a:spcPts val="0"/>
+                </a:spcAft>
+              </a:pPr>
+              <a:r>
+                <a:rPr sz="900">
+                  <a:solidFill>
+                    <a:srgbClr val="404040">
+                      <a:alpha val="100000"/>
+                    </a:srgbClr>
+                  </a:solidFill>
+                  <a:latin typeface="Helvetica"/>
+                  <a:cs typeface="Helvetica"/>
+                </a:rPr>
+                <a:t>subHR per 10 % decline: 1.25 (0.98-1.58), p_Bonf = 0.415 (n = 6)  |  per IQR decline (Δ = 29.5 %): 1.91 (0.95-3.84)  |  IQR: [-15.6, 13.9] %</a:t>
+              </a:r>
+            </a:p>
+          </p:txBody>
+        </p:sp>
+        <p:sp>
+          <p:nvSpPr>
+            <p:cNvPr id="90" name="tx90"/>
+            <p:cNvSpPr/>
+            <p:nvPr/>
+          </p:nvSpPr>
+          <p:spPr>
+            <a:xfrm>
+              <a:off x="887106" y="3932770"/>
               <a:ext cx="2661269" cy="120152"/>
             </a:xfrm>
             <a:prstGeom prst="rect">
